--- a/docs/curso/slides/m11-gestao.pptx
+++ b/docs/curso/slides/m11-gestao.pptx
@@ -2888,6 +2888,54 @@
           <a:chExt cx="0" cy="0"/>
         </a:xfrm>
       </p:grpSpPr>
+      <p:sp>
+        <p:nvSpPr>
+          <p:cNvPr id="25" name="Slide Number Placeholder 0"/>
+          <p:cNvSpPr>
+            <a:spLocks noGrp="1"/>
+          </p:cNvSpPr>
+          <p:nvPr>
+            <p:ph type="sldNum" sz="quarter" idx="4294967295"/>
+          </p:nvPr>
+        </p:nvSpPr>
+        <p:spPr>
+          <a:xfrm>
+            <a:off x="11292840" y="6556248"/>
+            <a:ext cx="548640" cy="256032"/>
+          </a:xfrm>
+          <a:prstGeom prst="rect">
+            <a:avLst/>
+          </a:prstGeom>
+          <a:extLst>
+            <a:ext uri="{C572A759-6A51-4108-AA02-DFA0A04FC94B}">
+              <ma14:wrappingTextBoxFlag xmlns:ma14="http://schemas.microsoft.com/office/mac/drawingml/2011/main" val="0"/>
+            </a:ext>
+          </a:extLst>
+        </p:spPr>
+        <p:txBody>
+          <a:bodyPr/>
+          <a:lstStyle>
+            <a:lvl1pPr>
+              <a:defRPr sz="900">
+                <a:solidFill>
+                  <a:srgbClr val="1B3A6B"/>
+                </a:solidFill>
+                <a:latin typeface="Arial"/>
+                <a:ea typeface="Arial"/>
+                <a:cs typeface="Arial"/>
+              </a:defRPr>
+            </a:lvl1pPr>
+          </a:lstStyle>
+          <a:p>
+            <a:pPr algn="r"/>
+            <a:fld id="{F7021451-1387-4CA6-816F-3879F97B5CBC}" type="slidenum">
+              <a:rPr b="1" lang="en-US"/>
+              <a:t>1000</a:t>
+            </a:fld>
+            <a:endParaRPr lang="en-US"/>
+          </a:p>
+        </p:txBody>
+      </p:sp>
     </p:spTree>
   </p:cSld>
   <p:clrMapOvr>
@@ -2913,6 +2961,54 @@
           <a:chExt cx="0" cy="0"/>
         </a:xfrm>
       </p:grpSpPr>
+      <p:sp>
+        <p:nvSpPr>
+          <p:cNvPr id="25" name="Slide Number Placeholder 0"/>
+          <p:cNvSpPr>
+            <a:spLocks noGrp="1"/>
+          </p:cNvSpPr>
+          <p:nvPr>
+            <p:ph type="sldNum" sz="quarter" idx="4294967295"/>
+          </p:nvPr>
+        </p:nvSpPr>
+        <p:spPr>
+          <a:xfrm>
+            <a:off x="11292840" y="6556248"/>
+            <a:ext cx="548640" cy="256032"/>
+          </a:xfrm>
+          <a:prstGeom prst="rect">
+            <a:avLst/>
+          </a:prstGeom>
+          <a:extLst>
+            <a:ext uri="{C572A759-6A51-4108-AA02-DFA0A04FC94B}">
+              <ma14:wrappingTextBoxFlag xmlns:ma14="http://schemas.microsoft.com/office/mac/drawingml/2011/main" val="0"/>
+            </a:ext>
+          </a:extLst>
+        </p:spPr>
+        <p:txBody>
+          <a:bodyPr/>
+          <a:lstStyle>
+            <a:lvl1pPr>
+              <a:defRPr sz="900">
+                <a:solidFill>
+                  <a:srgbClr val="1B3A6B"/>
+                </a:solidFill>
+                <a:latin typeface="Arial"/>
+                <a:ea typeface="Arial"/>
+                <a:cs typeface="Arial"/>
+              </a:defRPr>
+            </a:lvl1pPr>
+          </a:lstStyle>
+          <a:p>
+            <a:pPr algn="r"/>
+            <a:fld id="{F7021451-1387-4CA6-816F-3879F97B5CBC}" type="slidenum">
+              <a:rPr b="1" lang="en-US"/>
+              <a:t>null</a:t>
+            </a:fld>
+            <a:endParaRPr lang="en-US"/>
+          </a:p>
+        </p:txBody>
+      </p:sp>
     </p:spTree>
   </p:cSld>
   <p:clrMap bg1="lt1" tx1="dk1" bg2="lt2" tx2="dk2" accent1="accent1" accent2="accent2" accent3="accent3" accent4="accent4" accent5="accent5" accent6="accent6" hlink="hlink" folHlink="folHlink"/>
@@ -3746,7 +3842,7 @@
         </p:blipFill>
         <p:spPr>
           <a:xfrm>
-            <a:off x="411480" y="6547104"/>
+            <a:off x="548640" y="6547104"/>
             <a:ext cx="274320" cy="274320"/>
           </a:xfrm>
           <a:prstGeom prst="rect">
@@ -3762,7 +3858,7 @@
         </p:nvSpPr>
         <p:spPr>
           <a:xfrm>
-            <a:off x="749808" y="6528816"/>
+            <a:off x="886968" y="6528816"/>
             <a:ext cx="6400800" cy="310896"/>
           </a:xfrm>
           <a:prstGeom prst="rect">
@@ -3802,7 +3898,7 @@
         <p:spPr>
           <a:xfrm>
             <a:off x="7132320" y="6528816"/>
-            <a:ext cx="4663440" cy="310896"/>
+            <a:ext cx="4023360" cy="310896"/>
           </a:xfrm>
           <a:prstGeom prst="rect">
             <a:avLst/>
@@ -3840,7 +3936,7 @@
         </p:nvSpPr>
         <p:spPr>
           <a:xfrm>
-            <a:off x="411480" y="384048"/>
+            <a:off x="548640" y="384048"/>
             <a:ext cx="82296" cy="658368"/>
           </a:xfrm>
           <a:prstGeom prst="rect">
@@ -3860,7 +3956,7 @@
         </p:nvSpPr>
         <p:spPr>
           <a:xfrm>
-            <a:off x="640080" y="292608"/>
+            <a:off x="777240" y="292608"/>
             <a:ext cx="10972800" cy="274320"/>
           </a:xfrm>
           <a:prstGeom prst="rect">
@@ -3899,8 +3995,8 @@
         </p:nvSpPr>
         <p:spPr>
           <a:xfrm>
-            <a:off x="640080" y="530352"/>
-            <a:ext cx="11155680" cy="566928"/>
+            <a:off x="777240" y="530352"/>
+            <a:ext cx="10881360" cy="566928"/>
           </a:xfrm>
           <a:prstGeom prst="rect">
             <a:avLst/>
@@ -3940,8 +4036,8 @@
         </p:nvSpPr>
         <p:spPr>
           <a:xfrm>
-            <a:off x="411480" y="1325880"/>
-            <a:ext cx="3642360" cy="2331720"/>
+            <a:off x="548640" y="1325880"/>
+            <a:ext cx="3544824" cy="2331720"/>
           </a:xfrm>
           <a:prstGeom prst="roundRect">
             <a:avLst>
@@ -3974,7 +4070,7 @@
         </p:nvSpPr>
         <p:spPr>
           <a:xfrm>
-            <a:off x="594360" y="1508760"/>
+            <a:off x="731520" y="1508760"/>
             <a:ext cx="457200" cy="457200"/>
           </a:xfrm>
           <a:prstGeom prst="ellipse">
@@ -3994,7 +4090,7 @@
         </p:nvSpPr>
         <p:spPr>
           <a:xfrm>
-            <a:off x="594360" y="1508760"/>
+            <a:off x="731520" y="1508760"/>
             <a:ext cx="457200" cy="457200"/>
           </a:xfrm>
           <a:prstGeom prst="rect">
@@ -4033,8 +4129,8 @@
         </p:nvSpPr>
         <p:spPr>
           <a:xfrm>
-            <a:off x="1188720" y="1435608"/>
-            <a:ext cx="2727960" cy="2112264"/>
+            <a:off x="1325880" y="1435608"/>
+            <a:ext cx="2630424" cy="2112264"/>
           </a:xfrm>
           <a:prstGeom prst="rect">
             <a:avLst/>
@@ -4074,8 +4170,8 @@
         </p:nvSpPr>
         <p:spPr>
           <a:xfrm>
-            <a:off x="4282440" y="1325880"/>
-            <a:ext cx="3642360" cy="2331720"/>
+            <a:off x="4322064" y="1325880"/>
+            <a:ext cx="3544824" cy="2331720"/>
           </a:xfrm>
           <a:prstGeom prst="roundRect">
             <a:avLst>
@@ -4108,7 +4204,7 @@
         </p:nvSpPr>
         <p:spPr>
           <a:xfrm>
-            <a:off x="4465320" y="1508760"/>
+            <a:off x="4504944" y="1508760"/>
             <a:ext cx="457200" cy="457200"/>
           </a:xfrm>
           <a:prstGeom prst="ellipse">
@@ -4128,7 +4224,7 @@
         </p:nvSpPr>
         <p:spPr>
           <a:xfrm>
-            <a:off x="4465320" y="1508760"/>
+            <a:off x="4504944" y="1508760"/>
             <a:ext cx="457200" cy="457200"/>
           </a:xfrm>
           <a:prstGeom prst="rect">
@@ -4167,8 +4263,8 @@
         </p:nvSpPr>
         <p:spPr>
           <a:xfrm>
-            <a:off x="5059680" y="1435608"/>
-            <a:ext cx="2727960" cy="2112264"/>
+            <a:off x="5099304" y="1435608"/>
+            <a:ext cx="2630424" cy="2112264"/>
           </a:xfrm>
           <a:prstGeom prst="rect">
             <a:avLst/>
@@ -4208,8 +4304,8 @@
         </p:nvSpPr>
         <p:spPr>
           <a:xfrm>
-            <a:off x="8153400" y="1325880"/>
-            <a:ext cx="3642360" cy="2331720"/>
+            <a:off x="8095488" y="1325880"/>
+            <a:ext cx="3544824" cy="2331720"/>
           </a:xfrm>
           <a:prstGeom prst="roundRect">
             <a:avLst>
@@ -4242,7 +4338,7 @@
         </p:nvSpPr>
         <p:spPr>
           <a:xfrm>
-            <a:off x="8336280" y="1508760"/>
+            <a:off x="8278368" y="1508760"/>
             <a:ext cx="457200" cy="457200"/>
           </a:xfrm>
           <a:prstGeom prst="ellipse">
@@ -4262,7 +4358,7 @@
         </p:nvSpPr>
         <p:spPr>
           <a:xfrm>
-            <a:off x="8336280" y="1508760"/>
+            <a:off x="8278368" y="1508760"/>
             <a:ext cx="457200" cy="457200"/>
           </a:xfrm>
           <a:prstGeom prst="rect">
@@ -4301,8 +4397,8 @@
         </p:nvSpPr>
         <p:spPr>
           <a:xfrm>
-            <a:off x="8930640" y="1435608"/>
-            <a:ext cx="2727960" cy="2112264"/>
+            <a:off x="8872728" y="1435608"/>
+            <a:ext cx="2630424" cy="2112264"/>
           </a:xfrm>
           <a:prstGeom prst="rect">
             <a:avLst/>
@@ -4342,8 +4438,8 @@
         </p:nvSpPr>
         <p:spPr>
           <a:xfrm>
-            <a:off x="411480" y="3886200"/>
-            <a:ext cx="3642360" cy="2331720"/>
+            <a:off x="548640" y="3886200"/>
+            <a:ext cx="3544824" cy="2331720"/>
           </a:xfrm>
           <a:prstGeom prst="roundRect">
             <a:avLst>
@@ -4376,7 +4472,7 @@
         </p:nvSpPr>
         <p:spPr>
           <a:xfrm>
-            <a:off x="594360" y="4069080"/>
+            <a:off x="731520" y="4069080"/>
             <a:ext cx="457200" cy="457200"/>
           </a:xfrm>
           <a:prstGeom prst="ellipse">
@@ -4396,7 +4492,7 @@
         </p:nvSpPr>
         <p:spPr>
           <a:xfrm>
-            <a:off x="594360" y="4069080"/>
+            <a:off x="731520" y="4069080"/>
             <a:ext cx="457200" cy="457200"/>
           </a:xfrm>
           <a:prstGeom prst="rect">
@@ -4435,8 +4531,8 @@
         </p:nvSpPr>
         <p:spPr>
           <a:xfrm>
-            <a:off x="1188720" y="3995928"/>
-            <a:ext cx="2727960" cy="2112264"/>
+            <a:off x="1325880" y="3995928"/>
+            <a:ext cx="2630424" cy="2112264"/>
           </a:xfrm>
           <a:prstGeom prst="rect">
             <a:avLst/>
@@ -4476,8 +4572,8 @@
         </p:nvSpPr>
         <p:spPr>
           <a:xfrm>
-            <a:off x="4282440" y="3886200"/>
-            <a:ext cx="3642360" cy="2331720"/>
+            <a:off x="4322064" y="3886200"/>
+            <a:ext cx="3544824" cy="2331720"/>
           </a:xfrm>
           <a:prstGeom prst="roundRect">
             <a:avLst>
@@ -4510,7 +4606,7 @@
         </p:nvSpPr>
         <p:spPr>
           <a:xfrm>
-            <a:off x="4465320" y="4069080"/>
+            <a:off x="4504944" y="4069080"/>
             <a:ext cx="457200" cy="457200"/>
           </a:xfrm>
           <a:prstGeom prst="ellipse">
@@ -4530,7 +4626,7 @@
         </p:nvSpPr>
         <p:spPr>
           <a:xfrm>
-            <a:off x="4465320" y="4069080"/>
+            <a:off x="4504944" y="4069080"/>
             <a:ext cx="457200" cy="457200"/>
           </a:xfrm>
           <a:prstGeom prst="rect">
@@ -4569,8 +4665,8 @@
         </p:nvSpPr>
         <p:spPr>
           <a:xfrm>
-            <a:off x="5059680" y="3995928"/>
-            <a:ext cx="2727960" cy="2112264"/>
+            <a:off x="5099304" y="3995928"/>
+            <a:ext cx="2630424" cy="2112264"/>
           </a:xfrm>
           <a:prstGeom prst="rect">
             <a:avLst/>
@@ -4599,6 +4695,54 @@
               <a:t>contador especializado</a:t>
             </a:r>
             <a:endParaRPr lang="en-US" sz="1800" dirty="0"/>
+          </a:p>
+        </p:txBody>
+      </p:sp>
+      <p:sp>
+        <p:nvSpPr>
+          <p:cNvPr id="25" name="Slide Number Placeholder 0"/>
+          <p:cNvSpPr>
+            <a:spLocks noGrp="1"/>
+          </p:cNvSpPr>
+          <p:nvPr>
+            <p:ph type="sldNum" sz="quarter" idx="4294967295"/>
+          </p:nvPr>
+        </p:nvSpPr>
+        <p:spPr>
+          <a:xfrm>
+            <a:off x="11292840" y="6556248"/>
+            <a:ext cx="548640" cy="256032"/>
+          </a:xfrm>
+          <a:prstGeom prst="rect">
+            <a:avLst/>
+          </a:prstGeom>
+          <a:extLst>
+            <a:ext uri="{C572A759-6A51-4108-AA02-DFA0A04FC94B}">
+              <ma14:wrappingTextBoxFlag xmlns:ma14="http://schemas.microsoft.com/office/mac/drawingml/2011/main" val="0"/>
+            </a:ext>
+          </a:extLst>
+        </p:spPr>
+        <p:txBody>
+          <a:bodyPr/>
+          <a:lstStyle>
+            <a:lvl1pPr>
+              <a:defRPr sz="900">
+                <a:solidFill>
+                  <a:srgbClr val="1B3A6B"/>
+                </a:solidFill>
+                <a:latin typeface="Arial"/>
+                <a:ea typeface="Arial"/>
+                <a:cs typeface="Arial"/>
+              </a:defRPr>
+            </a:lvl1pPr>
+          </a:lstStyle>
+          <a:p>
+            <a:pPr algn="r"/>
+            <a:fld id="{F7021451-1387-4CA6-816F-3879F97B5CBC}" type="slidenum">
+              <a:rPr b="1" lang="en-US"/>
+              <a:t>10</a:t>
+            </a:fld>
+            <a:endParaRPr lang="en-US"/>
           </a:p>
         </p:txBody>
       </p:sp>
@@ -4662,6 +4806,45 @@
         </p:nvSpPr>
         <p:spPr>
           <a:xfrm>
+            <a:off x="457200" y="548640"/>
+            <a:ext cx="3474720" cy="1737360"/>
+          </a:xfrm>
+          <a:prstGeom prst="rect">
+            <a:avLst/>
+          </a:prstGeom>
+          <a:noFill/>
+          <a:ln/>
+        </p:spPr>
+        <p:txBody>
+          <a:bodyPr wrap="square" rtlCol="0" anchor="ctr"/>
+          <a:lstStyle/>
+          <a:p>
+            <a:pPr indent="0" marL="0">
+              <a:buNone/>
+            </a:pPr>
+            <a:r>
+              <a:rPr lang="en-US" sz="11000" b="1" dirty="0">
+                <a:solidFill>
+                  <a:srgbClr val="11396F"/>
+                </a:solidFill>
+                <a:latin typeface="Arial" pitchFamily="34" charset="0"/>
+                <a:ea typeface="Arial" pitchFamily="34" charset="-122"/>
+                <a:cs typeface="Arial" pitchFamily="34" charset="-120"/>
+              </a:rPr>
+              <a:t>03</a:t>
+            </a:r>
+            <a:endParaRPr lang="en-US" sz="11000" dirty="0"/>
+          </a:p>
+        </p:txBody>
+      </p:sp>
+      <p:sp>
+        <p:nvSpPr>
+          <p:cNvPr id="4" name="Text 2"/>
+          <p:cNvSpPr/>
+          <p:nvPr/>
+        </p:nvSpPr>
+        <p:spPr>
+          <a:xfrm>
             <a:off x="548640" y="2194560"/>
             <a:ext cx="3291840" cy="548640"/>
           </a:xfrm>
@@ -4695,7 +4878,46 @@
       </p:sp>
       <p:sp>
         <p:nvSpPr>
-          <p:cNvPr id="4" name="Text 2"/>
+          <p:cNvPr id="5" name="Text 3"/>
+          <p:cNvSpPr/>
+          <p:nvPr/>
+        </p:nvSpPr>
+        <p:spPr>
+          <a:xfrm>
+            <a:off x="548640" y="3200400"/>
+            <a:ext cx="3383280" cy="457200"/>
+          </a:xfrm>
+          <a:prstGeom prst="rect">
+            <a:avLst/>
+          </a:prstGeom>
+          <a:noFill/>
+          <a:ln/>
+        </p:spPr>
+        <p:txBody>
+          <a:bodyPr wrap="square" rtlCol="0" anchor="ctr"/>
+          <a:lstStyle/>
+          <a:p>
+            <a:pPr indent="0" marL="0">
+              <a:buNone/>
+            </a:pPr>
+            <a:r>
+              <a:rPr lang="en-US" sz="1100" dirty="0">
+                <a:solidFill>
+                  <a:srgbClr val="C7D2E3"/>
+                </a:solidFill>
+                <a:latin typeface="Arial" pitchFamily="34" charset="0"/>
+                <a:ea typeface="Arial" pitchFamily="34" charset="-122"/>
+                <a:cs typeface="Arial" pitchFamily="34" charset="-120"/>
+              </a:rPr>
+              <a:t>M11 · Etapa 4 · Gestão e estratégia</a:t>
+            </a:r>
+            <a:endParaRPr lang="en-US" sz="1100" dirty="0"/>
+          </a:p>
+        </p:txBody>
+      </p:sp>
+      <p:sp>
+        <p:nvSpPr>
+          <p:cNvPr id="6" name="Text 4"/>
           <p:cNvSpPr/>
           <p:nvPr/>
         </p:nvSpPr>
@@ -4734,7 +4956,7 @@
       </p:sp>
       <p:pic>
         <p:nvPicPr>
-          <p:cNvPr id="5" name="Image 0" descr="/www/wwwroot/rexar/gdsolar/docs/curso/slides/assets/logo-gdsolar.png">    </p:cNvPr>
+          <p:cNvPr id="7" name="Image 0" descr="/www/wwwroot/rexar/gdsolar/docs/curso/slides/assets/logo-gdsolar.png">    </p:cNvPr>
           <p:cNvPicPr>
             <a:picLocks noChangeAspect="1"/>
           </p:cNvPicPr>
@@ -4758,7 +4980,7 @@
       </p:pic>
       <p:sp>
         <p:nvSpPr>
-          <p:cNvPr id="6" name="Text 3"/>
+          <p:cNvPr id="8" name="Text 5"/>
           <p:cNvSpPr/>
           <p:nvPr/>
         </p:nvSpPr>
@@ -4799,7 +5021,7 @@
       </p:sp>
       <p:sp>
         <p:nvSpPr>
-          <p:cNvPr id="7" name="Text 4"/>
+          <p:cNvPr id="9" name="Text 6"/>
           <p:cNvSpPr/>
           <p:nvPr/>
         </p:nvSpPr>
@@ -4840,7 +5062,7 @@
       </p:sp>
       <p:sp>
         <p:nvSpPr>
-          <p:cNvPr id="8" name="Text 5"/>
+          <p:cNvPr id="10" name="Text 7"/>
           <p:cNvSpPr/>
           <p:nvPr/>
         </p:nvSpPr>
@@ -4998,7 +5220,7 @@
         </p:blipFill>
         <p:spPr>
           <a:xfrm>
-            <a:off x="411480" y="6547104"/>
+            <a:off x="548640" y="6547104"/>
             <a:ext cx="274320" cy="274320"/>
           </a:xfrm>
           <a:prstGeom prst="rect">
@@ -5014,7 +5236,7 @@
         </p:nvSpPr>
         <p:spPr>
           <a:xfrm>
-            <a:off x="749808" y="6528816"/>
+            <a:off x="886968" y="6528816"/>
             <a:ext cx="6400800" cy="310896"/>
           </a:xfrm>
           <a:prstGeom prst="rect">
@@ -5054,7 +5276,7 @@
         <p:spPr>
           <a:xfrm>
             <a:off x="7132320" y="6528816"/>
-            <a:ext cx="4663440" cy="310896"/>
+            <a:ext cx="4023360" cy="310896"/>
           </a:xfrm>
           <a:prstGeom prst="rect">
             <a:avLst/>
@@ -5092,7 +5314,7 @@
         </p:nvSpPr>
         <p:spPr>
           <a:xfrm>
-            <a:off x="411480" y="384048"/>
+            <a:off x="548640" y="384048"/>
             <a:ext cx="82296" cy="658368"/>
           </a:xfrm>
           <a:prstGeom prst="rect">
@@ -5112,7 +5334,7 @@
         </p:nvSpPr>
         <p:spPr>
           <a:xfrm>
-            <a:off x="640080" y="292608"/>
+            <a:off x="777240" y="292608"/>
             <a:ext cx="10972800" cy="274320"/>
           </a:xfrm>
           <a:prstGeom prst="rect">
@@ -5151,8 +5373,8 @@
         </p:nvSpPr>
         <p:spPr>
           <a:xfrm>
-            <a:off x="640080" y="530352"/>
-            <a:ext cx="11155680" cy="566928"/>
+            <a:off x="777240" y="530352"/>
+            <a:ext cx="10881360" cy="566928"/>
           </a:xfrm>
           <a:prstGeom prst="rect">
             <a:avLst/>
@@ -5192,12 +5414,12 @@
         </p:nvSpPr>
         <p:spPr>
           <a:xfrm>
-            <a:off x="411480" y="1325880"/>
-            <a:ext cx="3642360" cy="4892040"/>
+            <a:off x="548640" y="1325880"/>
+            <a:ext cx="3544824" cy="4892040"/>
           </a:xfrm>
           <a:prstGeom prst="roundRect">
             <a:avLst>
-              <a:gd name="adj" fmla="val 2008"/>
+              <a:gd name="adj" fmla="val 2064"/>
             </a:avLst>
           </a:prstGeom>
           <a:solidFill>
@@ -5226,7 +5448,7 @@
         </p:nvSpPr>
         <p:spPr>
           <a:xfrm>
-            <a:off x="594360" y="1508760"/>
+            <a:off x="731520" y="1508760"/>
             <a:ext cx="457200" cy="457200"/>
           </a:xfrm>
           <a:prstGeom prst="ellipse">
@@ -5246,7 +5468,7 @@
         </p:nvSpPr>
         <p:spPr>
           <a:xfrm>
-            <a:off x="594360" y="1508760"/>
+            <a:off x="731520" y="1508760"/>
             <a:ext cx="457200" cy="457200"/>
           </a:xfrm>
           <a:prstGeom prst="rect">
@@ -5285,8 +5507,8 @@
         </p:nvSpPr>
         <p:spPr>
           <a:xfrm>
-            <a:off x="1188720" y="1435608"/>
-            <a:ext cx="2727960" cy="4672584"/>
+            <a:off x="1325880" y="1435608"/>
+            <a:ext cx="2630424" cy="4672584"/>
           </a:xfrm>
           <a:prstGeom prst="rect">
             <a:avLst/>
@@ -5326,12 +5548,12 @@
         </p:nvSpPr>
         <p:spPr>
           <a:xfrm>
-            <a:off x="4282440" y="1325880"/>
-            <a:ext cx="3642360" cy="4892040"/>
+            <a:off x="4322064" y="1325880"/>
+            <a:ext cx="3544824" cy="4892040"/>
           </a:xfrm>
           <a:prstGeom prst="roundRect">
             <a:avLst>
-              <a:gd name="adj" fmla="val 2008"/>
+              <a:gd name="adj" fmla="val 2064"/>
             </a:avLst>
           </a:prstGeom>
           <a:solidFill>
@@ -5360,7 +5582,7 @@
         </p:nvSpPr>
         <p:spPr>
           <a:xfrm>
-            <a:off x="4465320" y="1508760"/>
+            <a:off x="4504944" y="1508760"/>
             <a:ext cx="457200" cy="457200"/>
           </a:xfrm>
           <a:prstGeom prst="ellipse">
@@ -5380,7 +5602,7 @@
         </p:nvSpPr>
         <p:spPr>
           <a:xfrm>
-            <a:off x="4465320" y="1508760"/>
+            <a:off x="4504944" y="1508760"/>
             <a:ext cx="457200" cy="457200"/>
           </a:xfrm>
           <a:prstGeom prst="rect">
@@ -5419,8 +5641,8 @@
         </p:nvSpPr>
         <p:spPr>
           <a:xfrm>
-            <a:off x="5059680" y="1435608"/>
-            <a:ext cx="2727960" cy="4672584"/>
+            <a:off x="5099304" y="1435608"/>
+            <a:ext cx="2630424" cy="4672584"/>
           </a:xfrm>
           <a:prstGeom prst="rect">
             <a:avLst/>
@@ -5460,12 +5682,12 @@
         </p:nvSpPr>
         <p:spPr>
           <a:xfrm>
-            <a:off x="8153400" y="1325880"/>
-            <a:ext cx="3642360" cy="4892040"/>
+            <a:off x="8095488" y="1325880"/>
+            <a:ext cx="3544824" cy="4892040"/>
           </a:xfrm>
           <a:prstGeom prst="roundRect">
             <a:avLst>
-              <a:gd name="adj" fmla="val 2008"/>
+              <a:gd name="adj" fmla="val 2064"/>
             </a:avLst>
           </a:prstGeom>
           <a:solidFill>
@@ -5494,7 +5716,7 @@
         </p:nvSpPr>
         <p:spPr>
           <a:xfrm>
-            <a:off x="8336280" y="1508760"/>
+            <a:off x="8278368" y="1508760"/>
             <a:ext cx="457200" cy="457200"/>
           </a:xfrm>
           <a:prstGeom prst="ellipse">
@@ -5514,7 +5736,7 @@
         </p:nvSpPr>
         <p:spPr>
           <a:xfrm>
-            <a:off x="8336280" y="1508760"/>
+            <a:off x="8278368" y="1508760"/>
             <a:ext cx="457200" cy="457200"/>
           </a:xfrm>
           <a:prstGeom prst="rect">
@@ -5553,8 +5775,8 @@
         </p:nvSpPr>
         <p:spPr>
           <a:xfrm>
-            <a:off x="8930640" y="1435608"/>
-            <a:ext cx="2727960" cy="4672584"/>
+            <a:off x="8872728" y="1435608"/>
+            <a:ext cx="2630424" cy="4672584"/>
           </a:xfrm>
           <a:prstGeom prst="rect">
             <a:avLst/>
@@ -5583,6 +5805,54 @@
               <a:t>cada risco com dono e plano</a:t>
             </a:r>
             <a:endParaRPr lang="en-US" sz="1800" dirty="0"/>
+          </a:p>
+        </p:txBody>
+      </p:sp>
+      <p:sp>
+        <p:nvSpPr>
+          <p:cNvPr id="25" name="Slide Number Placeholder 0"/>
+          <p:cNvSpPr>
+            <a:spLocks noGrp="1"/>
+          </p:cNvSpPr>
+          <p:nvPr>
+            <p:ph type="sldNum" sz="quarter" idx="4294967295"/>
+          </p:nvPr>
+        </p:nvSpPr>
+        <p:spPr>
+          <a:xfrm>
+            <a:off x="11292840" y="6556248"/>
+            <a:ext cx="548640" cy="256032"/>
+          </a:xfrm>
+          <a:prstGeom prst="rect">
+            <a:avLst/>
+          </a:prstGeom>
+          <a:extLst>
+            <a:ext uri="{C572A759-6A51-4108-AA02-DFA0A04FC94B}">
+              <ma14:wrappingTextBoxFlag xmlns:ma14="http://schemas.microsoft.com/office/mac/drawingml/2011/main" val="0"/>
+            </a:ext>
+          </a:extLst>
+        </p:spPr>
+        <p:txBody>
+          <a:bodyPr/>
+          <a:lstStyle>
+            <a:lvl1pPr>
+              <a:defRPr sz="900">
+                <a:solidFill>
+                  <a:srgbClr val="1B3A6B"/>
+                </a:solidFill>
+                <a:latin typeface="Arial"/>
+                <a:ea typeface="Arial"/>
+                <a:cs typeface="Arial"/>
+              </a:defRPr>
+            </a:lvl1pPr>
+          </a:lstStyle>
+          <a:p>
+            <a:pPr algn="r"/>
+            <a:fld id="{F7021451-1387-4CA6-816F-3879F97B5CBC}" type="slidenum">
+              <a:rPr b="1" lang="en-US"/>
+              <a:t>12</a:t>
+            </a:fld>
+            <a:endParaRPr lang="en-US"/>
           </a:p>
         </p:txBody>
       </p:sp>
@@ -5659,7 +5929,7 @@
         </p:blipFill>
         <p:spPr>
           <a:xfrm>
-            <a:off x="411480" y="6547104"/>
+            <a:off x="548640" y="6547104"/>
             <a:ext cx="274320" cy="274320"/>
           </a:xfrm>
           <a:prstGeom prst="rect">
@@ -5675,7 +5945,7 @@
         </p:nvSpPr>
         <p:spPr>
           <a:xfrm>
-            <a:off x="749808" y="6528816"/>
+            <a:off x="886968" y="6528816"/>
             <a:ext cx="6400800" cy="310896"/>
           </a:xfrm>
           <a:prstGeom prst="rect">
@@ -5715,7 +5985,7 @@
         <p:spPr>
           <a:xfrm>
             <a:off x="7132320" y="6528816"/>
-            <a:ext cx="4663440" cy="310896"/>
+            <a:ext cx="4023360" cy="310896"/>
           </a:xfrm>
           <a:prstGeom prst="rect">
             <a:avLst/>
@@ -5753,7 +6023,7 @@
         </p:nvSpPr>
         <p:spPr>
           <a:xfrm>
-            <a:off x="411480" y="384048"/>
+            <a:off x="548640" y="384048"/>
             <a:ext cx="82296" cy="658368"/>
           </a:xfrm>
           <a:prstGeom prst="rect">
@@ -5773,7 +6043,7 @@
         </p:nvSpPr>
         <p:spPr>
           <a:xfrm>
-            <a:off x="640080" y="292608"/>
+            <a:off x="777240" y="292608"/>
             <a:ext cx="10972800" cy="274320"/>
           </a:xfrm>
           <a:prstGeom prst="rect">
@@ -5812,8 +6082,8 @@
         </p:nvSpPr>
         <p:spPr>
           <a:xfrm>
-            <a:off x="640080" y="530352"/>
-            <a:ext cx="11155680" cy="566928"/>
+            <a:off x="777240" y="530352"/>
+            <a:ext cx="10881360" cy="566928"/>
           </a:xfrm>
           <a:prstGeom prst="rect">
             <a:avLst/>
@@ -5854,7 +6124,7 @@
         <p:spPr>
           <a:xfrm>
             <a:off x="548640" y="1325880"/>
-            <a:ext cx="11155680" cy="4937760"/>
+            <a:ext cx="5486400" cy="4937760"/>
           </a:xfrm>
           <a:prstGeom prst="rect">
             <a:avLst/>
@@ -5875,7 +6145,7 @@
               <a:buNone/>
             </a:pPr>
             <a:r>
-              <a:rPr lang="en-US" sz="1200" dirty="0">
+              <a:rPr lang="en-US" sz="1800" dirty="0">
                 <a:solidFill>
                   <a:srgbClr val="1F2937"/>
                 </a:solidFill>
@@ -5885,7 +6155,7 @@
               </a:rPr>
               <a:t>1. Regulatório (Fio B 2029, novas regras) → cenários, cláusulas de reequilíbrio, acompanhamento semestral</a:t>
             </a:r>
-            <a:endParaRPr lang="en-US" sz="1200" dirty="0"/>
+            <a:endParaRPr lang="en-US" sz="1800" dirty="0"/>
           </a:p>
           <a:p>
             <a:pPr indent="0" marL="0">
@@ -5895,7 +6165,7 @@
               <a:buNone/>
             </a:pPr>
             <a:r>
-              <a:rPr lang="en-US" sz="1200" dirty="0">
+              <a:rPr lang="en-US" sz="1800" dirty="0">
                 <a:solidFill>
                   <a:srgbClr val="1F2937"/>
                 </a:solidFill>
@@ -5905,7 +6175,7 @@
               </a:rPr>
               <a:t>2. Abertura do mercado livre na baixa tensão → relacionamento, economia comprovada, contratos flexíveis, avaliar atuar também como comercializadora no futuro</a:t>
             </a:r>
-            <a:endParaRPr lang="en-US" sz="1200" dirty="0"/>
+            <a:endParaRPr lang="en-US" sz="1800" dirty="0"/>
           </a:p>
           <a:p>
             <a:pPr indent="0" marL="0">
@@ -5915,7 +6185,7 @@
               <a:buNone/>
             </a:pPr>
             <a:r>
-              <a:rPr lang="en-US" sz="1200" dirty="0">
+              <a:rPr lang="en-US" sz="1800" dirty="0">
                 <a:solidFill>
                   <a:srgbClr val="1F2937"/>
                 </a:solidFill>
@@ -5925,7 +6195,7 @@
               </a:rPr>
               <a:t>3. Geração abaixo do esperado / usina parada → due diligence, O&amp;M com prazo, seguro, monitoramento, mais de uma usina</a:t>
             </a:r>
-            <a:endParaRPr lang="en-US" sz="1200" dirty="0"/>
+            <a:endParaRPr lang="en-US" sz="1800" dirty="0"/>
           </a:p>
           <a:p>
             <a:pPr indent="0" marL="0">
@@ -5935,7 +6205,7 @@
               <a:buNone/>
             </a:pPr>
             <a:r>
-              <a:rPr lang="en-US" sz="1200" dirty="0">
+              <a:rPr lang="en-US" sz="1800" dirty="0">
                 <a:solidFill>
                   <a:srgbClr val="1F2937"/>
                 </a:solidFill>
@@ -5945,7 +6215,7 @@
               </a:rPr>
               <a:t>4. Oversell e concentração → travas da plataforma, ocupação ≤ 98%, limite por cliente</a:t>
             </a:r>
-            <a:endParaRPr lang="en-US" sz="1200" dirty="0"/>
+            <a:endParaRPr lang="en-US" sz="1800" dirty="0"/>
           </a:p>
           <a:p>
             <a:pPr indent="0" marL="0">
@@ -5955,7 +6225,7 @@
               <a:buNone/>
             </a:pPr>
             <a:r>
-              <a:rPr lang="en-US" sz="1200" dirty="0">
+              <a:rPr lang="en-US" sz="1800" dirty="0">
                 <a:solidFill>
                   <a:srgbClr val="1F2937"/>
                 </a:solidFill>
@@ -5965,8 +6235,32 @@
               </a:rPr>
               <a:t>5. Inadimplência → régua, Pix padrão, comissão após 1ª paga, análise na entrada</a:t>
             </a:r>
-            <a:endParaRPr lang="en-US" sz="1200" dirty="0"/>
-          </a:p>
+            <a:endParaRPr lang="en-US" sz="1800" dirty="0"/>
+          </a:p>
+        </p:txBody>
+      </p:sp>
+      <p:sp>
+        <p:nvSpPr>
+          <p:cNvPr id="10" name="Text 7"/>
+          <p:cNvSpPr/>
+          <p:nvPr/>
+        </p:nvSpPr>
+        <p:spPr>
+          <a:xfrm>
+            <a:off x="6263640" y="1325880"/>
+            <a:ext cx="5486400" cy="4937760"/>
+          </a:xfrm>
+          <a:prstGeom prst="rect">
+            <a:avLst/>
+          </a:prstGeom>
+          <a:noFill/>
+          <a:ln/>
+        </p:spPr>
+        <p:txBody>
+          <a:bodyPr wrap="square" rtlCol="0" anchor="t">
+            <a:normAutofit/>
+          </a:bodyPr>
+          <a:lstStyle/>
           <a:p>
             <a:pPr indent="0" marL="0">
               <a:spcAft>
@@ -5975,7 +6269,7 @@
               <a:buNone/>
             </a:pPr>
             <a:r>
-              <a:rPr lang="en-US" sz="1200" dirty="0">
+              <a:rPr lang="en-US" sz="1800" dirty="0">
                 <a:solidFill>
                   <a:srgbClr val="1F2937"/>
                 </a:solidFill>
@@ -5985,7 +6279,7 @@
               </a:rPr>
               <a:t>6. Churn → explicação das duas contas, relatório de economia, suporte</a:t>
             </a:r>
-            <a:endParaRPr lang="en-US" sz="1200" dirty="0"/>
+            <a:endParaRPr lang="en-US" sz="1800" dirty="0"/>
           </a:p>
           <a:p>
             <a:pPr indent="0" marL="0">
@@ -5995,7 +6289,7 @@
               <a:buNone/>
             </a:pPr>
             <a:r>
-              <a:rPr lang="en-US" sz="1200" dirty="0">
+              <a:rPr lang="en-US" sz="1800" dirty="0">
                 <a:solidFill>
                   <a:srgbClr val="1F2937"/>
                 </a:solidFill>
@@ -6005,7 +6299,7 @@
               </a:rPr>
               <a:t>7. Distribuidora (rateio atrasado, erros) → dia fixo, protocolos, conferência esperado × faturado</a:t>
             </a:r>
-            <a:endParaRPr lang="en-US" sz="1200" dirty="0"/>
+            <a:endParaRPr lang="en-US" sz="1800" dirty="0"/>
           </a:p>
           <a:p>
             <a:pPr indent="0" marL="0">
@@ -6015,7 +6309,7 @@
               <a:buNone/>
             </a:pPr>
             <a:r>
-              <a:rPr lang="en-US" sz="1200" dirty="0">
+              <a:rPr lang="en-US" sz="1800" dirty="0">
                 <a:solidFill>
                   <a:srgbClr val="1F2937"/>
                 </a:solidFill>
@@ -6025,7 +6319,7 @@
               </a:rPr>
               <a:t>8. Dependência de um produtor ou usina → portfólio de usinas, contratos com prazo e transição</a:t>
             </a:r>
-            <a:endParaRPr lang="en-US" sz="1200" dirty="0"/>
+            <a:endParaRPr lang="en-US" sz="1800" dirty="0"/>
           </a:p>
           <a:p>
             <a:pPr indent="0" marL="0">
@@ -6035,7 +6329,7 @@
               <a:buNone/>
             </a:pPr>
             <a:r>
-              <a:rPr lang="en-US" sz="1200" dirty="0">
+              <a:rPr lang="en-US" sz="1800" dirty="0">
                 <a:solidFill>
                   <a:srgbClr val="1F2937"/>
                 </a:solidFill>
@@ -6045,7 +6339,7 @@
               </a:rPr>
               <a:t>9. Jurídico/consumidor → contratos revisados, linguagem correta, LGPD</a:t>
             </a:r>
-            <a:endParaRPr lang="en-US" sz="1200" dirty="0"/>
+            <a:endParaRPr lang="en-US" sz="1800" dirty="0"/>
           </a:p>
           <a:p>
             <a:pPr indent="0" marL="0">
@@ -6055,7 +6349,7 @@
               <a:buNone/>
             </a:pPr>
             <a:r>
-              <a:rPr lang="en-US" sz="1200" dirty="0">
+              <a:rPr lang="en-US" sz="1800" dirty="0">
                 <a:solidFill>
                   <a:srgbClr val="1F2937"/>
                 </a:solidFill>
@@ -6065,7 +6359,55 @@
               </a:rPr>
               <a:t>10. Caixa (capital de giro até o ponto de equilíbrio) → plano financeiro, estrutura fixa enxuta, metas comerciais</a:t>
             </a:r>
-            <a:endParaRPr lang="en-US" sz="1200" dirty="0"/>
+            <a:endParaRPr lang="en-US" sz="1800" dirty="0"/>
+          </a:p>
+        </p:txBody>
+      </p:sp>
+      <p:sp>
+        <p:nvSpPr>
+          <p:cNvPr id="25" name="Slide Number Placeholder 0"/>
+          <p:cNvSpPr>
+            <a:spLocks noGrp="1"/>
+          </p:cNvSpPr>
+          <p:nvPr>
+            <p:ph type="sldNum" sz="quarter" idx="4294967295"/>
+          </p:nvPr>
+        </p:nvSpPr>
+        <p:spPr>
+          <a:xfrm>
+            <a:off x="11292840" y="6556248"/>
+            <a:ext cx="548640" cy="256032"/>
+          </a:xfrm>
+          <a:prstGeom prst="rect">
+            <a:avLst/>
+          </a:prstGeom>
+          <a:extLst>
+            <a:ext uri="{C572A759-6A51-4108-AA02-DFA0A04FC94B}">
+              <ma14:wrappingTextBoxFlag xmlns:ma14="http://schemas.microsoft.com/office/mac/drawingml/2011/main" val="0"/>
+            </a:ext>
+          </a:extLst>
+        </p:spPr>
+        <p:txBody>
+          <a:bodyPr/>
+          <a:lstStyle>
+            <a:lvl1pPr>
+              <a:defRPr sz="900">
+                <a:solidFill>
+                  <a:srgbClr val="1B3A6B"/>
+                </a:solidFill>
+                <a:latin typeface="Arial"/>
+                <a:ea typeface="Arial"/>
+                <a:cs typeface="Arial"/>
+              </a:defRPr>
+            </a:lvl1pPr>
+          </a:lstStyle>
+          <a:p>
+            <a:pPr algn="r"/>
+            <a:fld id="{F7021451-1387-4CA6-816F-3879F97B5CBC}" type="slidenum">
+              <a:rPr b="1" lang="en-US"/>
+              <a:t>13</a:t>
+            </a:fld>
+            <a:endParaRPr lang="en-US"/>
           </a:p>
         </p:txBody>
       </p:sp>
@@ -6142,7 +6484,7 @@
         </p:blipFill>
         <p:spPr>
           <a:xfrm>
-            <a:off x="411480" y="6547104"/>
+            <a:off x="548640" y="6547104"/>
             <a:ext cx="274320" cy="274320"/>
           </a:xfrm>
           <a:prstGeom prst="rect">
@@ -6158,7 +6500,7 @@
         </p:nvSpPr>
         <p:spPr>
           <a:xfrm>
-            <a:off x="749808" y="6528816"/>
+            <a:off x="886968" y="6528816"/>
             <a:ext cx="6400800" cy="310896"/>
           </a:xfrm>
           <a:prstGeom prst="rect">
@@ -6198,7 +6540,7 @@
         <p:spPr>
           <a:xfrm>
             <a:off x="7132320" y="6528816"/>
-            <a:ext cx="4663440" cy="310896"/>
+            <a:ext cx="4023360" cy="310896"/>
           </a:xfrm>
           <a:prstGeom prst="rect">
             <a:avLst/>
@@ -6236,7 +6578,7 @@
         </p:nvSpPr>
         <p:spPr>
           <a:xfrm>
-            <a:off x="411480" y="384048"/>
+            <a:off x="548640" y="384048"/>
             <a:ext cx="82296" cy="658368"/>
           </a:xfrm>
           <a:prstGeom prst="rect">
@@ -6256,7 +6598,7 @@
         </p:nvSpPr>
         <p:spPr>
           <a:xfrm>
-            <a:off x="640080" y="292608"/>
+            <a:off x="777240" y="292608"/>
             <a:ext cx="10972800" cy="274320"/>
           </a:xfrm>
           <a:prstGeom prst="rect">
@@ -6295,8 +6637,8 @@
         </p:nvSpPr>
         <p:spPr>
           <a:xfrm>
-            <a:off x="640080" y="530352"/>
-            <a:ext cx="11155680" cy="566928"/>
+            <a:off x="777240" y="530352"/>
+            <a:ext cx="10881360" cy="566928"/>
           </a:xfrm>
           <a:prstGeom prst="rect">
             <a:avLst/>
@@ -6336,12 +6678,12 @@
         </p:nvSpPr>
         <p:spPr>
           <a:xfrm>
-            <a:off x="411480" y="1325880"/>
-            <a:ext cx="3642360" cy="4892040"/>
+            <a:off x="548640" y="1325880"/>
+            <a:ext cx="3544824" cy="4892040"/>
           </a:xfrm>
           <a:prstGeom prst="roundRect">
             <a:avLst>
-              <a:gd name="adj" fmla="val 2008"/>
+              <a:gd name="adj" fmla="val 2064"/>
             </a:avLst>
           </a:prstGeom>
           <a:solidFill>
@@ -6370,7 +6712,7 @@
         </p:nvSpPr>
         <p:spPr>
           <a:xfrm>
-            <a:off x="594360" y="1508760"/>
+            <a:off x="731520" y="1508760"/>
             <a:ext cx="457200" cy="457200"/>
           </a:xfrm>
           <a:prstGeom prst="ellipse">
@@ -6390,7 +6732,7 @@
         </p:nvSpPr>
         <p:spPr>
           <a:xfrm>
-            <a:off x="594360" y="1508760"/>
+            <a:off x="731520" y="1508760"/>
             <a:ext cx="457200" cy="457200"/>
           </a:xfrm>
           <a:prstGeom prst="rect">
@@ -6429,8 +6771,8 @@
         </p:nvSpPr>
         <p:spPr>
           <a:xfrm>
-            <a:off x="1188720" y="1435608"/>
-            <a:ext cx="2727960" cy="4672584"/>
+            <a:off x="1325880" y="1435608"/>
+            <a:ext cx="2630424" cy="4672584"/>
           </a:xfrm>
           <a:prstGeom prst="rect">
             <a:avLst/>
@@ -6470,12 +6812,12 @@
         </p:nvSpPr>
         <p:spPr>
           <a:xfrm>
-            <a:off x="4282440" y="1325880"/>
-            <a:ext cx="3642360" cy="4892040"/>
+            <a:off x="4322064" y="1325880"/>
+            <a:ext cx="3544824" cy="4892040"/>
           </a:xfrm>
           <a:prstGeom prst="roundRect">
             <a:avLst>
-              <a:gd name="adj" fmla="val 2008"/>
+              <a:gd name="adj" fmla="val 2064"/>
             </a:avLst>
           </a:prstGeom>
           <a:solidFill>
@@ -6504,7 +6846,7 @@
         </p:nvSpPr>
         <p:spPr>
           <a:xfrm>
-            <a:off x="4465320" y="1508760"/>
+            <a:off x="4504944" y="1508760"/>
             <a:ext cx="457200" cy="457200"/>
           </a:xfrm>
           <a:prstGeom prst="ellipse">
@@ -6524,7 +6866,7 @@
         </p:nvSpPr>
         <p:spPr>
           <a:xfrm>
-            <a:off x="4465320" y="1508760"/>
+            <a:off x="4504944" y="1508760"/>
             <a:ext cx="457200" cy="457200"/>
           </a:xfrm>
           <a:prstGeom prst="rect">
@@ -6563,8 +6905,8 @@
         </p:nvSpPr>
         <p:spPr>
           <a:xfrm>
-            <a:off x="5059680" y="1435608"/>
-            <a:ext cx="2727960" cy="4672584"/>
+            <a:off x="5099304" y="1435608"/>
+            <a:ext cx="2630424" cy="4672584"/>
           </a:xfrm>
           <a:prstGeom prst="rect">
             <a:avLst/>
@@ -6604,12 +6946,12 @@
         </p:nvSpPr>
         <p:spPr>
           <a:xfrm>
-            <a:off x="8153400" y="1325880"/>
-            <a:ext cx="3642360" cy="4892040"/>
+            <a:off x="8095488" y="1325880"/>
+            <a:ext cx="3544824" cy="4892040"/>
           </a:xfrm>
           <a:prstGeom prst="roundRect">
             <a:avLst>
-              <a:gd name="adj" fmla="val 2008"/>
+              <a:gd name="adj" fmla="val 2064"/>
             </a:avLst>
           </a:prstGeom>
           <a:solidFill>
@@ -6638,7 +6980,7 @@
         </p:nvSpPr>
         <p:spPr>
           <a:xfrm>
-            <a:off x="8336280" y="1508760"/>
+            <a:off x="8278368" y="1508760"/>
             <a:ext cx="457200" cy="457200"/>
           </a:xfrm>
           <a:prstGeom prst="ellipse">
@@ -6658,7 +7000,7 @@
         </p:nvSpPr>
         <p:spPr>
           <a:xfrm>
-            <a:off x="8336280" y="1508760"/>
+            <a:off x="8278368" y="1508760"/>
             <a:ext cx="457200" cy="457200"/>
           </a:xfrm>
           <a:prstGeom prst="rect">
@@ -6697,8 +7039,8 @@
         </p:nvSpPr>
         <p:spPr>
           <a:xfrm>
-            <a:off x="8930640" y="1435608"/>
-            <a:ext cx="2727960" cy="4672584"/>
+            <a:off x="8872728" y="1435608"/>
+            <a:ext cx="2630424" cy="4672584"/>
           </a:xfrm>
           <a:prstGeom prst="rect">
             <a:avLst/>
@@ -6727,6 +7069,54 @@
               <a:t>atualizar mitigação</a:t>
             </a:r>
             <a:endParaRPr lang="en-US" sz="1800" dirty="0"/>
+          </a:p>
+        </p:txBody>
+      </p:sp>
+      <p:sp>
+        <p:nvSpPr>
+          <p:cNvPr id="25" name="Slide Number Placeholder 0"/>
+          <p:cNvSpPr>
+            <a:spLocks noGrp="1"/>
+          </p:cNvSpPr>
+          <p:nvPr>
+            <p:ph type="sldNum" sz="quarter" idx="4294967295"/>
+          </p:nvPr>
+        </p:nvSpPr>
+        <p:spPr>
+          <a:xfrm>
+            <a:off x="11292840" y="6556248"/>
+            <a:ext cx="548640" cy="256032"/>
+          </a:xfrm>
+          <a:prstGeom prst="rect">
+            <a:avLst/>
+          </a:prstGeom>
+          <a:extLst>
+            <a:ext uri="{C572A759-6A51-4108-AA02-DFA0A04FC94B}">
+              <ma14:wrappingTextBoxFlag xmlns:ma14="http://schemas.microsoft.com/office/mac/drawingml/2011/main" val="0"/>
+            </a:ext>
+          </a:extLst>
+        </p:spPr>
+        <p:txBody>
+          <a:bodyPr/>
+          <a:lstStyle>
+            <a:lvl1pPr>
+              <a:defRPr sz="900">
+                <a:solidFill>
+                  <a:srgbClr val="1B3A6B"/>
+                </a:solidFill>
+                <a:latin typeface="Arial"/>
+                <a:ea typeface="Arial"/>
+                <a:cs typeface="Arial"/>
+              </a:defRPr>
+            </a:lvl1pPr>
+          </a:lstStyle>
+          <a:p>
+            <a:pPr algn="r"/>
+            <a:fld id="{F7021451-1387-4CA6-816F-3879F97B5CBC}" type="slidenum">
+              <a:rPr b="1" lang="en-US"/>
+              <a:t>14</a:t>
+            </a:fld>
+            <a:endParaRPr lang="en-US"/>
           </a:p>
         </p:txBody>
       </p:sp>
@@ -6803,7 +7193,7 @@
         </p:blipFill>
         <p:spPr>
           <a:xfrm>
-            <a:off x="411480" y="6547104"/>
+            <a:off x="548640" y="6547104"/>
             <a:ext cx="274320" cy="274320"/>
           </a:xfrm>
           <a:prstGeom prst="rect">
@@ -6819,7 +7209,7 @@
         </p:nvSpPr>
         <p:spPr>
           <a:xfrm>
-            <a:off x="749808" y="6528816"/>
+            <a:off x="886968" y="6528816"/>
             <a:ext cx="6400800" cy="310896"/>
           </a:xfrm>
           <a:prstGeom prst="rect">
@@ -6859,7 +7249,7 @@
         <p:spPr>
           <a:xfrm>
             <a:off x="7132320" y="6528816"/>
-            <a:ext cx="4663440" cy="310896"/>
+            <a:ext cx="4023360" cy="310896"/>
           </a:xfrm>
           <a:prstGeom prst="rect">
             <a:avLst/>
@@ -6897,7 +7287,7 @@
         </p:nvSpPr>
         <p:spPr>
           <a:xfrm>
-            <a:off x="411480" y="384048"/>
+            <a:off x="548640" y="384048"/>
             <a:ext cx="82296" cy="658368"/>
           </a:xfrm>
           <a:prstGeom prst="rect">
@@ -6917,7 +7307,7 @@
         </p:nvSpPr>
         <p:spPr>
           <a:xfrm>
-            <a:off x="640080" y="292608"/>
+            <a:off x="777240" y="292608"/>
             <a:ext cx="10972800" cy="274320"/>
           </a:xfrm>
           <a:prstGeom prst="rect">
@@ -6956,8 +7346,8 @@
         </p:nvSpPr>
         <p:spPr>
           <a:xfrm>
-            <a:off x="640080" y="530352"/>
-            <a:ext cx="11155680" cy="566928"/>
+            <a:off x="777240" y="530352"/>
+            <a:ext cx="10881360" cy="566928"/>
           </a:xfrm>
           <a:prstGeom prst="rect">
             <a:avLst/>
@@ -6997,8 +7387,8 @@
         </p:nvSpPr>
         <p:spPr>
           <a:xfrm>
-            <a:off x="411480" y="1325880"/>
-            <a:ext cx="5577840" cy="2331720"/>
+            <a:off x="548640" y="1325880"/>
+            <a:ext cx="5431536" cy="2331720"/>
           </a:xfrm>
           <a:prstGeom prst="roundRect">
             <a:avLst>
@@ -7031,7 +7421,7 @@
         </p:nvSpPr>
         <p:spPr>
           <a:xfrm>
-            <a:off x="594360" y="1508760"/>
+            <a:off x="731520" y="1508760"/>
             <a:ext cx="457200" cy="457200"/>
           </a:xfrm>
           <a:prstGeom prst="ellipse">
@@ -7051,7 +7441,7 @@
         </p:nvSpPr>
         <p:spPr>
           <a:xfrm>
-            <a:off x="594360" y="1508760"/>
+            <a:off x="731520" y="1508760"/>
             <a:ext cx="457200" cy="457200"/>
           </a:xfrm>
           <a:prstGeom prst="rect">
@@ -7090,8 +7480,8 @@
         </p:nvSpPr>
         <p:spPr>
           <a:xfrm>
-            <a:off x="1188720" y="1435608"/>
-            <a:ext cx="4663440" cy="2112264"/>
+            <a:off x="1325880" y="1435608"/>
+            <a:ext cx="4517136" cy="2112264"/>
           </a:xfrm>
           <a:prstGeom prst="rect">
             <a:avLst/>
@@ -7131,8 +7521,8 @@
         </p:nvSpPr>
         <p:spPr>
           <a:xfrm>
-            <a:off x="6217920" y="1325880"/>
-            <a:ext cx="5577840" cy="2331720"/>
+            <a:off x="6208776" y="1325880"/>
+            <a:ext cx="5431536" cy="2331720"/>
           </a:xfrm>
           <a:prstGeom prst="roundRect">
             <a:avLst>
@@ -7165,7 +7555,7 @@
         </p:nvSpPr>
         <p:spPr>
           <a:xfrm>
-            <a:off x="6400800" y="1508760"/>
+            <a:off x="6391656" y="1508760"/>
             <a:ext cx="457200" cy="457200"/>
           </a:xfrm>
           <a:prstGeom prst="ellipse">
@@ -7185,7 +7575,7 @@
         </p:nvSpPr>
         <p:spPr>
           <a:xfrm>
-            <a:off x="6400800" y="1508760"/>
+            <a:off x="6391656" y="1508760"/>
             <a:ext cx="457200" cy="457200"/>
           </a:xfrm>
           <a:prstGeom prst="rect">
@@ -7224,8 +7614,8 @@
         </p:nvSpPr>
         <p:spPr>
           <a:xfrm>
-            <a:off x="6995160" y="1435608"/>
-            <a:ext cx="4663440" cy="2112264"/>
+            <a:off x="6986016" y="1435608"/>
+            <a:ext cx="4517136" cy="2112264"/>
           </a:xfrm>
           <a:prstGeom prst="rect">
             <a:avLst/>
@@ -7265,8 +7655,8 @@
         </p:nvSpPr>
         <p:spPr>
           <a:xfrm>
-            <a:off x="411480" y="3886200"/>
-            <a:ext cx="5577840" cy="2331720"/>
+            <a:off x="548640" y="3886200"/>
+            <a:ext cx="5431536" cy="2331720"/>
           </a:xfrm>
           <a:prstGeom prst="roundRect">
             <a:avLst>
@@ -7299,7 +7689,7 @@
         </p:nvSpPr>
         <p:spPr>
           <a:xfrm>
-            <a:off x="594360" y="4069080"/>
+            <a:off x="731520" y="4069080"/>
             <a:ext cx="457200" cy="457200"/>
           </a:xfrm>
           <a:prstGeom prst="ellipse">
@@ -7319,7 +7709,7 @@
         </p:nvSpPr>
         <p:spPr>
           <a:xfrm>
-            <a:off x="594360" y="4069080"/>
+            <a:off x="731520" y="4069080"/>
             <a:ext cx="457200" cy="457200"/>
           </a:xfrm>
           <a:prstGeom prst="rect">
@@ -7358,8 +7748,8 @@
         </p:nvSpPr>
         <p:spPr>
           <a:xfrm>
-            <a:off x="1188720" y="3995928"/>
-            <a:ext cx="4663440" cy="2112264"/>
+            <a:off x="1325880" y="3995928"/>
+            <a:ext cx="4517136" cy="2112264"/>
           </a:xfrm>
           <a:prstGeom prst="rect">
             <a:avLst/>
@@ -7399,8 +7789,8 @@
         </p:nvSpPr>
         <p:spPr>
           <a:xfrm>
-            <a:off x="6217920" y="3886200"/>
-            <a:ext cx="5577840" cy="2331720"/>
+            <a:off x="6208776" y="3886200"/>
+            <a:ext cx="5431536" cy="2331720"/>
           </a:xfrm>
           <a:prstGeom prst="roundRect">
             <a:avLst>
@@ -7433,7 +7823,7 @@
         </p:nvSpPr>
         <p:spPr>
           <a:xfrm>
-            <a:off x="6400800" y="4069080"/>
+            <a:off x="6391656" y="4069080"/>
             <a:ext cx="457200" cy="457200"/>
           </a:xfrm>
           <a:prstGeom prst="ellipse">
@@ -7453,7 +7843,7 @@
         </p:nvSpPr>
         <p:spPr>
           <a:xfrm>
-            <a:off x="6400800" y="4069080"/>
+            <a:off x="6391656" y="4069080"/>
             <a:ext cx="457200" cy="457200"/>
           </a:xfrm>
           <a:prstGeom prst="rect">
@@ -7492,8 +7882,8 @@
         </p:nvSpPr>
         <p:spPr>
           <a:xfrm>
-            <a:off x="6995160" y="3995928"/>
-            <a:ext cx="4663440" cy="2112264"/>
+            <a:off x="6986016" y="3995928"/>
+            <a:ext cx="4517136" cy="2112264"/>
           </a:xfrm>
           <a:prstGeom prst="rect">
             <a:avLst/>
@@ -7522,6 +7912,54 @@
               <a:t>revisão trimestral</a:t>
             </a:r>
             <a:endParaRPr lang="en-US" sz="1800" dirty="0"/>
+          </a:p>
+        </p:txBody>
+      </p:sp>
+      <p:sp>
+        <p:nvSpPr>
+          <p:cNvPr id="25" name="Slide Number Placeholder 0"/>
+          <p:cNvSpPr>
+            <a:spLocks noGrp="1"/>
+          </p:cNvSpPr>
+          <p:nvPr>
+            <p:ph type="sldNum" sz="quarter" idx="4294967295"/>
+          </p:nvPr>
+        </p:nvSpPr>
+        <p:spPr>
+          <a:xfrm>
+            <a:off x="11292840" y="6556248"/>
+            <a:ext cx="548640" cy="256032"/>
+          </a:xfrm>
+          <a:prstGeom prst="rect">
+            <a:avLst/>
+          </a:prstGeom>
+          <a:extLst>
+            <a:ext uri="{C572A759-6A51-4108-AA02-DFA0A04FC94B}">
+              <ma14:wrappingTextBoxFlag xmlns:ma14="http://schemas.microsoft.com/office/mac/drawingml/2011/main" val="0"/>
+            </a:ext>
+          </a:extLst>
+        </p:spPr>
+        <p:txBody>
+          <a:bodyPr/>
+          <a:lstStyle>
+            <a:lvl1pPr>
+              <a:defRPr sz="900">
+                <a:solidFill>
+                  <a:srgbClr val="1B3A6B"/>
+                </a:solidFill>
+                <a:latin typeface="Arial"/>
+                <a:ea typeface="Arial"/>
+                <a:cs typeface="Arial"/>
+              </a:defRPr>
+            </a:lvl1pPr>
+          </a:lstStyle>
+          <a:p>
+            <a:pPr algn="r"/>
+            <a:fld id="{F7021451-1387-4CA6-816F-3879F97B5CBC}" type="slidenum">
+              <a:rPr b="1" lang="en-US"/>
+              <a:t>15</a:t>
+            </a:fld>
+            <a:endParaRPr lang="en-US"/>
           </a:p>
         </p:txBody>
       </p:sp>
@@ -7585,6 +8023,45 @@
         </p:nvSpPr>
         <p:spPr>
           <a:xfrm>
+            <a:off x="457200" y="548640"/>
+            <a:ext cx="3474720" cy="1737360"/>
+          </a:xfrm>
+          <a:prstGeom prst="rect">
+            <a:avLst/>
+          </a:prstGeom>
+          <a:noFill/>
+          <a:ln/>
+        </p:spPr>
+        <p:txBody>
+          <a:bodyPr wrap="square" rtlCol="0" anchor="ctr"/>
+          <a:lstStyle/>
+          <a:p>
+            <a:pPr indent="0" marL="0">
+              <a:buNone/>
+            </a:pPr>
+            <a:r>
+              <a:rPr lang="en-US" sz="11000" b="1" dirty="0">
+                <a:solidFill>
+                  <a:srgbClr val="11396F"/>
+                </a:solidFill>
+                <a:latin typeface="Arial" pitchFamily="34" charset="0"/>
+                <a:ea typeface="Arial" pitchFamily="34" charset="-122"/>
+                <a:cs typeface="Arial" pitchFamily="34" charset="-120"/>
+              </a:rPr>
+              <a:t>04</a:t>
+            </a:r>
+            <a:endParaRPr lang="en-US" sz="11000" dirty="0"/>
+          </a:p>
+        </p:txBody>
+      </p:sp>
+      <p:sp>
+        <p:nvSpPr>
+          <p:cNvPr id="4" name="Text 2"/>
+          <p:cNvSpPr/>
+          <p:nvPr/>
+        </p:nvSpPr>
+        <p:spPr>
+          <a:xfrm>
             <a:off x="548640" y="2194560"/>
             <a:ext cx="3291840" cy="548640"/>
           </a:xfrm>
@@ -7618,7 +8095,46 @@
       </p:sp>
       <p:sp>
         <p:nvSpPr>
-          <p:cNvPr id="4" name="Text 2"/>
+          <p:cNvPr id="5" name="Text 3"/>
+          <p:cNvSpPr/>
+          <p:nvPr/>
+        </p:nvSpPr>
+        <p:spPr>
+          <a:xfrm>
+            <a:off x="548640" y="3200400"/>
+            <a:ext cx="3383280" cy="457200"/>
+          </a:xfrm>
+          <a:prstGeom prst="rect">
+            <a:avLst/>
+          </a:prstGeom>
+          <a:noFill/>
+          <a:ln/>
+        </p:spPr>
+        <p:txBody>
+          <a:bodyPr wrap="square" rtlCol="0" anchor="ctr"/>
+          <a:lstStyle/>
+          <a:p>
+            <a:pPr indent="0" marL="0">
+              <a:buNone/>
+            </a:pPr>
+            <a:r>
+              <a:rPr lang="en-US" sz="1100" dirty="0">
+                <a:solidFill>
+                  <a:srgbClr val="C7D2E3"/>
+                </a:solidFill>
+                <a:latin typeface="Arial" pitchFamily="34" charset="0"/>
+                <a:ea typeface="Arial" pitchFamily="34" charset="-122"/>
+                <a:cs typeface="Arial" pitchFamily="34" charset="-120"/>
+              </a:rPr>
+              <a:t>M11 · Etapa 4 · Gestão e estratégia</a:t>
+            </a:r>
+            <a:endParaRPr lang="en-US" sz="1100" dirty="0"/>
+          </a:p>
+        </p:txBody>
+      </p:sp>
+      <p:sp>
+        <p:nvSpPr>
+          <p:cNvPr id="6" name="Text 4"/>
           <p:cNvSpPr/>
           <p:nvPr/>
         </p:nvSpPr>
@@ -7657,7 +8173,7 @@
       </p:sp>
       <p:pic>
         <p:nvPicPr>
-          <p:cNvPr id="5" name="Image 0" descr="/www/wwwroot/rexar/gdsolar/docs/curso/slides/assets/logo-gdsolar.png">    </p:cNvPr>
+          <p:cNvPr id="7" name="Image 0" descr="/www/wwwroot/rexar/gdsolar/docs/curso/slides/assets/logo-gdsolar.png">    </p:cNvPr>
           <p:cNvPicPr>
             <a:picLocks noChangeAspect="1"/>
           </p:cNvPicPr>
@@ -7681,7 +8197,7 @@
       </p:pic>
       <p:sp>
         <p:nvSpPr>
-          <p:cNvPr id="6" name="Text 3"/>
+          <p:cNvPr id="8" name="Text 5"/>
           <p:cNvSpPr/>
           <p:nvPr/>
         </p:nvSpPr>
@@ -7722,7 +8238,7 @@
       </p:sp>
       <p:sp>
         <p:nvSpPr>
-          <p:cNvPr id="7" name="Text 4"/>
+          <p:cNvPr id="9" name="Text 6"/>
           <p:cNvSpPr/>
           <p:nvPr/>
         </p:nvSpPr>
@@ -7763,7 +8279,7 @@
       </p:sp>
       <p:sp>
         <p:nvSpPr>
-          <p:cNvPr id="8" name="Text 5"/>
+          <p:cNvPr id="10" name="Text 7"/>
           <p:cNvSpPr/>
           <p:nvPr/>
         </p:nvSpPr>
@@ -7942,7 +8458,7 @@
         </p:blipFill>
         <p:spPr>
           <a:xfrm>
-            <a:off x="411480" y="6547104"/>
+            <a:off x="548640" y="6547104"/>
             <a:ext cx="274320" cy="274320"/>
           </a:xfrm>
           <a:prstGeom prst="rect">
@@ -7958,7 +8474,7 @@
         </p:nvSpPr>
         <p:spPr>
           <a:xfrm>
-            <a:off x="749808" y="6528816"/>
+            <a:off x="886968" y="6528816"/>
             <a:ext cx="6400800" cy="310896"/>
           </a:xfrm>
           <a:prstGeom prst="rect">
@@ -7998,7 +8514,7 @@
         <p:spPr>
           <a:xfrm>
             <a:off x="7132320" y="6528816"/>
-            <a:ext cx="4663440" cy="310896"/>
+            <a:ext cx="4023360" cy="310896"/>
           </a:xfrm>
           <a:prstGeom prst="rect">
             <a:avLst/>
@@ -8036,7 +8552,7 @@
         </p:nvSpPr>
         <p:spPr>
           <a:xfrm>
-            <a:off x="411480" y="384048"/>
+            <a:off x="548640" y="384048"/>
             <a:ext cx="82296" cy="658368"/>
           </a:xfrm>
           <a:prstGeom prst="rect">
@@ -8056,7 +8572,7 @@
         </p:nvSpPr>
         <p:spPr>
           <a:xfrm>
-            <a:off x="640080" y="292608"/>
+            <a:off x="777240" y="292608"/>
             <a:ext cx="10972800" cy="274320"/>
           </a:xfrm>
           <a:prstGeom prst="rect">
@@ -8095,8 +8611,8 @@
         </p:nvSpPr>
         <p:spPr>
           <a:xfrm>
-            <a:off x="640080" y="530352"/>
-            <a:ext cx="11155680" cy="566928"/>
+            <a:off x="777240" y="530352"/>
+            <a:ext cx="10881360" cy="566928"/>
           </a:xfrm>
           <a:prstGeom prst="rect">
             <a:avLst/>
@@ -8136,12 +8652,12 @@
         </p:nvSpPr>
         <p:spPr>
           <a:xfrm>
-            <a:off x="411480" y="1325880"/>
-            <a:ext cx="3611880" cy="4937760"/>
+            <a:off x="548640" y="1325880"/>
+            <a:ext cx="3514344" cy="4937760"/>
           </a:xfrm>
           <a:prstGeom prst="roundRect">
             <a:avLst>
-              <a:gd name="adj" fmla="val 2025"/>
+              <a:gd name="adj" fmla="val 2082"/>
             </a:avLst>
           </a:prstGeom>
           <a:solidFill>
@@ -8170,8 +8686,8 @@
         </p:nvSpPr>
         <p:spPr>
           <a:xfrm>
-            <a:off x="411480" y="1325880"/>
-            <a:ext cx="3611880" cy="109728"/>
+            <a:off x="548640" y="1325880"/>
+            <a:ext cx="3514344" cy="109728"/>
           </a:xfrm>
           <a:prstGeom prst="rect">
             <a:avLst/>
@@ -8190,8 +8706,8 @@
         </p:nvSpPr>
         <p:spPr>
           <a:xfrm>
-            <a:off x="685800" y="1554480"/>
-            <a:ext cx="3063240" cy="685800"/>
+            <a:off x="822960" y="1554480"/>
+            <a:ext cx="2965704" cy="685800"/>
           </a:xfrm>
           <a:prstGeom prst="rect">
             <a:avLst/>
@@ -8231,8 +8747,8 @@
         </p:nvSpPr>
         <p:spPr>
           <a:xfrm>
-            <a:off x="685800" y="2286000"/>
-            <a:ext cx="3063240" cy="3749040"/>
+            <a:off x="822960" y="2286000"/>
+            <a:ext cx="2965704" cy="3749040"/>
           </a:xfrm>
           <a:prstGeom prst="rect">
             <a:avLst/>
@@ -8254,7 +8770,7 @@
               <a:buChar char="●"/>
             </a:pPr>
             <a:r>
-              <a:rPr lang="en-US" sz="1400" dirty="0">
+              <a:rPr lang="en-US" sz="1700" dirty="0">
                 <a:solidFill>
                   <a:srgbClr val="1F2937"/>
                 </a:solidFill>
@@ -8264,7 +8780,7 @@
               </a:rPr>
               <a:t>Dono (gestão, usinas, produtores)</a:t>
             </a:r>
-            <a:endParaRPr lang="en-US" sz="1400" dirty="0"/>
+            <a:endParaRPr lang="en-US" sz="1700" dirty="0"/>
           </a:p>
           <a:p>
             <a:pPr marL="342900" indent="-342900">
@@ -8275,7 +8791,7 @@
               <a:buChar char="●"/>
             </a:pPr>
             <a:r>
-              <a:rPr lang="en-US" sz="1400" dirty="0">
+              <a:rPr lang="en-US" sz="1700" dirty="0">
                 <a:solidFill>
                   <a:srgbClr val="1F2937"/>
                 </a:solidFill>
@@ -8285,7 +8801,7 @@
               </a:rPr>
               <a:t>1 operador (faturas, cobranças, rateio, suporte)</a:t>
             </a:r>
-            <a:endParaRPr lang="en-US" sz="1400" dirty="0"/>
+            <a:endParaRPr lang="en-US" sz="1700" dirty="0"/>
           </a:p>
           <a:p>
             <a:pPr marL="342900" indent="-342900">
@@ -8296,7 +8812,7 @@
               <a:buChar char="●"/>
             </a:pPr>
             <a:r>
-              <a:rPr lang="en-US" sz="1400" dirty="0">
+              <a:rPr lang="en-US" sz="1700" dirty="0">
                 <a:solidFill>
                   <a:srgbClr val="1F2937"/>
                 </a:solidFill>
@@ -8306,7 +8822,7 @@
               </a:rPr>
               <a:t>2–3 consultores</a:t>
             </a:r>
-            <a:endParaRPr lang="en-US" sz="1400" dirty="0"/>
+            <a:endParaRPr lang="en-US" sz="1700" dirty="0"/>
           </a:p>
           <a:p>
             <a:pPr marL="342900" indent="-342900">
@@ -8317,7 +8833,7 @@
               <a:buChar char="●"/>
             </a:pPr>
             <a:r>
-              <a:rPr lang="en-US" sz="1400" dirty="0">
+              <a:rPr lang="en-US" sz="1700" dirty="0">
                 <a:solidFill>
                   <a:srgbClr val="1F2937"/>
                 </a:solidFill>
@@ -8327,7 +8843,7 @@
               </a:rPr>
               <a:t>parceiros: contador, advogado, O&amp;M</a:t>
             </a:r>
-            <a:endParaRPr lang="en-US" sz="1400" dirty="0"/>
+            <a:endParaRPr lang="en-US" sz="1700" dirty="0"/>
           </a:p>
         </p:txBody>
       </p:sp>
@@ -8339,12 +8855,12 @@
         </p:nvSpPr>
         <p:spPr>
           <a:xfrm>
-            <a:off x="4297680" y="1325880"/>
-            <a:ext cx="3611880" cy="4937760"/>
+            <a:off x="4337304" y="1325880"/>
+            <a:ext cx="3514344" cy="4937760"/>
           </a:xfrm>
           <a:prstGeom prst="roundRect">
             <a:avLst>
-              <a:gd name="adj" fmla="val 2025"/>
+              <a:gd name="adj" fmla="val 2082"/>
             </a:avLst>
           </a:prstGeom>
           <a:solidFill>
@@ -8373,8 +8889,8 @@
         </p:nvSpPr>
         <p:spPr>
           <a:xfrm>
-            <a:off x="4297680" y="1325880"/>
-            <a:ext cx="3611880" cy="109728"/>
+            <a:off x="4337304" y="1325880"/>
+            <a:ext cx="3514344" cy="109728"/>
           </a:xfrm>
           <a:prstGeom prst="rect">
             <a:avLst/>
@@ -8393,8 +8909,8 @@
         </p:nvSpPr>
         <p:spPr>
           <a:xfrm>
-            <a:off x="4572000" y="1554480"/>
-            <a:ext cx="3063240" cy="685800"/>
+            <a:off x="4611624" y="1554480"/>
+            <a:ext cx="2965704" cy="685800"/>
           </a:xfrm>
           <a:prstGeom prst="rect">
             <a:avLst/>
@@ -8434,8 +8950,8 @@
         </p:nvSpPr>
         <p:spPr>
           <a:xfrm>
-            <a:off x="4572000" y="2286000"/>
-            <a:ext cx="3063240" cy="3749040"/>
+            <a:off x="4611624" y="2286000"/>
+            <a:ext cx="2965704" cy="3749040"/>
           </a:xfrm>
           <a:prstGeom prst="rect">
             <a:avLst/>
@@ -8457,7 +8973,7 @@
               <a:buChar char="●"/>
             </a:pPr>
             <a:r>
-              <a:rPr lang="en-US" sz="1400" dirty="0">
+              <a:rPr lang="en-US" sz="1700" dirty="0">
                 <a:solidFill>
                   <a:srgbClr val="1F2937"/>
                 </a:solidFill>
@@ -8467,7 +8983,7 @@
               </a:rPr>
               <a:t>Gestor comercial + 5–10 consultores</a:t>
             </a:r>
-            <a:endParaRPr lang="en-US" sz="1400" dirty="0"/>
+            <a:endParaRPr lang="en-US" sz="1700" dirty="0"/>
           </a:p>
           <a:p>
             <a:pPr marL="342900" indent="-342900">
@@ -8478,7 +8994,7 @@
               <a:buChar char="●"/>
             </a:pPr>
             <a:r>
-              <a:rPr lang="en-US" sz="1400" dirty="0">
+              <a:rPr lang="en-US" sz="1700" dirty="0">
                 <a:solidFill>
                   <a:srgbClr val="1F2937"/>
                 </a:solidFill>
@@ -8488,7 +9004,7 @@
               </a:rPr>
               <a:t>Operações: 2–3 (faturas/rateio, cobrança)</a:t>
             </a:r>
-            <a:endParaRPr lang="en-US" sz="1400" dirty="0"/>
+            <a:endParaRPr lang="en-US" sz="1700" dirty="0"/>
           </a:p>
           <a:p>
             <a:pPr marL="342900" indent="-342900">
@@ -8499,7 +9015,7 @@
               <a:buChar char="●"/>
             </a:pPr>
             <a:r>
-              <a:rPr lang="en-US" sz="1400" dirty="0">
+              <a:rPr lang="en-US" sz="1700" dirty="0">
                 <a:solidFill>
                   <a:srgbClr val="1F2937"/>
                 </a:solidFill>
@@ -8509,7 +9025,7 @@
               </a:rPr>
               <a:t>Atendimento: 1–2</a:t>
             </a:r>
-            <a:endParaRPr lang="en-US" sz="1400" dirty="0"/>
+            <a:endParaRPr lang="en-US" sz="1700" dirty="0"/>
           </a:p>
           <a:p>
             <a:pPr marL="342900" indent="-342900">
@@ -8520,7 +9036,7 @@
               <a:buChar char="●"/>
             </a:pPr>
             <a:r>
-              <a:rPr lang="en-US" sz="1400" dirty="0">
+              <a:rPr lang="en-US" sz="1700" dirty="0">
                 <a:solidFill>
                   <a:srgbClr val="1F2937"/>
                 </a:solidFill>
@@ -8530,7 +9046,7 @@
               </a:rPr>
               <a:t>Financeiro/repasses: 1</a:t>
             </a:r>
-            <a:endParaRPr lang="en-US" sz="1400" dirty="0"/>
+            <a:endParaRPr lang="en-US" sz="1700" dirty="0"/>
           </a:p>
           <a:p>
             <a:pPr marL="342900" indent="-342900">
@@ -8541,7 +9057,7 @@
               <a:buChar char="●"/>
             </a:pPr>
             <a:r>
-              <a:rPr lang="en-US" sz="1400" dirty="0">
+              <a:rPr lang="en-US" sz="1700" dirty="0">
                 <a:solidFill>
                   <a:srgbClr val="1F2937"/>
                 </a:solidFill>
@@ -8551,7 +9067,7 @@
               </a:rPr>
               <a:t>Captação de usinas: 1</a:t>
             </a:r>
-            <a:endParaRPr lang="en-US" sz="1400" dirty="0"/>
+            <a:endParaRPr lang="en-US" sz="1700" dirty="0"/>
           </a:p>
         </p:txBody>
       </p:sp>
@@ -8563,12 +9079,12 @@
         </p:nvSpPr>
         <p:spPr>
           <a:xfrm>
-            <a:off x="8183880" y="1325880"/>
-            <a:ext cx="3611880" cy="4937760"/>
+            <a:off x="8125968" y="1325880"/>
+            <a:ext cx="3514344" cy="4937760"/>
           </a:xfrm>
           <a:prstGeom prst="roundRect">
             <a:avLst>
-              <a:gd name="adj" fmla="val 2025"/>
+              <a:gd name="adj" fmla="val 2082"/>
             </a:avLst>
           </a:prstGeom>
           <a:solidFill>
@@ -8597,8 +9113,8 @@
         </p:nvSpPr>
         <p:spPr>
           <a:xfrm>
-            <a:off x="8183880" y="1325880"/>
-            <a:ext cx="3611880" cy="109728"/>
+            <a:off x="8125968" y="1325880"/>
+            <a:ext cx="3514344" cy="109728"/>
           </a:xfrm>
           <a:prstGeom prst="rect">
             <a:avLst/>
@@ -8617,8 +9133,8 @@
         </p:nvSpPr>
         <p:spPr>
           <a:xfrm>
-            <a:off x="8458200" y="1554480"/>
-            <a:ext cx="3063240" cy="685800"/>
+            <a:off x="8400288" y="1554480"/>
+            <a:ext cx="2965704" cy="685800"/>
           </a:xfrm>
           <a:prstGeom prst="rect">
             <a:avLst/>
@@ -8658,8 +9174,8 @@
         </p:nvSpPr>
         <p:spPr>
           <a:xfrm>
-            <a:off x="8458200" y="2286000"/>
-            <a:ext cx="3063240" cy="3749040"/>
+            <a:off x="8400288" y="2286000"/>
+            <a:ext cx="2965704" cy="3749040"/>
           </a:xfrm>
           <a:prstGeom prst="rect">
             <a:avLst/>
@@ -8681,7 +9197,7 @@
               <a:buChar char="●"/>
             </a:pPr>
             <a:r>
-              <a:rPr lang="en-US" sz="1400" dirty="0">
+              <a:rPr lang="en-US" sz="1700" dirty="0">
                 <a:solidFill>
                   <a:srgbClr val="1F2937"/>
                 </a:solidFill>
@@ -8691,7 +9207,7 @@
               </a:rPr>
               <a:t>Operação por distribuidora</a:t>
             </a:r>
-            <a:endParaRPr lang="en-US" sz="1400" dirty="0"/>
+            <a:endParaRPr lang="en-US" sz="1700" dirty="0"/>
           </a:p>
           <a:p>
             <a:pPr marL="342900" indent="-342900">
@@ -8702,7 +9218,7 @@
               <a:buChar char="●"/>
             </a:pPr>
             <a:r>
-              <a:rPr lang="en-US" sz="1400" dirty="0">
+              <a:rPr lang="en-US" sz="1700" dirty="0">
                 <a:solidFill>
                   <a:srgbClr val="1F2937"/>
                 </a:solidFill>
@@ -8712,7 +9228,7 @@
               </a:rPr>
               <a:t>gestão de portfólio de usinas e investidores</a:t>
             </a:r>
-            <a:endParaRPr lang="en-US" sz="1400" dirty="0"/>
+            <a:endParaRPr lang="en-US" sz="1700" dirty="0"/>
           </a:p>
           <a:p>
             <a:pPr marL="342900" indent="-342900">
@@ -8723,7 +9239,7 @@
               <a:buChar char="●"/>
             </a:pPr>
             <a:r>
-              <a:rPr lang="en-US" sz="1400" dirty="0">
+              <a:rPr lang="en-US" sz="1700" dirty="0">
                 <a:solidFill>
                   <a:srgbClr val="1F2937"/>
                 </a:solidFill>
@@ -8733,7 +9249,7 @@
               </a:rPr>
               <a:t>qualidade e auditoria</a:t>
             </a:r>
-            <a:endParaRPr lang="en-US" sz="1400" dirty="0"/>
+            <a:endParaRPr lang="en-US" sz="1700" dirty="0"/>
           </a:p>
           <a:p>
             <a:pPr marL="342900" indent="-342900">
@@ -8744,7 +9260,7 @@
               <a:buChar char="●"/>
             </a:pPr>
             <a:r>
-              <a:rPr lang="en-US" sz="1400" dirty="0">
+              <a:rPr lang="en-US" sz="1700" dirty="0">
                 <a:solidFill>
                   <a:srgbClr val="1F2937"/>
                 </a:solidFill>
@@ -8754,7 +9270,55 @@
               </a:rPr>
               <a:t>expansão para novas áreas</a:t>
             </a:r>
-            <a:endParaRPr lang="en-US" sz="1400" dirty="0"/>
+            <a:endParaRPr lang="en-US" sz="1700" dirty="0"/>
+          </a:p>
+        </p:txBody>
+      </p:sp>
+      <p:sp>
+        <p:nvSpPr>
+          <p:cNvPr id="25" name="Slide Number Placeholder 0"/>
+          <p:cNvSpPr>
+            <a:spLocks noGrp="1"/>
+          </p:cNvSpPr>
+          <p:nvPr>
+            <p:ph type="sldNum" sz="quarter" idx="4294967295"/>
+          </p:nvPr>
+        </p:nvSpPr>
+        <p:spPr>
+          <a:xfrm>
+            <a:off x="11292840" y="6556248"/>
+            <a:ext cx="548640" cy="256032"/>
+          </a:xfrm>
+          <a:prstGeom prst="rect">
+            <a:avLst/>
+          </a:prstGeom>
+          <a:extLst>
+            <a:ext uri="{C572A759-6A51-4108-AA02-DFA0A04FC94B}">
+              <ma14:wrappingTextBoxFlag xmlns:ma14="http://schemas.microsoft.com/office/mac/drawingml/2011/main" val="0"/>
+            </a:ext>
+          </a:extLst>
+        </p:spPr>
+        <p:txBody>
+          <a:bodyPr/>
+          <a:lstStyle>
+            <a:lvl1pPr>
+              <a:defRPr sz="900">
+                <a:solidFill>
+                  <a:srgbClr val="1B3A6B"/>
+                </a:solidFill>
+                <a:latin typeface="Arial"/>
+                <a:ea typeface="Arial"/>
+                <a:cs typeface="Arial"/>
+              </a:defRPr>
+            </a:lvl1pPr>
+          </a:lstStyle>
+          <a:p>
+            <a:pPr algn="r"/>
+            <a:fld id="{F7021451-1387-4CA6-816F-3879F97B5CBC}" type="slidenum">
+              <a:rPr b="1" lang="en-US"/>
+              <a:t>17</a:t>
+            </a:fld>
+            <a:endParaRPr lang="en-US"/>
           </a:p>
         </p:txBody>
       </p:sp>
@@ -8831,7 +9395,7 @@
         </p:blipFill>
         <p:spPr>
           <a:xfrm>
-            <a:off x="411480" y="6547104"/>
+            <a:off x="548640" y="6547104"/>
             <a:ext cx="274320" cy="274320"/>
           </a:xfrm>
           <a:prstGeom prst="rect">
@@ -8847,7 +9411,7 @@
         </p:nvSpPr>
         <p:spPr>
           <a:xfrm>
-            <a:off x="749808" y="6528816"/>
+            <a:off x="886968" y="6528816"/>
             <a:ext cx="6400800" cy="310896"/>
           </a:xfrm>
           <a:prstGeom prst="rect">
@@ -8887,7 +9451,7 @@
         <p:spPr>
           <a:xfrm>
             <a:off x="7132320" y="6528816"/>
-            <a:ext cx="4663440" cy="310896"/>
+            <a:ext cx="4023360" cy="310896"/>
           </a:xfrm>
           <a:prstGeom prst="rect">
             <a:avLst/>
@@ -8925,7 +9489,7 @@
         </p:nvSpPr>
         <p:spPr>
           <a:xfrm>
-            <a:off x="411480" y="384048"/>
+            <a:off x="548640" y="384048"/>
             <a:ext cx="82296" cy="658368"/>
           </a:xfrm>
           <a:prstGeom prst="rect">
@@ -8945,7 +9509,7 @@
         </p:nvSpPr>
         <p:spPr>
           <a:xfrm>
-            <a:off x="640080" y="292608"/>
+            <a:off x="777240" y="292608"/>
             <a:ext cx="10972800" cy="274320"/>
           </a:xfrm>
           <a:prstGeom prst="rect">
@@ -8984,8 +9548,8 @@
         </p:nvSpPr>
         <p:spPr>
           <a:xfrm>
-            <a:off x="640080" y="530352"/>
-            <a:ext cx="11155680" cy="566928"/>
+            <a:off x="777240" y="530352"/>
+            <a:ext cx="10881360" cy="566928"/>
           </a:xfrm>
           <a:prstGeom prst="rect">
             <a:avLst/>
@@ -9025,8 +9589,8 @@
         </p:nvSpPr>
         <p:spPr>
           <a:xfrm>
-            <a:off x="411480" y="1325880"/>
-            <a:ext cx="3642360" cy="2331720"/>
+            <a:off x="548640" y="1325880"/>
+            <a:ext cx="3544824" cy="2331720"/>
           </a:xfrm>
           <a:prstGeom prst="roundRect">
             <a:avLst>
@@ -9059,7 +9623,7 @@
         </p:nvSpPr>
         <p:spPr>
           <a:xfrm>
-            <a:off x="594360" y="1508760"/>
+            <a:off x="731520" y="1508760"/>
             <a:ext cx="457200" cy="457200"/>
           </a:xfrm>
           <a:prstGeom prst="ellipse">
@@ -9079,7 +9643,7 @@
         </p:nvSpPr>
         <p:spPr>
           <a:xfrm>
-            <a:off x="594360" y="1508760"/>
+            <a:off x="731520" y="1508760"/>
             <a:ext cx="457200" cy="457200"/>
           </a:xfrm>
           <a:prstGeom prst="rect">
@@ -9118,8 +9682,8 @@
         </p:nvSpPr>
         <p:spPr>
           <a:xfrm>
-            <a:off x="1188720" y="1435608"/>
-            <a:ext cx="2727960" cy="2112264"/>
+            <a:off x="1325880" y="1435608"/>
+            <a:ext cx="2630424" cy="2112264"/>
           </a:xfrm>
           <a:prstGeom prst="rect">
             <a:avLst/>
@@ -9159,8 +9723,8 @@
         </p:nvSpPr>
         <p:spPr>
           <a:xfrm>
-            <a:off x="4282440" y="1325880"/>
-            <a:ext cx="3642360" cy="2331720"/>
+            <a:off x="4322064" y="1325880"/>
+            <a:ext cx="3544824" cy="2331720"/>
           </a:xfrm>
           <a:prstGeom prst="roundRect">
             <a:avLst>
@@ -9193,7 +9757,7 @@
         </p:nvSpPr>
         <p:spPr>
           <a:xfrm>
-            <a:off x="4465320" y="1508760"/>
+            <a:off x="4504944" y="1508760"/>
             <a:ext cx="457200" cy="457200"/>
           </a:xfrm>
           <a:prstGeom prst="ellipse">
@@ -9213,7 +9777,7 @@
         </p:nvSpPr>
         <p:spPr>
           <a:xfrm>
-            <a:off x="4465320" y="1508760"/>
+            <a:off x="4504944" y="1508760"/>
             <a:ext cx="457200" cy="457200"/>
           </a:xfrm>
           <a:prstGeom prst="rect">
@@ -9252,8 +9816,8 @@
         </p:nvSpPr>
         <p:spPr>
           <a:xfrm>
-            <a:off x="5059680" y="1435608"/>
-            <a:ext cx="2727960" cy="2112264"/>
+            <a:off x="5099304" y="1435608"/>
+            <a:ext cx="2630424" cy="2112264"/>
           </a:xfrm>
           <a:prstGeom prst="rect">
             <a:avLst/>
@@ -9293,8 +9857,8 @@
         </p:nvSpPr>
         <p:spPr>
           <a:xfrm>
-            <a:off x="8153400" y="1325880"/>
-            <a:ext cx="3642360" cy="2331720"/>
+            <a:off x="8095488" y="1325880"/>
+            <a:ext cx="3544824" cy="2331720"/>
           </a:xfrm>
           <a:prstGeom prst="roundRect">
             <a:avLst>
@@ -9327,7 +9891,7 @@
         </p:nvSpPr>
         <p:spPr>
           <a:xfrm>
-            <a:off x="8336280" y="1508760"/>
+            <a:off x="8278368" y="1508760"/>
             <a:ext cx="457200" cy="457200"/>
           </a:xfrm>
           <a:prstGeom prst="ellipse">
@@ -9347,7 +9911,7 @@
         </p:nvSpPr>
         <p:spPr>
           <a:xfrm>
-            <a:off x="8336280" y="1508760"/>
+            <a:off x="8278368" y="1508760"/>
             <a:ext cx="457200" cy="457200"/>
           </a:xfrm>
           <a:prstGeom prst="rect">
@@ -9386,8 +9950,8 @@
         </p:nvSpPr>
         <p:spPr>
           <a:xfrm>
-            <a:off x="8930640" y="1435608"/>
-            <a:ext cx="2727960" cy="2112264"/>
+            <a:off x="8872728" y="1435608"/>
+            <a:ext cx="2630424" cy="2112264"/>
           </a:xfrm>
           <a:prstGeom prst="rect">
             <a:avLst/>
@@ -9427,8 +9991,8 @@
         </p:nvSpPr>
         <p:spPr>
           <a:xfrm>
-            <a:off x="411480" y="3886200"/>
-            <a:ext cx="3642360" cy="2331720"/>
+            <a:off x="548640" y="3886200"/>
+            <a:ext cx="3544824" cy="2331720"/>
           </a:xfrm>
           <a:prstGeom prst="roundRect">
             <a:avLst>
@@ -9461,7 +10025,7 @@
         </p:nvSpPr>
         <p:spPr>
           <a:xfrm>
-            <a:off x="594360" y="4069080"/>
+            <a:off x="731520" y="4069080"/>
             <a:ext cx="457200" cy="457200"/>
           </a:xfrm>
           <a:prstGeom prst="ellipse">
@@ -9481,7 +10045,7 @@
         </p:nvSpPr>
         <p:spPr>
           <a:xfrm>
-            <a:off x="594360" y="4069080"/>
+            <a:off x="731520" y="4069080"/>
             <a:ext cx="457200" cy="457200"/>
           </a:xfrm>
           <a:prstGeom prst="rect">
@@ -9520,8 +10084,8 @@
         </p:nvSpPr>
         <p:spPr>
           <a:xfrm>
-            <a:off x="1188720" y="3995928"/>
-            <a:ext cx="2727960" cy="2112264"/>
+            <a:off x="1325880" y="3995928"/>
+            <a:ext cx="2630424" cy="2112264"/>
           </a:xfrm>
           <a:prstGeom prst="rect">
             <a:avLst/>
@@ -9561,8 +10125,8 @@
         </p:nvSpPr>
         <p:spPr>
           <a:xfrm>
-            <a:off x="4282440" y="3886200"/>
-            <a:ext cx="3642360" cy="2331720"/>
+            <a:off x="4322064" y="3886200"/>
+            <a:ext cx="3544824" cy="2331720"/>
           </a:xfrm>
           <a:prstGeom prst="roundRect">
             <a:avLst>
@@ -9595,7 +10159,7 @@
         </p:nvSpPr>
         <p:spPr>
           <a:xfrm>
-            <a:off x="4465320" y="4069080"/>
+            <a:off x="4504944" y="4069080"/>
             <a:ext cx="457200" cy="457200"/>
           </a:xfrm>
           <a:prstGeom prst="ellipse">
@@ -9615,7 +10179,7 @@
         </p:nvSpPr>
         <p:spPr>
           <a:xfrm>
-            <a:off x="4465320" y="4069080"/>
+            <a:off x="4504944" y="4069080"/>
             <a:ext cx="457200" cy="457200"/>
           </a:xfrm>
           <a:prstGeom prst="rect">
@@ -9654,8 +10218,8 @@
         </p:nvSpPr>
         <p:spPr>
           <a:xfrm>
-            <a:off x="5059680" y="3995928"/>
-            <a:ext cx="2727960" cy="2112264"/>
+            <a:off x="5099304" y="3995928"/>
+            <a:ext cx="2630424" cy="2112264"/>
           </a:xfrm>
           <a:prstGeom prst="rect">
             <a:avLst/>
@@ -9684,6 +10248,54 @@
               <a:t>onboarding de novos colaboradores com o laboratório</a:t>
             </a:r>
             <a:endParaRPr lang="en-US" sz="1800" dirty="0"/>
+          </a:p>
+        </p:txBody>
+      </p:sp>
+      <p:sp>
+        <p:nvSpPr>
+          <p:cNvPr id="25" name="Slide Number Placeholder 0"/>
+          <p:cNvSpPr>
+            <a:spLocks noGrp="1"/>
+          </p:cNvSpPr>
+          <p:nvPr>
+            <p:ph type="sldNum" sz="quarter" idx="4294967295"/>
+          </p:nvPr>
+        </p:nvSpPr>
+        <p:spPr>
+          <a:xfrm>
+            <a:off x="11292840" y="6556248"/>
+            <a:ext cx="548640" cy="256032"/>
+          </a:xfrm>
+          <a:prstGeom prst="rect">
+            <a:avLst/>
+          </a:prstGeom>
+          <a:extLst>
+            <a:ext uri="{C572A759-6A51-4108-AA02-DFA0A04FC94B}">
+              <ma14:wrappingTextBoxFlag xmlns:ma14="http://schemas.microsoft.com/office/mac/drawingml/2011/main" val="0"/>
+            </a:ext>
+          </a:extLst>
+        </p:spPr>
+        <p:txBody>
+          <a:bodyPr/>
+          <a:lstStyle>
+            <a:lvl1pPr>
+              <a:defRPr sz="900">
+                <a:solidFill>
+                  <a:srgbClr val="1B3A6B"/>
+                </a:solidFill>
+                <a:latin typeface="Arial"/>
+                <a:ea typeface="Arial"/>
+                <a:cs typeface="Arial"/>
+              </a:defRPr>
+            </a:lvl1pPr>
+          </a:lstStyle>
+          <a:p>
+            <a:pPr algn="r"/>
+            <a:fld id="{F7021451-1387-4CA6-816F-3879F97B5CBC}" type="slidenum">
+              <a:rPr b="1" lang="en-US"/>
+              <a:t>18</a:t>
+            </a:fld>
+            <a:endParaRPr lang="en-US"/>
           </a:p>
         </p:txBody>
       </p:sp>
@@ -9760,7 +10372,7 @@
         </p:blipFill>
         <p:spPr>
           <a:xfrm>
-            <a:off x="411480" y="6547104"/>
+            <a:off x="548640" y="6547104"/>
             <a:ext cx="274320" cy="274320"/>
           </a:xfrm>
           <a:prstGeom prst="rect">
@@ -9776,7 +10388,7 @@
         </p:nvSpPr>
         <p:spPr>
           <a:xfrm>
-            <a:off x="749808" y="6528816"/>
+            <a:off x="886968" y="6528816"/>
             <a:ext cx="6400800" cy="310896"/>
           </a:xfrm>
           <a:prstGeom prst="rect">
@@ -9816,7 +10428,7 @@
         <p:spPr>
           <a:xfrm>
             <a:off x="7132320" y="6528816"/>
-            <a:ext cx="4663440" cy="310896"/>
+            <a:ext cx="4023360" cy="310896"/>
           </a:xfrm>
           <a:prstGeom prst="rect">
             <a:avLst/>
@@ -9854,7 +10466,7 @@
         </p:nvSpPr>
         <p:spPr>
           <a:xfrm>
-            <a:off x="411480" y="384048"/>
+            <a:off x="548640" y="384048"/>
             <a:ext cx="82296" cy="658368"/>
           </a:xfrm>
           <a:prstGeom prst="rect">
@@ -9874,7 +10486,7 @@
         </p:nvSpPr>
         <p:spPr>
           <a:xfrm>
-            <a:off x="640080" y="292608"/>
+            <a:off x="777240" y="292608"/>
             <a:ext cx="10972800" cy="274320"/>
           </a:xfrm>
           <a:prstGeom prst="rect">
@@ -9913,8 +10525,8 @@
         </p:nvSpPr>
         <p:spPr>
           <a:xfrm>
-            <a:off x="640080" y="530352"/>
-            <a:ext cx="11155680" cy="566928"/>
+            <a:off x="777240" y="530352"/>
+            <a:ext cx="10881360" cy="566928"/>
           </a:xfrm>
           <a:prstGeom prst="rect">
             <a:avLst/>
@@ -9954,8 +10566,8 @@
         </p:nvSpPr>
         <p:spPr>
           <a:xfrm>
-            <a:off x="411480" y="1325880"/>
-            <a:ext cx="5577840" cy="2331720"/>
+            <a:off x="548640" y="1325880"/>
+            <a:ext cx="5431536" cy="2331720"/>
           </a:xfrm>
           <a:prstGeom prst="roundRect">
             <a:avLst>
@@ -9988,7 +10600,7 @@
         </p:nvSpPr>
         <p:spPr>
           <a:xfrm>
-            <a:off x="594360" y="1508760"/>
+            <a:off x="731520" y="1508760"/>
             <a:ext cx="457200" cy="457200"/>
           </a:xfrm>
           <a:prstGeom prst="ellipse">
@@ -10008,7 +10620,7 @@
         </p:nvSpPr>
         <p:spPr>
           <a:xfrm>
-            <a:off x="594360" y="1508760"/>
+            <a:off x="731520" y="1508760"/>
             <a:ext cx="457200" cy="457200"/>
           </a:xfrm>
           <a:prstGeom prst="rect">
@@ -10047,8 +10659,8 @@
         </p:nvSpPr>
         <p:spPr>
           <a:xfrm>
-            <a:off x="1188720" y="1435608"/>
-            <a:ext cx="4663440" cy="2112264"/>
+            <a:off x="1325880" y="1435608"/>
+            <a:ext cx="4517136" cy="2112264"/>
           </a:xfrm>
           <a:prstGeom prst="rect">
             <a:avLst/>
@@ -10088,8 +10700,8 @@
         </p:nvSpPr>
         <p:spPr>
           <a:xfrm>
-            <a:off x="6217920" y="1325880"/>
-            <a:ext cx="5577840" cy="2331720"/>
+            <a:off x="6208776" y="1325880"/>
+            <a:ext cx="5431536" cy="2331720"/>
           </a:xfrm>
           <a:prstGeom prst="roundRect">
             <a:avLst>
@@ -10122,7 +10734,7 @@
         </p:nvSpPr>
         <p:spPr>
           <a:xfrm>
-            <a:off x="6400800" y="1508760"/>
+            <a:off x="6391656" y="1508760"/>
             <a:ext cx="457200" cy="457200"/>
           </a:xfrm>
           <a:prstGeom prst="ellipse">
@@ -10142,7 +10754,7 @@
         </p:nvSpPr>
         <p:spPr>
           <a:xfrm>
-            <a:off x="6400800" y="1508760"/>
+            <a:off x="6391656" y="1508760"/>
             <a:ext cx="457200" cy="457200"/>
           </a:xfrm>
           <a:prstGeom prst="rect">
@@ -10181,8 +10793,8 @@
         </p:nvSpPr>
         <p:spPr>
           <a:xfrm>
-            <a:off x="6995160" y="1435608"/>
-            <a:ext cx="4663440" cy="2112264"/>
+            <a:off x="6986016" y="1435608"/>
+            <a:ext cx="4517136" cy="2112264"/>
           </a:xfrm>
           <a:prstGeom prst="rect">
             <a:avLst/>
@@ -10222,8 +10834,8 @@
         </p:nvSpPr>
         <p:spPr>
           <a:xfrm>
-            <a:off x="411480" y="3886200"/>
-            <a:ext cx="5577840" cy="2331720"/>
+            <a:off x="548640" y="3886200"/>
+            <a:ext cx="5431536" cy="2331720"/>
           </a:xfrm>
           <a:prstGeom prst="roundRect">
             <a:avLst>
@@ -10256,7 +10868,7 @@
         </p:nvSpPr>
         <p:spPr>
           <a:xfrm>
-            <a:off x="594360" y="4069080"/>
+            <a:off x="731520" y="4069080"/>
             <a:ext cx="457200" cy="457200"/>
           </a:xfrm>
           <a:prstGeom prst="ellipse">
@@ -10276,7 +10888,7 @@
         </p:nvSpPr>
         <p:spPr>
           <a:xfrm>
-            <a:off x="594360" y="4069080"/>
+            <a:off x="731520" y="4069080"/>
             <a:ext cx="457200" cy="457200"/>
           </a:xfrm>
           <a:prstGeom prst="rect">
@@ -10315,8 +10927,8 @@
         </p:nvSpPr>
         <p:spPr>
           <a:xfrm>
-            <a:off x="1188720" y="3995928"/>
-            <a:ext cx="4663440" cy="2112264"/>
+            <a:off x="1325880" y="3995928"/>
+            <a:ext cx="4517136" cy="2112264"/>
           </a:xfrm>
           <a:prstGeom prst="rect">
             <a:avLst/>
@@ -10356,8 +10968,8 @@
         </p:nvSpPr>
         <p:spPr>
           <a:xfrm>
-            <a:off x="6217920" y="3886200"/>
-            <a:ext cx="5577840" cy="2331720"/>
+            <a:off x="6208776" y="3886200"/>
+            <a:ext cx="5431536" cy="2331720"/>
           </a:xfrm>
           <a:prstGeom prst="roundRect">
             <a:avLst>
@@ -10390,7 +11002,7 @@
         </p:nvSpPr>
         <p:spPr>
           <a:xfrm>
-            <a:off x="6400800" y="4069080"/>
+            <a:off x="6391656" y="4069080"/>
             <a:ext cx="457200" cy="457200"/>
           </a:xfrm>
           <a:prstGeom prst="ellipse">
@@ -10410,7 +11022,7 @@
         </p:nvSpPr>
         <p:spPr>
           <a:xfrm>
-            <a:off x="6400800" y="4069080"/>
+            <a:off x="6391656" y="4069080"/>
             <a:ext cx="457200" cy="457200"/>
           </a:xfrm>
           <a:prstGeom prst="rect">
@@ -10449,8 +11061,8 @@
         </p:nvSpPr>
         <p:spPr>
           <a:xfrm>
-            <a:off x="6995160" y="3995928"/>
-            <a:ext cx="4663440" cy="2112264"/>
+            <a:off x="6986016" y="3995928"/>
+            <a:ext cx="4517136" cy="2112264"/>
           </a:xfrm>
           <a:prstGeom prst="rect">
             <a:avLst/>
@@ -10479,6 +11091,54 @@
               <a:t>processos &gt; pessoas</a:t>
             </a:r>
             <a:endParaRPr lang="en-US" sz="1800" dirty="0"/>
+          </a:p>
+        </p:txBody>
+      </p:sp>
+      <p:sp>
+        <p:nvSpPr>
+          <p:cNvPr id="25" name="Slide Number Placeholder 0"/>
+          <p:cNvSpPr>
+            <a:spLocks noGrp="1"/>
+          </p:cNvSpPr>
+          <p:nvPr>
+            <p:ph type="sldNum" sz="quarter" idx="4294967295"/>
+          </p:nvPr>
+        </p:nvSpPr>
+        <p:spPr>
+          <a:xfrm>
+            <a:off x="11292840" y="6556248"/>
+            <a:ext cx="548640" cy="256032"/>
+          </a:xfrm>
+          <a:prstGeom prst="rect">
+            <a:avLst/>
+          </a:prstGeom>
+          <a:extLst>
+            <a:ext uri="{C572A759-6A51-4108-AA02-DFA0A04FC94B}">
+              <ma14:wrappingTextBoxFlag xmlns:ma14="http://schemas.microsoft.com/office/mac/drawingml/2011/main" val="0"/>
+            </a:ext>
+          </a:extLst>
+        </p:spPr>
+        <p:txBody>
+          <a:bodyPr/>
+          <a:lstStyle>
+            <a:lvl1pPr>
+              <a:defRPr sz="900">
+                <a:solidFill>
+                  <a:srgbClr val="1B3A6B"/>
+                </a:solidFill>
+                <a:latin typeface="Arial"/>
+                <a:ea typeface="Arial"/>
+                <a:cs typeface="Arial"/>
+              </a:defRPr>
+            </a:lvl1pPr>
+          </a:lstStyle>
+          <a:p>
+            <a:pPr algn="r"/>
+            <a:fld id="{F7021451-1387-4CA6-816F-3879F97B5CBC}" type="slidenum">
+              <a:rPr b="1" lang="en-US"/>
+              <a:t>19</a:t>
+            </a:fld>
+            <a:endParaRPr lang="en-US"/>
           </a:p>
         </p:txBody>
       </p:sp>
@@ -10542,6 +11202,45 @@
         </p:nvSpPr>
         <p:spPr>
           <a:xfrm>
+            <a:off x="457200" y="548640"/>
+            <a:ext cx="3474720" cy="1737360"/>
+          </a:xfrm>
+          <a:prstGeom prst="rect">
+            <a:avLst/>
+          </a:prstGeom>
+          <a:noFill/>
+          <a:ln/>
+        </p:spPr>
+        <p:txBody>
+          <a:bodyPr wrap="square" rtlCol="0" anchor="ctr"/>
+          <a:lstStyle/>
+          <a:p>
+            <a:pPr indent="0" marL="0">
+              <a:buNone/>
+            </a:pPr>
+            <a:r>
+              <a:rPr lang="en-US" sz="11000" b="1" dirty="0">
+                <a:solidFill>
+                  <a:srgbClr val="11396F"/>
+                </a:solidFill>
+                <a:latin typeface="Arial" pitchFamily="34" charset="0"/>
+                <a:ea typeface="Arial" pitchFamily="34" charset="-122"/>
+                <a:cs typeface="Arial" pitchFamily="34" charset="-120"/>
+              </a:rPr>
+              <a:t>01</a:t>
+            </a:r>
+            <a:endParaRPr lang="en-US" sz="11000" dirty="0"/>
+          </a:p>
+        </p:txBody>
+      </p:sp>
+      <p:sp>
+        <p:nvSpPr>
+          <p:cNvPr id="4" name="Text 2"/>
+          <p:cNvSpPr/>
+          <p:nvPr/>
+        </p:nvSpPr>
+        <p:spPr>
+          <a:xfrm>
             <a:off x="548640" y="2194560"/>
             <a:ext cx="3291840" cy="548640"/>
           </a:xfrm>
@@ -10575,7 +11274,46 @@
       </p:sp>
       <p:sp>
         <p:nvSpPr>
-          <p:cNvPr id="4" name="Text 2"/>
+          <p:cNvPr id="5" name="Text 3"/>
+          <p:cNvSpPr/>
+          <p:nvPr/>
+        </p:nvSpPr>
+        <p:spPr>
+          <a:xfrm>
+            <a:off x="548640" y="3200400"/>
+            <a:ext cx="3383280" cy="457200"/>
+          </a:xfrm>
+          <a:prstGeom prst="rect">
+            <a:avLst/>
+          </a:prstGeom>
+          <a:noFill/>
+          <a:ln/>
+        </p:spPr>
+        <p:txBody>
+          <a:bodyPr wrap="square" rtlCol="0" anchor="ctr"/>
+          <a:lstStyle/>
+          <a:p>
+            <a:pPr indent="0" marL="0">
+              <a:buNone/>
+            </a:pPr>
+            <a:r>
+              <a:rPr lang="en-US" sz="1100" dirty="0">
+                <a:solidFill>
+                  <a:srgbClr val="C7D2E3"/>
+                </a:solidFill>
+                <a:latin typeface="Arial" pitchFamily="34" charset="0"/>
+                <a:ea typeface="Arial" pitchFamily="34" charset="-122"/>
+                <a:cs typeface="Arial" pitchFamily="34" charset="-120"/>
+              </a:rPr>
+              <a:t>M11 · Etapa 4 · Gestão e estratégia</a:t>
+            </a:r>
+            <a:endParaRPr lang="en-US" sz="1100" dirty="0"/>
+          </a:p>
+        </p:txBody>
+      </p:sp>
+      <p:sp>
+        <p:nvSpPr>
+          <p:cNvPr id="6" name="Text 4"/>
           <p:cNvSpPr/>
           <p:nvPr/>
         </p:nvSpPr>
@@ -10614,7 +11352,7 @@
       </p:sp>
       <p:pic>
         <p:nvPicPr>
-          <p:cNvPr id="5" name="Image 0" descr="/www/wwwroot/rexar/gdsolar/docs/curso/slides/assets/logo-gdsolar.png">    </p:cNvPr>
+          <p:cNvPr id="7" name="Image 0" descr="/www/wwwroot/rexar/gdsolar/docs/curso/slides/assets/logo-gdsolar.png">    </p:cNvPr>
           <p:cNvPicPr>
             <a:picLocks noChangeAspect="1"/>
           </p:cNvPicPr>
@@ -10638,7 +11376,7 @@
       </p:pic>
       <p:sp>
         <p:nvSpPr>
-          <p:cNvPr id="6" name="Text 3"/>
+          <p:cNvPr id="8" name="Text 5"/>
           <p:cNvSpPr/>
           <p:nvPr/>
         </p:nvSpPr>
@@ -10679,7 +11417,7 @@
       </p:sp>
       <p:sp>
         <p:nvSpPr>
-          <p:cNvPr id="7" name="Text 4"/>
+          <p:cNvPr id="9" name="Text 6"/>
           <p:cNvSpPr/>
           <p:nvPr/>
         </p:nvSpPr>
@@ -10720,7 +11458,7 @@
       </p:sp>
       <p:sp>
         <p:nvSpPr>
-          <p:cNvPr id="8" name="Text 5"/>
+          <p:cNvPr id="10" name="Text 7"/>
           <p:cNvSpPr/>
           <p:nvPr/>
         </p:nvSpPr>
@@ -10886,6 +11624,45 @@
         </p:nvSpPr>
         <p:spPr>
           <a:xfrm>
+            <a:off x="457200" y="548640"/>
+            <a:ext cx="3474720" cy="1737360"/>
+          </a:xfrm>
+          <a:prstGeom prst="rect">
+            <a:avLst/>
+          </a:prstGeom>
+          <a:noFill/>
+          <a:ln/>
+        </p:spPr>
+        <p:txBody>
+          <a:bodyPr wrap="square" rtlCol="0" anchor="ctr"/>
+          <a:lstStyle/>
+          <a:p>
+            <a:pPr indent="0" marL="0">
+              <a:buNone/>
+            </a:pPr>
+            <a:r>
+              <a:rPr lang="en-US" sz="11000" b="1" dirty="0">
+                <a:solidFill>
+                  <a:srgbClr val="11396F"/>
+                </a:solidFill>
+                <a:latin typeface="Arial" pitchFamily="34" charset="0"/>
+                <a:ea typeface="Arial" pitchFamily="34" charset="-122"/>
+                <a:cs typeface="Arial" pitchFamily="34" charset="-120"/>
+              </a:rPr>
+              <a:t>05</a:t>
+            </a:r>
+            <a:endParaRPr lang="en-US" sz="11000" dirty="0"/>
+          </a:p>
+        </p:txBody>
+      </p:sp>
+      <p:sp>
+        <p:nvSpPr>
+          <p:cNvPr id="4" name="Text 2"/>
+          <p:cNvSpPr/>
+          <p:nvPr/>
+        </p:nvSpPr>
+        <p:spPr>
+          <a:xfrm>
             <a:off x="548640" y="2194560"/>
             <a:ext cx="3291840" cy="548640"/>
           </a:xfrm>
@@ -10919,7 +11696,46 @@
       </p:sp>
       <p:sp>
         <p:nvSpPr>
-          <p:cNvPr id="4" name="Text 2"/>
+          <p:cNvPr id="5" name="Text 3"/>
+          <p:cNvSpPr/>
+          <p:nvPr/>
+        </p:nvSpPr>
+        <p:spPr>
+          <a:xfrm>
+            <a:off x="548640" y="3200400"/>
+            <a:ext cx="3383280" cy="457200"/>
+          </a:xfrm>
+          <a:prstGeom prst="rect">
+            <a:avLst/>
+          </a:prstGeom>
+          <a:noFill/>
+          <a:ln/>
+        </p:spPr>
+        <p:txBody>
+          <a:bodyPr wrap="square" rtlCol="0" anchor="ctr"/>
+          <a:lstStyle/>
+          <a:p>
+            <a:pPr indent="0" marL="0">
+              <a:buNone/>
+            </a:pPr>
+            <a:r>
+              <a:rPr lang="en-US" sz="1100" dirty="0">
+                <a:solidFill>
+                  <a:srgbClr val="C7D2E3"/>
+                </a:solidFill>
+                <a:latin typeface="Arial" pitchFamily="34" charset="0"/>
+                <a:ea typeface="Arial" pitchFamily="34" charset="-122"/>
+                <a:cs typeface="Arial" pitchFamily="34" charset="-120"/>
+              </a:rPr>
+              <a:t>M11 · Etapa 4 · Gestão e estratégia</a:t>
+            </a:r>
+            <a:endParaRPr lang="en-US" sz="1100" dirty="0"/>
+          </a:p>
+        </p:txBody>
+      </p:sp>
+      <p:sp>
+        <p:nvSpPr>
+          <p:cNvPr id="6" name="Text 4"/>
           <p:cNvSpPr/>
           <p:nvPr/>
         </p:nvSpPr>
@@ -10958,7 +11774,7 @@
       </p:sp>
       <p:pic>
         <p:nvPicPr>
-          <p:cNvPr id="5" name="Image 0" descr="/www/wwwroot/rexar/gdsolar/docs/curso/slides/assets/logo-gdsolar.png">    </p:cNvPr>
+          <p:cNvPr id="7" name="Image 0" descr="/www/wwwroot/rexar/gdsolar/docs/curso/slides/assets/logo-gdsolar.png">    </p:cNvPr>
           <p:cNvPicPr>
             <a:picLocks noChangeAspect="1"/>
           </p:cNvPicPr>
@@ -10982,7 +11798,7 @@
       </p:pic>
       <p:sp>
         <p:nvSpPr>
-          <p:cNvPr id="6" name="Text 3"/>
+          <p:cNvPr id="8" name="Text 5"/>
           <p:cNvSpPr/>
           <p:nvPr/>
         </p:nvSpPr>
@@ -11023,7 +11839,7 @@
       </p:sp>
       <p:sp>
         <p:nvSpPr>
-          <p:cNvPr id="7" name="Text 4"/>
+          <p:cNvPr id="9" name="Text 6"/>
           <p:cNvSpPr/>
           <p:nvPr/>
         </p:nvSpPr>
@@ -11064,7 +11880,7 @@
       </p:sp>
       <p:sp>
         <p:nvSpPr>
-          <p:cNvPr id="8" name="Text 5"/>
+          <p:cNvPr id="10" name="Text 7"/>
           <p:cNvSpPr/>
           <p:nvPr/>
         </p:nvSpPr>
@@ -11180,7 +11996,7 @@
         </p:blipFill>
         <p:spPr>
           <a:xfrm>
-            <a:off x="411480" y="6547104"/>
+            <a:off x="548640" y="6547104"/>
             <a:ext cx="274320" cy="274320"/>
           </a:xfrm>
           <a:prstGeom prst="rect">
@@ -11196,7 +12012,7 @@
         </p:nvSpPr>
         <p:spPr>
           <a:xfrm>
-            <a:off x="749808" y="6528816"/>
+            <a:off x="886968" y="6528816"/>
             <a:ext cx="6400800" cy="310896"/>
           </a:xfrm>
           <a:prstGeom prst="rect">
@@ -11236,7 +12052,7 @@
         <p:spPr>
           <a:xfrm>
             <a:off x="7132320" y="6528816"/>
-            <a:ext cx="4663440" cy="310896"/>
+            <a:ext cx="4023360" cy="310896"/>
           </a:xfrm>
           <a:prstGeom prst="rect">
             <a:avLst/>
@@ -11274,7 +12090,7 @@
         </p:nvSpPr>
         <p:spPr>
           <a:xfrm>
-            <a:off x="411480" y="384048"/>
+            <a:off x="548640" y="384048"/>
             <a:ext cx="82296" cy="658368"/>
           </a:xfrm>
           <a:prstGeom prst="rect">
@@ -11294,7 +12110,7 @@
         </p:nvSpPr>
         <p:spPr>
           <a:xfrm>
-            <a:off x="640080" y="292608"/>
+            <a:off x="777240" y="292608"/>
             <a:ext cx="10972800" cy="274320"/>
           </a:xfrm>
           <a:prstGeom prst="rect">
@@ -11333,8 +12149,8 @@
         </p:nvSpPr>
         <p:spPr>
           <a:xfrm>
-            <a:off x="640080" y="530352"/>
-            <a:ext cx="11155680" cy="566928"/>
+            <a:off x="777240" y="530352"/>
+            <a:ext cx="10881360" cy="566928"/>
           </a:xfrm>
           <a:prstGeom prst="rect">
             <a:avLst/>
@@ -11688,6 +12504,54 @@
               <a:t>Contas de pagamento (Mercado Pago) · caixas de e-mail de faturas · credenciais criptografadas · webhook exige a chave secreta</a:t>
             </a:r>
             <a:endParaRPr lang="en-US" sz="1500" dirty="0"/>
+          </a:p>
+        </p:txBody>
+      </p:sp>
+      <p:sp>
+        <p:nvSpPr>
+          <p:cNvPr id="25" name="Slide Number Placeholder 0"/>
+          <p:cNvSpPr>
+            <a:spLocks noGrp="1"/>
+          </p:cNvSpPr>
+          <p:nvPr>
+            <p:ph type="sldNum" sz="quarter" idx="4294967295"/>
+          </p:nvPr>
+        </p:nvSpPr>
+        <p:spPr>
+          <a:xfrm>
+            <a:off x="11292840" y="6556248"/>
+            <a:ext cx="548640" cy="256032"/>
+          </a:xfrm>
+          <a:prstGeom prst="rect">
+            <a:avLst/>
+          </a:prstGeom>
+          <a:extLst>
+            <a:ext uri="{C572A759-6A51-4108-AA02-DFA0A04FC94B}">
+              <ma14:wrappingTextBoxFlag xmlns:ma14="http://schemas.microsoft.com/office/mac/drawingml/2011/main" val="0"/>
+            </a:ext>
+          </a:extLst>
+        </p:spPr>
+        <p:txBody>
+          <a:bodyPr/>
+          <a:lstStyle>
+            <a:lvl1pPr>
+              <a:defRPr sz="900">
+                <a:solidFill>
+                  <a:srgbClr val="1B3A6B"/>
+                </a:solidFill>
+                <a:latin typeface="Arial"/>
+                <a:ea typeface="Arial"/>
+                <a:cs typeface="Arial"/>
+              </a:defRPr>
+            </a:lvl1pPr>
+          </a:lstStyle>
+          <a:p>
+            <a:pPr algn="r"/>
+            <a:fld id="{F7021451-1387-4CA6-816F-3879F97B5CBC}" type="slidenum">
+              <a:rPr b="1" lang="en-US"/>
+              <a:t>21</a:t>
+            </a:fld>
+            <a:endParaRPr lang="en-US"/>
           </a:p>
         </p:txBody>
       </p:sp>
@@ -11764,7 +12628,7 @@
         </p:blipFill>
         <p:spPr>
           <a:xfrm>
-            <a:off x="411480" y="6547104"/>
+            <a:off x="548640" y="6547104"/>
             <a:ext cx="274320" cy="274320"/>
           </a:xfrm>
           <a:prstGeom prst="rect">
@@ -11780,7 +12644,7 @@
         </p:nvSpPr>
         <p:spPr>
           <a:xfrm>
-            <a:off x="749808" y="6528816"/>
+            <a:off x="886968" y="6528816"/>
             <a:ext cx="6400800" cy="310896"/>
           </a:xfrm>
           <a:prstGeom prst="rect">
@@ -11820,7 +12684,7 @@
         <p:spPr>
           <a:xfrm>
             <a:off x="7132320" y="6528816"/>
-            <a:ext cx="4663440" cy="310896"/>
+            <a:ext cx="4023360" cy="310896"/>
           </a:xfrm>
           <a:prstGeom prst="rect">
             <a:avLst/>
@@ -11858,7 +12722,7 @@
         </p:nvSpPr>
         <p:spPr>
           <a:xfrm>
-            <a:off x="411480" y="384048"/>
+            <a:off x="548640" y="384048"/>
             <a:ext cx="82296" cy="658368"/>
           </a:xfrm>
           <a:prstGeom prst="rect">
@@ -11878,7 +12742,7 @@
         </p:nvSpPr>
         <p:spPr>
           <a:xfrm>
-            <a:off x="640080" y="292608"/>
+            <a:off x="777240" y="292608"/>
             <a:ext cx="10972800" cy="274320"/>
           </a:xfrm>
           <a:prstGeom prst="rect">
@@ -11917,8 +12781,8 @@
         </p:nvSpPr>
         <p:spPr>
           <a:xfrm>
-            <a:off x="640080" y="530352"/>
-            <a:ext cx="11155680" cy="566928"/>
+            <a:off x="777240" y="530352"/>
+            <a:ext cx="10881360" cy="566928"/>
           </a:xfrm>
           <a:prstGeom prst="rect">
             <a:avLst/>
@@ -12008,6 +12872,54 @@
           </a:prstGeom>
         </p:spPr>
       </p:pic>
+      <p:sp>
+        <p:nvSpPr>
+          <p:cNvPr id="25" name="Slide Number Placeholder 0"/>
+          <p:cNvSpPr>
+            <a:spLocks noGrp="1"/>
+          </p:cNvSpPr>
+          <p:nvPr>
+            <p:ph type="sldNum" sz="quarter" idx="4294967295"/>
+          </p:nvPr>
+        </p:nvSpPr>
+        <p:spPr>
+          <a:xfrm>
+            <a:off x="11292840" y="6556248"/>
+            <a:ext cx="548640" cy="256032"/>
+          </a:xfrm>
+          <a:prstGeom prst="rect">
+            <a:avLst/>
+          </a:prstGeom>
+          <a:extLst>
+            <a:ext uri="{C572A759-6A51-4108-AA02-DFA0A04FC94B}">
+              <ma14:wrappingTextBoxFlag xmlns:ma14="http://schemas.microsoft.com/office/mac/drawingml/2011/main" val="0"/>
+            </a:ext>
+          </a:extLst>
+        </p:spPr>
+        <p:txBody>
+          <a:bodyPr/>
+          <a:lstStyle>
+            <a:lvl1pPr>
+              <a:defRPr sz="900">
+                <a:solidFill>
+                  <a:srgbClr val="1B3A6B"/>
+                </a:solidFill>
+                <a:latin typeface="Arial"/>
+                <a:ea typeface="Arial"/>
+                <a:cs typeface="Arial"/>
+              </a:defRPr>
+            </a:lvl1pPr>
+          </a:lstStyle>
+          <a:p>
+            <a:pPr algn="r"/>
+            <a:fld id="{F7021451-1387-4CA6-816F-3879F97B5CBC}" type="slidenum">
+              <a:rPr b="1" lang="en-US"/>
+              <a:t>22</a:t>
+            </a:fld>
+            <a:endParaRPr lang="en-US"/>
+          </a:p>
+        </p:txBody>
+      </p:sp>
     </p:spTree>
   </p:cSld>
   <p:clrMapOvr>
@@ -12068,6 +12980,45 @@
         </p:nvSpPr>
         <p:spPr>
           <a:xfrm>
+            <a:off x="457200" y="548640"/>
+            <a:ext cx="3474720" cy="1737360"/>
+          </a:xfrm>
+          <a:prstGeom prst="rect">
+            <a:avLst/>
+          </a:prstGeom>
+          <a:noFill/>
+          <a:ln/>
+        </p:spPr>
+        <p:txBody>
+          <a:bodyPr wrap="square" rtlCol="0" anchor="ctr"/>
+          <a:lstStyle/>
+          <a:p>
+            <a:pPr indent="0" marL="0">
+              <a:buNone/>
+            </a:pPr>
+            <a:r>
+              <a:rPr lang="en-US" sz="11000" b="1" dirty="0">
+                <a:solidFill>
+                  <a:srgbClr val="11396F"/>
+                </a:solidFill>
+                <a:latin typeface="Arial" pitchFamily="34" charset="0"/>
+                <a:ea typeface="Arial" pitchFamily="34" charset="-122"/>
+                <a:cs typeface="Arial" pitchFamily="34" charset="-120"/>
+              </a:rPr>
+              <a:t>06</a:t>
+            </a:r>
+            <a:endParaRPr lang="en-US" sz="11000" dirty="0"/>
+          </a:p>
+        </p:txBody>
+      </p:sp>
+      <p:sp>
+        <p:nvSpPr>
+          <p:cNvPr id="4" name="Text 2"/>
+          <p:cNvSpPr/>
+          <p:nvPr/>
+        </p:nvSpPr>
+        <p:spPr>
+          <a:xfrm>
             <a:off x="548640" y="2194560"/>
             <a:ext cx="3291840" cy="548640"/>
           </a:xfrm>
@@ -12101,7 +13052,46 @@
       </p:sp>
       <p:sp>
         <p:nvSpPr>
-          <p:cNvPr id="4" name="Text 2"/>
+          <p:cNvPr id="5" name="Text 3"/>
+          <p:cNvSpPr/>
+          <p:nvPr/>
+        </p:nvSpPr>
+        <p:spPr>
+          <a:xfrm>
+            <a:off x="548640" y="3200400"/>
+            <a:ext cx="3383280" cy="457200"/>
+          </a:xfrm>
+          <a:prstGeom prst="rect">
+            <a:avLst/>
+          </a:prstGeom>
+          <a:noFill/>
+          <a:ln/>
+        </p:spPr>
+        <p:txBody>
+          <a:bodyPr wrap="square" rtlCol="0" anchor="ctr"/>
+          <a:lstStyle/>
+          <a:p>
+            <a:pPr indent="0" marL="0">
+              <a:buNone/>
+            </a:pPr>
+            <a:r>
+              <a:rPr lang="en-US" sz="1100" dirty="0">
+                <a:solidFill>
+                  <a:srgbClr val="C7D2E3"/>
+                </a:solidFill>
+                <a:latin typeface="Arial" pitchFamily="34" charset="0"/>
+                <a:ea typeface="Arial" pitchFamily="34" charset="-122"/>
+                <a:cs typeface="Arial" pitchFamily="34" charset="-120"/>
+              </a:rPr>
+              <a:t>M11 · Etapa 4 · Gestão e estratégia</a:t>
+            </a:r>
+            <a:endParaRPr lang="en-US" sz="1100" dirty="0"/>
+          </a:p>
+        </p:txBody>
+      </p:sp>
+      <p:sp>
+        <p:nvSpPr>
+          <p:cNvPr id="6" name="Text 4"/>
           <p:cNvSpPr/>
           <p:nvPr/>
         </p:nvSpPr>
@@ -12140,7 +13130,7 @@
       </p:sp>
       <p:pic>
         <p:nvPicPr>
-          <p:cNvPr id="5" name="Image 0" descr="/www/wwwroot/rexar/gdsolar/docs/curso/slides/assets/logo-gdsolar.png">    </p:cNvPr>
+          <p:cNvPr id="7" name="Image 0" descr="/www/wwwroot/rexar/gdsolar/docs/curso/slides/assets/logo-gdsolar.png">    </p:cNvPr>
           <p:cNvPicPr>
             <a:picLocks noChangeAspect="1"/>
           </p:cNvPicPr>
@@ -12164,7 +13154,7 @@
       </p:pic>
       <p:sp>
         <p:nvSpPr>
-          <p:cNvPr id="6" name="Text 3"/>
+          <p:cNvPr id="8" name="Text 5"/>
           <p:cNvSpPr/>
           <p:nvPr/>
         </p:nvSpPr>
@@ -12205,7 +13195,7 @@
       </p:sp>
       <p:sp>
         <p:nvSpPr>
-          <p:cNvPr id="7" name="Text 4"/>
+          <p:cNvPr id="9" name="Text 6"/>
           <p:cNvSpPr/>
           <p:nvPr/>
         </p:nvSpPr>
@@ -12246,7 +13236,7 @@
       </p:sp>
       <p:sp>
         <p:nvSpPr>
-          <p:cNvPr id="8" name="Text 5"/>
+          <p:cNvPr id="10" name="Text 7"/>
           <p:cNvSpPr/>
           <p:nvPr/>
         </p:nvSpPr>
@@ -12383,7 +13373,7 @@
         </p:blipFill>
         <p:spPr>
           <a:xfrm>
-            <a:off x="411480" y="6547104"/>
+            <a:off x="548640" y="6547104"/>
             <a:ext cx="274320" cy="274320"/>
           </a:xfrm>
           <a:prstGeom prst="rect">
@@ -12399,7 +13389,7 @@
         </p:nvSpPr>
         <p:spPr>
           <a:xfrm>
-            <a:off x="749808" y="6528816"/>
+            <a:off x="886968" y="6528816"/>
             <a:ext cx="6400800" cy="310896"/>
           </a:xfrm>
           <a:prstGeom prst="rect">
@@ -12439,7 +13429,7 @@
         <p:spPr>
           <a:xfrm>
             <a:off x="7132320" y="6528816"/>
-            <a:ext cx="4663440" cy="310896"/>
+            <a:ext cx="4023360" cy="310896"/>
           </a:xfrm>
           <a:prstGeom prst="rect">
             <a:avLst/>
@@ -12477,7 +13467,7 @@
         </p:nvSpPr>
         <p:spPr>
           <a:xfrm>
-            <a:off x="411480" y="384048"/>
+            <a:off x="548640" y="384048"/>
             <a:ext cx="82296" cy="658368"/>
           </a:xfrm>
           <a:prstGeom prst="rect">
@@ -12497,7 +13487,7 @@
         </p:nvSpPr>
         <p:spPr>
           <a:xfrm>
-            <a:off x="640080" y="292608"/>
+            <a:off x="777240" y="292608"/>
             <a:ext cx="10972800" cy="274320"/>
           </a:xfrm>
           <a:prstGeom prst="rect">
@@ -12536,8 +13526,8 @@
         </p:nvSpPr>
         <p:spPr>
           <a:xfrm>
-            <a:off x="640080" y="530352"/>
-            <a:ext cx="11155680" cy="566928"/>
+            <a:off x="777240" y="530352"/>
+            <a:ext cx="10881360" cy="566928"/>
           </a:xfrm>
           <a:prstGeom prst="rect">
             <a:avLst/>
@@ -12578,7 +13568,7 @@
         <p:spPr>
           <a:xfrm>
             <a:off x="548640" y="1325880"/>
-            <a:ext cx="11155680" cy="4937760"/>
+            <a:ext cx="5486400" cy="4937760"/>
           </a:xfrm>
           <a:prstGeom prst="rect">
             <a:avLst/>
@@ -12599,7 +13589,7 @@
               <a:buNone/>
             </a:pPr>
             <a:r>
-              <a:rPr lang="en-US" sz="1300" dirty="0">
+              <a:rPr lang="en-US" sz="1800" dirty="0">
                 <a:solidFill>
                   <a:srgbClr val="1F2937"/>
                 </a:solidFill>
@@ -12609,7 +13599,7 @@
               </a:rPr>
               <a:t>1. Proposta de valor (para cliente e produtor)</a:t>
             </a:r>
-            <a:endParaRPr lang="en-US" sz="1300" dirty="0"/>
+            <a:endParaRPr lang="en-US" sz="1800" dirty="0"/>
           </a:p>
           <a:p>
             <a:pPr indent="0" marL="0">
@@ -12619,7 +13609,7 @@
               <a:buNone/>
             </a:pPr>
             <a:r>
-              <a:rPr lang="en-US" sz="1300" dirty="0">
+              <a:rPr lang="en-US" sz="1800" dirty="0">
                 <a:solidFill>
                   <a:srgbClr val="1F2937"/>
                 </a:solidFill>
@@ -12629,7 +13619,7 @@
               </a:rPr>
               <a:t>2. Mercado: distribuidora, região, público-alvo</a:t>
             </a:r>
-            <a:endParaRPr lang="en-US" sz="1300" dirty="0"/>
+            <a:endParaRPr lang="en-US" sz="1800" dirty="0"/>
           </a:p>
           <a:p>
             <a:pPr indent="0" marL="0">
@@ -12639,7 +13629,7 @@
               <a:buNone/>
             </a:pPr>
             <a:r>
-              <a:rPr lang="en-US" sz="1300" dirty="0">
+              <a:rPr lang="en-US" sz="1800" dirty="0">
                 <a:solidFill>
                   <a:srgbClr val="1F2937"/>
                 </a:solidFill>
@@ -12649,7 +13639,7 @@
               </a:rPr>
               <a:t>3. Modelo: asset-light / heavy / híbrido · estrutura jurídica</a:t>
             </a:r>
-            <a:endParaRPr lang="en-US" sz="1300" dirty="0"/>
+            <a:endParaRPr lang="en-US" sz="1800" dirty="0"/>
           </a:p>
           <a:p>
             <a:pPr indent="0" marL="0">
@@ -12659,7 +13649,7 @@
               <a:buNone/>
             </a:pPr>
             <a:r>
-              <a:rPr lang="en-US" sz="1300" dirty="0">
+              <a:rPr lang="en-US" sz="1800" dirty="0">
                 <a:solidFill>
                   <a:srgbClr val="1F2937"/>
                 </a:solidFill>
@@ -12669,7 +13659,7 @@
               </a:rPr>
               <a:t>4. Unit economics: crédito, desconto, taxa, repasse, margem/kWh</a:t>
             </a:r>
-            <a:endParaRPr lang="en-US" sz="1300" dirty="0"/>
+            <a:endParaRPr lang="en-US" sz="1800" dirty="0"/>
           </a:p>
           <a:p>
             <a:pPr indent="0" marL="0">
@@ -12679,7 +13669,7 @@
               <a:buNone/>
             </a:pPr>
             <a:r>
-              <a:rPr lang="en-US" sz="1300" dirty="0">
+              <a:rPr lang="en-US" sz="1800" dirty="0">
                 <a:solidFill>
                   <a:srgbClr val="1F2937"/>
                 </a:solidFill>
@@ -12689,8 +13679,32 @@
               </a:rPr>
               <a:t>5. Metas 12 e 36 meses: usinas, MWh/mês, clientes</a:t>
             </a:r>
-            <a:endParaRPr lang="en-US" sz="1300" dirty="0"/>
-          </a:p>
+            <a:endParaRPr lang="en-US" sz="1800" dirty="0"/>
+          </a:p>
+        </p:txBody>
+      </p:sp>
+      <p:sp>
+        <p:nvSpPr>
+          <p:cNvPr id="10" name="Text 7"/>
+          <p:cNvSpPr/>
+          <p:nvPr/>
+        </p:nvSpPr>
+        <p:spPr>
+          <a:xfrm>
+            <a:off x="6263640" y="1325880"/>
+            <a:ext cx="5486400" cy="4937760"/>
+          </a:xfrm>
+          <a:prstGeom prst="rect">
+            <a:avLst/>
+          </a:prstGeom>
+          <a:noFill/>
+          <a:ln/>
+        </p:spPr>
+        <p:txBody>
+          <a:bodyPr wrap="square" rtlCol="0" anchor="t">
+            <a:normAutofit/>
+          </a:bodyPr>
+          <a:lstStyle/>
           <a:p>
             <a:pPr indent="0" marL="0">
               <a:spcAft>
@@ -12699,7 +13713,7 @@
               <a:buNone/>
             </a:pPr>
             <a:r>
-              <a:rPr lang="en-US" sz="1300" dirty="0">
+              <a:rPr lang="en-US" sz="1800" dirty="0">
                 <a:solidFill>
                   <a:srgbClr val="1F2937"/>
                 </a:solidFill>
@@ -12709,7 +13723,7 @@
               </a:rPr>
               <a:t>6. Ponto de equilíbrio e capital necessário</a:t>
             </a:r>
-            <a:endParaRPr lang="en-US" sz="1300" dirty="0"/>
+            <a:endParaRPr lang="en-US" sz="1800" dirty="0"/>
           </a:p>
           <a:p>
             <a:pPr indent="0" marL="0">
@@ -12719,7 +13733,7 @@
               <a:buNone/>
             </a:pPr>
             <a:r>
-              <a:rPr lang="en-US" sz="1300" dirty="0">
+              <a:rPr lang="en-US" sz="1800" dirty="0">
                 <a:solidFill>
                   <a:srgbClr val="1F2937"/>
                 </a:solidFill>
@@ -12729,7 +13743,7 @@
               </a:rPr>
               <a:t>7. Equipe e parceiros</a:t>
             </a:r>
-            <a:endParaRPr lang="en-US" sz="1300" dirty="0"/>
+            <a:endParaRPr lang="en-US" sz="1800" dirty="0"/>
           </a:p>
           <a:p>
             <a:pPr indent="0" marL="0">
@@ -12739,7 +13753,7 @@
               <a:buNone/>
             </a:pPr>
             <a:r>
-              <a:rPr lang="en-US" sz="1300" dirty="0">
+              <a:rPr lang="en-US" sz="1800" dirty="0">
                 <a:solidFill>
                   <a:srgbClr val="1F2937"/>
                 </a:solidFill>
@@ -12749,7 +13763,7 @@
               </a:rPr>
               <a:t>8. Indicadores-chave e metas</a:t>
             </a:r>
-            <a:endParaRPr lang="en-US" sz="1300" dirty="0"/>
+            <a:endParaRPr lang="en-US" sz="1800" dirty="0"/>
           </a:p>
           <a:p>
             <a:pPr indent="0" marL="0">
@@ -12759,7 +13773,7 @@
               <a:buNone/>
             </a:pPr>
             <a:r>
-              <a:rPr lang="en-US" sz="1300" dirty="0">
+              <a:rPr lang="en-US" sz="1800" dirty="0">
                 <a:solidFill>
                   <a:srgbClr val="1F2937"/>
                 </a:solidFill>
@@ -12769,7 +13783,55 @@
               </a:rPr>
               <a:t>9. Riscos principais e mitigação</a:t>
             </a:r>
-            <a:endParaRPr lang="en-US" sz="1300" dirty="0"/>
+            <a:endParaRPr lang="en-US" sz="1800" dirty="0"/>
+          </a:p>
+        </p:txBody>
+      </p:sp>
+      <p:sp>
+        <p:nvSpPr>
+          <p:cNvPr id="25" name="Slide Number Placeholder 0"/>
+          <p:cNvSpPr>
+            <a:spLocks noGrp="1"/>
+          </p:cNvSpPr>
+          <p:nvPr>
+            <p:ph type="sldNum" sz="quarter" idx="4294967295"/>
+          </p:nvPr>
+        </p:nvSpPr>
+        <p:spPr>
+          <a:xfrm>
+            <a:off x="11292840" y="6556248"/>
+            <a:ext cx="548640" cy="256032"/>
+          </a:xfrm>
+          <a:prstGeom prst="rect">
+            <a:avLst/>
+          </a:prstGeom>
+          <a:extLst>
+            <a:ext uri="{C572A759-6A51-4108-AA02-DFA0A04FC94B}">
+              <ma14:wrappingTextBoxFlag xmlns:ma14="http://schemas.microsoft.com/office/mac/drawingml/2011/main" val="0"/>
+            </a:ext>
+          </a:extLst>
+        </p:spPr>
+        <p:txBody>
+          <a:bodyPr/>
+          <a:lstStyle>
+            <a:lvl1pPr>
+              <a:defRPr sz="900">
+                <a:solidFill>
+                  <a:srgbClr val="1B3A6B"/>
+                </a:solidFill>
+                <a:latin typeface="Arial"/>
+                <a:ea typeface="Arial"/>
+                <a:cs typeface="Arial"/>
+              </a:defRPr>
+            </a:lvl1pPr>
+          </a:lstStyle>
+          <a:p>
+            <a:pPr algn="r"/>
+            <a:fld id="{F7021451-1387-4CA6-816F-3879F97B5CBC}" type="slidenum">
+              <a:rPr b="1" lang="en-US"/>
+              <a:t>24</a:t>
+            </a:fld>
+            <a:endParaRPr lang="en-US"/>
           </a:p>
         </p:txBody>
       </p:sp>
@@ -12846,7 +13908,7 @@
         </p:blipFill>
         <p:spPr>
           <a:xfrm>
-            <a:off x="411480" y="6547104"/>
+            <a:off x="548640" y="6547104"/>
             <a:ext cx="274320" cy="274320"/>
           </a:xfrm>
           <a:prstGeom prst="rect">
@@ -12862,7 +13924,7 @@
         </p:nvSpPr>
         <p:spPr>
           <a:xfrm>
-            <a:off x="749808" y="6528816"/>
+            <a:off x="886968" y="6528816"/>
             <a:ext cx="6400800" cy="310896"/>
           </a:xfrm>
           <a:prstGeom prst="rect">
@@ -12902,7 +13964,7 @@
         <p:spPr>
           <a:xfrm>
             <a:off x="7132320" y="6528816"/>
-            <a:ext cx="4663440" cy="310896"/>
+            <a:ext cx="4023360" cy="310896"/>
           </a:xfrm>
           <a:prstGeom prst="rect">
             <a:avLst/>
@@ -12940,7 +14002,7 @@
         </p:nvSpPr>
         <p:spPr>
           <a:xfrm>
-            <a:off x="411480" y="384048"/>
+            <a:off x="548640" y="384048"/>
             <a:ext cx="82296" cy="658368"/>
           </a:xfrm>
           <a:prstGeom prst="rect">
@@ -12960,7 +14022,7 @@
         </p:nvSpPr>
         <p:spPr>
           <a:xfrm>
-            <a:off x="640080" y="292608"/>
+            <a:off x="777240" y="292608"/>
             <a:ext cx="10972800" cy="274320"/>
           </a:xfrm>
           <a:prstGeom prst="rect">
@@ -12999,8 +14061,8 @@
         </p:nvSpPr>
         <p:spPr>
           <a:xfrm>
-            <a:off x="640080" y="530352"/>
-            <a:ext cx="11155680" cy="566928"/>
+            <a:off x="777240" y="530352"/>
+            <a:ext cx="10881360" cy="566928"/>
           </a:xfrm>
           <a:prstGeom prst="rect">
             <a:avLst/>
@@ -13040,8 +14102,8 @@
         </p:nvSpPr>
         <p:spPr>
           <a:xfrm>
-            <a:off x="411480" y="1325880"/>
-            <a:ext cx="3642360" cy="2331720"/>
+            <a:off x="548640" y="1325880"/>
+            <a:ext cx="3544824" cy="2331720"/>
           </a:xfrm>
           <a:prstGeom prst="roundRect">
             <a:avLst>
@@ -13074,7 +14136,7 @@
         </p:nvSpPr>
         <p:spPr>
           <a:xfrm>
-            <a:off x="594360" y="1508760"/>
+            <a:off x="731520" y="1508760"/>
             <a:ext cx="457200" cy="457200"/>
           </a:xfrm>
           <a:prstGeom prst="ellipse">
@@ -13094,7 +14156,7 @@
         </p:nvSpPr>
         <p:spPr>
           <a:xfrm>
-            <a:off x="594360" y="1508760"/>
+            <a:off x="731520" y="1508760"/>
             <a:ext cx="457200" cy="457200"/>
           </a:xfrm>
           <a:prstGeom prst="rect">
@@ -13133,8 +14195,8 @@
         </p:nvSpPr>
         <p:spPr>
           <a:xfrm>
-            <a:off x="1188720" y="1435608"/>
-            <a:ext cx="2727960" cy="2112264"/>
+            <a:off x="1325880" y="1435608"/>
+            <a:ext cx="2630424" cy="2112264"/>
           </a:xfrm>
           <a:prstGeom prst="rect">
             <a:avLst/>
@@ -13174,8 +14236,8 @@
         </p:nvSpPr>
         <p:spPr>
           <a:xfrm>
-            <a:off x="4282440" y="1325880"/>
-            <a:ext cx="3642360" cy="2331720"/>
+            <a:off x="4322064" y="1325880"/>
+            <a:ext cx="3544824" cy="2331720"/>
           </a:xfrm>
           <a:prstGeom prst="roundRect">
             <a:avLst>
@@ -13208,7 +14270,7 @@
         </p:nvSpPr>
         <p:spPr>
           <a:xfrm>
-            <a:off x="4465320" y="1508760"/>
+            <a:off x="4504944" y="1508760"/>
             <a:ext cx="457200" cy="457200"/>
           </a:xfrm>
           <a:prstGeom prst="ellipse">
@@ -13228,7 +14290,7 @@
         </p:nvSpPr>
         <p:spPr>
           <a:xfrm>
-            <a:off x="4465320" y="1508760"/>
+            <a:off x="4504944" y="1508760"/>
             <a:ext cx="457200" cy="457200"/>
           </a:xfrm>
           <a:prstGeom prst="rect">
@@ -13267,8 +14329,8 @@
         </p:nvSpPr>
         <p:spPr>
           <a:xfrm>
-            <a:off x="5059680" y="1435608"/>
-            <a:ext cx="2727960" cy="2112264"/>
+            <a:off x="5099304" y="1435608"/>
+            <a:ext cx="2630424" cy="2112264"/>
           </a:xfrm>
           <a:prstGeom prst="rect">
             <a:avLst/>
@@ -13308,8 +14370,8 @@
         </p:nvSpPr>
         <p:spPr>
           <a:xfrm>
-            <a:off x="8153400" y="1325880"/>
-            <a:ext cx="3642360" cy="2331720"/>
+            <a:off x="8095488" y="1325880"/>
+            <a:ext cx="3544824" cy="2331720"/>
           </a:xfrm>
           <a:prstGeom prst="roundRect">
             <a:avLst>
@@ -13342,7 +14404,7 @@
         </p:nvSpPr>
         <p:spPr>
           <a:xfrm>
-            <a:off x="8336280" y="1508760"/>
+            <a:off x="8278368" y="1508760"/>
             <a:ext cx="457200" cy="457200"/>
           </a:xfrm>
           <a:prstGeom prst="ellipse">
@@ -13362,7 +14424,7 @@
         </p:nvSpPr>
         <p:spPr>
           <a:xfrm>
-            <a:off x="8336280" y="1508760"/>
+            <a:off x="8278368" y="1508760"/>
             <a:ext cx="457200" cy="457200"/>
           </a:xfrm>
           <a:prstGeom prst="rect">
@@ -13401,8 +14463,8 @@
         </p:nvSpPr>
         <p:spPr>
           <a:xfrm>
-            <a:off x="8930640" y="1435608"/>
-            <a:ext cx="2727960" cy="2112264"/>
+            <a:off x="8872728" y="1435608"/>
+            <a:ext cx="2630424" cy="2112264"/>
           </a:xfrm>
           <a:prstGeom prst="rect">
             <a:avLst/>
@@ -13442,8 +14504,8 @@
         </p:nvSpPr>
         <p:spPr>
           <a:xfrm>
-            <a:off x="411480" y="3886200"/>
-            <a:ext cx="3642360" cy="2331720"/>
+            <a:off x="548640" y="3886200"/>
+            <a:ext cx="3544824" cy="2331720"/>
           </a:xfrm>
           <a:prstGeom prst="roundRect">
             <a:avLst>
@@ -13476,7 +14538,7 @@
         </p:nvSpPr>
         <p:spPr>
           <a:xfrm>
-            <a:off x="594360" y="4069080"/>
+            <a:off x="731520" y="4069080"/>
             <a:ext cx="457200" cy="457200"/>
           </a:xfrm>
           <a:prstGeom prst="ellipse">
@@ -13496,7 +14558,7 @@
         </p:nvSpPr>
         <p:spPr>
           <a:xfrm>
-            <a:off x="594360" y="4069080"/>
+            <a:off x="731520" y="4069080"/>
             <a:ext cx="457200" cy="457200"/>
           </a:xfrm>
           <a:prstGeom prst="rect">
@@ -13535,8 +14597,8 @@
         </p:nvSpPr>
         <p:spPr>
           <a:xfrm>
-            <a:off x="1188720" y="3995928"/>
-            <a:ext cx="2727960" cy="2112264"/>
+            <a:off x="1325880" y="3995928"/>
+            <a:ext cx="2630424" cy="2112264"/>
           </a:xfrm>
           <a:prstGeom prst="rect">
             <a:avLst/>
@@ -13576,8 +14638,8 @@
         </p:nvSpPr>
         <p:spPr>
           <a:xfrm>
-            <a:off x="4282440" y="3886200"/>
-            <a:ext cx="3642360" cy="2331720"/>
+            <a:off x="4322064" y="3886200"/>
+            <a:ext cx="3544824" cy="2331720"/>
           </a:xfrm>
           <a:prstGeom prst="roundRect">
             <a:avLst>
@@ -13610,7 +14672,7 @@
         </p:nvSpPr>
         <p:spPr>
           <a:xfrm>
-            <a:off x="4465320" y="4069080"/>
+            <a:off x="4504944" y="4069080"/>
             <a:ext cx="457200" cy="457200"/>
           </a:xfrm>
           <a:prstGeom prst="ellipse">
@@ -13630,7 +14692,7 @@
         </p:nvSpPr>
         <p:spPr>
           <a:xfrm>
-            <a:off x="4465320" y="4069080"/>
+            <a:off x="4504944" y="4069080"/>
             <a:ext cx="457200" cy="457200"/>
           </a:xfrm>
           <a:prstGeom prst="rect">
@@ -13669,8 +14731,8 @@
         </p:nvSpPr>
         <p:spPr>
           <a:xfrm>
-            <a:off x="5059680" y="3995928"/>
-            <a:ext cx="2727960" cy="2112264"/>
+            <a:off x="5099304" y="3995928"/>
+            <a:ext cx="2630424" cy="2112264"/>
           </a:xfrm>
           <a:prstGeom prst="rect">
             <a:avLst/>
@@ -13699,6 +14761,54 @@
               <a:t>capital de giro R$ X</a:t>
             </a:r>
             <a:endParaRPr lang="en-US" sz="1800" dirty="0"/>
+          </a:p>
+        </p:txBody>
+      </p:sp>
+      <p:sp>
+        <p:nvSpPr>
+          <p:cNvPr id="25" name="Slide Number Placeholder 0"/>
+          <p:cNvSpPr>
+            <a:spLocks noGrp="1"/>
+          </p:cNvSpPr>
+          <p:nvPr>
+            <p:ph type="sldNum" sz="quarter" idx="4294967295"/>
+          </p:nvPr>
+        </p:nvSpPr>
+        <p:spPr>
+          <a:xfrm>
+            <a:off x="11292840" y="6556248"/>
+            <a:ext cx="548640" cy="256032"/>
+          </a:xfrm>
+          <a:prstGeom prst="rect">
+            <a:avLst/>
+          </a:prstGeom>
+          <a:extLst>
+            <a:ext uri="{C572A759-6A51-4108-AA02-DFA0A04FC94B}">
+              <ma14:wrappingTextBoxFlag xmlns:ma14="http://schemas.microsoft.com/office/mac/drawingml/2011/main" val="0"/>
+            </a:ext>
+          </a:extLst>
+        </p:spPr>
+        <p:txBody>
+          <a:bodyPr/>
+          <a:lstStyle>
+            <a:lvl1pPr>
+              <a:defRPr sz="900">
+                <a:solidFill>
+                  <a:srgbClr val="1B3A6B"/>
+                </a:solidFill>
+                <a:latin typeface="Arial"/>
+                <a:ea typeface="Arial"/>
+                <a:cs typeface="Arial"/>
+              </a:defRPr>
+            </a:lvl1pPr>
+          </a:lstStyle>
+          <a:p>
+            <a:pPr algn="r"/>
+            <a:fld id="{F7021451-1387-4CA6-816F-3879F97B5CBC}" type="slidenum">
+              <a:rPr b="1" lang="en-US"/>
+              <a:t>25</a:t>
+            </a:fld>
+            <a:endParaRPr lang="en-US"/>
           </a:p>
         </p:txBody>
       </p:sp>
@@ -13775,7 +14885,7 @@
         </p:blipFill>
         <p:spPr>
           <a:xfrm>
-            <a:off x="411480" y="6547104"/>
+            <a:off x="548640" y="6547104"/>
             <a:ext cx="274320" cy="274320"/>
           </a:xfrm>
           <a:prstGeom prst="rect">
@@ -13791,7 +14901,7 @@
         </p:nvSpPr>
         <p:spPr>
           <a:xfrm>
-            <a:off x="749808" y="6528816"/>
+            <a:off x="886968" y="6528816"/>
             <a:ext cx="6400800" cy="310896"/>
           </a:xfrm>
           <a:prstGeom prst="rect">
@@ -13831,7 +14941,7 @@
         <p:spPr>
           <a:xfrm>
             <a:off x="7132320" y="6528816"/>
-            <a:ext cx="4663440" cy="310896"/>
+            <a:ext cx="4023360" cy="310896"/>
           </a:xfrm>
           <a:prstGeom prst="rect">
             <a:avLst/>
@@ -13869,7 +14979,7 @@
         </p:nvSpPr>
         <p:spPr>
           <a:xfrm>
-            <a:off x="411480" y="384048"/>
+            <a:off x="548640" y="384048"/>
             <a:ext cx="82296" cy="658368"/>
           </a:xfrm>
           <a:prstGeom prst="rect">
@@ -13889,7 +14999,7 @@
         </p:nvSpPr>
         <p:spPr>
           <a:xfrm>
-            <a:off x="640080" y="292608"/>
+            <a:off x="777240" y="292608"/>
             <a:ext cx="10972800" cy="274320"/>
           </a:xfrm>
           <a:prstGeom prst="rect">
@@ -13928,8 +15038,8 @@
         </p:nvSpPr>
         <p:spPr>
           <a:xfrm>
-            <a:off x="640080" y="530352"/>
-            <a:ext cx="11155680" cy="566928"/>
+            <a:off x="777240" y="530352"/>
+            <a:ext cx="10881360" cy="566928"/>
           </a:xfrm>
           <a:prstGeom prst="rect">
             <a:avLst/>
@@ -13969,8 +15079,8 @@
         </p:nvSpPr>
         <p:spPr>
           <a:xfrm>
-            <a:off x="411480" y="1325880"/>
-            <a:ext cx="5577840" cy="2331720"/>
+            <a:off x="548640" y="1325880"/>
+            <a:ext cx="5431536" cy="2331720"/>
           </a:xfrm>
           <a:prstGeom prst="roundRect">
             <a:avLst>
@@ -14003,7 +15113,7 @@
         </p:nvSpPr>
         <p:spPr>
           <a:xfrm>
-            <a:off x="594360" y="1508760"/>
+            <a:off x="731520" y="1508760"/>
             <a:ext cx="457200" cy="457200"/>
           </a:xfrm>
           <a:prstGeom prst="ellipse">
@@ -14023,7 +15133,7 @@
         </p:nvSpPr>
         <p:spPr>
           <a:xfrm>
-            <a:off x="594360" y="1508760"/>
+            <a:off x="731520" y="1508760"/>
             <a:ext cx="457200" cy="457200"/>
           </a:xfrm>
           <a:prstGeom prst="rect">
@@ -14062,8 +15172,8 @@
         </p:nvSpPr>
         <p:spPr>
           <a:xfrm>
-            <a:off x="1188720" y="1435608"/>
-            <a:ext cx="4663440" cy="2112264"/>
+            <a:off x="1325880" y="1435608"/>
+            <a:ext cx="4517136" cy="2112264"/>
           </a:xfrm>
           <a:prstGeom prst="rect">
             <a:avLst/>
@@ -14103,8 +15213,8 @@
         </p:nvSpPr>
         <p:spPr>
           <a:xfrm>
-            <a:off x="6217920" y="1325880"/>
-            <a:ext cx="5577840" cy="2331720"/>
+            <a:off x="6208776" y="1325880"/>
+            <a:ext cx="5431536" cy="2331720"/>
           </a:xfrm>
           <a:prstGeom prst="roundRect">
             <a:avLst>
@@ -14137,7 +15247,7 @@
         </p:nvSpPr>
         <p:spPr>
           <a:xfrm>
-            <a:off x="6400800" y="1508760"/>
+            <a:off x="6391656" y="1508760"/>
             <a:ext cx="457200" cy="457200"/>
           </a:xfrm>
           <a:prstGeom prst="ellipse">
@@ -14157,7 +15267,7 @@
         </p:nvSpPr>
         <p:spPr>
           <a:xfrm>
-            <a:off x="6400800" y="1508760"/>
+            <a:off x="6391656" y="1508760"/>
             <a:ext cx="457200" cy="457200"/>
           </a:xfrm>
           <a:prstGeom prst="rect">
@@ -14196,8 +15306,8 @@
         </p:nvSpPr>
         <p:spPr>
           <a:xfrm>
-            <a:off x="6995160" y="1435608"/>
-            <a:ext cx="4663440" cy="2112264"/>
+            <a:off x="6986016" y="1435608"/>
+            <a:ext cx="4517136" cy="2112264"/>
           </a:xfrm>
           <a:prstGeom prst="rect">
             <a:avLst/>
@@ -14237,8 +15347,8 @@
         </p:nvSpPr>
         <p:spPr>
           <a:xfrm>
-            <a:off x="411480" y="3886200"/>
-            <a:ext cx="5577840" cy="2331720"/>
+            <a:off x="548640" y="3886200"/>
+            <a:ext cx="5431536" cy="2331720"/>
           </a:xfrm>
           <a:prstGeom prst="roundRect">
             <a:avLst>
@@ -14271,7 +15381,7 @@
         </p:nvSpPr>
         <p:spPr>
           <a:xfrm>
-            <a:off x="594360" y="4069080"/>
+            <a:off x="731520" y="4069080"/>
             <a:ext cx="457200" cy="457200"/>
           </a:xfrm>
           <a:prstGeom prst="ellipse">
@@ -14291,7 +15401,7 @@
         </p:nvSpPr>
         <p:spPr>
           <a:xfrm>
-            <a:off x="594360" y="4069080"/>
+            <a:off x="731520" y="4069080"/>
             <a:ext cx="457200" cy="457200"/>
           </a:xfrm>
           <a:prstGeom prst="rect">
@@ -14330,8 +15440,8 @@
         </p:nvSpPr>
         <p:spPr>
           <a:xfrm>
-            <a:off x="1188720" y="3995928"/>
-            <a:ext cx="4663440" cy="2112264"/>
+            <a:off x="1325880" y="3995928"/>
+            <a:ext cx="4517136" cy="2112264"/>
           </a:xfrm>
           <a:prstGeom prst="rect">
             <a:avLst/>
@@ -14371,8 +15481,8 @@
         </p:nvSpPr>
         <p:spPr>
           <a:xfrm>
-            <a:off x="6217920" y="3886200"/>
-            <a:ext cx="5577840" cy="2331720"/>
+            <a:off x="6208776" y="3886200"/>
+            <a:ext cx="5431536" cy="2331720"/>
           </a:xfrm>
           <a:prstGeom prst="roundRect">
             <a:avLst>
@@ -14405,7 +15515,7 @@
         </p:nvSpPr>
         <p:spPr>
           <a:xfrm>
-            <a:off x="6400800" y="4069080"/>
+            <a:off x="6391656" y="4069080"/>
             <a:ext cx="457200" cy="457200"/>
           </a:xfrm>
           <a:prstGeom prst="ellipse">
@@ -14425,7 +15535,7 @@
         </p:nvSpPr>
         <p:spPr>
           <a:xfrm>
-            <a:off x="6400800" y="4069080"/>
+            <a:off x="6391656" y="4069080"/>
             <a:ext cx="457200" cy="457200"/>
           </a:xfrm>
           <a:prstGeom prst="rect">
@@ -14464,8 +15574,8 @@
         </p:nvSpPr>
         <p:spPr>
           <a:xfrm>
-            <a:off x="6995160" y="3995928"/>
-            <a:ext cx="4663440" cy="2112264"/>
+            <a:off x="6986016" y="3995928"/>
+            <a:ext cx="4517136" cy="2112264"/>
           </a:xfrm>
           <a:prstGeom prst="rect">
             <a:avLst/>
@@ -14494,6 +15604,54 @@
               <a:t>Próximo: projeto final</a:t>
             </a:r>
             <a:endParaRPr lang="en-US" sz="1800" dirty="0"/>
+          </a:p>
+        </p:txBody>
+      </p:sp>
+      <p:sp>
+        <p:nvSpPr>
+          <p:cNvPr id="25" name="Slide Number Placeholder 0"/>
+          <p:cNvSpPr>
+            <a:spLocks noGrp="1"/>
+          </p:cNvSpPr>
+          <p:nvPr>
+            <p:ph type="sldNum" sz="quarter" idx="4294967295"/>
+          </p:nvPr>
+        </p:nvSpPr>
+        <p:spPr>
+          <a:xfrm>
+            <a:off x="11292840" y="6556248"/>
+            <a:ext cx="548640" cy="256032"/>
+          </a:xfrm>
+          <a:prstGeom prst="rect">
+            <a:avLst/>
+          </a:prstGeom>
+          <a:extLst>
+            <a:ext uri="{C572A759-6A51-4108-AA02-DFA0A04FC94B}">
+              <ma14:wrappingTextBoxFlag xmlns:ma14="http://schemas.microsoft.com/office/mac/drawingml/2011/main" val="0"/>
+            </a:ext>
+          </a:extLst>
+        </p:spPr>
+        <p:txBody>
+          <a:bodyPr/>
+          <a:lstStyle>
+            <a:lvl1pPr>
+              <a:defRPr sz="900">
+                <a:solidFill>
+                  <a:srgbClr val="1B3A6B"/>
+                </a:solidFill>
+                <a:latin typeface="Arial"/>
+                <a:ea typeface="Arial"/>
+                <a:cs typeface="Arial"/>
+              </a:defRPr>
+            </a:lvl1pPr>
+          </a:lstStyle>
+          <a:p>
+            <a:pPr algn="r"/>
+            <a:fld id="{F7021451-1387-4CA6-816F-3879F97B5CBC}" type="slidenum">
+              <a:rPr b="1" lang="en-US"/>
+              <a:t>26</a:t>
+            </a:fld>
+            <a:endParaRPr lang="en-US"/>
           </a:p>
         </p:txBody>
       </p:sp>
@@ -14570,7 +15728,7 @@
         </p:blipFill>
         <p:spPr>
           <a:xfrm>
-            <a:off x="411480" y="6547104"/>
+            <a:off x="548640" y="6547104"/>
             <a:ext cx="274320" cy="274320"/>
           </a:xfrm>
           <a:prstGeom prst="rect">
@@ -14586,7 +15744,7 @@
         </p:nvSpPr>
         <p:spPr>
           <a:xfrm>
-            <a:off x="749808" y="6528816"/>
+            <a:off x="886968" y="6528816"/>
             <a:ext cx="6400800" cy="310896"/>
           </a:xfrm>
           <a:prstGeom prst="rect">
@@ -14626,7 +15784,7 @@
         <p:spPr>
           <a:xfrm>
             <a:off x="7132320" y="6528816"/>
-            <a:ext cx="4663440" cy="310896"/>
+            <a:ext cx="4023360" cy="310896"/>
           </a:xfrm>
           <a:prstGeom prst="rect">
             <a:avLst/>
@@ -14664,7 +15822,7 @@
         </p:nvSpPr>
         <p:spPr>
           <a:xfrm>
-            <a:off x="411480" y="384048"/>
+            <a:off x="548640" y="384048"/>
             <a:ext cx="82296" cy="658368"/>
           </a:xfrm>
           <a:prstGeom prst="rect">
@@ -14684,7 +15842,7 @@
         </p:nvSpPr>
         <p:spPr>
           <a:xfrm>
-            <a:off x="640080" y="292608"/>
+            <a:off x="777240" y="292608"/>
             <a:ext cx="10972800" cy="274320"/>
           </a:xfrm>
           <a:prstGeom prst="rect">
@@ -14723,8 +15881,8 @@
         </p:nvSpPr>
         <p:spPr>
           <a:xfrm>
-            <a:off x="640080" y="530352"/>
-            <a:ext cx="11155680" cy="566928"/>
+            <a:off x="777240" y="530352"/>
+            <a:ext cx="10881360" cy="566928"/>
           </a:xfrm>
           <a:prstGeom prst="rect">
             <a:avLst/>
@@ -14764,8 +15922,8 @@
         </p:nvSpPr>
         <p:spPr>
           <a:xfrm>
-            <a:off x="411480" y="1325880"/>
-            <a:ext cx="5577840" cy="411480"/>
+            <a:off x="548640" y="1325880"/>
+            <a:ext cx="5394960" cy="411480"/>
           </a:xfrm>
           <a:prstGeom prst="rect">
             <a:avLst/>
@@ -14803,8 +15961,8 @@
         </p:nvSpPr>
         <p:spPr>
           <a:xfrm>
-            <a:off x="411480" y="1783080"/>
-            <a:ext cx="5577840" cy="4480560"/>
+            <a:off x="548640" y="1783080"/>
+            <a:ext cx="5394960" cy="4480560"/>
           </a:xfrm>
           <a:prstGeom prst="rect">
             <a:avLst/>
@@ -14887,8 +16045,8 @@
         </p:nvSpPr>
         <p:spPr>
           <a:xfrm>
-            <a:off x="6309360" y="1325880"/>
-            <a:ext cx="5486400" cy="4937760"/>
+            <a:off x="6172200" y="1325880"/>
+            <a:ext cx="5468112" cy="4937760"/>
           </a:xfrm>
           <a:prstGeom prst="roundRect">
             <a:avLst>
@@ -14909,8 +16067,8 @@
         </p:nvSpPr>
         <p:spPr>
           <a:xfrm>
-            <a:off x="6629400" y="1554480"/>
-            <a:ext cx="4846320" cy="4480560"/>
+            <a:off x="6492240" y="1554480"/>
+            <a:ext cx="4828032" cy="4480560"/>
           </a:xfrm>
           <a:prstGeom prst="rect">
             <a:avLst/>
@@ -14954,6 +16112,54 @@
               <a:t>Plano de negócio em uma página + matriz de riscos (10 riscos com probabilidade, impacto e mitigação) + identidade visual da sua empresa aplicada no laboratório.</a:t>
             </a:r>
             <a:endParaRPr lang="en-US" sz="1300" dirty="0"/>
+          </a:p>
+        </p:txBody>
+      </p:sp>
+      <p:sp>
+        <p:nvSpPr>
+          <p:cNvPr id="25" name="Slide Number Placeholder 0"/>
+          <p:cNvSpPr>
+            <a:spLocks noGrp="1"/>
+          </p:cNvSpPr>
+          <p:nvPr>
+            <p:ph type="sldNum" sz="quarter" idx="4294967295"/>
+          </p:nvPr>
+        </p:nvSpPr>
+        <p:spPr>
+          <a:xfrm>
+            <a:off x="11292840" y="6556248"/>
+            <a:ext cx="548640" cy="256032"/>
+          </a:xfrm>
+          <a:prstGeom prst="rect">
+            <a:avLst/>
+          </a:prstGeom>
+          <a:extLst>
+            <a:ext uri="{C572A759-6A51-4108-AA02-DFA0A04FC94B}">
+              <ma14:wrappingTextBoxFlag xmlns:ma14="http://schemas.microsoft.com/office/mac/drawingml/2011/main" val="0"/>
+            </a:ext>
+          </a:extLst>
+        </p:spPr>
+        <p:txBody>
+          <a:bodyPr/>
+          <a:lstStyle>
+            <a:lvl1pPr>
+              <a:defRPr sz="900">
+                <a:solidFill>
+                  <a:srgbClr val="1B3A6B"/>
+                </a:solidFill>
+                <a:latin typeface="Arial"/>
+                <a:ea typeface="Arial"/>
+                <a:cs typeface="Arial"/>
+              </a:defRPr>
+            </a:lvl1pPr>
+          </a:lstStyle>
+          <a:p>
+            <a:pPr algn="r"/>
+            <a:fld id="{F7021451-1387-4CA6-816F-3879F97B5CBC}" type="slidenum">
+              <a:rPr b="1" lang="en-US"/>
+              <a:t>27</a:t>
+            </a:fld>
+            <a:endParaRPr lang="en-US"/>
           </a:p>
         </p:txBody>
       </p:sp>
@@ -15030,7 +16236,7 @@
         </p:blipFill>
         <p:spPr>
           <a:xfrm>
-            <a:off x="411480" y="6547104"/>
+            <a:off x="548640" y="6547104"/>
             <a:ext cx="274320" cy="274320"/>
           </a:xfrm>
           <a:prstGeom prst="rect">
@@ -15046,7 +16252,7 @@
         </p:nvSpPr>
         <p:spPr>
           <a:xfrm>
-            <a:off x="749808" y="6528816"/>
+            <a:off x="886968" y="6528816"/>
             <a:ext cx="6400800" cy="310896"/>
           </a:xfrm>
           <a:prstGeom prst="rect">
@@ -15086,7 +16292,7 @@
         <p:spPr>
           <a:xfrm>
             <a:off x="7132320" y="6528816"/>
-            <a:ext cx="4663440" cy="310896"/>
+            <a:ext cx="4023360" cy="310896"/>
           </a:xfrm>
           <a:prstGeom prst="rect">
             <a:avLst/>
@@ -15124,7 +16330,7 @@
         </p:nvSpPr>
         <p:spPr>
           <a:xfrm>
-            <a:off x="411480" y="384048"/>
+            <a:off x="548640" y="384048"/>
             <a:ext cx="82296" cy="658368"/>
           </a:xfrm>
           <a:prstGeom prst="rect">
@@ -15144,7 +16350,7 @@
         </p:nvSpPr>
         <p:spPr>
           <a:xfrm>
-            <a:off x="640080" y="292608"/>
+            <a:off x="777240" y="292608"/>
             <a:ext cx="10972800" cy="274320"/>
           </a:xfrm>
           <a:prstGeom prst="rect">
@@ -15183,8 +16389,8 @@
         </p:nvSpPr>
         <p:spPr>
           <a:xfrm>
-            <a:off x="640080" y="530352"/>
-            <a:ext cx="11155680" cy="566928"/>
+            <a:off x="777240" y="530352"/>
+            <a:ext cx="10881360" cy="566928"/>
           </a:xfrm>
           <a:prstGeom prst="rect">
             <a:avLst/>
@@ -15224,8 +16430,8 @@
         </p:nvSpPr>
         <p:spPr>
           <a:xfrm>
-            <a:off x="411480" y="1325880"/>
-            <a:ext cx="5554980" cy="4937760"/>
+            <a:off x="548640" y="1325880"/>
+            <a:ext cx="5408676" cy="4937760"/>
           </a:xfrm>
           <a:prstGeom prst="roundRect">
             <a:avLst>
@@ -15258,8 +16464,8 @@
         </p:nvSpPr>
         <p:spPr>
           <a:xfrm>
-            <a:off x="411480" y="1325880"/>
-            <a:ext cx="5554980" cy="109728"/>
+            <a:off x="548640" y="1325880"/>
+            <a:ext cx="5408676" cy="109728"/>
           </a:xfrm>
           <a:prstGeom prst="rect">
             <a:avLst/>
@@ -15278,8 +16484,8 @@
         </p:nvSpPr>
         <p:spPr>
           <a:xfrm>
-            <a:off x="685800" y="1554480"/>
-            <a:ext cx="5006340" cy="685800"/>
+            <a:off x="822960" y="1554480"/>
+            <a:ext cx="4860036" cy="685800"/>
           </a:xfrm>
           <a:prstGeom prst="rect">
             <a:avLst/>
@@ -15319,8 +16525,8 @@
         </p:nvSpPr>
         <p:spPr>
           <a:xfrm>
-            <a:off x="685800" y="2286000"/>
-            <a:ext cx="5006340" cy="3749040"/>
+            <a:off x="822960" y="2286000"/>
+            <a:ext cx="4860036" cy="3749040"/>
           </a:xfrm>
           <a:prstGeom prst="rect">
             <a:avLst/>
@@ -15427,8 +16633,8 @@
         </p:nvSpPr>
         <p:spPr>
           <a:xfrm>
-            <a:off x="6240780" y="1325880"/>
-            <a:ext cx="5554980" cy="4937760"/>
+            <a:off x="6231636" y="1325880"/>
+            <a:ext cx="5408676" cy="4937760"/>
           </a:xfrm>
           <a:prstGeom prst="roundRect">
             <a:avLst>
@@ -15461,8 +16667,8 @@
         </p:nvSpPr>
         <p:spPr>
           <a:xfrm>
-            <a:off x="6240780" y="1325880"/>
-            <a:ext cx="5554980" cy="109728"/>
+            <a:off x="6231636" y="1325880"/>
+            <a:ext cx="5408676" cy="109728"/>
           </a:xfrm>
           <a:prstGeom prst="rect">
             <a:avLst/>
@@ -15481,8 +16687,8 @@
         </p:nvSpPr>
         <p:spPr>
           <a:xfrm>
-            <a:off x="6515100" y="1554480"/>
-            <a:ext cx="5006340" cy="685800"/>
+            <a:off x="6505956" y="1554480"/>
+            <a:ext cx="4860036" cy="685800"/>
           </a:xfrm>
           <a:prstGeom prst="rect">
             <a:avLst/>
@@ -15522,8 +16728,8 @@
         </p:nvSpPr>
         <p:spPr>
           <a:xfrm>
-            <a:off x="6515100" y="2286000"/>
-            <a:ext cx="5006340" cy="3749040"/>
+            <a:off x="6505956" y="2286000"/>
+            <a:ext cx="4860036" cy="3749040"/>
           </a:xfrm>
           <a:prstGeom prst="rect">
             <a:avLst/>
@@ -15619,6 +16825,54 @@
               <a:t>tributação adequada a cada atividade</a:t>
             </a:r>
             <a:endParaRPr lang="en-US" sz="1700" dirty="0"/>
+          </a:p>
+        </p:txBody>
+      </p:sp>
+      <p:sp>
+        <p:nvSpPr>
+          <p:cNvPr id="25" name="Slide Number Placeholder 0"/>
+          <p:cNvSpPr>
+            <a:spLocks noGrp="1"/>
+          </p:cNvSpPr>
+          <p:nvPr>
+            <p:ph type="sldNum" sz="quarter" idx="4294967295"/>
+          </p:nvPr>
+        </p:nvSpPr>
+        <p:spPr>
+          <a:xfrm>
+            <a:off x="11292840" y="6556248"/>
+            <a:ext cx="548640" cy="256032"/>
+          </a:xfrm>
+          <a:prstGeom prst="rect">
+            <a:avLst/>
+          </a:prstGeom>
+          <a:extLst>
+            <a:ext uri="{C572A759-6A51-4108-AA02-DFA0A04FC94B}">
+              <ma14:wrappingTextBoxFlag xmlns:ma14="http://schemas.microsoft.com/office/mac/drawingml/2011/main" val="0"/>
+            </a:ext>
+          </a:extLst>
+        </p:spPr>
+        <p:txBody>
+          <a:bodyPr/>
+          <a:lstStyle>
+            <a:lvl1pPr>
+              <a:defRPr sz="900">
+                <a:solidFill>
+                  <a:srgbClr val="1B3A6B"/>
+                </a:solidFill>
+                <a:latin typeface="Arial"/>
+                <a:ea typeface="Arial"/>
+                <a:cs typeface="Arial"/>
+              </a:defRPr>
+            </a:lvl1pPr>
+          </a:lstStyle>
+          <a:p>
+            <a:pPr algn="r"/>
+            <a:fld id="{F7021451-1387-4CA6-816F-3879F97B5CBC}" type="slidenum">
+              <a:rPr b="1" lang="en-US"/>
+              <a:t>3</a:t>
+            </a:fld>
+            <a:endParaRPr lang="en-US"/>
           </a:p>
         </p:txBody>
       </p:sp>
@@ -15695,7 +16949,7 @@
         </p:blipFill>
         <p:spPr>
           <a:xfrm>
-            <a:off x="411480" y="6547104"/>
+            <a:off x="548640" y="6547104"/>
             <a:ext cx="274320" cy="274320"/>
           </a:xfrm>
           <a:prstGeom prst="rect">
@@ -15711,7 +16965,7 @@
         </p:nvSpPr>
         <p:spPr>
           <a:xfrm>
-            <a:off x="749808" y="6528816"/>
+            <a:off x="886968" y="6528816"/>
             <a:ext cx="6400800" cy="310896"/>
           </a:xfrm>
           <a:prstGeom prst="rect">
@@ -15751,7 +17005,7 @@
         <p:spPr>
           <a:xfrm>
             <a:off x="7132320" y="6528816"/>
-            <a:ext cx="4663440" cy="310896"/>
+            <a:ext cx="4023360" cy="310896"/>
           </a:xfrm>
           <a:prstGeom prst="rect">
             <a:avLst/>
@@ -15789,7 +17043,7 @@
         </p:nvSpPr>
         <p:spPr>
           <a:xfrm>
-            <a:off x="411480" y="384048"/>
+            <a:off x="548640" y="384048"/>
             <a:ext cx="82296" cy="658368"/>
           </a:xfrm>
           <a:prstGeom prst="rect">
@@ -15809,7 +17063,7 @@
         </p:nvSpPr>
         <p:spPr>
           <a:xfrm>
-            <a:off x="640080" y="292608"/>
+            <a:off x="777240" y="292608"/>
             <a:ext cx="10972800" cy="274320"/>
           </a:xfrm>
           <a:prstGeom prst="rect">
@@ -15848,8 +17102,8 @@
         </p:nvSpPr>
         <p:spPr>
           <a:xfrm>
-            <a:off x="640080" y="530352"/>
-            <a:ext cx="11155680" cy="566928"/>
+            <a:off x="777240" y="530352"/>
+            <a:ext cx="10881360" cy="566928"/>
           </a:xfrm>
           <a:prstGeom prst="rect">
             <a:avLst/>
@@ -15890,7 +17144,7 @@
         <p:spPr>
           <a:xfrm>
             <a:off x="548640" y="1325880"/>
-            <a:ext cx="11155680" cy="4937760"/>
+            <a:ext cx="5486400" cy="4937760"/>
           </a:xfrm>
           <a:prstGeom prst="rect">
             <a:avLst/>
@@ -15911,7 +17165,7 @@
               <a:buNone/>
             </a:pPr>
             <a:r>
-              <a:rPr lang="en-US" sz="1400" dirty="0">
+              <a:rPr lang="en-US" sz="1800" dirty="0">
                 <a:solidFill>
                   <a:srgbClr val="1F2937"/>
                 </a:solidFill>
@@ -15921,7 +17175,7 @@
               </a:rPr>
               <a:t>☐ Contrato social da gestora (e acordo de sócios)</a:t>
             </a:r>
-            <a:endParaRPr lang="en-US" sz="1400" dirty="0"/>
+            <a:endParaRPr lang="en-US" sz="1800" dirty="0"/>
           </a:p>
           <a:p>
             <a:pPr indent="0" marL="0">
@@ -15931,7 +17185,7 @@
               <a:buNone/>
             </a:pPr>
             <a:r>
-              <a:rPr lang="en-US" sz="1400" dirty="0">
+              <a:rPr lang="en-US" sz="1800" dirty="0">
                 <a:solidFill>
                   <a:srgbClr val="1F2937"/>
                 </a:solidFill>
@@ -15941,7 +17195,7 @@
               </a:rPr>
               <a:t>☐ Constituição de cada entidade (contrato de consórcio / estatuto)</a:t>
             </a:r>
-            <a:endParaRPr lang="en-US" sz="1400" dirty="0"/>
+            <a:endParaRPr lang="en-US" sz="1800" dirty="0"/>
           </a:p>
           <a:p>
             <a:pPr indent="0" marL="0">
@@ -15951,7 +17205,7 @@
               <a:buNone/>
             </a:pPr>
             <a:r>
-              <a:rPr lang="en-US" sz="1400" dirty="0">
+              <a:rPr lang="en-US" sz="1800" dirty="0">
                 <a:solidFill>
                   <a:srgbClr val="1F2937"/>
                 </a:solidFill>
@@ -15961,7 +17215,7 @@
               </a:rPr>
               <a:t>☐ Contrato de gestão entidade ↔ gestora</a:t>
             </a:r>
-            <a:endParaRPr lang="en-US" sz="1400" dirty="0"/>
+            <a:endParaRPr lang="en-US" sz="1800" dirty="0"/>
           </a:p>
           <a:p>
             <a:pPr indent="0" marL="0">
@@ -15971,7 +17225,7 @@
               <a:buNone/>
             </a:pPr>
             <a:r>
-              <a:rPr lang="en-US" sz="1400" dirty="0">
+              <a:rPr lang="en-US" sz="1800" dirty="0">
                 <a:solidFill>
                   <a:srgbClr val="1F2937"/>
                 </a:solidFill>
@@ -15981,8 +17235,32 @@
               </a:rPr>
               <a:t>☐ Locação da usina produtor ↔ entidade</a:t>
             </a:r>
-            <a:endParaRPr lang="en-US" sz="1400" dirty="0"/>
-          </a:p>
+            <a:endParaRPr lang="en-US" sz="1800" dirty="0"/>
+          </a:p>
+        </p:txBody>
+      </p:sp>
+      <p:sp>
+        <p:nvSpPr>
+          <p:cNvPr id="10" name="Text 7"/>
+          <p:cNvSpPr/>
+          <p:nvPr/>
+        </p:nvSpPr>
+        <p:spPr>
+          <a:xfrm>
+            <a:off x="6263640" y="1325880"/>
+            <a:ext cx="5486400" cy="4937760"/>
+          </a:xfrm>
+          <a:prstGeom prst="rect">
+            <a:avLst/>
+          </a:prstGeom>
+          <a:noFill/>
+          <a:ln/>
+        </p:spPr>
+        <p:txBody>
+          <a:bodyPr wrap="square" rtlCol="0" anchor="t">
+            <a:normAutofit/>
+          </a:bodyPr>
+          <a:lstStyle/>
           <a:p>
             <a:pPr indent="0" marL="0">
               <a:spcAft>
@@ -15991,7 +17269,7 @@
               <a:buNone/>
             </a:pPr>
             <a:r>
-              <a:rPr lang="en-US" sz="1400" dirty="0">
+              <a:rPr lang="en-US" sz="1800" dirty="0">
                 <a:solidFill>
                   <a:srgbClr val="1F2937"/>
                 </a:solidFill>
@@ -16001,7 +17279,7 @@
               </a:rPr>
               <a:t>☐ Adesão/participação do cliente</a:t>
             </a:r>
-            <a:endParaRPr lang="en-US" sz="1400" dirty="0"/>
+            <a:endParaRPr lang="en-US" sz="1800" dirty="0"/>
           </a:p>
           <a:p>
             <a:pPr indent="0" marL="0">
@@ -16011,7 +17289,7 @@
               <a:buNone/>
             </a:pPr>
             <a:r>
-              <a:rPr lang="en-US" sz="1400" dirty="0">
+              <a:rPr lang="en-US" sz="1800" dirty="0">
                 <a:solidFill>
                   <a:srgbClr val="1F2937"/>
                 </a:solidFill>
@@ -16021,7 +17299,7 @@
               </a:rPr>
               <a:t>☐ O&amp;M, seguro, meio de pagamento, plataforma</a:t>
             </a:r>
-            <a:endParaRPr lang="en-US" sz="1400" dirty="0"/>
+            <a:endParaRPr lang="en-US" sz="1800" dirty="0"/>
           </a:p>
           <a:p>
             <a:pPr indent="0" marL="0">
@@ -16031,7 +17309,7 @@
               <a:buNone/>
             </a:pPr>
             <a:r>
-              <a:rPr lang="en-US" sz="1400" dirty="0">
+              <a:rPr lang="en-US" sz="1800" dirty="0">
                 <a:solidFill>
                   <a:srgbClr val="1F2937"/>
                 </a:solidFill>
@@ -16041,7 +17319,55 @@
               </a:rPr>
               <a:t>☐ Política de privacidade e termos de uso do portal</a:t>
             </a:r>
-            <a:endParaRPr lang="en-US" sz="1400" dirty="0"/>
+            <a:endParaRPr lang="en-US" sz="1800" dirty="0"/>
+          </a:p>
+        </p:txBody>
+      </p:sp>
+      <p:sp>
+        <p:nvSpPr>
+          <p:cNvPr id="25" name="Slide Number Placeholder 0"/>
+          <p:cNvSpPr>
+            <a:spLocks noGrp="1"/>
+          </p:cNvSpPr>
+          <p:nvPr>
+            <p:ph type="sldNum" sz="quarter" idx="4294967295"/>
+          </p:nvPr>
+        </p:nvSpPr>
+        <p:spPr>
+          <a:xfrm>
+            <a:off x="11292840" y="6556248"/>
+            <a:ext cx="548640" cy="256032"/>
+          </a:xfrm>
+          <a:prstGeom prst="rect">
+            <a:avLst/>
+          </a:prstGeom>
+          <a:extLst>
+            <a:ext uri="{C572A759-6A51-4108-AA02-DFA0A04FC94B}">
+              <ma14:wrappingTextBoxFlag xmlns:ma14="http://schemas.microsoft.com/office/mac/drawingml/2011/main" val="0"/>
+            </a:ext>
+          </a:extLst>
+        </p:spPr>
+        <p:txBody>
+          <a:bodyPr/>
+          <a:lstStyle>
+            <a:lvl1pPr>
+              <a:defRPr sz="900">
+                <a:solidFill>
+                  <a:srgbClr val="1B3A6B"/>
+                </a:solidFill>
+                <a:latin typeface="Arial"/>
+                <a:ea typeface="Arial"/>
+                <a:cs typeface="Arial"/>
+              </a:defRPr>
+            </a:lvl1pPr>
+          </a:lstStyle>
+          <a:p>
+            <a:pPr algn="r"/>
+            <a:fld id="{F7021451-1387-4CA6-816F-3879F97B5CBC}" type="slidenum">
+              <a:rPr b="1" lang="en-US"/>
+              <a:t>4</a:t>
+            </a:fld>
+            <a:endParaRPr lang="en-US"/>
           </a:p>
         </p:txBody>
       </p:sp>
@@ -16118,7 +17444,7 @@
         </p:blipFill>
         <p:spPr>
           <a:xfrm>
-            <a:off x="411480" y="6547104"/>
+            <a:off x="548640" y="6547104"/>
             <a:ext cx="274320" cy="274320"/>
           </a:xfrm>
           <a:prstGeom prst="rect">
@@ -16134,7 +17460,7 @@
         </p:nvSpPr>
         <p:spPr>
           <a:xfrm>
-            <a:off x="749808" y="6528816"/>
+            <a:off x="886968" y="6528816"/>
             <a:ext cx="6400800" cy="310896"/>
           </a:xfrm>
           <a:prstGeom prst="rect">
@@ -16174,7 +17500,7 @@
         <p:spPr>
           <a:xfrm>
             <a:off x="7132320" y="6528816"/>
-            <a:ext cx="4663440" cy="310896"/>
+            <a:ext cx="4023360" cy="310896"/>
           </a:xfrm>
           <a:prstGeom prst="rect">
             <a:avLst/>
@@ -16212,7 +17538,7 @@
         </p:nvSpPr>
         <p:spPr>
           <a:xfrm>
-            <a:off x="411480" y="384048"/>
+            <a:off x="548640" y="384048"/>
             <a:ext cx="82296" cy="658368"/>
           </a:xfrm>
           <a:prstGeom prst="rect">
@@ -16232,7 +17558,7 @@
         </p:nvSpPr>
         <p:spPr>
           <a:xfrm>
-            <a:off x="640080" y="292608"/>
+            <a:off x="777240" y="292608"/>
             <a:ext cx="10972800" cy="274320"/>
           </a:xfrm>
           <a:prstGeom prst="rect">
@@ -16271,8 +17597,8 @@
         </p:nvSpPr>
         <p:spPr>
           <a:xfrm>
-            <a:off x="640080" y="530352"/>
-            <a:ext cx="11155680" cy="566928"/>
+            <a:off x="777240" y="530352"/>
+            <a:ext cx="10881360" cy="566928"/>
           </a:xfrm>
           <a:prstGeom prst="rect">
             <a:avLst/>
@@ -16312,12 +17638,12 @@
         </p:nvSpPr>
         <p:spPr>
           <a:xfrm>
-            <a:off x="411480" y="1325880"/>
-            <a:ext cx="3642360" cy="4892040"/>
+            <a:off x="548640" y="1325880"/>
+            <a:ext cx="3544824" cy="4892040"/>
           </a:xfrm>
           <a:prstGeom prst="roundRect">
             <a:avLst>
-              <a:gd name="adj" fmla="val 2008"/>
+              <a:gd name="adj" fmla="val 2064"/>
             </a:avLst>
           </a:prstGeom>
           <a:solidFill>
@@ -16346,7 +17672,7 @@
         </p:nvSpPr>
         <p:spPr>
           <a:xfrm>
-            <a:off x="594360" y="1508760"/>
+            <a:off x="731520" y="1508760"/>
             <a:ext cx="457200" cy="457200"/>
           </a:xfrm>
           <a:prstGeom prst="ellipse">
@@ -16366,7 +17692,7 @@
         </p:nvSpPr>
         <p:spPr>
           <a:xfrm>
-            <a:off x="594360" y="1508760"/>
+            <a:off x="731520" y="1508760"/>
             <a:ext cx="457200" cy="457200"/>
           </a:xfrm>
           <a:prstGeom prst="rect">
@@ -16405,8 +17731,8 @@
         </p:nvSpPr>
         <p:spPr>
           <a:xfrm>
-            <a:off x="1188720" y="1435608"/>
-            <a:ext cx="2727960" cy="4672584"/>
+            <a:off x="1325880" y="1435608"/>
+            <a:ext cx="2630424" cy="4672584"/>
           </a:xfrm>
           <a:prstGeom prst="rect">
             <a:avLst/>
@@ -16446,12 +17772,12 @@
         </p:nvSpPr>
         <p:spPr>
           <a:xfrm>
-            <a:off x="4282440" y="1325880"/>
-            <a:ext cx="3642360" cy="4892040"/>
+            <a:off x="4322064" y="1325880"/>
+            <a:ext cx="3544824" cy="4892040"/>
           </a:xfrm>
           <a:prstGeom prst="roundRect">
             <a:avLst>
-              <a:gd name="adj" fmla="val 2008"/>
+              <a:gd name="adj" fmla="val 2064"/>
             </a:avLst>
           </a:prstGeom>
           <a:solidFill>
@@ -16480,7 +17806,7 @@
         </p:nvSpPr>
         <p:spPr>
           <a:xfrm>
-            <a:off x="4465320" y="1508760"/>
+            <a:off x="4504944" y="1508760"/>
             <a:ext cx="457200" cy="457200"/>
           </a:xfrm>
           <a:prstGeom prst="ellipse">
@@ -16500,7 +17826,7 @@
         </p:nvSpPr>
         <p:spPr>
           <a:xfrm>
-            <a:off x="4465320" y="1508760"/>
+            <a:off x="4504944" y="1508760"/>
             <a:ext cx="457200" cy="457200"/>
           </a:xfrm>
           <a:prstGeom prst="rect">
@@ -16539,8 +17865,8 @@
         </p:nvSpPr>
         <p:spPr>
           <a:xfrm>
-            <a:off x="5059680" y="1435608"/>
-            <a:ext cx="2727960" cy="4672584"/>
+            <a:off x="5099304" y="1435608"/>
+            <a:ext cx="2630424" cy="4672584"/>
           </a:xfrm>
           <a:prstGeom prst="rect">
             <a:avLst/>
@@ -16580,12 +17906,12 @@
         </p:nvSpPr>
         <p:spPr>
           <a:xfrm>
-            <a:off x="8153400" y="1325880"/>
-            <a:ext cx="3642360" cy="4892040"/>
+            <a:off x="8095488" y="1325880"/>
+            <a:ext cx="3544824" cy="4892040"/>
           </a:xfrm>
           <a:prstGeom prst="roundRect">
             <a:avLst>
-              <a:gd name="adj" fmla="val 2008"/>
+              <a:gd name="adj" fmla="val 2064"/>
             </a:avLst>
           </a:prstGeom>
           <a:solidFill>
@@ -16614,7 +17940,7 @@
         </p:nvSpPr>
         <p:spPr>
           <a:xfrm>
-            <a:off x="8336280" y="1508760"/>
+            <a:off x="8278368" y="1508760"/>
             <a:ext cx="457200" cy="457200"/>
           </a:xfrm>
           <a:prstGeom prst="ellipse">
@@ -16634,7 +17960,7 @@
         </p:nvSpPr>
         <p:spPr>
           <a:xfrm>
-            <a:off x="8336280" y="1508760"/>
+            <a:off x="8278368" y="1508760"/>
             <a:ext cx="457200" cy="457200"/>
           </a:xfrm>
           <a:prstGeom prst="rect">
@@ -16673,8 +17999,8 @@
         </p:nvSpPr>
         <p:spPr>
           <a:xfrm>
-            <a:off x="8930640" y="1435608"/>
-            <a:ext cx="2727960" cy="4672584"/>
+            <a:off x="8872728" y="1435608"/>
+            <a:ext cx="2630424" cy="4672584"/>
           </a:xfrm>
           <a:prstGeom prst="rect">
             <a:avLst/>
@@ -16703,6 +18029,54 @@
               <a:t>atenção a conflito de interesse com o investidor</a:t>
             </a:r>
             <a:endParaRPr lang="en-US" sz="1800" dirty="0"/>
+          </a:p>
+        </p:txBody>
+      </p:sp>
+      <p:sp>
+        <p:nvSpPr>
+          <p:cNvPr id="25" name="Slide Number Placeholder 0"/>
+          <p:cNvSpPr>
+            <a:spLocks noGrp="1"/>
+          </p:cNvSpPr>
+          <p:nvPr>
+            <p:ph type="sldNum" sz="quarter" idx="4294967295"/>
+          </p:nvPr>
+        </p:nvSpPr>
+        <p:spPr>
+          <a:xfrm>
+            <a:off x="11292840" y="6556248"/>
+            <a:ext cx="548640" cy="256032"/>
+          </a:xfrm>
+          <a:prstGeom prst="rect">
+            <a:avLst/>
+          </a:prstGeom>
+          <a:extLst>
+            <a:ext uri="{C572A759-6A51-4108-AA02-DFA0A04FC94B}">
+              <ma14:wrappingTextBoxFlag xmlns:ma14="http://schemas.microsoft.com/office/mac/drawingml/2011/main" val="0"/>
+            </a:ext>
+          </a:extLst>
+        </p:spPr>
+        <p:txBody>
+          <a:bodyPr/>
+          <a:lstStyle>
+            <a:lvl1pPr>
+              <a:defRPr sz="900">
+                <a:solidFill>
+                  <a:srgbClr val="1B3A6B"/>
+                </a:solidFill>
+                <a:latin typeface="Arial"/>
+                <a:ea typeface="Arial"/>
+                <a:cs typeface="Arial"/>
+              </a:defRPr>
+            </a:lvl1pPr>
+          </a:lstStyle>
+          <a:p>
+            <a:pPr algn="r"/>
+            <a:fld id="{F7021451-1387-4CA6-816F-3879F97B5CBC}" type="slidenum">
+              <a:rPr b="1" lang="en-US"/>
+              <a:t>5</a:t>
+            </a:fld>
+            <a:endParaRPr lang="en-US"/>
           </a:p>
         </p:txBody>
       </p:sp>
@@ -16779,7 +18153,7 @@
         </p:blipFill>
         <p:spPr>
           <a:xfrm>
-            <a:off x="411480" y="6547104"/>
+            <a:off x="548640" y="6547104"/>
             <a:ext cx="274320" cy="274320"/>
           </a:xfrm>
           <a:prstGeom prst="rect">
@@ -16795,7 +18169,7 @@
         </p:nvSpPr>
         <p:spPr>
           <a:xfrm>
-            <a:off x="749808" y="6528816"/>
+            <a:off x="886968" y="6528816"/>
             <a:ext cx="6400800" cy="310896"/>
           </a:xfrm>
           <a:prstGeom prst="rect">
@@ -16835,7 +18209,7 @@
         <p:spPr>
           <a:xfrm>
             <a:off x="7132320" y="6528816"/>
-            <a:ext cx="4663440" cy="310896"/>
+            <a:ext cx="4023360" cy="310896"/>
           </a:xfrm>
           <a:prstGeom prst="rect">
             <a:avLst/>
@@ -16873,7 +18247,7 @@
         </p:nvSpPr>
         <p:spPr>
           <a:xfrm>
-            <a:off x="411480" y="384048"/>
+            <a:off x="548640" y="384048"/>
             <a:ext cx="82296" cy="658368"/>
           </a:xfrm>
           <a:prstGeom prst="rect">
@@ -16893,7 +18267,7 @@
         </p:nvSpPr>
         <p:spPr>
           <a:xfrm>
-            <a:off x="640080" y="292608"/>
+            <a:off x="777240" y="292608"/>
             <a:ext cx="10972800" cy="274320"/>
           </a:xfrm>
           <a:prstGeom prst="rect">
@@ -16932,8 +18306,8 @@
         </p:nvSpPr>
         <p:spPr>
           <a:xfrm>
-            <a:off x="640080" y="530352"/>
-            <a:ext cx="11155680" cy="566928"/>
+            <a:off x="777240" y="530352"/>
+            <a:ext cx="10881360" cy="566928"/>
           </a:xfrm>
           <a:prstGeom prst="rect">
             <a:avLst/>
@@ -16973,8 +18347,8 @@
         </p:nvSpPr>
         <p:spPr>
           <a:xfrm>
-            <a:off x="411480" y="1325880"/>
-            <a:ext cx="3642360" cy="2331720"/>
+            <a:off x="548640" y="1325880"/>
+            <a:ext cx="3544824" cy="2331720"/>
           </a:xfrm>
           <a:prstGeom prst="roundRect">
             <a:avLst>
@@ -17007,7 +18381,7 @@
         </p:nvSpPr>
         <p:spPr>
           <a:xfrm>
-            <a:off x="594360" y="1508760"/>
+            <a:off x="731520" y="1508760"/>
             <a:ext cx="457200" cy="457200"/>
           </a:xfrm>
           <a:prstGeom prst="ellipse">
@@ -17027,7 +18401,7 @@
         </p:nvSpPr>
         <p:spPr>
           <a:xfrm>
-            <a:off x="594360" y="1508760"/>
+            <a:off x="731520" y="1508760"/>
             <a:ext cx="457200" cy="457200"/>
           </a:xfrm>
           <a:prstGeom prst="rect">
@@ -17066,8 +18440,8 @@
         </p:nvSpPr>
         <p:spPr>
           <a:xfrm>
-            <a:off x="1188720" y="1435608"/>
-            <a:ext cx="2727960" cy="2112264"/>
+            <a:off x="1325880" y="1435608"/>
+            <a:ext cx="2630424" cy="2112264"/>
           </a:xfrm>
           <a:prstGeom prst="rect">
             <a:avLst/>
@@ -17107,8 +18481,8 @@
         </p:nvSpPr>
         <p:spPr>
           <a:xfrm>
-            <a:off x="4282440" y="1325880"/>
-            <a:ext cx="3642360" cy="2331720"/>
+            <a:off x="4322064" y="1325880"/>
+            <a:ext cx="3544824" cy="2331720"/>
           </a:xfrm>
           <a:prstGeom prst="roundRect">
             <a:avLst>
@@ -17141,7 +18515,7 @@
         </p:nvSpPr>
         <p:spPr>
           <a:xfrm>
-            <a:off x="4465320" y="1508760"/>
+            <a:off x="4504944" y="1508760"/>
             <a:ext cx="457200" cy="457200"/>
           </a:xfrm>
           <a:prstGeom prst="ellipse">
@@ -17161,7 +18535,7 @@
         </p:nvSpPr>
         <p:spPr>
           <a:xfrm>
-            <a:off x="4465320" y="1508760"/>
+            <a:off x="4504944" y="1508760"/>
             <a:ext cx="457200" cy="457200"/>
           </a:xfrm>
           <a:prstGeom prst="rect">
@@ -17200,8 +18574,8 @@
         </p:nvSpPr>
         <p:spPr>
           <a:xfrm>
-            <a:off x="5059680" y="1435608"/>
-            <a:ext cx="2727960" cy="2112264"/>
+            <a:off x="5099304" y="1435608"/>
+            <a:ext cx="2630424" cy="2112264"/>
           </a:xfrm>
           <a:prstGeom prst="rect">
             <a:avLst/>
@@ -17241,8 +18615,8 @@
         </p:nvSpPr>
         <p:spPr>
           <a:xfrm>
-            <a:off x="8153400" y="1325880"/>
-            <a:ext cx="3642360" cy="2331720"/>
+            <a:off x="8095488" y="1325880"/>
+            <a:ext cx="3544824" cy="2331720"/>
           </a:xfrm>
           <a:prstGeom prst="roundRect">
             <a:avLst>
@@ -17275,7 +18649,7 @@
         </p:nvSpPr>
         <p:spPr>
           <a:xfrm>
-            <a:off x="8336280" y="1508760"/>
+            <a:off x="8278368" y="1508760"/>
             <a:ext cx="457200" cy="457200"/>
           </a:xfrm>
           <a:prstGeom prst="ellipse">
@@ -17295,7 +18669,7 @@
         </p:nvSpPr>
         <p:spPr>
           <a:xfrm>
-            <a:off x="8336280" y="1508760"/>
+            <a:off x="8278368" y="1508760"/>
             <a:ext cx="457200" cy="457200"/>
           </a:xfrm>
           <a:prstGeom prst="rect">
@@ -17334,8 +18708,8 @@
         </p:nvSpPr>
         <p:spPr>
           <a:xfrm>
-            <a:off x="8930640" y="1435608"/>
-            <a:ext cx="2727960" cy="2112264"/>
+            <a:off x="8872728" y="1435608"/>
+            <a:ext cx="2630424" cy="2112264"/>
           </a:xfrm>
           <a:prstGeom prst="rect">
             <a:avLst/>
@@ -17375,8 +18749,8 @@
         </p:nvSpPr>
         <p:spPr>
           <a:xfrm>
-            <a:off x="411480" y="3886200"/>
-            <a:ext cx="3642360" cy="2331720"/>
+            <a:off x="548640" y="3886200"/>
+            <a:ext cx="3544824" cy="2331720"/>
           </a:xfrm>
           <a:prstGeom prst="roundRect">
             <a:avLst>
@@ -17409,7 +18783,7 @@
         </p:nvSpPr>
         <p:spPr>
           <a:xfrm>
-            <a:off x="594360" y="4069080"/>
+            <a:off x="731520" y="4069080"/>
             <a:ext cx="457200" cy="457200"/>
           </a:xfrm>
           <a:prstGeom prst="ellipse">
@@ -17429,7 +18803,7 @@
         </p:nvSpPr>
         <p:spPr>
           <a:xfrm>
-            <a:off x="594360" y="4069080"/>
+            <a:off x="731520" y="4069080"/>
             <a:ext cx="457200" cy="457200"/>
           </a:xfrm>
           <a:prstGeom prst="rect">
@@ -17468,8 +18842,8 @@
         </p:nvSpPr>
         <p:spPr>
           <a:xfrm>
-            <a:off x="1188720" y="3995928"/>
-            <a:ext cx="2727960" cy="2112264"/>
+            <a:off x="1325880" y="3995928"/>
+            <a:ext cx="2630424" cy="2112264"/>
           </a:xfrm>
           <a:prstGeom prst="rect">
             <a:avLst/>
@@ -17509,8 +18883,8 @@
         </p:nvSpPr>
         <p:spPr>
           <a:xfrm>
-            <a:off x="4282440" y="3886200"/>
-            <a:ext cx="3642360" cy="2331720"/>
+            <a:off x="4322064" y="3886200"/>
+            <a:ext cx="3544824" cy="2331720"/>
           </a:xfrm>
           <a:prstGeom prst="roundRect">
             <a:avLst>
@@ -17543,7 +18917,7 @@
         </p:nvSpPr>
         <p:spPr>
           <a:xfrm>
-            <a:off x="4465320" y="4069080"/>
+            <a:off x="4504944" y="4069080"/>
             <a:ext cx="457200" cy="457200"/>
           </a:xfrm>
           <a:prstGeom prst="ellipse">
@@ -17563,7 +18937,7 @@
         </p:nvSpPr>
         <p:spPr>
           <a:xfrm>
-            <a:off x="4465320" y="4069080"/>
+            <a:off x="4504944" y="4069080"/>
             <a:ext cx="457200" cy="457200"/>
           </a:xfrm>
           <a:prstGeom prst="rect">
@@ -17602,8 +18976,8 @@
         </p:nvSpPr>
         <p:spPr>
           <a:xfrm>
-            <a:off x="5059680" y="3995928"/>
-            <a:ext cx="2727960" cy="2112264"/>
+            <a:off x="5099304" y="3995928"/>
+            <a:ext cx="2630424" cy="2112264"/>
           </a:xfrm>
           <a:prstGeom prst="rect">
             <a:avLst/>
@@ -17632,6 +19006,54 @@
               <a:t>advogado especializado</a:t>
             </a:r>
             <a:endParaRPr lang="en-US" sz="1800" dirty="0"/>
+          </a:p>
+        </p:txBody>
+      </p:sp>
+      <p:sp>
+        <p:nvSpPr>
+          <p:cNvPr id="25" name="Slide Number Placeholder 0"/>
+          <p:cNvSpPr>
+            <a:spLocks noGrp="1"/>
+          </p:cNvSpPr>
+          <p:nvPr>
+            <p:ph type="sldNum" sz="quarter" idx="4294967295"/>
+          </p:nvPr>
+        </p:nvSpPr>
+        <p:spPr>
+          <a:xfrm>
+            <a:off x="11292840" y="6556248"/>
+            <a:ext cx="548640" cy="256032"/>
+          </a:xfrm>
+          <a:prstGeom prst="rect">
+            <a:avLst/>
+          </a:prstGeom>
+          <a:extLst>
+            <a:ext uri="{C572A759-6A51-4108-AA02-DFA0A04FC94B}">
+              <ma14:wrappingTextBoxFlag xmlns:ma14="http://schemas.microsoft.com/office/mac/drawingml/2011/main" val="0"/>
+            </a:ext>
+          </a:extLst>
+        </p:spPr>
+        <p:txBody>
+          <a:bodyPr/>
+          <a:lstStyle>
+            <a:lvl1pPr>
+              <a:defRPr sz="900">
+                <a:solidFill>
+                  <a:srgbClr val="1B3A6B"/>
+                </a:solidFill>
+                <a:latin typeface="Arial"/>
+                <a:ea typeface="Arial"/>
+                <a:cs typeface="Arial"/>
+              </a:defRPr>
+            </a:lvl1pPr>
+          </a:lstStyle>
+          <a:p>
+            <a:pPr algn="r"/>
+            <a:fld id="{F7021451-1387-4CA6-816F-3879F97B5CBC}" type="slidenum">
+              <a:rPr b="1" lang="en-US"/>
+              <a:t>6</a:t>
+            </a:fld>
+            <a:endParaRPr lang="en-US"/>
           </a:p>
         </p:txBody>
       </p:sp>
@@ -17695,6 +19117,45 @@
         </p:nvSpPr>
         <p:spPr>
           <a:xfrm>
+            <a:off x="457200" y="548640"/>
+            <a:ext cx="3474720" cy="1737360"/>
+          </a:xfrm>
+          <a:prstGeom prst="rect">
+            <a:avLst/>
+          </a:prstGeom>
+          <a:noFill/>
+          <a:ln/>
+        </p:spPr>
+        <p:txBody>
+          <a:bodyPr wrap="square" rtlCol="0" anchor="ctr"/>
+          <a:lstStyle/>
+          <a:p>
+            <a:pPr indent="0" marL="0">
+              <a:buNone/>
+            </a:pPr>
+            <a:r>
+              <a:rPr lang="en-US" sz="11000" b="1" dirty="0">
+                <a:solidFill>
+                  <a:srgbClr val="11396F"/>
+                </a:solidFill>
+                <a:latin typeface="Arial" pitchFamily="34" charset="0"/>
+                <a:ea typeface="Arial" pitchFamily="34" charset="-122"/>
+                <a:cs typeface="Arial" pitchFamily="34" charset="-120"/>
+              </a:rPr>
+              <a:t>02</a:t>
+            </a:r>
+            <a:endParaRPr lang="en-US" sz="11000" dirty="0"/>
+          </a:p>
+        </p:txBody>
+      </p:sp>
+      <p:sp>
+        <p:nvSpPr>
+          <p:cNvPr id="4" name="Text 2"/>
+          <p:cNvSpPr/>
+          <p:nvPr/>
+        </p:nvSpPr>
+        <p:spPr>
+          <a:xfrm>
             <a:off x="548640" y="2194560"/>
             <a:ext cx="3291840" cy="548640"/>
           </a:xfrm>
@@ -17728,7 +19189,46 @@
       </p:sp>
       <p:sp>
         <p:nvSpPr>
-          <p:cNvPr id="4" name="Text 2"/>
+          <p:cNvPr id="5" name="Text 3"/>
+          <p:cNvSpPr/>
+          <p:nvPr/>
+        </p:nvSpPr>
+        <p:spPr>
+          <a:xfrm>
+            <a:off x="548640" y="3200400"/>
+            <a:ext cx="3383280" cy="457200"/>
+          </a:xfrm>
+          <a:prstGeom prst="rect">
+            <a:avLst/>
+          </a:prstGeom>
+          <a:noFill/>
+          <a:ln/>
+        </p:spPr>
+        <p:txBody>
+          <a:bodyPr wrap="square" rtlCol="0" anchor="ctr"/>
+          <a:lstStyle/>
+          <a:p>
+            <a:pPr indent="0" marL="0">
+              <a:buNone/>
+            </a:pPr>
+            <a:r>
+              <a:rPr lang="en-US" sz="1100" dirty="0">
+                <a:solidFill>
+                  <a:srgbClr val="C7D2E3"/>
+                </a:solidFill>
+                <a:latin typeface="Arial" pitchFamily="34" charset="0"/>
+                <a:ea typeface="Arial" pitchFamily="34" charset="-122"/>
+                <a:cs typeface="Arial" pitchFamily="34" charset="-120"/>
+              </a:rPr>
+              <a:t>M11 · Etapa 4 · Gestão e estratégia</a:t>
+            </a:r>
+            <a:endParaRPr lang="en-US" sz="1100" dirty="0"/>
+          </a:p>
+        </p:txBody>
+      </p:sp>
+      <p:sp>
+        <p:nvSpPr>
+          <p:cNvPr id="6" name="Text 4"/>
           <p:cNvSpPr/>
           <p:nvPr/>
         </p:nvSpPr>
@@ -17767,7 +19267,7 @@
       </p:sp>
       <p:pic>
         <p:nvPicPr>
-          <p:cNvPr id="5" name="Image 0" descr="/www/wwwroot/rexar/gdsolar/docs/curso/slides/assets/logo-gdsolar.png">    </p:cNvPr>
+          <p:cNvPr id="7" name="Image 0" descr="/www/wwwroot/rexar/gdsolar/docs/curso/slides/assets/logo-gdsolar.png">    </p:cNvPr>
           <p:cNvPicPr>
             <a:picLocks noChangeAspect="1"/>
           </p:cNvPicPr>
@@ -17791,7 +19291,7 @@
       </p:pic>
       <p:sp>
         <p:nvSpPr>
-          <p:cNvPr id="6" name="Text 3"/>
+          <p:cNvPr id="8" name="Text 5"/>
           <p:cNvSpPr/>
           <p:nvPr/>
         </p:nvSpPr>
@@ -17832,7 +19332,7 @@
       </p:sp>
       <p:sp>
         <p:nvSpPr>
-          <p:cNvPr id="7" name="Text 4"/>
+          <p:cNvPr id="9" name="Text 6"/>
           <p:cNvSpPr/>
           <p:nvPr/>
         </p:nvSpPr>
@@ -17873,7 +19373,7 @@
       </p:sp>
       <p:sp>
         <p:nvSpPr>
-          <p:cNvPr id="8" name="Text 5"/>
+          <p:cNvPr id="10" name="Text 7"/>
           <p:cNvSpPr/>
           <p:nvPr/>
         </p:nvSpPr>
@@ -18052,7 +19552,7 @@
         </p:blipFill>
         <p:spPr>
           <a:xfrm>
-            <a:off x="411480" y="6547104"/>
+            <a:off x="548640" y="6547104"/>
             <a:ext cx="274320" cy="274320"/>
           </a:xfrm>
           <a:prstGeom prst="rect">
@@ -18068,7 +19568,7 @@
         </p:nvSpPr>
         <p:spPr>
           <a:xfrm>
-            <a:off x="749808" y="6528816"/>
+            <a:off x="886968" y="6528816"/>
             <a:ext cx="6400800" cy="310896"/>
           </a:xfrm>
           <a:prstGeom prst="rect">
@@ -18108,7 +19608,7 @@
         <p:spPr>
           <a:xfrm>
             <a:off x="7132320" y="6528816"/>
-            <a:ext cx="4663440" cy="310896"/>
+            <a:ext cx="4023360" cy="310896"/>
           </a:xfrm>
           <a:prstGeom prst="rect">
             <a:avLst/>
@@ -18146,7 +19646,7 @@
         </p:nvSpPr>
         <p:spPr>
           <a:xfrm>
-            <a:off x="411480" y="384048"/>
+            <a:off x="548640" y="384048"/>
             <a:ext cx="82296" cy="658368"/>
           </a:xfrm>
           <a:prstGeom prst="rect">
@@ -18166,7 +19666,7 @@
         </p:nvSpPr>
         <p:spPr>
           <a:xfrm>
-            <a:off x="640080" y="292608"/>
+            <a:off x="777240" y="292608"/>
             <a:ext cx="10972800" cy="274320"/>
           </a:xfrm>
           <a:prstGeom prst="rect">
@@ -18205,8 +19705,8 @@
         </p:nvSpPr>
         <p:spPr>
           <a:xfrm>
-            <a:off x="640080" y="530352"/>
-            <a:ext cx="11155680" cy="566928"/>
+            <a:off x="777240" y="530352"/>
+            <a:ext cx="10881360" cy="566928"/>
           </a:xfrm>
           <a:prstGeom prst="rect">
             <a:avLst/>
@@ -18246,12 +19746,12 @@
         </p:nvSpPr>
         <p:spPr>
           <a:xfrm>
-            <a:off x="411480" y="1325880"/>
-            <a:ext cx="3611880" cy="4937760"/>
+            <a:off x="548640" y="1325880"/>
+            <a:ext cx="3514344" cy="4937760"/>
           </a:xfrm>
           <a:prstGeom prst="roundRect">
             <a:avLst>
-              <a:gd name="adj" fmla="val 2025"/>
+              <a:gd name="adj" fmla="val 2082"/>
             </a:avLst>
           </a:prstGeom>
           <a:solidFill>
@@ -18280,8 +19780,8 @@
         </p:nvSpPr>
         <p:spPr>
           <a:xfrm>
-            <a:off x="411480" y="1325880"/>
-            <a:ext cx="3611880" cy="109728"/>
+            <a:off x="548640" y="1325880"/>
+            <a:ext cx="3514344" cy="109728"/>
           </a:xfrm>
           <a:prstGeom prst="rect">
             <a:avLst/>
@@ -18300,8 +19800,8 @@
         </p:nvSpPr>
         <p:spPr>
           <a:xfrm>
-            <a:off x="685800" y="1554480"/>
-            <a:ext cx="3063240" cy="685800"/>
+            <a:off x="822960" y="1554480"/>
+            <a:ext cx="2965704" cy="685800"/>
           </a:xfrm>
           <a:prstGeom prst="rect">
             <a:avLst/>
@@ -18341,8 +19841,8 @@
         </p:nvSpPr>
         <p:spPr>
           <a:xfrm>
-            <a:off x="685800" y="2286000"/>
-            <a:ext cx="3063240" cy="3749040"/>
+            <a:off x="822960" y="2286000"/>
+            <a:ext cx="2965704" cy="3749040"/>
           </a:xfrm>
           <a:prstGeom prst="rect">
             <a:avLst/>
@@ -18364,7 +19864,7 @@
               <a:buChar char="●"/>
             </a:pPr>
             <a:r>
-              <a:rPr lang="en-US" sz="1200" dirty="0">
+              <a:rPr lang="en-US" sz="1700" dirty="0">
                 <a:solidFill>
                   <a:srgbClr val="1F2937"/>
                 </a:solidFill>
@@ -18374,7 +19874,7 @@
               </a:rPr>
               <a:t>PIS/COFINS: alíquota zero sobre a energia compensada (Lei 13.169/2015)</a:t>
             </a:r>
-            <a:endParaRPr lang="en-US" sz="1200" dirty="0"/>
+            <a:endParaRPr lang="en-US" sz="1700" dirty="0"/>
           </a:p>
           <a:p>
             <a:pPr marL="342900" indent="-342900">
@@ -18385,7 +19885,7 @@
               <a:buChar char="●"/>
             </a:pPr>
             <a:r>
-              <a:rPr lang="en-US" sz="1200" dirty="0">
+              <a:rPr lang="en-US" sz="1700" dirty="0">
                 <a:solidFill>
                   <a:srgbClr val="1F2937"/>
                 </a:solidFill>
@@ -18395,7 +19895,7 @@
               </a:rPr>
               <a:t>ICMS: isenção sobre a energia compensada pelo Convênio ICMS 16/2015, conforme adesão e condições de cada estado</a:t>
             </a:r>
-            <a:endParaRPr lang="en-US" sz="1200" dirty="0"/>
+            <a:endParaRPr lang="en-US" sz="1700" dirty="0"/>
           </a:p>
           <a:p>
             <a:pPr marL="342900" indent="-342900">
@@ -18406,7 +19906,7 @@
               <a:buChar char="●"/>
             </a:pPr>
             <a:r>
-              <a:rPr lang="en-US" sz="1200" dirty="0">
+              <a:rPr lang="en-US" sz="1700" dirty="0">
                 <a:solidFill>
                   <a:srgbClr val="1F2937"/>
                 </a:solidFill>
@@ -18416,7 +19916,7 @@
               </a:rPr>
               <a:t>Parcela não compensada (ex.: Fio B, mínimo): tributada normalmente</a:t>
             </a:r>
-            <a:endParaRPr lang="en-US" sz="1200" dirty="0"/>
+            <a:endParaRPr lang="en-US" sz="1700" dirty="0"/>
           </a:p>
         </p:txBody>
       </p:sp>
@@ -18428,12 +19928,12 @@
         </p:nvSpPr>
         <p:spPr>
           <a:xfrm>
-            <a:off x="4297680" y="1325880"/>
-            <a:ext cx="3611880" cy="4937760"/>
+            <a:off x="4337304" y="1325880"/>
+            <a:ext cx="3514344" cy="4937760"/>
           </a:xfrm>
           <a:prstGeom prst="roundRect">
             <a:avLst>
-              <a:gd name="adj" fmla="val 2025"/>
+              <a:gd name="adj" fmla="val 2082"/>
             </a:avLst>
           </a:prstGeom>
           <a:solidFill>
@@ -18462,8 +19962,8 @@
         </p:nvSpPr>
         <p:spPr>
           <a:xfrm>
-            <a:off x="4297680" y="1325880"/>
-            <a:ext cx="3611880" cy="109728"/>
+            <a:off x="4337304" y="1325880"/>
+            <a:ext cx="3514344" cy="109728"/>
           </a:xfrm>
           <a:prstGeom prst="rect">
             <a:avLst/>
@@ -18482,8 +19982,8 @@
         </p:nvSpPr>
         <p:spPr>
           <a:xfrm>
-            <a:off x="4572000" y="1554480"/>
-            <a:ext cx="3063240" cy="685800"/>
+            <a:off x="4611624" y="1554480"/>
+            <a:ext cx="2965704" cy="685800"/>
           </a:xfrm>
           <a:prstGeom prst="rect">
             <a:avLst/>
@@ -18523,8 +20023,8 @@
         </p:nvSpPr>
         <p:spPr>
           <a:xfrm>
-            <a:off x="4572000" y="2286000"/>
-            <a:ext cx="3063240" cy="3749040"/>
+            <a:off x="4611624" y="2286000"/>
+            <a:ext cx="2965704" cy="3749040"/>
           </a:xfrm>
           <a:prstGeom prst="rect">
             <a:avLst/>
@@ -18546,7 +20046,7 @@
               <a:buChar char="●"/>
             </a:pPr>
             <a:r>
-              <a:rPr lang="en-US" sz="1200" dirty="0">
+              <a:rPr lang="en-US" sz="1600" dirty="0">
                 <a:solidFill>
                   <a:srgbClr val="1F2937"/>
                 </a:solidFill>
@@ -18556,7 +20056,7 @@
               </a:rPr>
               <a:t>Simples Nacional: guia única; atenção ao anexo e ao fator R para serviços</a:t>
             </a:r>
-            <a:endParaRPr lang="en-US" sz="1200" dirty="0"/>
+            <a:endParaRPr lang="en-US" sz="1600" dirty="0"/>
           </a:p>
           <a:p>
             <a:pPr marL="342900" indent="-342900">
@@ -18567,7 +20067,7 @@
               <a:buChar char="●"/>
             </a:pPr>
             <a:r>
-              <a:rPr lang="en-US" sz="1200" dirty="0">
+              <a:rPr lang="en-US" sz="1600" dirty="0">
                 <a:solidFill>
                   <a:srgbClr val="1F2937"/>
                 </a:solidFill>
@@ -18577,7 +20077,7 @@
               </a:rPr>
               <a:t>Lucro Presumido: IRPJ/CSLL sobre base presumida de serviços + PIS/COFINS cumulativos + ISS</a:t>
             </a:r>
-            <a:endParaRPr lang="en-US" sz="1200" dirty="0"/>
+            <a:endParaRPr lang="en-US" sz="1600" dirty="0"/>
           </a:p>
           <a:p>
             <a:pPr marL="342900" indent="-342900">
@@ -18588,7 +20088,7 @@
               <a:buChar char="●"/>
             </a:pPr>
             <a:r>
-              <a:rPr lang="en-US" sz="1200" dirty="0">
+              <a:rPr lang="en-US" sz="1600" dirty="0">
                 <a:solidFill>
                   <a:srgbClr val="1F2937"/>
                 </a:solidFill>
@@ -18598,7 +20098,7 @@
               </a:rPr>
               <a:t>Lucro Real: para margens baixas/estruturas maiores</a:t>
             </a:r>
-            <a:endParaRPr lang="en-US" sz="1200" dirty="0"/>
+            <a:endParaRPr lang="en-US" sz="1600" dirty="0"/>
           </a:p>
           <a:p>
             <a:pPr marL="342900" indent="-342900">
@@ -18609,7 +20109,7 @@
               <a:buChar char="●"/>
             </a:pPr>
             <a:r>
-              <a:rPr lang="en-US" sz="1200" dirty="0">
+              <a:rPr lang="en-US" sz="1600" dirty="0">
                 <a:solidFill>
                   <a:srgbClr val="1F2937"/>
                 </a:solidFill>
@@ -18619,7 +20119,7 @@
               </a:rPr>
               <a:t>ISS municipal sobre a taxa de gestão (alíquota do município)</a:t>
             </a:r>
-            <a:endParaRPr lang="en-US" sz="1200" dirty="0"/>
+            <a:endParaRPr lang="en-US" sz="1600" dirty="0"/>
           </a:p>
         </p:txBody>
       </p:sp>
@@ -18631,12 +20131,12 @@
         </p:nvSpPr>
         <p:spPr>
           <a:xfrm>
-            <a:off x="8183880" y="1325880"/>
-            <a:ext cx="3611880" cy="4937760"/>
+            <a:off x="8125968" y="1325880"/>
+            <a:ext cx="3514344" cy="4937760"/>
           </a:xfrm>
           <a:prstGeom prst="roundRect">
             <a:avLst>
-              <a:gd name="adj" fmla="val 2025"/>
+              <a:gd name="adj" fmla="val 2082"/>
             </a:avLst>
           </a:prstGeom>
           <a:solidFill>
@@ -18665,8 +20165,8 @@
         </p:nvSpPr>
         <p:spPr>
           <a:xfrm>
-            <a:off x="8183880" y="1325880"/>
-            <a:ext cx="3611880" cy="109728"/>
+            <a:off x="8125968" y="1325880"/>
+            <a:ext cx="3514344" cy="109728"/>
           </a:xfrm>
           <a:prstGeom prst="rect">
             <a:avLst/>
@@ -18685,8 +20185,8 @@
         </p:nvSpPr>
         <p:spPr>
           <a:xfrm>
-            <a:off x="8458200" y="1554480"/>
-            <a:ext cx="3063240" cy="685800"/>
+            <a:off x="8400288" y="1554480"/>
+            <a:ext cx="2965704" cy="685800"/>
           </a:xfrm>
           <a:prstGeom prst="rect">
             <a:avLst/>
@@ -18726,8 +20226,8 @@
         </p:nvSpPr>
         <p:spPr>
           <a:xfrm>
-            <a:off x="8458200" y="2286000"/>
-            <a:ext cx="3063240" cy="3749040"/>
+            <a:off x="8400288" y="2286000"/>
+            <a:ext cx="2965704" cy="3749040"/>
           </a:xfrm>
           <a:prstGeom prst="rect">
             <a:avLst/>
@@ -18749,7 +20249,7 @@
               <a:buChar char="●"/>
             </a:pPr>
             <a:r>
-              <a:rPr lang="en-US" sz="1300" dirty="0">
+              <a:rPr lang="en-US" sz="1700" dirty="0">
                 <a:solidFill>
                   <a:srgbClr val="1F2937"/>
                 </a:solidFill>
@@ -18759,7 +20259,7 @@
               </a:rPr>
               <a:t>Consórcio: tributação nas consorciadas, conforme contrato</a:t>
             </a:r>
-            <a:endParaRPr lang="en-US" sz="1300" dirty="0"/>
+            <a:endParaRPr lang="en-US" sz="1700" dirty="0"/>
           </a:p>
           <a:p>
             <a:pPr marL="342900" indent="-342900">
@@ -18770,7 +20270,7 @@
               <a:buChar char="●"/>
             </a:pPr>
             <a:r>
-              <a:rPr lang="en-US" sz="1300" dirty="0">
+              <a:rPr lang="en-US" sz="1700" dirty="0">
                 <a:solidFill>
                   <a:srgbClr val="1F2937"/>
                 </a:solidFill>
@@ -18780,7 +20280,7 @@
               </a:rPr>
               <a:t>Cooperativa: ato cooperativo</a:t>
             </a:r>
-            <a:endParaRPr lang="en-US" sz="1300" dirty="0"/>
+            <a:endParaRPr lang="en-US" sz="1700" dirty="0"/>
           </a:p>
           <a:p>
             <a:pPr marL="342900" indent="-342900">
@@ -18791,7 +20291,7 @@
               <a:buChar char="●"/>
             </a:pPr>
             <a:r>
-              <a:rPr lang="en-US" sz="1300" dirty="0">
+              <a:rPr lang="en-US" sz="1700" dirty="0">
                 <a:solidFill>
                   <a:srgbClr val="1F2937"/>
                 </a:solidFill>
@@ -18801,7 +20301,7 @@
               </a:rPr>
               <a:t>Associação: regras de entidade sem fins lucrativos</a:t>
             </a:r>
-            <a:endParaRPr lang="en-US" sz="1300" dirty="0"/>
+            <a:endParaRPr lang="en-US" sz="1700" dirty="0"/>
           </a:p>
           <a:p>
             <a:pPr marL="342900" indent="-342900">
@@ -18812,7 +20312,7 @@
               <a:buChar char="●"/>
             </a:pPr>
             <a:r>
-              <a:rPr lang="en-US" sz="1300" dirty="0">
+              <a:rPr lang="en-US" sz="1700" dirty="0">
                 <a:solidFill>
                   <a:srgbClr val="1F2937"/>
                 </a:solidFill>
@@ -18822,7 +20322,55 @@
               </a:rPr>
               <a:t>Locação ao produtor: rendimento tributado do produtor</a:t>
             </a:r>
-            <a:endParaRPr lang="en-US" sz="1300" dirty="0"/>
+            <a:endParaRPr lang="en-US" sz="1700" dirty="0"/>
+          </a:p>
+        </p:txBody>
+      </p:sp>
+      <p:sp>
+        <p:nvSpPr>
+          <p:cNvPr id="25" name="Slide Number Placeholder 0"/>
+          <p:cNvSpPr>
+            <a:spLocks noGrp="1"/>
+          </p:cNvSpPr>
+          <p:nvPr>
+            <p:ph type="sldNum" sz="quarter" idx="4294967295"/>
+          </p:nvPr>
+        </p:nvSpPr>
+        <p:spPr>
+          <a:xfrm>
+            <a:off x="11292840" y="6556248"/>
+            <a:ext cx="548640" cy="256032"/>
+          </a:xfrm>
+          <a:prstGeom prst="rect">
+            <a:avLst/>
+          </a:prstGeom>
+          <a:extLst>
+            <a:ext uri="{C572A759-6A51-4108-AA02-DFA0A04FC94B}">
+              <ma14:wrappingTextBoxFlag xmlns:ma14="http://schemas.microsoft.com/office/mac/drawingml/2011/main" val="0"/>
+            </a:ext>
+          </a:extLst>
+        </p:spPr>
+        <p:txBody>
+          <a:bodyPr/>
+          <a:lstStyle>
+            <a:lvl1pPr>
+              <a:defRPr sz="900">
+                <a:solidFill>
+                  <a:srgbClr val="1B3A6B"/>
+                </a:solidFill>
+                <a:latin typeface="Arial"/>
+                <a:ea typeface="Arial"/>
+                <a:cs typeface="Arial"/>
+              </a:defRPr>
+            </a:lvl1pPr>
+          </a:lstStyle>
+          <a:p>
+            <a:pPr algn="r"/>
+            <a:fld id="{F7021451-1387-4CA6-816F-3879F97B5CBC}" type="slidenum">
+              <a:rPr b="1" lang="en-US"/>
+              <a:t>8</a:t>
+            </a:fld>
+            <a:endParaRPr lang="en-US"/>
           </a:p>
         </p:txBody>
       </p:sp>
@@ -18899,7 +20447,7 @@
         </p:blipFill>
         <p:spPr>
           <a:xfrm>
-            <a:off x="411480" y="6547104"/>
+            <a:off x="548640" y="6547104"/>
             <a:ext cx="274320" cy="274320"/>
           </a:xfrm>
           <a:prstGeom prst="rect">
@@ -18915,7 +20463,7 @@
         </p:nvSpPr>
         <p:spPr>
           <a:xfrm>
-            <a:off x="749808" y="6528816"/>
+            <a:off x="886968" y="6528816"/>
             <a:ext cx="6400800" cy="310896"/>
           </a:xfrm>
           <a:prstGeom prst="rect">
@@ -18955,7 +20503,7 @@
         <p:spPr>
           <a:xfrm>
             <a:off x="7132320" y="6528816"/>
-            <a:ext cx="4663440" cy="310896"/>
+            <a:ext cx="4023360" cy="310896"/>
           </a:xfrm>
           <a:prstGeom prst="rect">
             <a:avLst/>
@@ -18993,7 +20541,7 @@
         </p:nvSpPr>
         <p:spPr>
           <a:xfrm>
-            <a:off x="411480" y="384048"/>
+            <a:off x="548640" y="384048"/>
             <a:ext cx="82296" cy="658368"/>
           </a:xfrm>
           <a:prstGeom prst="rect">
@@ -19013,7 +20561,7 @@
         </p:nvSpPr>
         <p:spPr>
           <a:xfrm>
-            <a:off x="640080" y="292608"/>
+            <a:off x="777240" y="292608"/>
             <a:ext cx="10972800" cy="274320"/>
           </a:xfrm>
           <a:prstGeom prst="rect">
@@ -19052,8 +20600,8 @@
         </p:nvSpPr>
         <p:spPr>
           <a:xfrm>
-            <a:off x="640080" y="530352"/>
-            <a:ext cx="11155680" cy="566928"/>
+            <a:off x="777240" y="530352"/>
+            <a:ext cx="10881360" cy="566928"/>
           </a:xfrm>
           <a:prstGeom prst="rect">
             <a:avLst/>
@@ -19093,8 +20641,8 @@
         </p:nvSpPr>
         <p:spPr>
           <a:xfrm>
-            <a:off x="411480" y="1325880"/>
-            <a:ext cx="5577840" cy="2331720"/>
+            <a:off x="548640" y="1325880"/>
+            <a:ext cx="5431536" cy="2331720"/>
           </a:xfrm>
           <a:prstGeom prst="roundRect">
             <a:avLst>
@@ -19127,7 +20675,7 @@
         </p:nvSpPr>
         <p:spPr>
           <a:xfrm>
-            <a:off x="594360" y="1508760"/>
+            <a:off x="731520" y="1508760"/>
             <a:ext cx="457200" cy="457200"/>
           </a:xfrm>
           <a:prstGeom prst="ellipse">
@@ -19147,7 +20695,7 @@
         </p:nvSpPr>
         <p:spPr>
           <a:xfrm>
-            <a:off x="594360" y="1508760"/>
+            <a:off x="731520" y="1508760"/>
             <a:ext cx="457200" cy="457200"/>
           </a:xfrm>
           <a:prstGeom prst="rect">
@@ -19186,8 +20734,8 @@
         </p:nvSpPr>
         <p:spPr>
           <a:xfrm>
-            <a:off x="1188720" y="1435608"/>
-            <a:ext cx="4663440" cy="2112264"/>
+            <a:off x="1325880" y="1435608"/>
+            <a:ext cx="4517136" cy="2112264"/>
           </a:xfrm>
           <a:prstGeom prst="rect">
             <a:avLst/>
@@ -19227,8 +20775,8 @@
         </p:nvSpPr>
         <p:spPr>
           <a:xfrm>
-            <a:off x="6217920" y="1325880"/>
-            <a:ext cx="5577840" cy="2331720"/>
+            <a:off x="6208776" y="1325880"/>
+            <a:ext cx="5431536" cy="2331720"/>
           </a:xfrm>
           <a:prstGeom prst="roundRect">
             <a:avLst>
@@ -19261,7 +20809,7 @@
         </p:nvSpPr>
         <p:spPr>
           <a:xfrm>
-            <a:off x="6400800" y="1508760"/>
+            <a:off x="6391656" y="1508760"/>
             <a:ext cx="457200" cy="457200"/>
           </a:xfrm>
           <a:prstGeom prst="ellipse">
@@ -19281,7 +20829,7 @@
         </p:nvSpPr>
         <p:spPr>
           <a:xfrm>
-            <a:off x="6400800" y="1508760"/>
+            <a:off x="6391656" y="1508760"/>
             <a:ext cx="457200" cy="457200"/>
           </a:xfrm>
           <a:prstGeom prst="rect">
@@ -19320,8 +20868,8 @@
         </p:nvSpPr>
         <p:spPr>
           <a:xfrm>
-            <a:off x="6995160" y="1435608"/>
-            <a:ext cx="4663440" cy="2112264"/>
+            <a:off x="6986016" y="1435608"/>
+            <a:ext cx="4517136" cy="2112264"/>
           </a:xfrm>
           <a:prstGeom prst="rect">
             <a:avLst/>
@@ -19361,8 +20909,8 @@
         </p:nvSpPr>
         <p:spPr>
           <a:xfrm>
-            <a:off x="411480" y="3886200"/>
-            <a:ext cx="5577840" cy="2331720"/>
+            <a:off x="548640" y="3886200"/>
+            <a:ext cx="5431536" cy="2331720"/>
           </a:xfrm>
           <a:prstGeom prst="roundRect">
             <a:avLst>
@@ -19395,7 +20943,7 @@
         </p:nvSpPr>
         <p:spPr>
           <a:xfrm>
-            <a:off x="594360" y="4069080"/>
+            <a:off x="731520" y="4069080"/>
             <a:ext cx="457200" cy="457200"/>
           </a:xfrm>
           <a:prstGeom prst="ellipse">
@@ -19415,7 +20963,7 @@
         </p:nvSpPr>
         <p:spPr>
           <a:xfrm>
-            <a:off x="594360" y="4069080"/>
+            <a:off x="731520" y="4069080"/>
             <a:ext cx="457200" cy="457200"/>
           </a:xfrm>
           <a:prstGeom prst="rect">
@@ -19454,8 +21002,8 @@
         </p:nvSpPr>
         <p:spPr>
           <a:xfrm>
-            <a:off x="1188720" y="3995928"/>
-            <a:ext cx="4663440" cy="2112264"/>
+            <a:off x="1325880" y="3995928"/>
+            <a:ext cx="4517136" cy="2112264"/>
           </a:xfrm>
           <a:prstGeom prst="rect">
             <a:avLst/>
@@ -19495,8 +21043,8 @@
         </p:nvSpPr>
         <p:spPr>
           <a:xfrm>
-            <a:off x="6217920" y="3886200"/>
-            <a:ext cx="5577840" cy="2331720"/>
+            <a:off x="6208776" y="3886200"/>
+            <a:ext cx="5431536" cy="2331720"/>
           </a:xfrm>
           <a:prstGeom prst="roundRect">
             <a:avLst>
@@ -19529,7 +21077,7 @@
         </p:nvSpPr>
         <p:spPr>
           <a:xfrm>
-            <a:off x="6400800" y="4069080"/>
+            <a:off x="6391656" y="4069080"/>
             <a:ext cx="457200" cy="457200"/>
           </a:xfrm>
           <a:prstGeom prst="ellipse">
@@ -19549,7 +21097,7 @@
         </p:nvSpPr>
         <p:spPr>
           <a:xfrm>
-            <a:off x="6400800" y="4069080"/>
+            <a:off x="6391656" y="4069080"/>
             <a:ext cx="457200" cy="457200"/>
           </a:xfrm>
           <a:prstGeom prst="rect">
@@ -19588,8 +21136,8 @@
         </p:nvSpPr>
         <p:spPr>
           <a:xfrm>
-            <a:off x="6995160" y="3995928"/>
-            <a:ext cx="4663440" cy="2112264"/>
+            <a:off x="6986016" y="3995928"/>
+            <a:ext cx="4517136" cy="2112264"/>
           </a:xfrm>
           <a:prstGeom prst="rect">
             <a:avLst/>
@@ -19618,6 +21166,54 @@
               <a:t>2033: sistema novo</a:t>
             </a:r>
             <a:endParaRPr lang="en-US" sz="1800" dirty="0"/>
+          </a:p>
+        </p:txBody>
+      </p:sp>
+      <p:sp>
+        <p:nvSpPr>
+          <p:cNvPr id="25" name="Slide Number Placeholder 0"/>
+          <p:cNvSpPr>
+            <a:spLocks noGrp="1"/>
+          </p:cNvSpPr>
+          <p:nvPr>
+            <p:ph type="sldNum" sz="quarter" idx="4294967295"/>
+          </p:nvPr>
+        </p:nvSpPr>
+        <p:spPr>
+          <a:xfrm>
+            <a:off x="11292840" y="6556248"/>
+            <a:ext cx="548640" cy="256032"/>
+          </a:xfrm>
+          <a:prstGeom prst="rect">
+            <a:avLst/>
+          </a:prstGeom>
+          <a:extLst>
+            <a:ext uri="{C572A759-6A51-4108-AA02-DFA0A04FC94B}">
+              <ma14:wrappingTextBoxFlag xmlns:ma14="http://schemas.microsoft.com/office/mac/drawingml/2011/main" val="0"/>
+            </a:ext>
+          </a:extLst>
+        </p:spPr>
+        <p:txBody>
+          <a:bodyPr/>
+          <a:lstStyle>
+            <a:lvl1pPr>
+              <a:defRPr sz="900">
+                <a:solidFill>
+                  <a:srgbClr val="1B3A6B"/>
+                </a:solidFill>
+                <a:latin typeface="Arial"/>
+                <a:ea typeface="Arial"/>
+                <a:cs typeface="Arial"/>
+              </a:defRPr>
+            </a:lvl1pPr>
+          </a:lstStyle>
+          <a:p>
+            <a:pPr algn="r"/>
+            <a:fld id="{F7021451-1387-4CA6-816F-3879F97B5CBC}" type="slidenum">
+              <a:rPr b="1" lang="en-US"/>
+              <a:t>9</a:t>
+            </a:fld>
+            <a:endParaRPr lang="en-US"/>
           </a:p>
         </p:txBody>
       </p:sp>

--- a/docs/curso/slides/m11-gestao.pptx
+++ b/docs/curso/slides/m11-gestao.pptx
@@ -32,9 +32,13 @@
     <p:sldId id="280" r:id="rId26"/>
     <p:sldId id="281" r:id="rId27"/>
     <p:sldId id="282" r:id="rId28"/>
+    <p:sldId id="283" r:id="rId29"/>
+    <p:sldId id="284" r:id="rId30"/>
+    <p:sldId id="285" r:id="rId31"/>
+    <p:sldId id="286" r:id="rId32"/>
   </p:sldIdLst>
   <p:notesMasterIdLst>
-    <p:notesMasterId r:id="rId29"/>
+    <p:notesMasterId r:id="rId33"/>
   </p:notesMasterIdLst>
   <p:sldSz cx="12192000" cy="6858000"/>
   <p:notesSz cx="6858000" cy="12192000"/>
@@ -616,7 +620,7 @@
           <a:p>
             <a:r>
               <a:rPr lang="en-US" dirty="0"/>
-              <a:t>Resumindo: três camadas — a energia compensada, com regras federais e estaduais; a gestora, com o regime e o ISS; a entidade e o produtor — e a reforma tributária no horizonte. Leve as perguntas do exercício ao seu contador. Na próxima aula, os riscos do negócio.</a:t>
+              <a:t/>
             </a:r>
             <a:endParaRPr lang="en-US" dirty="0"/>
           </a:p>
@@ -792,7 +796,7 @@
           <a:p>
             <a:r>
               <a:rPr lang="en-US" dirty="0"/>
-              <a:t>A ferramenta é uma matriz simples: para cada risco, avalie a probabilidade de acontecer e o impacto se acontecer, de baixo a alto. Os riscos de alta probabilidade e alto impacto exigem ação imediata. Os de baixa probabilidade e alto impacto exigem um plano pronto. E cada risco ganha um dono: a pessoa que acompanha e executa a mitigação.</a:t>
+              <a:t>Classifique cada risco por probabilidade e impacto, e dê a cada um um dono e um plano.</a:t>
             </a:r>
             <a:endParaRPr lang="en-US" dirty="0"/>
           </a:p>
@@ -880,7 +884,7 @@
           <a:p>
             <a:r>
               <a:rPr lang="en-US" dirty="0"/>
-              <a:t>Vamos aos dez riscos que toda empresa de assinatura deve mapear. Um: o regulatório, como a regra do Fio B a partir de 2029 e outras mudanças. Mitigação: trabalhar com cenários, ter cláusulas de reequilíbrio e acompanhar a regulação. Dois: a abertura do mercado livre para os consumidores de baixa tensão, que pode dar ao seu cliente outras opções. Mitigação: relacionamento forte, economia comprovada mês a mês e, no futuro, avaliar oferecer também esse produto. Três: geração abaixo do esperado ou usina parada. Mitigação: due diligence, manutenção com prazo de atendimento, seguro, monitoramento e mais de uma usina. Quatro: vender mais energia do que existe e concentração de clientes. Mitigação: as travas da plataforma, ocupação no máximo em noventa e oito por cento e um limite por cliente. Cinco: inadimplência. Mitigação: a régua de cobrança, o Pix como padrão, comissão só depois da primeira cobrança paga e análise na entrada. Seis: cancelamentos. Mitigação: explicar as duas contas, o relatório de economia e um bom suporte. Sete: a distribuidora, com rateio atrasado ou erros na fatura. Mitigação: dia fixo para o rateio, protocolos guardados e a conferência entre esperado e faturado. Oito: dependência de um único produtor ou usina. Mitigação: um portfólio de usinas e contratos com prazo e plano de transição. Nove: jurídico e de consumidor. Mitigação: contratos revisados, linguagem correta e LGPD. E dez: o caixa. Muitas empresas boas morrem antes do ponto de equilíbrio. Mitigação: um plano financeiro realista, estrutura fixa enxuta e metas comerciais acompanhadas toda semana.</a:t>
+              <a:t>Os dez riscos da tela são os que toda empresa de assinatura deve mapear. Atenção ao último: muitas empresas boas morrem por falta de caixa antes do ponto de equilíbrio.</a:t>
             </a:r>
             <a:endParaRPr lang="en-US" dirty="0"/>
           </a:p>
@@ -968,7 +972,7 @@
           <a:p>
             <a:r>
               <a:rPr lang="en-US" dirty="0"/>
-              <a:t>A matriz não é um documento para a gaveta. Revise a cada trimestre: algum risco ficou mais provável? Algum incidente aconteceu? A mitigação funcionou? Registre os incidentes, mesmo os pequenos, porque eles mostram onde a empresa está frágil.</a:t>
+              <a:t>Revise a matriz a cada trimestre e registre os incidentes.</a:t>
             </a:r>
             <a:endParaRPr lang="en-US" dirty="0"/>
           </a:p>
@@ -1056,7 +1060,7 @@
           <a:p>
             <a:r>
               <a:rPr lang="en-US" dirty="0"/>
-              <a:t>Resumindo: mapeie os dez riscos, classifique por probabilidade e impacto, dê a cada um um dono e um plano, e revise a cada trimestre. A sua matriz faz parte do entregável deste módulo. Na próxima aula, como crescer: time, papéis e processos.</a:t>
+              <a:t/>
             </a:r>
             <a:endParaRPr lang="en-US" dirty="0"/>
           </a:p>
@@ -1232,9 +1236,9 @@
           <a:p>
             <a:r>
               <a:rPr lang="en-US" dirty="0"/>
-              <a:t>Na primeira fase, até cerca de trezentos clientes, a estrutura é mínima. O dono cuida da gestão, das usinas e dos produtores, e muitas vezes vende também. Um operador cuida das faturas, das cobranças, do rateio e do suporte, seguindo o SOP. Dois ou três consultores vendem. E os parceiros externos: contador, advogado e a empresa de manutenção. Na plataforma, o dono e o operador são administradores, e os vendedores são consultores, cada um com a própria carteira. Nesta fase, o dono precisa conhecer cada processo por dentro — foi para isso que você fez os laboratórios.
-Na segunda fase, a empresa se divide em áreas. Um gestor comercial, com cinco a dez consultores. Uma área de operações, com duas ou três pessoas, separando faturas e rateio de um lado e cobrança do outro. Atendimento, com uma ou duas pessoas. Financeiro e repasses aos produtores. E alguém dedicado a captar usinas, porque o crescimento passa a depender de energia nova todo mês. A plataforma acompanha: cada consultor segue vendo só a carteira dele, os alertas financeiros vão para o consultor responsável e os de fatura e sistema ficam com a operação.
-Na terceira fase, a empresa atua em várias distribuidoras, e a operação se organiza por distribuidora, porque cada uma tem o seu calendário, o seu layout de fatura e o seu procedimento de rateio. Surge a gestão do portfólio de usinas e de investidores, uma área de qualidade e auditoria — conferindo amostras de faturas e cobranças — e um plano de expansão para novas regiões.</a:t>
+              <a:t>Na primeira fase, a estrutura é mínima e o dono conhece cada processo por dentro.
+Na segunda, a empresa se divide em áreas, com alguém dedicado a captar usinas.
+Na terceira, a operação se organiza por distribuidora.</a:t>
             </a:r>
             <a:endParaRPr lang="en-US" dirty="0"/>
           </a:p>
@@ -1322,7 +1326,7 @@
           <a:p>
             <a:r>
               <a:rPr lang="en-US" dirty="0"/>
-              <a:t>O que permite escalar não são as pessoas, são os processos. O SOP escrito e treinado. Checklists para as tarefas críticas: revisão de fatura, rateio, fechamento. Metas por área, ligadas aos doze indicadores. Rituais curtos: quinze minutos por dia, trinta por semana, o fechamento mensal. E uma dica valiosa: use o próprio laboratório deste curso para treinar cada novo colaborador antes de ele mexer na operação real.</a:t>
+              <a:t>O que escala são processos: procedimento escrito, checklists, metas e rituais curtos. Use o laboratório do curso para treinar cada pessoa nova.</a:t>
             </a:r>
             <a:endParaRPr lang="en-US" dirty="0"/>
           </a:p>
@@ -1410,7 +1414,7 @@
           <a:p>
             <a:r>
               <a:rPr lang="en-US" dirty="0"/>
-              <a:t>Resumindo: comece enxuto, crie áreas quando a base passar de algumas centenas, organize por distribuidora quando expandir, e invista em processos antes de pessoas. Desenhe os seus organogramas no exercício. Na próxima aula, a tecnologia e a marca da sua empresa na plataforma.</a:t>
+              <a:t/>
             </a:r>
             <a:endParaRPr lang="en-US" dirty="0"/>
           </a:p>
@@ -1674,10 +1678,10 @@
           <a:p>
             <a:r>
               <a:rPr lang="en-US" dirty="0"/>
-              <a:t>Abra Configurações, Identidade Visual. Preencha o nome da plataforma com o nome da sua empresa. Escolha as cores: primária, secundária, de destaque, a cor de fundo do menu e a cor do texto e dos ícones. Envie o logotipo da plataforma, um logotipo específico para o boleto em PDF — normalmente uma versão horizontal, que funciona bem impressa — e o favicon, o ícone da aba do navegador. A tela mostra uma prévia do menu antes de salvar. Salve e recarregue: o menu, o login, os e-mails e os PDFs de proposta e de boleto passam a usar a sua marca. Gere uma proposta para ver.
-Agora, a equipe. Em Usuários, Consultores Cadastrados, crie um consultor. A senha precisa seguir a política da plataforma: pelo menos oito caracteres, com letras e números. Esse consultor vai ver só a própria carteira. Os administradores, em Usuários, Administradores, são para quem opera faturas, cobranças e configurações. Dê o perfil de administrador só a quem precisa.
-Em Whatsapp, Templates de Mensagens, ficam os modelos das mensagens que os consultores enviam: lembrete de cobrança, envio de boleto, convite. Edite com o tom da sua empresa. Os campos entre chaves duplas, como o nome do cliente, o valor e o vencimento, são preenchidos automaticamente. Lembre: a plataforma prepara a mensagem, mas o envio é sempre um clique humano.
-Por fim, as integrações, que na empresa real são configuradas uma vez, com cuidado. Em Financeiro, Bancos, fica a conta do Mercado Pago: a chave pública, o token de acesso e a chave secreta dos avisos de pagamento. Sem essa chave secreta, a plataforma recusa os avisos, por segurança. As credenciais ficam criptografadas e nunca aparecem para outros usuários. Em Integrações, ficam as caixas de e-mail que recebem as faturas e o histórico de importação. No laboratório, não use credenciais reais: o guia de configuração completo do Mercado Pago está nos materiais, para quando você montar a empresa de verdade.</a:t>
+              <a:t>Em Configurações, Identidade Visual: nome, cores, logotipos e favicon. Telas, PDFs, boletos e e-mails passam a usar a sua marca.
+Em Usuários, crie um consultor, que vê só a própria carteira. Administrador só para quem opera.
+Em Whatsapp, Templates de Mensagens, edite os modelos no tom da sua empresa. O envio é sempre com um clique.
+Em Financeiro, Bancos, fica a conta do Mercado Pago, com credenciais criptografadas. Em Integrações, as caixas de e-mail das faturas.</a:t>
             </a:r>
             <a:endParaRPr lang="en-US" dirty="0"/>
           </a:p>
@@ -1941,7 +1945,7 @@
           <a:p>
             <a:r>
               <a:rPr lang="en-US" dirty="0"/>
-              <a:t>São nove blocos. Um: a proposta de valor, em uma frase para o cliente — economia sem investimento — e uma para o produtor — renda com a usina cheia e zero trabalho. Dois: o mercado, ou seja, a distribuidora, a região e o público-alvo. Três: o modelo — leve, pesado ou híbrido — e a estrutura jurídica. Quatro: o unit economics, com o valor do crédito, o desconto, a taxa de administração, o repasse e a margem por quilowatt-hora, para 2026, 2027 e 2028. Cinco: as metas de doze e de trinta e seis meses, em usinas, megawatts-hora por mês e clientes. Seis: o ponto de equilíbrio e o capital necessário para chegar lá. Sete: a equipe e os parceiros. Oito: os indicadores-chave com as metas. E nove: os três ou quatro riscos principais, com a mitigação. Cada bloco já existe nos seus entregáveis: o trabalho agora é resumir.</a:t>
+              <a:t>São nove blocos, e cada um já existe nos seus entregáveis. O trabalho agora é resumir.</a:t>
             </a:r>
             <a:endParaRPr lang="en-US" dirty="0"/>
           </a:p>
@@ -2029,7 +2033,7 @@
           <a:p>
             <a:r>
               <a:rPr lang="en-US" dirty="0"/>
-              <a:t>Veja o exemplo da Solaris, a empresa fictícia do módulo zero. Modelo híbrido: a integradora constrói usinas para investidores e as gere. Um consórcio para empresas e uma associação para residências. Meta: de uma para quatro usinas em trinta e seis meses. Ponto de equilíbrio no mês dezoito, com o capital de giro calculado na planilha. Equipe da fase um. Indicadores com metas. E os três riscos principais: regulação, inadimplência e ritmo de captação de usinas. Repare como cada número tem origem num laboratório ou numa planilha do curso.</a:t>
+              <a:t>No exemplo da Solaris, repare que cada número tem origem num laboratório ou numa planilha do curso.</a:t>
             </a:r>
             <a:endParaRPr lang="en-US" dirty="0"/>
           </a:p>
@@ -2117,7 +2121,7 @@
           <a:p>
             <a:r>
               <a:rPr lang="en-US" dirty="0"/>
-              <a:t>Resumindo: nove blocos, números com origem, uma página. Esse plano é o entregável do módulo e a espinha do projeto final. No próximo e último módulo, você vai apresentar a sua empresa funcionando.</a:t>
+              <a:t/>
             </a:r>
             <a:endParaRPr lang="en-US" dirty="0"/>
           </a:p>
@@ -2247,6 +2251,182 @@
 </p:notes>
 </file>
 
+<file path=ppt/notesSlides/notesSlide28.xml><?xml version="1.0" encoding="utf-8"?>
+<p:notes xmlns:a="http://schemas.openxmlformats.org/drawingml/2006/main" xmlns:r="http://schemas.openxmlformats.org/officeDocument/2006/relationships" xmlns:p="http://schemas.openxmlformats.org/presentationml/2006/main">
+  <p:cSld>
+    <p:spTree>
+      <p:nvGrpSpPr>
+        <p:cNvPr id="1" name=""/>
+        <p:cNvGrpSpPr/>
+        <p:nvPr/>
+      </p:nvGrpSpPr>
+      <p:grpSpPr>
+        <a:xfrm>
+          <a:off x="0" y="0"/>
+          <a:ext cx="0" cy="0"/>
+          <a:chOff x="0" y="0"/>
+          <a:chExt cx="0" cy="0"/>
+        </a:xfrm>
+      </p:grpSpPr>
+      <p:sp>
+        <p:nvSpPr>
+          <p:cNvPr id="2" name="Slide Image Placeholder 1"/>
+          <p:cNvSpPr>
+            <a:spLocks noGrp="1" noRot="1" noChangeAspect="1"/>
+          </p:cNvSpPr>
+          <p:nvPr>
+            <p:ph type="sldImg"/>
+          </p:nvPr>
+        </p:nvSpPr>
+        <p:spPr/>
+      </p:sp>
+      <p:sp>
+        <p:nvSpPr>
+          <p:cNvPr id="3" name="Notes Placeholder 2"/>
+          <p:cNvSpPr>
+            <a:spLocks noGrp="1"/>
+          </p:cNvSpPr>
+          <p:nvPr>
+            <p:ph type="body" idx="1"/>
+          </p:nvPr>
+        </p:nvSpPr>
+        <p:spPr/>
+        <p:txBody>
+          <a:bodyPr/>
+          <a:lstStyle/>
+          <a:p>
+            <a:r>
+              <a:rPr lang="en-US" dirty="0"/>
+              <a:t/>
+            </a:r>
+            <a:endParaRPr lang="en-US" dirty="0"/>
+          </a:p>
+        </p:txBody>
+      </p:sp>
+      <p:sp>
+        <p:nvSpPr>
+          <p:cNvPr id="4" name="Slide Number Placeholder 3"/>
+          <p:cNvSpPr>
+            <a:spLocks noGrp="1"/>
+          </p:cNvSpPr>
+          <p:nvPr>
+            <p:ph type="sldNum" sz="quarter" idx="10"/>
+          </p:nvPr>
+        </p:nvSpPr>
+        <p:spPr/>
+        <p:txBody>
+          <a:bodyPr/>
+          <a:lstStyle/>
+          <a:p>
+            <a:fld id="{F7021451-1387-4CA6-816F-3879F97B5CBC}" type="slidenum">
+              <a:rPr lang="en-US"/>
+              <a:t>28</a:t>
+            </a:fld>
+            <a:endParaRPr lang="en-US"/>
+          </a:p>
+        </p:txBody>
+      </p:sp>
+    </p:spTree>
+    <p:extLst>
+      <p:ext uri="{BB962C8B-B14F-4D97-AF65-F5344CB8AC3E}">
+        <p14:creationId xmlns:p14="http://schemas.microsoft.com/office/powerpoint/2010/main" val="1024086991"/>
+      </p:ext>
+    </p:extLst>
+  </p:cSld>
+  <p:clrMapOvr>
+    <a:masterClrMapping/>
+  </p:clrMapOvr>
+</p:notes>
+</file>
+
+<file path=ppt/notesSlides/notesSlide29.xml><?xml version="1.0" encoding="utf-8"?>
+<p:notes xmlns:a="http://schemas.openxmlformats.org/drawingml/2006/main" xmlns:r="http://schemas.openxmlformats.org/officeDocument/2006/relationships" xmlns:p="http://schemas.openxmlformats.org/presentationml/2006/main">
+  <p:cSld>
+    <p:spTree>
+      <p:nvGrpSpPr>
+        <p:cNvPr id="1" name=""/>
+        <p:cNvGrpSpPr/>
+        <p:nvPr/>
+      </p:nvGrpSpPr>
+      <p:grpSpPr>
+        <a:xfrm>
+          <a:off x="0" y="0"/>
+          <a:ext cx="0" cy="0"/>
+          <a:chOff x="0" y="0"/>
+          <a:chExt cx="0" cy="0"/>
+        </a:xfrm>
+      </p:grpSpPr>
+      <p:sp>
+        <p:nvSpPr>
+          <p:cNvPr id="2" name="Slide Image Placeholder 1"/>
+          <p:cNvSpPr>
+            <a:spLocks noGrp="1" noRot="1" noChangeAspect="1"/>
+          </p:cNvSpPr>
+          <p:nvPr>
+            <p:ph type="sldImg"/>
+          </p:nvPr>
+        </p:nvSpPr>
+        <p:spPr/>
+      </p:sp>
+      <p:sp>
+        <p:nvSpPr>
+          <p:cNvPr id="3" name="Notes Placeholder 2"/>
+          <p:cNvSpPr>
+            <a:spLocks noGrp="1"/>
+          </p:cNvSpPr>
+          <p:nvPr>
+            <p:ph type="body" idx="1"/>
+          </p:nvPr>
+        </p:nvSpPr>
+        <p:spPr/>
+        <p:txBody>
+          <a:bodyPr/>
+          <a:lstStyle/>
+          <a:p>
+            <a:r>
+              <a:rPr lang="en-US" dirty="0"/>
+              <a:t/>
+            </a:r>
+            <a:endParaRPr lang="en-US" dirty="0"/>
+          </a:p>
+        </p:txBody>
+      </p:sp>
+      <p:sp>
+        <p:nvSpPr>
+          <p:cNvPr id="4" name="Slide Number Placeholder 3"/>
+          <p:cNvSpPr>
+            <a:spLocks noGrp="1"/>
+          </p:cNvSpPr>
+          <p:nvPr>
+            <p:ph type="sldNum" sz="quarter" idx="10"/>
+          </p:nvPr>
+        </p:nvSpPr>
+        <p:spPr/>
+        <p:txBody>
+          <a:bodyPr/>
+          <a:lstStyle/>
+          <a:p>
+            <a:fld id="{F7021451-1387-4CA6-816F-3879F97B5CBC}" type="slidenum">
+              <a:rPr lang="en-US"/>
+              <a:t>29</a:t>
+            </a:fld>
+            <a:endParaRPr lang="en-US"/>
+          </a:p>
+        </p:txBody>
+      </p:sp>
+    </p:spTree>
+    <p:extLst>
+      <p:ext uri="{BB962C8B-B14F-4D97-AF65-F5344CB8AC3E}">
+        <p14:creationId xmlns:p14="http://schemas.microsoft.com/office/powerpoint/2010/main" val="1024086991"/>
+      </p:ext>
+    </p:extLst>
+  </p:cSld>
+  <p:clrMapOvr>
+    <a:masterClrMapping/>
+  </p:clrMapOvr>
+</p:notes>
+</file>
+
 <file path=ppt/notesSlides/notesSlide3.xml><?xml version="1.0" encoding="utf-8"?>
 <p:notes xmlns:a="http://schemas.openxmlformats.org/drawingml/2006/main" xmlns:r="http://schemas.openxmlformats.org/officeDocument/2006/relationships" xmlns:p="http://schemas.openxmlformats.org/presentationml/2006/main">
   <p:cSld>
@@ -2293,8 +2473,8 @@
           <a:p>
             <a:r>
               <a:rPr lang="en-US" dirty="0"/>
-              <a:t>O desenho mais comum tem três camadas. A gestora: a sua empresa, normalmente uma sociedade limitada, que emprega a equipe, contrata a plataforma e os parceiros e recebe a taxa de administração. As entidades: uma ou mais, conforme o público — por exemplo, um consórcio para empresas e uma cooperativa ou associação para residências —, cada uma titular das unidades das usinas ligadas a ela, com contrato de gestão com a sua empresa. E as usinas: locadas pelas entidades junto aos produtores. Se você for dono de usinas, no modelo asset-heavy, é comum colocar cada usina numa sociedade de propósito específico, uma SPE: isso separa o risco e o financiamento de cada usina e facilita vender ou trazer um investidor para uma usina específica.
-Por que tanta separação? Primeiro, para isolar riscos: um problema numa usina não contamina a gestora nem as outras usinas. Segundo, para facilitar financiamento: bancos e investidores preferem financiar uma SPE com uma usina e contratos claros. Terceiro, para a governança: na cooperativa ou na associação, quem decide é a assembleia; na gestora, os sócios. E quarto, para a tributação adequada de cada atividade, que é o tema da próxima aula.</a:t>
+              <a:t>O desenho típico tem a gestora, as entidades por público e as usinas. No modelo pesado, cada usina pode ficar numa empresa própria.
+Separar isola riscos e facilita financiamento.</a:t>
             </a:r>
             <a:endParaRPr lang="en-US" dirty="0"/>
           </a:p>
@@ -2318,6 +2498,182 @@
             <a:fld id="{F7021451-1387-4CA6-816F-3879F97B5CBC}" type="slidenum">
               <a:rPr lang="en-US"/>
               <a:t>3</a:t>
+            </a:fld>
+            <a:endParaRPr lang="en-US"/>
+          </a:p>
+        </p:txBody>
+      </p:sp>
+    </p:spTree>
+    <p:extLst>
+      <p:ext uri="{BB962C8B-B14F-4D97-AF65-F5344CB8AC3E}">
+        <p14:creationId xmlns:p14="http://schemas.microsoft.com/office/powerpoint/2010/main" val="1024086991"/>
+      </p:ext>
+    </p:extLst>
+  </p:cSld>
+  <p:clrMapOvr>
+    <a:masterClrMapping/>
+  </p:clrMapOvr>
+</p:notes>
+</file>
+
+<file path=ppt/notesSlides/notesSlide30.xml><?xml version="1.0" encoding="utf-8"?>
+<p:notes xmlns:a="http://schemas.openxmlformats.org/drawingml/2006/main" xmlns:r="http://schemas.openxmlformats.org/officeDocument/2006/relationships" xmlns:p="http://schemas.openxmlformats.org/presentationml/2006/main">
+  <p:cSld>
+    <p:spTree>
+      <p:nvGrpSpPr>
+        <p:cNvPr id="1" name=""/>
+        <p:cNvGrpSpPr/>
+        <p:nvPr/>
+      </p:nvGrpSpPr>
+      <p:grpSpPr>
+        <a:xfrm>
+          <a:off x="0" y="0"/>
+          <a:ext cx="0" cy="0"/>
+          <a:chOff x="0" y="0"/>
+          <a:chExt cx="0" cy="0"/>
+        </a:xfrm>
+      </p:grpSpPr>
+      <p:sp>
+        <p:nvSpPr>
+          <p:cNvPr id="2" name="Slide Image Placeholder 1"/>
+          <p:cNvSpPr>
+            <a:spLocks noGrp="1" noRot="1" noChangeAspect="1"/>
+          </p:cNvSpPr>
+          <p:nvPr>
+            <p:ph type="sldImg"/>
+          </p:nvPr>
+        </p:nvSpPr>
+        <p:spPr/>
+      </p:sp>
+      <p:sp>
+        <p:nvSpPr>
+          <p:cNvPr id="3" name="Notes Placeholder 2"/>
+          <p:cNvSpPr>
+            <a:spLocks noGrp="1"/>
+          </p:cNvSpPr>
+          <p:nvPr>
+            <p:ph type="body" idx="1"/>
+          </p:nvPr>
+        </p:nvSpPr>
+        <p:spPr/>
+        <p:txBody>
+          <a:bodyPr/>
+          <a:lstStyle/>
+          <a:p>
+            <a:r>
+              <a:rPr lang="en-US" dirty="0"/>
+              <a:t/>
+            </a:r>
+            <a:endParaRPr lang="en-US" dirty="0"/>
+          </a:p>
+        </p:txBody>
+      </p:sp>
+      <p:sp>
+        <p:nvSpPr>
+          <p:cNvPr id="4" name="Slide Number Placeholder 3"/>
+          <p:cNvSpPr>
+            <a:spLocks noGrp="1"/>
+          </p:cNvSpPr>
+          <p:nvPr>
+            <p:ph type="sldNum" sz="quarter" idx="10"/>
+          </p:nvPr>
+        </p:nvSpPr>
+        <p:spPr/>
+        <p:txBody>
+          <a:bodyPr/>
+          <a:lstStyle/>
+          <a:p>
+            <a:fld id="{F7021451-1387-4CA6-816F-3879F97B5CBC}" type="slidenum">
+              <a:rPr lang="en-US"/>
+              <a:t>30</a:t>
+            </a:fld>
+            <a:endParaRPr lang="en-US"/>
+          </a:p>
+        </p:txBody>
+      </p:sp>
+    </p:spTree>
+    <p:extLst>
+      <p:ext uri="{BB962C8B-B14F-4D97-AF65-F5344CB8AC3E}">
+        <p14:creationId xmlns:p14="http://schemas.microsoft.com/office/powerpoint/2010/main" val="1024086991"/>
+      </p:ext>
+    </p:extLst>
+  </p:cSld>
+  <p:clrMapOvr>
+    <a:masterClrMapping/>
+  </p:clrMapOvr>
+</p:notes>
+</file>
+
+<file path=ppt/notesSlides/notesSlide31.xml><?xml version="1.0" encoding="utf-8"?>
+<p:notes xmlns:a="http://schemas.openxmlformats.org/drawingml/2006/main" xmlns:r="http://schemas.openxmlformats.org/officeDocument/2006/relationships" xmlns:p="http://schemas.openxmlformats.org/presentationml/2006/main">
+  <p:cSld>
+    <p:spTree>
+      <p:nvGrpSpPr>
+        <p:cNvPr id="1" name=""/>
+        <p:cNvGrpSpPr/>
+        <p:nvPr/>
+      </p:nvGrpSpPr>
+      <p:grpSpPr>
+        <a:xfrm>
+          <a:off x="0" y="0"/>
+          <a:ext cx="0" cy="0"/>
+          <a:chOff x="0" y="0"/>
+          <a:chExt cx="0" cy="0"/>
+        </a:xfrm>
+      </p:grpSpPr>
+      <p:sp>
+        <p:nvSpPr>
+          <p:cNvPr id="2" name="Slide Image Placeholder 1"/>
+          <p:cNvSpPr>
+            <a:spLocks noGrp="1" noRot="1" noChangeAspect="1"/>
+          </p:cNvSpPr>
+          <p:nvPr>
+            <p:ph type="sldImg"/>
+          </p:nvPr>
+        </p:nvSpPr>
+        <p:spPr/>
+      </p:sp>
+      <p:sp>
+        <p:nvSpPr>
+          <p:cNvPr id="3" name="Notes Placeholder 2"/>
+          <p:cNvSpPr>
+            <a:spLocks noGrp="1"/>
+          </p:cNvSpPr>
+          <p:nvPr>
+            <p:ph type="body" idx="1"/>
+          </p:nvPr>
+        </p:nvSpPr>
+        <p:spPr/>
+        <p:txBody>
+          <a:bodyPr/>
+          <a:lstStyle/>
+          <a:p>
+            <a:r>
+              <a:rPr lang="en-US" dirty="0"/>
+              <a:t/>
+            </a:r>
+            <a:endParaRPr lang="en-US" dirty="0"/>
+          </a:p>
+        </p:txBody>
+      </p:sp>
+      <p:sp>
+        <p:nvSpPr>
+          <p:cNvPr id="4" name="Slide Number Placeholder 3"/>
+          <p:cNvSpPr>
+            <a:spLocks noGrp="1"/>
+          </p:cNvSpPr>
+          <p:nvPr>
+            <p:ph type="sldNum" sz="quarter" idx="10"/>
+          </p:nvPr>
+        </p:nvSpPr>
+        <p:spPr/>
+        <p:txBody>
+          <a:bodyPr/>
+          <a:lstStyle/>
+          <a:p>
+            <a:fld id="{F7021451-1387-4CA6-816F-3879F97B5CBC}" type="slidenum">
+              <a:rPr lang="en-US"/>
+              <a:t>31</a:t>
             </a:fld>
             <a:endParaRPr lang="en-US"/>
           </a:p>
@@ -2382,7 +2738,7 @@
           <a:p>
             <a:r>
               <a:rPr lang="en-US" dirty="0"/>
-              <a:t>Faça um inventário dos contratos. O contrato social da gestora e, se houver mais de um sócio, um acordo de sócios — quem investe, quem trabalha, o que acontece se um sair. A constituição de cada entidade. O contrato de gestão entre a entidade e a gestora. A locação de cada usina. O contrato de adesão do cliente. Os contratos com parceiros: manutenção, seguro, meio de pagamento, plataforma. E a política de privacidade e os termos de uso do portal. Cada um deles deve ter cláusulas de reequilíbrio regulatório coerentes entre si.</a:t>
+              <a:t>Faça o inventário dos contratos da tela, com cláusulas de reequilíbrio coerentes entre si.</a:t>
             </a:r>
             <a:endParaRPr lang="en-US" dirty="0"/>
           </a:p>
@@ -2470,7 +2826,7 @@
           <a:p>
             <a:r>
               <a:rPr lang="en-US" dirty="0"/>
-              <a:t>Se você já tem uma integradora, avalie separar a atividade de gestão em outra empresa, ou pelo menos ter as atividades bem definidas. Quando a sua integradora constrói e mantém a usina que a sua gestora administra, os contratos de obra e de manutenção devem ter preço e condições de mercado — o investidor vai perguntar. Transparência nesse ponto é o que dá credibilidade ao modelo híbrido.</a:t>
+              <a:t>Se você já tem integradora, contrate obra e manutenção a preço de mercado. O investidor vai perguntar.</a:t>
             </a:r>
             <a:endParaRPr lang="en-US" dirty="0"/>
           </a:p>
@@ -2558,7 +2914,7 @@
           <a:p>
             <a:r>
               <a:rPr lang="en-US" dirty="0"/>
-              <a:t>Resumindo: gestora, entidades por público e usinas, eventualmente em SPEs; um inventário completo de contratos coerentes entre si; e tudo validado por um advogado especializado em energia. Na próxima aula, os tributos.</a:t>
+              <a:t/>
             </a:r>
             <a:endParaRPr lang="en-US" dirty="0"/>
           </a:p>
@@ -2734,9 +3090,9 @@
           <a:p>
             <a:r>
               <a:rPr lang="en-US" dirty="0"/>
-              <a:t>Primeira camada: a energia compensada na conta do cliente. Em nível federal, há previsão legal de alíquota zero de PIS e COFINS sobre a energia compensada pelo sistema de compensação. No ICMS, existe um convênio entre os estados que permite isentar a energia compensada, mas cada estado define a adesão e as condições — por exemplo, limites de potência, modalidades atendidas e o tratamento das parcelas que continuam sendo pagas, como o Fio B e o custo de disponibilidade. Na prática, isso muda o valor do crédito com impostos e, portanto, a economia do cliente. Por isso a calculadora do curso tem um campo para a regra do seu estado. Peça ao contador a regra exata da sua UF e confira numa fatura real.
-Segunda camada: a sua gestora. A receita dela é a taxa de administração, uma receita de prestação de serviços. Os regimes mais comuns são o Simples Nacional, com guia única, em que a alíquota efetiva depende do anexo de enquadramento da atividade e, em serviços, do chamado fator R, a relação entre folha de pagamento e faturamento; o Lucro Presumido, em que imposto de renda e contribuição social incidem sobre uma base presumida para serviços, mais PIS e COFINS cumulativos e o ISS; e o Lucro Real, que costuma fazer sentido para estruturas maiores ou de margem baixa. Em todos, há ISS municipal sobre a taxa de gestão, com a alíquota do município. Lembre: na conta do módulo 3, usamos dez por cento da taxa como imposto apenas como exemplo. Coloque o número real do seu contador na calculadora.
-Terceira camada: a entidade e o produtor. O tratamento muda conforme a forma: no consórcio, os efeitos tributários costumam recair sobre as consorciadas, conforme o contrato; na cooperativa, existe o regime do ato cooperativo; na associação, as regras de entidade sem fins lucrativos, com as condições que elas exigem. E o aluguel que o produtor recebe é rendimento tributável dele — pessoa física ou jurídica —, o que vale explicar na proposta, porque o produtor vai comparar o rendimento líquido.</a:t>
+              <a:t>Sobre a energia compensada há regras federais e estaduais específicas, que mudam o valor do crédito e a economia do cliente. Confira a regra do seu estado numa fatura real.
+A gestora recebe por serviço. O regime tributário muda a margem, e o imposto real entra na calculadora.
+A forma da entidade e o aluguel do produtor têm tratamentos próprios.</a:t>
             </a:r>
             <a:endParaRPr lang="en-US" dirty="0"/>
           </a:p>
@@ -2824,7 +3180,7 @@
           <a:p>
             <a:r>
               <a:rPr lang="en-US" dirty="0"/>
-              <a:t>Por fim, a reforma tributária, que vai mudar a tributação do consumo no Brasil nos próximos anos. Em linhas gerais: 2026 é um ano de teste dos novos tributos; em 2027, a CBS, federal, substitui o PIS e a COFINS; entre 2029 e 2032, o ICMS e o ISS vão sendo substituídos gradualmente pelo IBS; e, em 2033, o sistema novo funciona plenamente. Como isso vai tratar a energia compensada na geração distribuída e os serviços da gestora depende de regulamentação que ainda está sendo detalhada. Duas atitudes práticas: inclua a reforma nos cenários do seu plano e nas cláusulas de reequilíbrio dos contratos, e acompanhe as atualizações semestrais deste curso.</a:t>
+              <a:t>A reforma tributária muda o cenário até 2033. Inclua-a nos cenários e nas cláusulas dos contratos.</a:t>
             </a:r>
             <a:endParaRPr lang="en-US" dirty="0"/>
           </a:p>
@@ -5415,7 +5771,7 @@
         <p:spPr>
           <a:xfrm>
             <a:off x="548640" y="1325880"/>
-            <a:ext cx="3544824" cy="4892040"/>
+            <a:ext cx="3544824" cy="3977640"/>
           </a:xfrm>
           <a:prstGeom prst="roundRect">
             <a:avLst>
@@ -5508,7 +5864,7 @@
         <p:spPr>
           <a:xfrm>
             <a:off x="1325880" y="1435608"/>
-            <a:ext cx="2630424" cy="4672584"/>
+            <a:ext cx="2630424" cy="3758184"/>
           </a:xfrm>
           <a:prstGeom prst="rect">
             <a:avLst/>
@@ -5549,7 +5905,7 @@
         <p:spPr>
           <a:xfrm>
             <a:off x="4322064" y="1325880"/>
-            <a:ext cx="3544824" cy="4892040"/>
+            <a:ext cx="3544824" cy="3977640"/>
           </a:xfrm>
           <a:prstGeom prst="roundRect">
             <a:avLst>
@@ -5642,7 +5998,7 @@
         <p:spPr>
           <a:xfrm>
             <a:off x="5099304" y="1435608"/>
-            <a:ext cx="2630424" cy="4672584"/>
+            <a:ext cx="2630424" cy="3758184"/>
           </a:xfrm>
           <a:prstGeom prst="rect">
             <a:avLst/>
@@ -5683,7 +6039,7 @@
         <p:spPr>
           <a:xfrm>
             <a:off x="8095488" y="1325880"/>
-            <a:ext cx="3544824" cy="4892040"/>
+            <a:ext cx="3544824" cy="3977640"/>
           </a:xfrm>
           <a:prstGeom prst="roundRect">
             <a:avLst>
@@ -5776,7 +6132,7 @@
         <p:spPr>
           <a:xfrm>
             <a:off x="8872728" y="1435608"/>
-            <a:ext cx="2630424" cy="4672584"/>
+            <a:ext cx="2630424" cy="3758184"/>
           </a:xfrm>
           <a:prstGeom prst="rect">
             <a:avLst/>
@@ -5805,6 +6161,92 @@
               <a:t>cada risco com dono e plano</a:t>
             </a:r>
             <a:endParaRPr lang="en-US" sz="1800" dirty="0"/>
+          </a:p>
+        </p:txBody>
+      </p:sp>
+      <p:sp>
+        <p:nvSpPr>
+          <p:cNvPr id="21" name="Shape 18"/>
+          <p:cNvSpPr/>
+          <p:nvPr/>
+        </p:nvSpPr>
+        <p:spPr>
+          <a:xfrm>
+            <a:off x="548640" y="5413248"/>
+            <a:ext cx="11091672" cy="868680"/>
+          </a:xfrm>
+          <a:prstGeom prst="roundRect">
+            <a:avLst>
+              <a:gd name="adj" fmla="val 8421"/>
+            </a:avLst>
+          </a:prstGeom>
+          <a:solidFill>
+            <a:srgbClr val="EEF3FA"/>
+          </a:solidFill>
+          <a:ln w="6350">
+            <a:solidFill>
+              <a:srgbClr val="D8E0EC"/>
+            </a:solidFill>
+            <a:prstDash val="solid"/>
+          </a:ln>
+        </p:spPr>
+      </p:sp>
+      <p:sp>
+        <p:nvSpPr>
+          <p:cNvPr id="22" name="Shape 19"/>
+          <p:cNvSpPr/>
+          <p:nvPr/>
+        </p:nvSpPr>
+        <p:spPr>
+          <a:xfrm>
+            <a:off x="548640" y="5413248"/>
+            <a:ext cx="91440" cy="868680"/>
+          </a:xfrm>
+          <a:prstGeom prst="rect">
+            <a:avLst/>
+          </a:prstGeom>
+          <a:solidFill>
+            <a:srgbClr val="F7A23B"/>
+          </a:solidFill>
+          <a:ln/>
+        </p:spPr>
+      </p:sp>
+      <p:sp>
+        <p:nvSpPr>
+          <p:cNvPr id="23" name="Text 20"/>
+          <p:cNvSpPr/>
+          <p:nvPr/>
+        </p:nvSpPr>
+        <p:spPr>
+          <a:xfrm>
+            <a:off x="777240" y="5458968"/>
+            <a:ext cx="10744200" cy="777240"/>
+          </a:xfrm>
+          <a:prstGeom prst="rect">
+            <a:avLst/>
+          </a:prstGeom>
+          <a:noFill/>
+          <a:ln/>
+        </p:spPr>
+        <p:txBody>
+          <a:bodyPr wrap="square" rtlCol="0" anchor="ctr"/>
+          <a:lstStyle/>
+          <a:p>
+            <a:pPr indent="0" marL="0">
+              <a:buNone/>
+            </a:pPr>
+            <a:r>
+              <a:rPr lang="en-US" sz="1500" dirty="0">
+                <a:solidFill>
+                  <a:srgbClr val="1F2937"/>
+                </a:solidFill>
+                <a:latin typeface="Arial" pitchFamily="34" charset="0"/>
+                <a:ea typeface="Arial" pitchFamily="34" charset="-122"/>
+                <a:cs typeface="Arial" pitchFamily="34" charset="-120"/>
+              </a:rPr>
+              <a:t>Classifique cada risco por probabilidade e impacto, e dê a cada um um dono e um plano.</a:t>
+            </a:r>
+            <a:endParaRPr lang="en-US" sz="1500" dirty="0"/>
           </a:p>
         </p:txBody>
       </p:sp>
@@ -6124,7 +6566,7 @@
         <p:spPr>
           <a:xfrm>
             <a:off x="548640" y="1325880"/>
-            <a:ext cx="5486400" cy="4937760"/>
+            <a:ext cx="5486400" cy="3977640"/>
           </a:xfrm>
           <a:prstGeom prst="rect">
             <a:avLst/>
@@ -6145,7 +6587,7 @@
               <a:buNone/>
             </a:pPr>
             <a:r>
-              <a:rPr lang="en-US" sz="1800" dirty="0">
+              <a:rPr lang="en-US" sz="1500" dirty="0">
                 <a:solidFill>
                   <a:srgbClr val="1F2937"/>
                 </a:solidFill>
@@ -6155,7 +6597,7 @@
               </a:rPr>
               <a:t>1. Regulatório (Fio B 2029, novas regras) → cenários, cláusulas de reequilíbrio, acompanhamento semestral</a:t>
             </a:r>
-            <a:endParaRPr lang="en-US" sz="1800" dirty="0"/>
+            <a:endParaRPr lang="en-US" sz="1500" dirty="0"/>
           </a:p>
           <a:p>
             <a:pPr indent="0" marL="0">
@@ -6165,7 +6607,7 @@
               <a:buNone/>
             </a:pPr>
             <a:r>
-              <a:rPr lang="en-US" sz="1800" dirty="0">
+              <a:rPr lang="en-US" sz="1500" dirty="0">
                 <a:solidFill>
                   <a:srgbClr val="1F2937"/>
                 </a:solidFill>
@@ -6175,7 +6617,7 @@
               </a:rPr>
               <a:t>2. Abertura do mercado livre na baixa tensão → relacionamento, economia comprovada, contratos flexíveis, avaliar atuar também como comercializadora no futuro</a:t>
             </a:r>
-            <a:endParaRPr lang="en-US" sz="1800" dirty="0"/>
+            <a:endParaRPr lang="en-US" sz="1500" dirty="0"/>
           </a:p>
           <a:p>
             <a:pPr indent="0" marL="0">
@@ -6185,7 +6627,7 @@
               <a:buNone/>
             </a:pPr>
             <a:r>
-              <a:rPr lang="en-US" sz="1800" dirty="0">
+              <a:rPr lang="en-US" sz="1500" dirty="0">
                 <a:solidFill>
                   <a:srgbClr val="1F2937"/>
                 </a:solidFill>
@@ -6195,7 +6637,7 @@
               </a:rPr>
               <a:t>3. Geração abaixo do esperado / usina parada → due diligence, O&amp;M com prazo, seguro, monitoramento, mais de uma usina</a:t>
             </a:r>
-            <a:endParaRPr lang="en-US" sz="1800" dirty="0"/>
+            <a:endParaRPr lang="en-US" sz="1500" dirty="0"/>
           </a:p>
           <a:p>
             <a:pPr indent="0" marL="0">
@@ -6205,7 +6647,7 @@
               <a:buNone/>
             </a:pPr>
             <a:r>
-              <a:rPr lang="en-US" sz="1800" dirty="0">
+              <a:rPr lang="en-US" sz="1500" dirty="0">
                 <a:solidFill>
                   <a:srgbClr val="1F2937"/>
                 </a:solidFill>
@@ -6215,7 +6657,7 @@
               </a:rPr>
               <a:t>4. Oversell e concentração → travas da plataforma, ocupação ≤ 98%, limite por cliente</a:t>
             </a:r>
-            <a:endParaRPr lang="en-US" sz="1800" dirty="0"/>
+            <a:endParaRPr lang="en-US" sz="1500" dirty="0"/>
           </a:p>
           <a:p>
             <a:pPr indent="0" marL="0">
@@ -6225,7 +6667,7 @@
               <a:buNone/>
             </a:pPr>
             <a:r>
-              <a:rPr lang="en-US" sz="1800" dirty="0">
+              <a:rPr lang="en-US" sz="1500" dirty="0">
                 <a:solidFill>
                   <a:srgbClr val="1F2937"/>
                 </a:solidFill>
@@ -6235,7 +6677,7 @@
               </a:rPr>
               <a:t>5. Inadimplência → régua, Pix padrão, comissão após 1ª paga, análise na entrada</a:t>
             </a:r>
-            <a:endParaRPr lang="en-US" sz="1800" dirty="0"/>
+            <a:endParaRPr lang="en-US" sz="1500" dirty="0"/>
           </a:p>
         </p:txBody>
       </p:sp>
@@ -6248,7 +6690,7 @@
         <p:spPr>
           <a:xfrm>
             <a:off x="6263640" y="1325880"/>
-            <a:ext cx="5486400" cy="4937760"/>
+            <a:ext cx="5486400" cy="3977640"/>
           </a:xfrm>
           <a:prstGeom prst="rect">
             <a:avLst/>
@@ -6269,7 +6711,7 @@
               <a:buNone/>
             </a:pPr>
             <a:r>
-              <a:rPr lang="en-US" sz="1800" dirty="0">
+              <a:rPr lang="en-US" sz="1600" dirty="0">
                 <a:solidFill>
                   <a:srgbClr val="1F2937"/>
                 </a:solidFill>
@@ -6279,7 +6721,7 @@
               </a:rPr>
               <a:t>6. Churn → explicação das duas contas, relatório de economia, suporte</a:t>
             </a:r>
-            <a:endParaRPr lang="en-US" sz="1800" dirty="0"/>
+            <a:endParaRPr lang="en-US" sz="1600" dirty="0"/>
           </a:p>
           <a:p>
             <a:pPr indent="0" marL="0">
@@ -6289,7 +6731,7 @@
               <a:buNone/>
             </a:pPr>
             <a:r>
-              <a:rPr lang="en-US" sz="1800" dirty="0">
+              <a:rPr lang="en-US" sz="1600" dirty="0">
                 <a:solidFill>
                   <a:srgbClr val="1F2937"/>
                 </a:solidFill>
@@ -6299,7 +6741,7 @@
               </a:rPr>
               <a:t>7. Distribuidora (rateio atrasado, erros) → dia fixo, protocolos, conferência esperado × faturado</a:t>
             </a:r>
-            <a:endParaRPr lang="en-US" sz="1800" dirty="0"/>
+            <a:endParaRPr lang="en-US" sz="1600" dirty="0"/>
           </a:p>
           <a:p>
             <a:pPr indent="0" marL="0">
@@ -6309,7 +6751,7 @@
               <a:buNone/>
             </a:pPr>
             <a:r>
-              <a:rPr lang="en-US" sz="1800" dirty="0">
+              <a:rPr lang="en-US" sz="1600" dirty="0">
                 <a:solidFill>
                   <a:srgbClr val="1F2937"/>
                 </a:solidFill>
@@ -6319,7 +6761,7 @@
               </a:rPr>
               <a:t>8. Dependência de um produtor ou usina → portfólio de usinas, contratos com prazo e transição</a:t>
             </a:r>
-            <a:endParaRPr lang="en-US" sz="1800" dirty="0"/>
+            <a:endParaRPr lang="en-US" sz="1600" dirty="0"/>
           </a:p>
           <a:p>
             <a:pPr indent="0" marL="0">
@@ -6329,7 +6771,7 @@
               <a:buNone/>
             </a:pPr>
             <a:r>
-              <a:rPr lang="en-US" sz="1800" dirty="0">
+              <a:rPr lang="en-US" sz="1600" dirty="0">
                 <a:solidFill>
                   <a:srgbClr val="1F2937"/>
                 </a:solidFill>
@@ -6339,7 +6781,7 @@
               </a:rPr>
               <a:t>9. Jurídico/consumidor → contratos revisados, linguagem correta, LGPD</a:t>
             </a:r>
-            <a:endParaRPr lang="en-US" sz="1800" dirty="0"/>
+            <a:endParaRPr lang="en-US" sz="1600" dirty="0"/>
           </a:p>
           <a:p>
             <a:pPr indent="0" marL="0">
@@ -6349,7 +6791,7 @@
               <a:buNone/>
             </a:pPr>
             <a:r>
-              <a:rPr lang="en-US" sz="1800" dirty="0">
+              <a:rPr lang="en-US" sz="1600" dirty="0">
                 <a:solidFill>
                   <a:srgbClr val="1F2937"/>
                 </a:solidFill>
@@ -6359,7 +6801,93 @@
               </a:rPr>
               <a:t>10. Caixa (capital de giro até o ponto de equilíbrio) → plano financeiro, estrutura fixa enxuta, metas comerciais</a:t>
             </a:r>
-            <a:endParaRPr lang="en-US" sz="1800" dirty="0"/>
+            <a:endParaRPr lang="en-US" sz="1600" dirty="0"/>
+          </a:p>
+        </p:txBody>
+      </p:sp>
+      <p:sp>
+        <p:nvSpPr>
+          <p:cNvPr id="11" name="Shape 8"/>
+          <p:cNvSpPr/>
+          <p:nvPr/>
+        </p:nvSpPr>
+        <p:spPr>
+          <a:xfrm>
+            <a:off x="548640" y="5413248"/>
+            <a:ext cx="11091672" cy="868680"/>
+          </a:xfrm>
+          <a:prstGeom prst="roundRect">
+            <a:avLst>
+              <a:gd name="adj" fmla="val 8421"/>
+            </a:avLst>
+          </a:prstGeom>
+          <a:solidFill>
+            <a:srgbClr val="EEF3FA"/>
+          </a:solidFill>
+          <a:ln w="6350">
+            <a:solidFill>
+              <a:srgbClr val="D8E0EC"/>
+            </a:solidFill>
+            <a:prstDash val="solid"/>
+          </a:ln>
+        </p:spPr>
+      </p:sp>
+      <p:sp>
+        <p:nvSpPr>
+          <p:cNvPr id="12" name="Shape 9"/>
+          <p:cNvSpPr/>
+          <p:nvPr/>
+        </p:nvSpPr>
+        <p:spPr>
+          <a:xfrm>
+            <a:off x="548640" y="5413248"/>
+            <a:ext cx="91440" cy="868680"/>
+          </a:xfrm>
+          <a:prstGeom prst="rect">
+            <a:avLst/>
+          </a:prstGeom>
+          <a:solidFill>
+            <a:srgbClr val="F7A23B"/>
+          </a:solidFill>
+          <a:ln/>
+        </p:spPr>
+      </p:sp>
+      <p:sp>
+        <p:nvSpPr>
+          <p:cNvPr id="13" name="Text 10"/>
+          <p:cNvSpPr/>
+          <p:nvPr/>
+        </p:nvSpPr>
+        <p:spPr>
+          <a:xfrm>
+            <a:off x="777240" y="5458968"/>
+            <a:ext cx="10744200" cy="777240"/>
+          </a:xfrm>
+          <a:prstGeom prst="rect">
+            <a:avLst/>
+          </a:prstGeom>
+          <a:noFill/>
+          <a:ln/>
+        </p:spPr>
+        <p:txBody>
+          <a:bodyPr wrap="square" rtlCol="0" anchor="ctr"/>
+          <a:lstStyle/>
+          <a:p>
+            <a:pPr indent="0" marL="0">
+              <a:buNone/>
+            </a:pPr>
+            <a:r>
+              <a:rPr lang="en-US" sz="1500" dirty="0">
+                <a:solidFill>
+                  <a:srgbClr val="1F2937"/>
+                </a:solidFill>
+                <a:latin typeface="Arial" pitchFamily="34" charset="0"/>
+                <a:ea typeface="Arial" pitchFamily="34" charset="-122"/>
+                <a:cs typeface="Arial" pitchFamily="34" charset="-120"/>
+              </a:rPr>
+              <a:t>Os dez riscos da tela são os que toda empresa de assinatura deve mapear. Atenção ao último: muitas empresas boas morrem por falta de caixa antes do ponto de equilíbrio.</a:t>
+            </a:r>
+            <a:endParaRPr lang="en-US" sz="1500" dirty="0"/>
           </a:p>
         </p:txBody>
       </p:sp>
@@ -6679,7 +7207,7 @@
         <p:spPr>
           <a:xfrm>
             <a:off x="548640" y="1325880"/>
-            <a:ext cx="3544824" cy="4892040"/>
+            <a:ext cx="3544824" cy="3977640"/>
           </a:xfrm>
           <a:prstGeom prst="roundRect">
             <a:avLst>
@@ -6772,7 +7300,7 @@
         <p:spPr>
           <a:xfrm>
             <a:off x="1325880" y="1435608"/>
-            <a:ext cx="2630424" cy="4672584"/>
+            <a:ext cx="2630424" cy="3758184"/>
           </a:xfrm>
           <a:prstGeom prst="rect">
             <a:avLst/>
@@ -6813,7 +7341,7 @@
         <p:spPr>
           <a:xfrm>
             <a:off x="4322064" y="1325880"/>
-            <a:ext cx="3544824" cy="4892040"/>
+            <a:ext cx="3544824" cy="3977640"/>
           </a:xfrm>
           <a:prstGeom prst="roundRect">
             <a:avLst>
@@ -6906,7 +7434,7 @@
         <p:spPr>
           <a:xfrm>
             <a:off x="5099304" y="1435608"/>
-            <a:ext cx="2630424" cy="4672584"/>
+            <a:ext cx="2630424" cy="3758184"/>
           </a:xfrm>
           <a:prstGeom prst="rect">
             <a:avLst/>
@@ -6947,7 +7475,7 @@
         <p:spPr>
           <a:xfrm>
             <a:off x="8095488" y="1325880"/>
-            <a:ext cx="3544824" cy="4892040"/>
+            <a:ext cx="3544824" cy="3977640"/>
           </a:xfrm>
           <a:prstGeom prst="roundRect">
             <a:avLst>
@@ -7040,7 +7568,7 @@
         <p:spPr>
           <a:xfrm>
             <a:off x="8872728" y="1435608"/>
-            <a:ext cx="2630424" cy="4672584"/>
+            <a:ext cx="2630424" cy="3758184"/>
           </a:xfrm>
           <a:prstGeom prst="rect">
             <a:avLst/>
@@ -7069,6 +7597,92 @@
               <a:t>atualizar mitigação</a:t>
             </a:r>
             <a:endParaRPr lang="en-US" sz="1800" dirty="0"/>
+          </a:p>
+        </p:txBody>
+      </p:sp>
+      <p:sp>
+        <p:nvSpPr>
+          <p:cNvPr id="21" name="Shape 18"/>
+          <p:cNvSpPr/>
+          <p:nvPr/>
+        </p:nvSpPr>
+        <p:spPr>
+          <a:xfrm>
+            <a:off x="548640" y="5413248"/>
+            <a:ext cx="11091672" cy="868680"/>
+          </a:xfrm>
+          <a:prstGeom prst="roundRect">
+            <a:avLst>
+              <a:gd name="adj" fmla="val 8421"/>
+            </a:avLst>
+          </a:prstGeom>
+          <a:solidFill>
+            <a:srgbClr val="EEF3FA"/>
+          </a:solidFill>
+          <a:ln w="6350">
+            <a:solidFill>
+              <a:srgbClr val="D8E0EC"/>
+            </a:solidFill>
+            <a:prstDash val="solid"/>
+          </a:ln>
+        </p:spPr>
+      </p:sp>
+      <p:sp>
+        <p:nvSpPr>
+          <p:cNvPr id="22" name="Shape 19"/>
+          <p:cNvSpPr/>
+          <p:nvPr/>
+        </p:nvSpPr>
+        <p:spPr>
+          <a:xfrm>
+            <a:off x="548640" y="5413248"/>
+            <a:ext cx="91440" cy="868680"/>
+          </a:xfrm>
+          <a:prstGeom prst="rect">
+            <a:avLst/>
+          </a:prstGeom>
+          <a:solidFill>
+            <a:srgbClr val="F7A23B"/>
+          </a:solidFill>
+          <a:ln/>
+        </p:spPr>
+      </p:sp>
+      <p:sp>
+        <p:nvSpPr>
+          <p:cNvPr id="23" name="Text 20"/>
+          <p:cNvSpPr/>
+          <p:nvPr/>
+        </p:nvSpPr>
+        <p:spPr>
+          <a:xfrm>
+            <a:off x="777240" y="5458968"/>
+            <a:ext cx="10744200" cy="777240"/>
+          </a:xfrm>
+          <a:prstGeom prst="rect">
+            <a:avLst/>
+          </a:prstGeom>
+          <a:noFill/>
+          <a:ln/>
+        </p:spPr>
+        <p:txBody>
+          <a:bodyPr wrap="square" rtlCol="0" anchor="ctr"/>
+          <a:lstStyle/>
+          <a:p>
+            <a:pPr indent="0" marL="0">
+              <a:buNone/>
+            </a:pPr>
+            <a:r>
+              <a:rPr lang="en-US" sz="1500" dirty="0">
+                <a:solidFill>
+                  <a:srgbClr val="1F2937"/>
+                </a:solidFill>
+                <a:latin typeface="Arial" pitchFamily="34" charset="0"/>
+                <a:ea typeface="Arial" pitchFamily="34" charset="-122"/>
+                <a:cs typeface="Arial" pitchFamily="34" charset="-120"/>
+              </a:rPr>
+              <a:t>Revise a matriz a cada trimestre e registre os incidentes.</a:t>
+            </a:r>
+            <a:endParaRPr lang="en-US" sz="1500" dirty="0"/>
           </a:p>
         </p:txBody>
       </p:sp>
@@ -8748,7 +9362,7 @@
         <p:spPr>
           <a:xfrm>
             <a:off x="822960" y="2286000"/>
-            <a:ext cx="2965704" cy="3749040"/>
+            <a:ext cx="2965704" cy="2286000"/>
           </a:xfrm>
           <a:prstGeom prst="rect">
             <a:avLst/>
@@ -8770,7 +9384,7 @@
               <a:buChar char="●"/>
             </a:pPr>
             <a:r>
-              <a:rPr lang="en-US" sz="1700" dirty="0">
+              <a:rPr lang="en-US" sz="1600" dirty="0">
                 <a:solidFill>
                   <a:srgbClr val="1F2937"/>
                 </a:solidFill>
@@ -8780,7 +9394,7 @@
               </a:rPr>
               <a:t>Dono (gestão, usinas, produtores)</a:t>
             </a:r>
-            <a:endParaRPr lang="en-US" sz="1700" dirty="0"/>
+            <a:endParaRPr lang="en-US" sz="1600" dirty="0"/>
           </a:p>
           <a:p>
             <a:pPr marL="342900" indent="-342900">
@@ -8791,7 +9405,7 @@
               <a:buChar char="●"/>
             </a:pPr>
             <a:r>
-              <a:rPr lang="en-US" sz="1700" dirty="0">
+              <a:rPr lang="en-US" sz="1600" dirty="0">
                 <a:solidFill>
                   <a:srgbClr val="1F2937"/>
                 </a:solidFill>
@@ -8801,7 +9415,7 @@
               </a:rPr>
               <a:t>1 operador (faturas, cobranças, rateio, suporte)</a:t>
             </a:r>
-            <a:endParaRPr lang="en-US" sz="1700" dirty="0"/>
+            <a:endParaRPr lang="en-US" sz="1600" dirty="0"/>
           </a:p>
           <a:p>
             <a:pPr marL="342900" indent="-342900">
@@ -8812,7 +9426,7 @@
               <a:buChar char="●"/>
             </a:pPr>
             <a:r>
-              <a:rPr lang="en-US" sz="1700" dirty="0">
+              <a:rPr lang="en-US" sz="1600" dirty="0">
                 <a:solidFill>
                   <a:srgbClr val="1F2937"/>
                 </a:solidFill>
@@ -8822,7 +9436,7 @@
               </a:rPr>
               <a:t>2–3 consultores</a:t>
             </a:r>
-            <a:endParaRPr lang="en-US" sz="1700" dirty="0"/>
+            <a:endParaRPr lang="en-US" sz="1600" dirty="0"/>
           </a:p>
           <a:p>
             <a:pPr marL="342900" indent="-342900">
@@ -8833,7 +9447,7 @@
               <a:buChar char="●"/>
             </a:pPr>
             <a:r>
-              <a:rPr lang="en-US" sz="1700" dirty="0">
+              <a:rPr lang="en-US" sz="1600" dirty="0">
                 <a:solidFill>
                   <a:srgbClr val="1F2937"/>
                 </a:solidFill>
@@ -8843,13 +9457,72 @@
               </a:rPr>
               <a:t>parceiros: contador, advogado, O&amp;M</a:t>
             </a:r>
-            <a:endParaRPr lang="en-US" sz="1700" dirty="0"/>
+            <a:endParaRPr lang="en-US" sz="1600" dirty="0"/>
           </a:p>
         </p:txBody>
       </p:sp>
       <p:sp>
         <p:nvSpPr>
           <p:cNvPr id="13" name="Shape 10"/>
+          <p:cNvSpPr/>
+          <p:nvPr/>
+        </p:nvSpPr>
+        <p:spPr>
+          <a:xfrm>
+            <a:off x="822960" y="4663440"/>
+            <a:ext cx="2965704" cy="18288"/>
+          </a:xfrm>
+          <a:prstGeom prst="rect">
+            <a:avLst/>
+          </a:prstGeom>
+          <a:solidFill>
+            <a:srgbClr val="D8E0EC"/>
+          </a:solidFill>
+          <a:ln/>
+        </p:spPr>
+      </p:sp>
+      <p:sp>
+        <p:nvSpPr>
+          <p:cNvPr id="14" name="Text 11"/>
+          <p:cNvSpPr/>
+          <p:nvPr/>
+        </p:nvSpPr>
+        <p:spPr>
+          <a:xfrm>
+            <a:off x="822960" y="4754880"/>
+            <a:ext cx="2965704" cy="1371600"/>
+          </a:xfrm>
+          <a:prstGeom prst="rect">
+            <a:avLst/>
+          </a:prstGeom>
+          <a:noFill/>
+          <a:ln/>
+        </p:spPr>
+        <p:txBody>
+          <a:bodyPr wrap="square" rtlCol="0" anchor="t"/>
+          <a:lstStyle/>
+          <a:p>
+            <a:pPr indent="0" marL="0">
+              <a:buNone/>
+            </a:pPr>
+            <a:r>
+              <a:rPr lang="en-US" sz="1300" i="1" dirty="0">
+                <a:solidFill>
+                  <a:srgbClr val="64748B"/>
+                </a:solidFill>
+                <a:latin typeface="Arial" pitchFamily="34" charset="0"/>
+                <a:ea typeface="Arial" pitchFamily="34" charset="-122"/>
+                <a:cs typeface="Arial" pitchFamily="34" charset="-120"/>
+              </a:rPr>
+              <a:t>Na primeira fase, a estrutura é mínima e o dono conhece cada processo por dentro.</a:t>
+            </a:r>
+            <a:endParaRPr lang="en-US" sz="1300" dirty="0"/>
+          </a:p>
+        </p:txBody>
+      </p:sp>
+      <p:sp>
+        <p:nvSpPr>
+          <p:cNvPr id="15" name="Shape 12"/>
           <p:cNvSpPr/>
           <p:nvPr/>
         </p:nvSpPr>
@@ -8883,7 +9556,7 @@
       </p:sp>
       <p:sp>
         <p:nvSpPr>
-          <p:cNvPr id="14" name="Shape 11"/>
+          <p:cNvPr id="16" name="Shape 13"/>
           <p:cNvSpPr/>
           <p:nvPr/>
         </p:nvSpPr>
@@ -8903,7 +9576,7 @@
       </p:sp>
       <p:sp>
         <p:nvSpPr>
-          <p:cNvPr id="15" name="Text 12"/>
+          <p:cNvPr id="17" name="Text 14"/>
           <p:cNvSpPr/>
           <p:nvPr/>
         </p:nvSpPr>
@@ -8944,14 +9617,14 @@
       </p:sp>
       <p:sp>
         <p:nvSpPr>
-          <p:cNvPr id="16" name="Text 13"/>
+          <p:cNvPr id="18" name="Text 15"/>
           <p:cNvSpPr/>
           <p:nvPr/>
         </p:nvSpPr>
         <p:spPr>
           <a:xfrm>
             <a:off x="4611624" y="2286000"/>
-            <a:ext cx="2965704" cy="3749040"/>
+            <a:ext cx="2965704" cy="2286000"/>
           </a:xfrm>
           <a:prstGeom prst="rect">
             <a:avLst/>
@@ -8973,7 +9646,7 @@
               <a:buChar char="●"/>
             </a:pPr>
             <a:r>
-              <a:rPr lang="en-US" sz="1700" dirty="0">
+              <a:rPr lang="en-US" sz="1600" dirty="0">
                 <a:solidFill>
                   <a:srgbClr val="1F2937"/>
                 </a:solidFill>
@@ -8983,7 +9656,7 @@
               </a:rPr>
               <a:t>Gestor comercial + 5–10 consultores</a:t>
             </a:r>
-            <a:endParaRPr lang="en-US" sz="1700" dirty="0"/>
+            <a:endParaRPr lang="en-US" sz="1600" dirty="0"/>
           </a:p>
           <a:p>
             <a:pPr marL="342900" indent="-342900">
@@ -8994,7 +9667,7 @@
               <a:buChar char="●"/>
             </a:pPr>
             <a:r>
-              <a:rPr lang="en-US" sz="1700" dirty="0">
+              <a:rPr lang="en-US" sz="1600" dirty="0">
                 <a:solidFill>
                   <a:srgbClr val="1F2937"/>
                 </a:solidFill>
@@ -9004,7 +9677,7 @@
               </a:rPr>
               <a:t>Operações: 2–3 (faturas/rateio, cobrança)</a:t>
             </a:r>
-            <a:endParaRPr lang="en-US" sz="1700" dirty="0"/>
+            <a:endParaRPr lang="en-US" sz="1600" dirty="0"/>
           </a:p>
           <a:p>
             <a:pPr marL="342900" indent="-342900">
@@ -9015,7 +9688,7 @@
               <a:buChar char="●"/>
             </a:pPr>
             <a:r>
-              <a:rPr lang="en-US" sz="1700" dirty="0">
+              <a:rPr lang="en-US" sz="1600" dirty="0">
                 <a:solidFill>
                   <a:srgbClr val="1F2937"/>
                 </a:solidFill>
@@ -9025,7 +9698,7 @@
               </a:rPr>
               <a:t>Atendimento: 1–2</a:t>
             </a:r>
-            <a:endParaRPr lang="en-US" sz="1700" dirty="0"/>
+            <a:endParaRPr lang="en-US" sz="1600" dirty="0"/>
           </a:p>
           <a:p>
             <a:pPr marL="342900" indent="-342900">
@@ -9036,7 +9709,7 @@
               <a:buChar char="●"/>
             </a:pPr>
             <a:r>
-              <a:rPr lang="en-US" sz="1700" dirty="0">
+              <a:rPr lang="en-US" sz="1600" dirty="0">
                 <a:solidFill>
                   <a:srgbClr val="1F2937"/>
                 </a:solidFill>
@@ -9046,7 +9719,7 @@
               </a:rPr>
               <a:t>Financeiro/repasses: 1</a:t>
             </a:r>
-            <a:endParaRPr lang="en-US" sz="1700" dirty="0"/>
+            <a:endParaRPr lang="en-US" sz="1600" dirty="0"/>
           </a:p>
           <a:p>
             <a:pPr marL="342900" indent="-342900">
@@ -9057,7 +9730,7 @@
               <a:buChar char="●"/>
             </a:pPr>
             <a:r>
-              <a:rPr lang="en-US" sz="1700" dirty="0">
+              <a:rPr lang="en-US" sz="1600" dirty="0">
                 <a:solidFill>
                   <a:srgbClr val="1F2937"/>
                 </a:solidFill>
@@ -9067,13 +9740,72 @@
               </a:rPr>
               <a:t>Captação de usinas: 1</a:t>
             </a:r>
-            <a:endParaRPr lang="en-US" sz="1700" dirty="0"/>
-          </a:p>
-        </p:txBody>
-      </p:sp>
-      <p:sp>
-        <p:nvSpPr>
-          <p:cNvPr id="17" name="Shape 14"/>
+            <a:endParaRPr lang="en-US" sz="1600" dirty="0"/>
+          </a:p>
+        </p:txBody>
+      </p:sp>
+      <p:sp>
+        <p:nvSpPr>
+          <p:cNvPr id="19" name="Shape 16"/>
+          <p:cNvSpPr/>
+          <p:nvPr/>
+        </p:nvSpPr>
+        <p:spPr>
+          <a:xfrm>
+            <a:off x="4611624" y="4663440"/>
+            <a:ext cx="2965704" cy="18288"/>
+          </a:xfrm>
+          <a:prstGeom prst="rect">
+            <a:avLst/>
+          </a:prstGeom>
+          <a:solidFill>
+            <a:srgbClr val="D8E0EC"/>
+          </a:solidFill>
+          <a:ln/>
+        </p:spPr>
+      </p:sp>
+      <p:sp>
+        <p:nvSpPr>
+          <p:cNvPr id="20" name="Text 17"/>
+          <p:cNvSpPr/>
+          <p:nvPr/>
+        </p:nvSpPr>
+        <p:spPr>
+          <a:xfrm>
+            <a:off x="4611624" y="4754880"/>
+            <a:ext cx="2965704" cy="1371600"/>
+          </a:xfrm>
+          <a:prstGeom prst="rect">
+            <a:avLst/>
+          </a:prstGeom>
+          <a:noFill/>
+          <a:ln/>
+        </p:spPr>
+        <p:txBody>
+          <a:bodyPr wrap="square" rtlCol="0" anchor="t"/>
+          <a:lstStyle/>
+          <a:p>
+            <a:pPr indent="0" marL="0">
+              <a:buNone/>
+            </a:pPr>
+            <a:r>
+              <a:rPr lang="en-US" sz="1300" i="1" dirty="0">
+                <a:solidFill>
+                  <a:srgbClr val="64748B"/>
+                </a:solidFill>
+                <a:latin typeface="Arial" pitchFamily="34" charset="0"/>
+                <a:ea typeface="Arial" pitchFamily="34" charset="-122"/>
+                <a:cs typeface="Arial" pitchFamily="34" charset="-120"/>
+              </a:rPr>
+              <a:t>Na segunda, a empresa se divide em áreas, com alguém dedicado a captar usinas.</a:t>
+            </a:r>
+            <a:endParaRPr lang="en-US" sz="1300" dirty="0"/>
+          </a:p>
+        </p:txBody>
+      </p:sp>
+      <p:sp>
+        <p:nvSpPr>
+          <p:cNvPr id="21" name="Shape 18"/>
           <p:cNvSpPr/>
           <p:nvPr/>
         </p:nvSpPr>
@@ -9107,7 +9839,7 @@
       </p:sp>
       <p:sp>
         <p:nvSpPr>
-          <p:cNvPr id="18" name="Shape 15"/>
+          <p:cNvPr id="22" name="Shape 19"/>
           <p:cNvSpPr/>
           <p:nvPr/>
         </p:nvSpPr>
@@ -9127,7 +9859,7 @@
       </p:sp>
       <p:sp>
         <p:nvSpPr>
-          <p:cNvPr id="19" name="Text 16"/>
+          <p:cNvPr id="23" name="Text 20"/>
           <p:cNvSpPr/>
           <p:nvPr/>
         </p:nvSpPr>
@@ -9168,14 +9900,14 @@
       </p:sp>
       <p:sp>
         <p:nvSpPr>
-          <p:cNvPr id="20" name="Text 17"/>
+          <p:cNvPr id="24" name="Text 21"/>
           <p:cNvSpPr/>
           <p:nvPr/>
         </p:nvSpPr>
         <p:spPr>
           <a:xfrm>
             <a:off x="8400288" y="2286000"/>
-            <a:ext cx="2965704" cy="3749040"/>
+            <a:ext cx="2965704" cy="2286000"/>
           </a:xfrm>
           <a:prstGeom prst="rect">
             <a:avLst/>
@@ -9271,6 +10003,65 @@
               <a:t>expansão para novas áreas</a:t>
             </a:r>
             <a:endParaRPr lang="en-US" sz="1700" dirty="0"/>
+          </a:p>
+        </p:txBody>
+      </p:sp>
+      <p:sp>
+        <p:nvSpPr>
+          <p:cNvPr id="25" name="Shape 22"/>
+          <p:cNvSpPr/>
+          <p:nvPr/>
+        </p:nvSpPr>
+        <p:spPr>
+          <a:xfrm>
+            <a:off x="8400288" y="4663440"/>
+            <a:ext cx="2965704" cy="18288"/>
+          </a:xfrm>
+          <a:prstGeom prst="rect">
+            <a:avLst/>
+          </a:prstGeom>
+          <a:solidFill>
+            <a:srgbClr val="D8E0EC"/>
+          </a:solidFill>
+          <a:ln/>
+        </p:spPr>
+      </p:sp>
+      <p:sp>
+        <p:nvSpPr>
+          <p:cNvPr id="26" name="Text 23"/>
+          <p:cNvSpPr/>
+          <p:nvPr/>
+        </p:nvSpPr>
+        <p:spPr>
+          <a:xfrm>
+            <a:off x="8400288" y="4754880"/>
+            <a:ext cx="2965704" cy="1371600"/>
+          </a:xfrm>
+          <a:prstGeom prst="rect">
+            <a:avLst/>
+          </a:prstGeom>
+          <a:noFill/>
+          <a:ln/>
+        </p:spPr>
+        <p:txBody>
+          <a:bodyPr wrap="square" rtlCol="0" anchor="t"/>
+          <a:lstStyle/>
+          <a:p>
+            <a:pPr indent="0" marL="0">
+              <a:buNone/>
+            </a:pPr>
+            <a:r>
+              <a:rPr lang="en-US" sz="1300" i="1" dirty="0">
+                <a:solidFill>
+                  <a:srgbClr val="64748B"/>
+                </a:solidFill>
+                <a:latin typeface="Arial" pitchFamily="34" charset="0"/>
+                <a:ea typeface="Arial" pitchFamily="34" charset="-122"/>
+                <a:cs typeface="Arial" pitchFamily="34" charset="-120"/>
+              </a:rPr>
+              <a:t>Na terceira, a operação se organiza por distribuidora.</a:t>
+            </a:r>
+            <a:endParaRPr lang="en-US" sz="1300" dirty="0"/>
           </a:p>
         </p:txBody>
       </p:sp>
@@ -9590,11 +10381,11 @@
         <p:spPr>
           <a:xfrm>
             <a:off x="548640" y="1325880"/>
-            <a:ext cx="3544824" cy="2331720"/>
+            <a:ext cx="3544824" cy="1874520"/>
           </a:xfrm>
           <a:prstGeom prst="roundRect">
             <a:avLst>
-              <a:gd name="adj" fmla="val 3137"/>
+              <a:gd name="adj" fmla="val 3902"/>
             </a:avLst>
           </a:prstGeom>
           <a:solidFill>
@@ -9683,7 +10474,7 @@
         <p:spPr>
           <a:xfrm>
             <a:off x="1325880" y="1435608"/>
-            <a:ext cx="2630424" cy="2112264"/>
+            <a:ext cx="2630424" cy="1655064"/>
           </a:xfrm>
           <a:prstGeom prst="rect">
             <a:avLst/>
@@ -9724,11 +10515,11 @@
         <p:spPr>
           <a:xfrm>
             <a:off x="4322064" y="1325880"/>
-            <a:ext cx="3544824" cy="2331720"/>
+            <a:ext cx="3544824" cy="1874520"/>
           </a:xfrm>
           <a:prstGeom prst="roundRect">
             <a:avLst>
-              <a:gd name="adj" fmla="val 3137"/>
+              <a:gd name="adj" fmla="val 3902"/>
             </a:avLst>
           </a:prstGeom>
           <a:solidFill>
@@ -9817,7 +10608,7 @@
         <p:spPr>
           <a:xfrm>
             <a:off x="5099304" y="1435608"/>
-            <a:ext cx="2630424" cy="2112264"/>
+            <a:ext cx="2630424" cy="1655064"/>
           </a:xfrm>
           <a:prstGeom prst="rect">
             <a:avLst/>
@@ -9858,11 +10649,11 @@
         <p:spPr>
           <a:xfrm>
             <a:off x="8095488" y="1325880"/>
-            <a:ext cx="3544824" cy="2331720"/>
+            <a:ext cx="3544824" cy="1874520"/>
           </a:xfrm>
           <a:prstGeom prst="roundRect">
             <a:avLst>
-              <a:gd name="adj" fmla="val 3137"/>
+              <a:gd name="adj" fmla="val 3902"/>
             </a:avLst>
           </a:prstGeom>
           <a:solidFill>
@@ -9951,7 +10742,7 @@
         <p:spPr>
           <a:xfrm>
             <a:off x="8872728" y="1435608"/>
-            <a:ext cx="2630424" cy="2112264"/>
+            <a:ext cx="2630424" cy="1655064"/>
           </a:xfrm>
           <a:prstGeom prst="rect">
             <a:avLst/>
@@ -9991,12 +10782,12 @@
         </p:nvSpPr>
         <p:spPr>
           <a:xfrm>
-            <a:off x="548640" y="3886200"/>
-            <a:ext cx="3544824" cy="2331720"/>
+            <a:off x="548640" y="3429000"/>
+            <a:ext cx="3544824" cy="1874520"/>
           </a:xfrm>
           <a:prstGeom prst="roundRect">
             <a:avLst>
-              <a:gd name="adj" fmla="val 3137"/>
+              <a:gd name="adj" fmla="val 3902"/>
             </a:avLst>
           </a:prstGeom>
           <a:solidFill>
@@ -10025,7 +10816,7 @@
         </p:nvSpPr>
         <p:spPr>
           <a:xfrm>
-            <a:off x="731520" y="4069080"/>
+            <a:off x="731520" y="3611880"/>
             <a:ext cx="457200" cy="457200"/>
           </a:xfrm>
           <a:prstGeom prst="ellipse">
@@ -10045,7 +10836,7 @@
         </p:nvSpPr>
         <p:spPr>
           <a:xfrm>
-            <a:off x="731520" y="4069080"/>
+            <a:off x="731520" y="3611880"/>
             <a:ext cx="457200" cy="457200"/>
           </a:xfrm>
           <a:prstGeom prst="rect">
@@ -10084,8 +10875,8 @@
         </p:nvSpPr>
         <p:spPr>
           <a:xfrm>
-            <a:off x="1325880" y="3995928"/>
-            <a:ext cx="2630424" cy="2112264"/>
+            <a:off x="1325880" y="3538728"/>
+            <a:ext cx="2630424" cy="1655064"/>
           </a:xfrm>
           <a:prstGeom prst="rect">
             <a:avLst/>
@@ -10125,12 +10916,12 @@
         </p:nvSpPr>
         <p:spPr>
           <a:xfrm>
-            <a:off x="4322064" y="3886200"/>
-            <a:ext cx="3544824" cy="2331720"/>
+            <a:off x="4322064" y="3429000"/>
+            <a:ext cx="3544824" cy="1874520"/>
           </a:xfrm>
           <a:prstGeom prst="roundRect">
             <a:avLst>
-              <a:gd name="adj" fmla="val 3137"/>
+              <a:gd name="adj" fmla="val 3902"/>
             </a:avLst>
           </a:prstGeom>
           <a:solidFill>
@@ -10159,7 +10950,7 @@
         </p:nvSpPr>
         <p:spPr>
           <a:xfrm>
-            <a:off x="4504944" y="4069080"/>
+            <a:off x="4504944" y="3611880"/>
             <a:ext cx="457200" cy="457200"/>
           </a:xfrm>
           <a:prstGeom prst="ellipse">
@@ -10179,7 +10970,7 @@
         </p:nvSpPr>
         <p:spPr>
           <a:xfrm>
-            <a:off x="4504944" y="4069080"/>
+            <a:off x="4504944" y="3611880"/>
             <a:ext cx="457200" cy="457200"/>
           </a:xfrm>
           <a:prstGeom prst="rect">
@@ -10218,8 +11009,8 @@
         </p:nvSpPr>
         <p:spPr>
           <a:xfrm>
-            <a:off x="5099304" y="3995928"/>
-            <a:ext cx="2630424" cy="2112264"/>
+            <a:off x="5099304" y="3538728"/>
+            <a:ext cx="2630424" cy="1655064"/>
           </a:xfrm>
           <a:prstGeom prst="rect">
             <a:avLst/>
@@ -10248,6 +11039,92 @@
               <a:t>onboarding de novos colaboradores com o laboratório</a:t>
             </a:r>
             <a:endParaRPr lang="en-US" sz="1800" dirty="0"/>
+          </a:p>
+        </p:txBody>
+      </p:sp>
+      <p:sp>
+        <p:nvSpPr>
+          <p:cNvPr id="29" name="Shape 26"/>
+          <p:cNvSpPr/>
+          <p:nvPr/>
+        </p:nvSpPr>
+        <p:spPr>
+          <a:xfrm>
+            <a:off x="548640" y="5413248"/>
+            <a:ext cx="11091672" cy="868680"/>
+          </a:xfrm>
+          <a:prstGeom prst="roundRect">
+            <a:avLst>
+              <a:gd name="adj" fmla="val 8421"/>
+            </a:avLst>
+          </a:prstGeom>
+          <a:solidFill>
+            <a:srgbClr val="EEF3FA"/>
+          </a:solidFill>
+          <a:ln w="6350">
+            <a:solidFill>
+              <a:srgbClr val="D8E0EC"/>
+            </a:solidFill>
+            <a:prstDash val="solid"/>
+          </a:ln>
+        </p:spPr>
+      </p:sp>
+      <p:sp>
+        <p:nvSpPr>
+          <p:cNvPr id="30" name="Shape 27"/>
+          <p:cNvSpPr/>
+          <p:nvPr/>
+        </p:nvSpPr>
+        <p:spPr>
+          <a:xfrm>
+            <a:off x="548640" y="5413248"/>
+            <a:ext cx="91440" cy="868680"/>
+          </a:xfrm>
+          <a:prstGeom prst="rect">
+            <a:avLst/>
+          </a:prstGeom>
+          <a:solidFill>
+            <a:srgbClr val="F7A23B"/>
+          </a:solidFill>
+          <a:ln/>
+        </p:spPr>
+      </p:sp>
+      <p:sp>
+        <p:nvSpPr>
+          <p:cNvPr id="31" name="Text 28"/>
+          <p:cNvSpPr/>
+          <p:nvPr/>
+        </p:nvSpPr>
+        <p:spPr>
+          <a:xfrm>
+            <a:off x="777240" y="5458968"/>
+            <a:ext cx="10744200" cy="777240"/>
+          </a:xfrm>
+          <a:prstGeom prst="rect">
+            <a:avLst/>
+          </a:prstGeom>
+          <a:noFill/>
+          <a:ln/>
+        </p:spPr>
+        <p:txBody>
+          <a:bodyPr wrap="square" rtlCol="0" anchor="ctr"/>
+          <a:lstStyle/>
+          <a:p>
+            <a:pPr indent="0" marL="0">
+              <a:buNone/>
+            </a:pPr>
+            <a:r>
+              <a:rPr lang="en-US" sz="1500" dirty="0">
+                <a:solidFill>
+                  <a:srgbClr val="1F2937"/>
+                </a:solidFill>
+                <a:latin typeface="Arial" pitchFamily="34" charset="0"/>
+                <a:ea typeface="Arial" pitchFamily="34" charset="-122"/>
+                <a:cs typeface="Arial" pitchFamily="34" charset="-120"/>
+              </a:rPr>
+              <a:t>O que escala são processos: procedimento escrito, checklists, metas e rituais curtos. Use o laboratório do curso para treinar cada pessoa nova.</a:t>
+            </a:r>
+            <a:endParaRPr lang="en-US" sz="1500" dirty="0"/>
           </a:p>
         </p:txBody>
       </p:sp>
@@ -12348,7 +13225,7 @@
                 <a:ea typeface="Arial" pitchFamily="34" charset="-122"/>
                 <a:cs typeface="Arial" pitchFamily="34" charset="-120"/>
               </a:rPr>
-              <a:t>Configurações → Identidade Visual: nome · cores · logos · favicon · prévia</a:t>
+              <a:t>Em Configurações, Identidade Visual: nome, cores, logotipos e favicon. Telas, PDFs, boletos e e-mails passam a usar a sua marca.</a:t>
             </a:r>
             <a:endParaRPr lang="en-US" sz="1500" dirty="0"/>
           </a:p>
@@ -12399,7 +13276,7 @@
                 <a:ea typeface="Arial" pitchFamily="34" charset="-122"/>
                 <a:cs typeface="Arial" pitchFamily="34" charset="-120"/>
               </a:rPr>
-              <a:t>Usuários: consultores (carteira própria) e administradores (operação)</a:t>
+              <a:t>Em Usuários, crie um consultor, que vê só a própria carteira. Administrador só para quem opera.</a:t>
             </a:r>
             <a:endParaRPr lang="en-US" sz="1500" dirty="0"/>
           </a:p>
@@ -12450,7 +13327,7 @@
                 <a:ea typeface="Arial" pitchFamily="34" charset="-122"/>
                 <a:cs typeface="Arial" pitchFamily="34" charset="-120"/>
               </a:rPr>
-              <a:t>Templates com {{variáveis}} preenchidas automaticamente · envio sempre por clique humano</a:t>
+              <a:t>Em Whatsapp, Templates de Mensagens, edite os modelos no tom da sua empresa. O envio é sempre com um clique.</a:t>
             </a:r>
             <a:endParaRPr lang="en-US" sz="1500" dirty="0"/>
           </a:p>
@@ -12501,7 +13378,7 @@
                 <a:ea typeface="Arial" pitchFamily="34" charset="-122"/>
                 <a:cs typeface="Arial" pitchFamily="34" charset="-120"/>
               </a:rPr>
-              <a:t>Contas de pagamento (Mercado Pago) · caixas de e-mail de faturas · credenciais criptografadas · webhook exige a chave secreta</a:t>
+              <a:t>Em Financeiro, Bancos, fica a conta do Mercado Pago, com credenciais criptografadas. Em Integrações, as caixas de e-mail das faturas.</a:t>
             </a:r>
             <a:endParaRPr lang="en-US" sz="1500" dirty="0"/>
           </a:p>
@@ -13568,7 +14445,7 @@
         <p:spPr>
           <a:xfrm>
             <a:off x="548640" y="1325880"/>
-            <a:ext cx="5486400" cy="4937760"/>
+            <a:ext cx="5486400" cy="3977640"/>
           </a:xfrm>
           <a:prstGeom prst="rect">
             <a:avLst/>
@@ -13692,7 +14569,7 @@
         <p:spPr>
           <a:xfrm>
             <a:off x="6263640" y="1325880"/>
-            <a:ext cx="5486400" cy="4937760"/>
+            <a:ext cx="5486400" cy="3977640"/>
           </a:xfrm>
           <a:prstGeom prst="rect">
             <a:avLst/>
@@ -13784,6 +14661,92 @@
               <a:t>9. Riscos principais e mitigação</a:t>
             </a:r>
             <a:endParaRPr lang="en-US" sz="1800" dirty="0"/>
+          </a:p>
+        </p:txBody>
+      </p:sp>
+      <p:sp>
+        <p:nvSpPr>
+          <p:cNvPr id="11" name="Shape 8"/>
+          <p:cNvSpPr/>
+          <p:nvPr/>
+        </p:nvSpPr>
+        <p:spPr>
+          <a:xfrm>
+            <a:off x="548640" y="5413248"/>
+            <a:ext cx="11091672" cy="868680"/>
+          </a:xfrm>
+          <a:prstGeom prst="roundRect">
+            <a:avLst>
+              <a:gd name="adj" fmla="val 8421"/>
+            </a:avLst>
+          </a:prstGeom>
+          <a:solidFill>
+            <a:srgbClr val="EEF3FA"/>
+          </a:solidFill>
+          <a:ln w="6350">
+            <a:solidFill>
+              <a:srgbClr val="D8E0EC"/>
+            </a:solidFill>
+            <a:prstDash val="solid"/>
+          </a:ln>
+        </p:spPr>
+      </p:sp>
+      <p:sp>
+        <p:nvSpPr>
+          <p:cNvPr id="12" name="Shape 9"/>
+          <p:cNvSpPr/>
+          <p:nvPr/>
+        </p:nvSpPr>
+        <p:spPr>
+          <a:xfrm>
+            <a:off x="548640" y="5413248"/>
+            <a:ext cx="91440" cy="868680"/>
+          </a:xfrm>
+          <a:prstGeom prst="rect">
+            <a:avLst/>
+          </a:prstGeom>
+          <a:solidFill>
+            <a:srgbClr val="F7A23B"/>
+          </a:solidFill>
+          <a:ln/>
+        </p:spPr>
+      </p:sp>
+      <p:sp>
+        <p:nvSpPr>
+          <p:cNvPr id="13" name="Text 10"/>
+          <p:cNvSpPr/>
+          <p:nvPr/>
+        </p:nvSpPr>
+        <p:spPr>
+          <a:xfrm>
+            <a:off x="777240" y="5458968"/>
+            <a:ext cx="10744200" cy="777240"/>
+          </a:xfrm>
+          <a:prstGeom prst="rect">
+            <a:avLst/>
+          </a:prstGeom>
+          <a:noFill/>
+          <a:ln/>
+        </p:spPr>
+        <p:txBody>
+          <a:bodyPr wrap="square" rtlCol="0" anchor="ctr"/>
+          <a:lstStyle/>
+          <a:p>
+            <a:pPr indent="0" marL="0">
+              <a:buNone/>
+            </a:pPr>
+            <a:r>
+              <a:rPr lang="en-US" sz="1500" dirty="0">
+                <a:solidFill>
+                  <a:srgbClr val="1F2937"/>
+                </a:solidFill>
+                <a:latin typeface="Arial" pitchFamily="34" charset="0"/>
+                <a:ea typeface="Arial" pitchFamily="34" charset="-122"/>
+                <a:cs typeface="Arial" pitchFamily="34" charset="-120"/>
+              </a:rPr>
+              <a:t>São nove blocos, e cada um já existe nos seus entregáveis. O trabalho agora é resumir.</a:t>
+            </a:r>
+            <a:endParaRPr lang="en-US" sz="1500" dirty="0"/>
           </a:p>
         </p:txBody>
       </p:sp>
@@ -14103,11 +15066,11 @@
         <p:spPr>
           <a:xfrm>
             <a:off x="548640" y="1325880"/>
-            <a:ext cx="3544824" cy="2331720"/>
+            <a:ext cx="3544824" cy="1874520"/>
           </a:xfrm>
           <a:prstGeom prst="roundRect">
             <a:avLst>
-              <a:gd name="adj" fmla="val 3137"/>
+              <a:gd name="adj" fmla="val 3902"/>
             </a:avLst>
           </a:prstGeom>
           <a:solidFill>
@@ -14196,7 +15159,7 @@
         <p:spPr>
           <a:xfrm>
             <a:off x="1325880" y="1435608"/>
-            <a:ext cx="2630424" cy="2112264"/>
+            <a:ext cx="2630424" cy="1655064"/>
           </a:xfrm>
           <a:prstGeom prst="rect">
             <a:avLst/>
@@ -14237,11 +15200,11 @@
         <p:spPr>
           <a:xfrm>
             <a:off x="4322064" y="1325880"/>
-            <a:ext cx="3544824" cy="2331720"/>
+            <a:ext cx="3544824" cy="1874520"/>
           </a:xfrm>
           <a:prstGeom prst="roundRect">
             <a:avLst>
-              <a:gd name="adj" fmla="val 3137"/>
+              <a:gd name="adj" fmla="val 3902"/>
             </a:avLst>
           </a:prstGeom>
           <a:solidFill>
@@ -14330,7 +15293,7 @@
         <p:spPr>
           <a:xfrm>
             <a:off x="5099304" y="1435608"/>
-            <a:ext cx="2630424" cy="2112264"/>
+            <a:ext cx="2630424" cy="1655064"/>
           </a:xfrm>
           <a:prstGeom prst="rect">
             <a:avLst/>
@@ -14371,11 +15334,11 @@
         <p:spPr>
           <a:xfrm>
             <a:off x="8095488" y="1325880"/>
-            <a:ext cx="3544824" cy="2331720"/>
+            <a:ext cx="3544824" cy="1874520"/>
           </a:xfrm>
           <a:prstGeom prst="roundRect">
             <a:avLst>
-              <a:gd name="adj" fmla="val 3137"/>
+              <a:gd name="adj" fmla="val 3902"/>
             </a:avLst>
           </a:prstGeom>
           <a:solidFill>
@@ -14464,7 +15427,7 @@
         <p:spPr>
           <a:xfrm>
             <a:off x="8872728" y="1435608"/>
-            <a:ext cx="2630424" cy="2112264"/>
+            <a:ext cx="2630424" cy="1655064"/>
           </a:xfrm>
           <a:prstGeom prst="rect">
             <a:avLst/>
@@ -14504,12 +15467,12 @@
         </p:nvSpPr>
         <p:spPr>
           <a:xfrm>
-            <a:off x="548640" y="3886200"/>
-            <a:ext cx="3544824" cy="2331720"/>
+            <a:off x="548640" y="3429000"/>
+            <a:ext cx="3544824" cy="1874520"/>
           </a:xfrm>
           <a:prstGeom prst="roundRect">
             <a:avLst>
-              <a:gd name="adj" fmla="val 3137"/>
+              <a:gd name="adj" fmla="val 3902"/>
             </a:avLst>
           </a:prstGeom>
           <a:solidFill>
@@ -14538,7 +15501,7 @@
         </p:nvSpPr>
         <p:spPr>
           <a:xfrm>
-            <a:off x="731520" y="4069080"/>
+            <a:off x="731520" y="3611880"/>
             <a:ext cx="457200" cy="457200"/>
           </a:xfrm>
           <a:prstGeom prst="ellipse">
@@ -14558,7 +15521,7 @@
         </p:nvSpPr>
         <p:spPr>
           <a:xfrm>
-            <a:off x="731520" y="4069080"/>
+            <a:off x="731520" y="3611880"/>
             <a:ext cx="457200" cy="457200"/>
           </a:xfrm>
           <a:prstGeom prst="rect">
@@ -14597,8 +15560,8 @@
         </p:nvSpPr>
         <p:spPr>
           <a:xfrm>
-            <a:off x="1325880" y="3995928"/>
-            <a:ext cx="2630424" cy="2112264"/>
+            <a:off x="1325880" y="3538728"/>
+            <a:ext cx="2630424" cy="1655064"/>
           </a:xfrm>
           <a:prstGeom prst="rect">
             <a:avLst/>
@@ -14638,12 +15601,12 @@
         </p:nvSpPr>
         <p:spPr>
           <a:xfrm>
-            <a:off x="4322064" y="3886200"/>
-            <a:ext cx="3544824" cy="2331720"/>
+            <a:off x="4322064" y="3429000"/>
+            <a:ext cx="3544824" cy="1874520"/>
           </a:xfrm>
           <a:prstGeom prst="roundRect">
             <a:avLst>
-              <a:gd name="adj" fmla="val 3137"/>
+              <a:gd name="adj" fmla="val 3902"/>
             </a:avLst>
           </a:prstGeom>
           <a:solidFill>
@@ -14672,7 +15635,7 @@
         </p:nvSpPr>
         <p:spPr>
           <a:xfrm>
-            <a:off x="4504944" y="4069080"/>
+            <a:off x="4504944" y="3611880"/>
             <a:ext cx="457200" cy="457200"/>
           </a:xfrm>
           <a:prstGeom prst="ellipse">
@@ -14692,7 +15655,7 @@
         </p:nvSpPr>
         <p:spPr>
           <a:xfrm>
-            <a:off x="4504944" y="4069080"/>
+            <a:off x="4504944" y="3611880"/>
             <a:ext cx="457200" cy="457200"/>
           </a:xfrm>
           <a:prstGeom prst="rect">
@@ -14731,8 +15694,8 @@
         </p:nvSpPr>
         <p:spPr>
           <a:xfrm>
-            <a:off x="5099304" y="3995928"/>
-            <a:ext cx="2630424" cy="2112264"/>
+            <a:off x="5099304" y="3538728"/>
+            <a:ext cx="2630424" cy="1655064"/>
           </a:xfrm>
           <a:prstGeom prst="rect">
             <a:avLst/>
@@ -14761,6 +15724,92 @@
               <a:t>capital de giro R$ X</a:t>
             </a:r>
             <a:endParaRPr lang="en-US" sz="1800" dirty="0"/>
+          </a:p>
+        </p:txBody>
+      </p:sp>
+      <p:sp>
+        <p:nvSpPr>
+          <p:cNvPr id="29" name="Shape 26"/>
+          <p:cNvSpPr/>
+          <p:nvPr/>
+        </p:nvSpPr>
+        <p:spPr>
+          <a:xfrm>
+            <a:off x="548640" y="5413248"/>
+            <a:ext cx="11091672" cy="868680"/>
+          </a:xfrm>
+          <a:prstGeom prst="roundRect">
+            <a:avLst>
+              <a:gd name="adj" fmla="val 8421"/>
+            </a:avLst>
+          </a:prstGeom>
+          <a:solidFill>
+            <a:srgbClr val="EEF3FA"/>
+          </a:solidFill>
+          <a:ln w="6350">
+            <a:solidFill>
+              <a:srgbClr val="D8E0EC"/>
+            </a:solidFill>
+            <a:prstDash val="solid"/>
+          </a:ln>
+        </p:spPr>
+      </p:sp>
+      <p:sp>
+        <p:nvSpPr>
+          <p:cNvPr id="30" name="Shape 27"/>
+          <p:cNvSpPr/>
+          <p:nvPr/>
+        </p:nvSpPr>
+        <p:spPr>
+          <a:xfrm>
+            <a:off x="548640" y="5413248"/>
+            <a:ext cx="91440" cy="868680"/>
+          </a:xfrm>
+          <a:prstGeom prst="rect">
+            <a:avLst/>
+          </a:prstGeom>
+          <a:solidFill>
+            <a:srgbClr val="F7A23B"/>
+          </a:solidFill>
+          <a:ln/>
+        </p:spPr>
+      </p:sp>
+      <p:sp>
+        <p:nvSpPr>
+          <p:cNvPr id="31" name="Text 28"/>
+          <p:cNvSpPr/>
+          <p:nvPr/>
+        </p:nvSpPr>
+        <p:spPr>
+          <a:xfrm>
+            <a:off x="777240" y="5458968"/>
+            <a:ext cx="10744200" cy="777240"/>
+          </a:xfrm>
+          <a:prstGeom prst="rect">
+            <a:avLst/>
+          </a:prstGeom>
+          <a:noFill/>
+          <a:ln/>
+        </p:spPr>
+        <p:txBody>
+          <a:bodyPr wrap="square" rtlCol="0" anchor="ctr"/>
+          <a:lstStyle/>
+          <a:p>
+            <a:pPr indent="0" marL="0">
+              <a:buNone/>
+            </a:pPr>
+            <a:r>
+              <a:rPr lang="en-US" sz="1500" dirty="0">
+                <a:solidFill>
+                  <a:srgbClr val="1F2937"/>
+                </a:solidFill>
+                <a:latin typeface="Arial" pitchFamily="34" charset="0"/>
+                <a:ea typeface="Arial" pitchFamily="34" charset="-122"/>
+                <a:cs typeface="Arial" pitchFamily="34" charset="-120"/>
+              </a:rPr>
+              <a:t>No exemplo da Solaris, repare que cada número tem origem num laboratório ou numa planilha do curso.</a:t>
+            </a:r>
+            <a:endParaRPr lang="en-US" sz="1500" dirty="0"/>
           </a:p>
         </p:txBody>
       </p:sp>
@@ -15808,7 +16857,7 @@
                 <a:ea typeface="Arial" pitchFamily="34" charset="-122"/>
                 <a:cs typeface="Arial" pitchFamily="34" charset="-120"/>
               </a:rPr>
-              <a:t>M11 · Fechamento</a:t>
+              <a:t>M11 · Teste rápido</a:t>
             </a:r>
             <a:endParaRPr lang="en-US" sz="900" dirty="0"/>
           </a:p>
@@ -15867,7 +16916,7 @@
                 <a:ea typeface="Arial" pitchFamily="34" charset="-122"/>
                 <a:cs typeface="Arial" pitchFamily="34" charset="-120"/>
               </a:rPr>
-              <a:t>FECHAMENTO DO MÓDULO</a:t>
+              <a:t>QUESTÕES 1–2 DE 6</a:t>
             </a:r>
             <a:endParaRPr lang="en-US" sz="1000" dirty="0"/>
           </a:p>
@@ -15908,7 +16957,7 @@
                 <a:ea typeface="Arial" pitchFamily="34" charset="-122"/>
                 <a:cs typeface="Arial" pitchFamily="34" charset="-120"/>
               </a:rPr>
-              <a:t>Pratique e entregue</a:t>
+              <a:t>Teste rápido</a:t>
             </a:r>
             <a:endParaRPr lang="en-US" sz="2600" dirty="0"/>
           </a:p>
@@ -15916,142 +16965,17 @@
       </p:sp>
       <p:sp>
         <p:nvSpPr>
-          <p:cNvPr id="9" name="Text 6"/>
+          <p:cNvPr id="9" name="Shape 6"/>
           <p:cNvSpPr/>
           <p:nvPr/>
         </p:nvSpPr>
         <p:spPr>
           <a:xfrm>
             <a:off x="548640" y="1325880"/>
-            <a:ext cx="5394960" cy="411480"/>
-          </a:xfrm>
-          <a:prstGeom prst="rect">
-            <a:avLst/>
-          </a:prstGeom>
-          <a:noFill/>
-          <a:ln/>
-        </p:spPr>
-        <p:txBody>
-          <a:bodyPr wrap="square" rtlCol="0" anchor="ctr"/>
-          <a:lstStyle/>
-          <a:p>
-            <a:pPr indent="0" marL="0">
-              <a:buNone/>
-            </a:pPr>
-            <a:r>
-              <a:rPr lang="en-US" sz="1600" b="1" dirty="0">
-                <a:solidFill>
-                  <a:srgbClr val="1B3A6B"/>
-                </a:solidFill>
-                <a:latin typeface="Arial" pitchFamily="34" charset="0"/>
-                <a:ea typeface="Arial" pitchFamily="34" charset="-122"/>
-                <a:cs typeface="Arial" pitchFamily="34" charset="-120"/>
-              </a:rPr>
-              <a:t>Exercícios</a:t>
-            </a:r>
-            <a:endParaRPr lang="en-US" sz="1600" dirty="0"/>
-          </a:p>
-        </p:txBody>
-      </p:sp>
-      <p:sp>
-        <p:nvSpPr>
-          <p:cNvPr id="10" name="Text 7"/>
-          <p:cNvSpPr/>
-          <p:nvPr/>
-        </p:nvSpPr>
-        <p:spPr>
-          <a:xfrm>
-            <a:off x="548640" y="1783080"/>
-            <a:ext cx="5394960" cy="4480560"/>
-          </a:xfrm>
-          <a:prstGeom prst="rect">
-            <a:avLst/>
-          </a:prstGeom>
-          <a:noFill/>
-          <a:ln/>
-        </p:spPr>
-        <p:txBody>
-          <a:bodyPr wrap="square" rtlCol="0" anchor="t">
-            <a:normAutofit/>
-          </a:bodyPr>
-          <a:lstStyle/>
-          <a:p>
-            <a:pPr indent="0" marL="0">
-              <a:spcAft>
-                <a:spcPts val="800"/>
-              </a:spcAft>
-              <a:buNone/>
-            </a:pPr>
-            <a:r>
-              <a:rPr lang="en-US" sz="1600" dirty="0">
-                <a:solidFill>
-                  <a:srgbClr val="1F2937"/>
-                </a:solidFill>
-                <a:latin typeface="Arial" pitchFamily="34" charset="0"/>
-                <a:ea typeface="Arial" pitchFamily="34" charset="-122"/>
-                <a:cs typeface="Arial" pitchFamily="34" charset="-120"/>
-              </a:rPr>
-              <a:t>1. Liste 8 perguntas para levar ao contador (regime da gestora, ISS, tributação da entidade, ICMS na sua UF, reforma tributária…).</a:t>
-            </a:r>
-            <a:endParaRPr lang="en-US" sz="1600" dirty="0"/>
-          </a:p>
-          <a:p>
-            <a:pPr indent="0" marL="0">
-              <a:spcAft>
-                <a:spcPts val="800"/>
-              </a:spcAft>
-              <a:buNone/>
-            </a:pPr>
-            <a:r>
-              <a:rPr lang="en-US" sz="1600" dirty="0">
-                <a:solidFill>
-                  <a:srgbClr val="1F2937"/>
-                </a:solidFill>
-                <a:latin typeface="Arial" pitchFamily="34" charset="0"/>
-                <a:ea typeface="Arial" pitchFamily="34" charset="-122"/>
-                <a:cs typeface="Arial" pitchFamily="34" charset="-120"/>
-              </a:rPr>
-              <a:t>2. Classifique 10 riscos na matriz e escolha os 3 que você mitiga primeiro.</a:t>
-            </a:r>
-            <a:endParaRPr lang="en-US" sz="1600" dirty="0"/>
-          </a:p>
-          <a:p>
-            <a:pPr indent="0" marL="0">
-              <a:spcAft>
-                <a:spcPts val="800"/>
-              </a:spcAft>
-              <a:buNone/>
-            </a:pPr>
-            <a:r>
-              <a:rPr lang="en-US" sz="1600" dirty="0">
-                <a:solidFill>
-                  <a:srgbClr val="1F2937"/>
-                </a:solidFill>
-                <a:latin typeface="Arial" pitchFamily="34" charset="0"/>
-                <a:ea typeface="Arial" pitchFamily="34" charset="-122"/>
-                <a:cs typeface="Arial" pitchFamily="34" charset="-120"/>
-              </a:rPr>
-              <a:t>3. Desenhe o organograma da empresa com 300 e com 1.500 clientes.</a:t>
-            </a:r>
-            <a:endParaRPr lang="en-US" sz="1600" dirty="0"/>
-          </a:p>
-        </p:txBody>
-      </p:sp>
-      <p:sp>
-        <p:nvSpPr>
-          <p:cNvPr id="11" name="Shape 8"/>
-          <p:cNvSpPr/>
-          <p:nvPr/>
-        </p:nvSpPr>
-        <p:spPr>
-          <a:xfrm>
-            <a:off x="6172200" y="1325880"/>
-            <a:ext cx="5468112" cy="4937760"/>
-          </a:xfrm>
-          <a:prstGeom prst="roundRect">
-            <a:avLst>
-              <a:gd name="adj" fmla="val 1852"/>
-            </a:avLst>
+            <a:ext cx="502920" cy="502920"/>
+          </a:xfrm>
+          <a:prstGeom prst="ellipse">
+            <a:avLst/>
           </a:prstGeom>
           <a:solidFill>
             <a:srgbClr val="1B3A6B"/>
@@ -16061,32 +16985,135 @@
       </p:sp>
       <p:sp>
         <p:nvSpPr>
-          <p:cNvPr id="12" name="Text 9"/>
-          <p:cNvSpPr/>
-          <p:nvPr/>
-        </p:nvSpPr>
-        <p:spPr>
-          <a:xfrm>
-            <a:off x="6492240" y="1554480"/>
-            <a:ext cx="4828032" cy="4480560"/>
-          </a:xfrm>
-          <a:prstGeom prst="rect">
-            <a:avLst/>
-          </a:prstGeom>
-          <a:noFill/>
-          <a:ln/>
-        </p:spPr>
-        <p:txBody>
-          <a:bodyPr wrap="square" rtlCol="0" anchor="t">
-            <a:normAutofit/>
-          </a:bodyPr>
-          <a:lstStyle/>
-          <a:p>
-            <a:pPr indent="0" marL="0">
-              <a:buNone/>
-            </a:pPr>
-            <a:r>
-              <a:rPr lang="en-US" sz="1300" b="1" spc="100" kern="0" dirty="0">
+          <p:cNvPr id="10" name="Text 7"/>
+          <p:cNvSpPr/>
+          <p:nvPr/>
+        </p:nvSpPr>
+        <p:spPr>
+          <a:xfrm>
+            <a:off x="548640" y="1325880"/>
+            <a:ext cx="502920" cy="502920"/>
+          </a:xfrm>
+          <a:prstGeom prst="rect">
+            <a:avLst/>
+          </a:prstGeom>
+          <a:noFill/>
+          <a:ln/>
+        </p:spPr>
+        <p:txBody>
+          <a:bodyPr wrap="square" rtlCol="0" anchor="ctr"/>
+          <a:lstStyle/>
+          <a:p>
+            <a:pPr algn="ctr" indent="0" marL="0">
+              <a:buNone/>
+            </a:pPr>
+            <a:r>
+              <a:rPr lang="en-US" sz="1600" b="1" dirty="0">
+                <a:solidFill>
+                  <a:srgbClr val="FFFFFF"/>
+                </a:solidFill>
+                <a:latin typeface="Arial" pitchFamily="34" charset="0"/>
+                <a:ea typeface="Arial" pitchFamily="34" charset="-122"/>
+                <a:cs typeface="Arial" pitchFamily="34" charset="-120"/>
+              </a:rPr>
+              <a:t>1</a:t>
+            </a:r>
+            <a:endParaRPr lang="en-US" sz="1600" dirty="0"/>
+          </a:p>
+        </p:txBody>
+      </p:sp>
+      <p:sp>
+        <p:nvSpPr>
+          <p:cNvPr id="11" name="Text 8"/>
+          <p:cNvSpPr/>
+          <p:nvPr/>
+        </p:nvSpPr>
+        <p:spPr>
+          <a:xfrm>
+            <a:off x="1234440" y="1280160"/>
+            <a:ext cx="10424160" cy="640080"/>
+          </a:xfrm>
+          <a:prstGeom prst="rect">
+            <a:avLst/>
+          </a:prstGeom>
+          <a:noFill/>
+          <a:ln/>
+        </p:spPr>
+        <p:txBody>
+          <a:bodyPr wrap="square" rtlCol="0" anchor="ctr"/>
+          <a:lstStyle/>
+          <a:p>
+            <a:pPr indent="0" marL="0">
+              <a:buNone/>
+            </a:pPr>
+            <a:r>
+              <a:rPr lang="en-US" sz="1800" b="1" dirty="0">
+                <a:solidFill>
+                  <a:srgbClr val="1B3A6B"/>
+                </a:solidFill>
+                <a:latin typeface="Arial" pitchFamily="34" charset="0"/>
+                <a:ea typeface="Arial" pitchFamily="34" charset="-122"/>
+                <a:cs typeface="Arial" pitchFamily="34" charset="-120"/>
+              </a:rPr>
+              <a:t>Na estrutura típica, quem contrata a gestora?</a:t>
+            </a:r>
+            <a:endParaRPr lang="en-US" sz="1800" dirty="0"/>
+          </a:p>
+        </p:txBody>
+      </p:sp>
+      <p:sp>
+        <p:nvSpPr>
+          <p:cNvPr id="12" name="Shape 9"/>
+          <p:cNvSpPr/>
+          <p:nvPr/>
+        </p:nvSpPr>
+        <p:spPr>
+          <a:xfrm>
+            <a:off x="548640" y="2057400"/>
+            <a:ext cx="2601468" cy="1463040"/>
+          </a:xfrm>
+          <a:prstGeom prst="roundRect">
+            <a:avLst>
+              <a:gd name="adj" fmla="val 5000"/>
+            </a:avLst>
+          </a:prstGeom>
+          <a:solidFill>
+            <a:srgbClr val="FFFFFF"/>
+          </a:solidFill>
+          <a:ln w="9525">
+            <a:solidFill>
+              <a:srgbClr val="D8E0EC"/>
+            </a:solidFill>
+            <a:prstDash val="solid"/>
+          </a:ln>
+        </p:spPr>
+      </p:sp>
+      <p:sp>
+        <p:nvSpPr>
+          <p:cNvPr id="13" name="Text 10"/>
+          <p:cNvSpPr/>
+          <p:nvPr/>
+        </p:nvSpPr>
+        <p:spPr>
+          <a:xfrm>
+            <a:off x="685800" y="2148840"/>
+            <a:ext cx="365760" cy="365760"/>
+          </a:xfrm>
+          <a:prstGeom prst="rect">
+            <a:avLst/>
+          </a:prstGeom>
+          <a:noFill/>
+          <a:ln/>
+        </p:spPr>
+        <p:txBody>
+          <a:bodyPr wrap="square" rtlCol="0" anchor="ctr"/>
+          <a:lstStyle/>
+          <a:p>
+            <a:pPr indent="0" marL="0">
+              <a:buNone/>
+            </a:pPr>
+            <a:r>
+              <a:rPr lang="en-US" sz="1400" b="1" dirty="0">
                 <a:solidFill>
                   <a:srgbClr val="F7A23B"/>
                 </a:solidFill>
@@ -16094,14 +17121,307 @@
                 <a:ea typeface="Arial" pitchFamily="34" charset="-122"/>
                 <a:cs typeface="Arial" pitchFamily="34" charset="-120"/>
               </a:rPr>
-              <a:t>ENTREGÁVEL DO MÓDULO
-</a:t>
-            </a:r>
-            <a:pPr indent="0" marL="0">
-              <a:buNone/>
-            </a:pPr>
-            <a:r>
-              <a:rPr lang="en-US" sz="1600" dirty="0">
+              <a:t>B</a:t>
+            </a:r>
+            <a:endParaRPr lang="en-US" sz="1400" dirty="0"/>
+          </a:p>
+        </p:txBody>
+      </p:sp>
+      <p:sp>
+        <p:nvSpPr>
+          <p:cNvPr id="14" name="Text 11"/>
+          <p:cNvSpPr/>
+          <p:nvPr/>
+        </p:nvSpPr>
+        <p:spPr>
+          <a:xfrm>
+            <a:off x="685800" y="2514600"/>
+            <a:ext cx="2327148" cy="914400"/>
+          </a:xfrm>
+          <a:prstGeom prst="rect">
+            <a:avLst/>
+          </a:prstGeom>
+          <a:noFill/>
+          <a:ln/>
+        </p:spPr>
+        <p:txBody>
+          <a:bodyPr wrap="square" rtlCol="0" anchor="t"/>
+          <a:lstStyle/>
+          <a:p>
+            <a:pPr indent="0" marL="0">
+              <a:buNone/>
+            </a:pPr>
+            <a:r>
+              <a:rPr lang="en-US" sz="1500" dirty="0">
+                <a:solidFill>
+                  <a:srgbClr val="1F2937"/>
+                </a:solidFill>
+                <a:latin typeface="Arial" pitchFamily="34" charset="0"/>
+                <a:ea typeface="Arial" pitchFamily="34" charset="-122"/>
+                <a:cs typeface="Arial" pitchFamily="34" charset="-120"/>
+              </a:rPr>
+              <a:t>a distribuidora</a:t>
+            </a:r>
+            <a:endParaRPr lang="en-US" sz="1500" dirty="0"/>
+          </a:p>
+        </p:txBody>
+      </p:sp>
+      <p:sp>
+        <p:nvSpPr>
+          <p:cNvPr id="15" name="Shape 12"/>
+          <p:cNvSpPr/>
+          <p:nvPr/>
+        </p:nvSpPr>
+        <p:spPr>
+          <a:xfrm>
+            <a:off x="3378708" y="2057400"/>
+            <a:ext cx="2601468" cy="1463040"/>
+          </a:xfrm>
+          <a:prstGeom prst="roundRect">
+            <a:avLst>
+              <a:gd name="adj" fmla="val 5000"/>
+            </a:avLst>
+          </a:prstGeom>
+          <a:solidFill>
+            <a:srgbClr val="FFFFFF"/>
+          </a:solidFill>
+          <a:ln w="9525">
+            <a:solidFill>
+              <a:srgbClr val="D8E0EC"/>
+            </a:solidFill>
+            <a:prstDash val="solid"/>
+          </a:ln>
+        </p:spPr>
+      </p:sp>
+      <p:sp>
+        <p:nvSpPr>
+          <p:cNvPr id="16" name="Text 13"/>
+          <p:cNvSpPr/>
+          <p:nvPr/>
+        </p:nvSpPr>
+        <p:spPr>
+          <a:xfrm>
+            <a:off x="3515868" y="2148840"/>
+            <a:ext cx="365760" cy="365760"/>
+          </a:xfrm>
+          <a:prstGeom prst="rect">
+            <a:avLst/>
+          </a:prstGeom>
+          <a:noFill/>
+          <a:ln/>
+        </p:spPr>
+        <p:txBody>
+          <a:bodyPr wrap="square" rtlCol="0" anchor="ctr"/>
+          <a:lstStyle/>
+          <a:p>
+            <a:pPr indent="0" marL="0">
+              <a:buNone/>
+            </a:pPr>
+            <a:r>
+              <a:rPr lang="en-US" sz="1400" b="1" dirty="0">
+                <a:solidFill>
+                  <a:srgbClr val="F7A23B"/>
+                </a:solidFill>
+                <a:latin typeface="Arial" pitchFamily="34" charset="0"/>
+                <a:ea typeface="Arial" pitchFamily="34" charset="-122"/>
+                <a:cs typeface="Arial" pitchFamily="34" charset="-120"/>
+              </a:rPr>
+              <a:t>C</a:t>
+            </a:r>
+            <a:endParaRPr lang="en-US" sz="1400" dirty="0"/>
+          </a:p>
+        </p:txBody>
+      </p:sp>
+      <p:sp>
+        <p:nvSpPr>
+          <p:cNvPr id="17" name="Text 14"/>
+          <p:cNvSpPr/>
+          <p:nvPr/>
+        </p:nvSpPr>
+        <p:spPr>
+          <a:xfrm>
+            <a:off x="3515868" y="2514600"/>
+            <a:ext cx="2327148" cy="914400"/>
+          </a:xfrm>
+          <a:prstGeom prst="rect">
+            <a:avLst/>
+          </a:prstGeom>
+          <a:noFill/>
+          <a:ln/>
+        </p:spPr>
+        <p:txBody>
+          <a:bodyPr wrap="square" rtlCol="0" anchor="t"/>
+          <a:lstStyle/>
+          <a:p>
+            <a:pPr indent="0" marL="0">
+              <a:buNone/>
+            </a:pPr>
+            <a:r>
+              <a:rPr lang="en-US" sz="1500" dirty="0">
+                <a:solidFill>
+                  <a:srgbClr val="1F2937"/>
+                </a:solidFill>
+                <a:latin typeface="Arial" pitchFamily="34" charset="0"/>
+                <a:ea typeface="Arial" pitchFamily="34" charset="-122"/>
+                <a:cs typeface="Arial" pitchFamily="34" charset="-120"/>
+              </a:rPr>
+              <a:t>a ANEEL</a:t>
+            </a:r>
+            <a:endParaRPr lang="en-US" sz="1500" dirty="0"/>
+          </a:p>
+        </p:txBody>
+      </p:sp>
+      <p:sp>
+        <p:nvSpPr>
+          <p:cNvPr id="18" name="Shape 15"/>
+          <p:cNvSpPr/>
+          <p:nvPr/>
+        </p:nvSpPr>
+        <p:spPr>
+          <a:xfrm>
+            <a:off x="6208776" y="2057400"/>
+            <a:ext cx="2601468" cy="1463040"/>
+          </a:xfrm>
+          <a:prstGeom prst="roundRect">
+            <a:avLst>
+              <a:gd name="adj" fmla="val 5000"/>
+            </a:avLst>
+          </a:prstGeom>
+          <a:solidFill>
+            <a:srgbClr val="FFFFFF"/>
+          </a:solidFill>
+          <a:ln w="9525">
+            <a:solidFill>
+              <a:srgbClr val="D8E0EC"/>
+            </a:solidFill>
+            <a:prstDash val="solid"/>
+          </a:ln>
+        </p:spPr>
+      </p:sp>
+      <p:sp>
+        <p:nvSpPr>
+          <p:cNvPr id="19" name="Text 16"/>
+          <p:cNvSpPr/>
+          <p:nvPr/>
+        </p:nvSpPr>
+        <p:spPr>
+          <a:xfrm>
+            <a:off x="6345936" y="2148840"/>
+            <a:ext cx="365760" cy="365760"/>
+          </a:xfrm>
+          <a:prstGeom prst="rect">
+            <a:avLst/>
+          </a:prstGeom>
+          <a:noFill/>
+          <a:ln/>
+        </p:spPr>
+        <p:txBody>
+          <a:bodyPr wrap="square" rtlCol="0" anchor="ctr"/>
+          <a:lstStyle/>
+          <a:p>
+            <a:pPr indent="0" marL="0">
+              <a:buNone/>
+            </a:pPr>
+            <a:r>
+              <a:rPr lang="en-US" sz="1400" b="1" dirty="0">
+                <a:solidFill>
+                  <a:srgbClr val="F7A23B"/>
+                </a:solidFill>
+                <a:latin typeface="Arial" pitchFamily="34" charset="0"/>
+                <a:ea typeface="Arial" pitchFamily="34" charset="-122"/>
+                <a:cs typeface="Arial" pitchFamily="34" charset="-120"/>
+              </a:rPr>
+              <a:t>D</a:t>
+            </a:r>
+            <a:endParaRPr lang="en-US" sz="1400" dirty="0"/>
+          </a:p>
+        </p:txBody>
+      </p:sp>
+      <p:sp>
+        <p:nvSpPr>
+          <p:cNvPr id="20" name="Text 17"/>
+          <p:cNvSpPr/>
+          <p:nvPr/>
+        </p:nvSpPr>
+        <p:spPr>
+          <a:xfrm>
+            <a:off x="6345936" y="2514600"/>
+            <a:ext cx="2327148" cy="914400"/>
+          </a:xfrm>
+          <a:prstGeom prst="rect">
+            <a:avLst/>
+          </a:prstGeom>
+          <a:noFill/>
+          <a:ln/>
+        </p:spPr>
+        <p:txBody>
+          <a:bodyPr wrap="square" rtlCol="0" anchor="t"/>
+          <a:lstStyle/>
+          <a:p>
+            <a:pPr indent="0" marL="0">
+              <a:buNone/>
+            </a:pPr>
+            <a:r>
+              <a:rPr lang="en-US" sz="1500" dirty="0">
+                <a:solidFill>
+                  <a:srgbClr val="1F2937"/>
+                </a:solidFill>
+                <a:latin typeface="Arial" pitchFamily="34" charset="0"/>
+                <a:ea typeface="Arial" pitchFamily="34" charset="-122"/>
+                <a:cs typeface="Arial" pitchFamily="34" charset="-120"/>
+              </a:rPr>
+              <a:t>o banco</a:t>
+            </a:r>
+            <a:endParaRPr lang="en-US" sz="1500" dirty="0"/>
+          </a:p>
+        </p:txBody>
+      </p:sp>
+      <p:sp>
+        <p:nvSpPr>
+          <p:cNvPr id="21" name="Shape 18"/>
+          <p:cNvSpPr/>
+          <p:nvPr/>
+        </p:nvSpPr>
+        <p:spPr>
+          <a:xfrm>
+            <a:off x="548640" y="3840480"/>
+            <a:ext cx="502920" cy="502920"/>
+          </a:xfrm>
+          <a:prstGeom prst="ellipse">
+            <a:avLst/>
+          </a:prstGeom>
+          <a:solidFill>
+            <a:srgbClr val="1B3A6B"/>
+          </a:solidFill>
+          <a:ln/>
+        </p:spPr>
+      </p:sp>
+      <p:sp>
+        <p:nvSpPr>
+          <p:cNvPr id="22" name="Text 19"/>
+          <p:cNvSpPr/>
+          <p:nvPr/>
+        </p:nvSpPr>
+        <p:spPr>
+          <a:xfrm>
+            <a:off x="548640" y="3840480"/>
+            <a:ext cx="502920" cy="502920"/>
+          </a:xfrm>
+          <a:prstGeom prst="rect">
+            <a:avLst/>
+          </a:prstGeom>
+          <a:noFill/>
+          <a:ln/>
+        </p:spPr>
+        <p:txBody>
+          <a:bodyPr wrap="square" rtlCol="0" anchor="ctr"/>
+          <a:lstStyle/>
+          <a:p>
+            <a:pPr algn="ctr" indent="0" marL="0">
+              <a:buNone/>
+            </a:pPr>
+            <a:r>
+              <a:rPr lang="en-US" sz="1600" b="1" dirty="0">
                 <a:solidFill>
                   <a:srgbClr val="FFFFFF"/>
                 </a:solidFill>
@@ -16109,9 +17429,363 @@
                 <a:ea typeface="Arial" pitchFamily="34" charset="-122"/>
                 <a:cs typeface="Arial" pitchFamily="34" charset="-120"/>
               </a:rPr>
-              <a:t>Plano de negócio em uma página + matriz de riscos (10 riscos com probabilidade, impacto e mitigação) + identidade visual da sua empresa aplicada no laboratório.</a:t>
-            </a:r>
-            <a:endParaRPr lang="en-US" sz="1300" dirty="0"/>
+              <a:t>2</a:t>
+            </a:r>
+            <a:endParaRPr lang="en-US" sz="1600" dirty="0"/>
+          </a:p>
+        </p:txBody>
+      </p:sp>
+      <p:sp>
+        <p:nvSpPr>
+          <p:cNvPr id="23" name="Text 20"/>
+          <p:cNvSpPr/>
+          <p:nvPr/>
+        </p:nvSpPr>
+        <p:spPr>
+          <a:xfrm>
+            <a:off x="1234440" y="3794760"/>
+            <a:ext cx="10424160" cy="640080"/>
+          </a:xfrm>
+          <a:prstGeom prst="rect">
+            <a:avLst/>
+          </a:prstGeom>
+          <a:noFill/>
+          <a:ln/>
+        </p:spPr>
+        <p:txBody>
+          <a:bodyPr wrap="square" rtlCol="0" anchor="ctr"/>
+          <a:lstStyle/>
+          <a:p>
+            <a:pPr indent="0" marL="0">
+              <a:buNone/>
+            </a:pPr>
+            <a:r>
+              <a:rPr lang="en-US" sz="1800" b="1" dirty="0">
+                <a:solidFill>
+                  <a:srgbClr val="1B3A6B"/>
+                </a:solidFill>
+                <a:latin typeface="Arial" pitchFamily="34" charset="0"/>
+                <a:ea typeface="Arial" pitchFamily="34" charset="-122"/>
+                <a:cs typeface="Arial" pitchFamily="34" charset="-120"/>
+              </a:rPr>
+              <a:t>PIS/COFINS sobre a energia compensada em GD:</a:t>
+            </a:r>
+            <a:endParaRPr lang="en-US" sz="1800" dirty="0"/>
+          </a:p>
+        </p:txBody>
+      </p:sp>
+      <p:sp>
+        <p:nvSpPr>
+          <p:cNvPr id="24" name="Shape 21"/>
+          <p:cNvSpPr/>
+          <p:nvPr/>
+        </p:nvSpPr>
+        <p:spPr>
+          <a:xfrm>
+            <a:off x="548640" y="4572000"/>
+            <a:ext cx="2601468" cy="1463040"/>
+          </a:xfrm>
+          <a:prstGeom prst="roundRect">
+            <a:avLst>
+              <a:gd name="adj" fmla="val 5000"/>
+            </a:avLst>
+          </a:prstGeom>
+          <a:solidFill>
+            <a:srgbClr val="FFFFFF"/>
+          </a:solidFill>
+          <a:ln w="9525">
+            <a:solidFill>
+              <a:srgbClr val="D8E0EC"/>
+            </a:solidFill>
+            <a:prstDash val="solid"/>
+          </a:ln>
+        </p:spPr>
+      </p:sp>
+      <p:sp>
+        <p:nvSpPr>
+          <p:cNvPr id="25" name="Text 22"/>
+          <p:cNvSpPr/>
+          <p:nvPr/>
+        </p:nvSpPr>
+        <p:spPr>
+          <a:xfrm>
+            <a:off x="685800" y="4663440"/>
+            <a:ext cx="365760" cy="365760"/>
+          </a:xfrm>
+          <a:prstGeom prst="rect">
+            <a:avLst/>
+          </a:prstGeom>
+          <a:noFill/>
+          <a:ln/>
+        </p:spPr>
+        <p:txBody>
+          <a:bodyPr wrap="square" rtlCol="0" anchor="ctr"/>
+          <a:lstStyle/>
+          <a:p>
+            <a:pPr indent="0" marL="0">
+              <a:buNone/>
+            </a:pPr>
+            <a:r>
+              <a:rPr lang="en-US" sz="1400" b="1" dirty="0">
+                <a:solidFill>
+                  <a:srgbClr val="F7A23B"/>
+                </a:solidFill>
+                <a:latin typeface="Arial" pitchFamily="34" charset="0"/>
+                <a:ea typeface="Arial" pitchFamily="34" charset="-122"/>
+                <a:cs typeface="Arial" pitchFamily="34" charset="-120"/>
+              </a:rPr>
+              <a:t>A</a:t>
+            </a:r>
+            <a:endParaRPr lang="en-US" sz="1400" dirty="0"/>
+          </a:p>
+        </p:txBody>
+      </p:sp>
+      <p:sp>
+        <p:nvSpPr>
+          <p:cNvPr id="26" name="Text 23"/>
+          <p:cNvSpPr/>
+          <p:nvPr/>
+        </p:nvSpPr>
+        <p:spPr>
+          <a:xfrm>
+            <a:off x="685800" y="5029200"/>
+            <a:ext cx="2327148" cy="914400"/>
+          </a:xfrm>
+          <a:prstGeom prst="rect">
+            <a:avLst/>
+          </a:prstGeom>
+          <a:noFill/>
+          <a:ln/>
+        </p:spPr>
+        <p:txBody>
+          <a:bodyPr wrap="square" rtlCol="0" anchor="t"/>
+          <a:lstStyle/>
+          <a:p>
+            <a:pPr indent="0" marL="0">
+              <a:buNone/>
+            </a:pPr>
+            <a:r>
+              <a:rPr lang="en-US" sz="1500" dirty="0">
+                <a:solidFill>
+                  <a:srgbClr val="1F2937"/>
+                </a:solidFill>
+                <a:latin typeface="Arial" pitchFamily="34" charset="0"/>
+                <a:ea typeface="Arial" pitchFamily="34" charset="-122"/>
+                <a:cs typeface="Arial" pitchFamily="34" charset="-120"/>
+              </a:rPr>
+              <a:t>incidem normalmente</a:t>
+            </a:r>
+            <a:endParaRPr lang="en-US" sz="1500" dirty="0"/>
+          </a:p>
+        </p:txBody>
+      </p:sp>
+      <p:sp>
+        <p:nvSpPr>
+          <p:cNvPr id="27" name="Shape 24"/>
+          <p:cNvSpPr/>
+          <p:nvPr/>
+        </p:nvSpPr>
+        <p:spPr>
+          <a:xfrm>
+            <a:off x="3378708" y="4572000"/>
+            <a:ext cx="2601468" cy="1463040"/>
+          </a:xfrm>
+          <a:prstGeom prst="roundRect">
+            <a:avLst>
+              <a:gd name="adj" fmla="val 5000"/>
+            </a:avLst>
+          </a:prstGeom>
+          <a:solidFill>
+            <a:srgbClr val="FFFFFF"/>
+          </a:solidFill>
+          <a:ln w="9525">
+            <a:solidFill>
+              <a:srgbClr val="D8E0EC"/>
+            </a:solidFill>
+            <a:prstDash val="solid"/>
+          </a:ln>
+        </p:spPr>
+      </p:sp>
+      <p:sp>
+        <p:nvSpPr>
+          <p:cNvPr id="28" name="Text 25"/>
+          <p:cNvSpPr/>
+          <p:nvPr/>
+        </p:nvSpPr>
+        <p:spPr>
+          <a:xfrm>
+            <a:off x="3515868" y="4663440"/>
+            <a:ext cx="365760" cy="365760"/>
+          </a:xfrm>
+          <a:prstGeom prst="rect">
+            <a:avLst/>
+          </a:prstGeom>
+          <a:noFill/>
+          <a:ln/>
+        </p:spPr>
+        <p:txBody>
+          <a:bodyPr wrap="square" rtlCol="0" anchor="ctr"/>
+          <a:lstStyle/>
+          <a:p>
+            <a:pPr indent="0" marL="0">
+              <a:buNone/>
+            </a:pPr>
+            <a:r>
+              <a:rPr lang="en-US" sz="1400" b="1" dirty="0">
+                <a:solidFill>
+                  <a:srgbClr val="F7A23B"/>
+                </a:solidFill>
+                <a:latin typeface="Arial" pitchFamily="34" charset="0"/>
+                <a:ea typeface="Arial" pitchFamily="34" charset="-122"/>
+                <a:cs typeface="Arial" pitchFamily="34" charset="-120"/>
+              </a:rPr>
+              <a:t>C</a:t>
+            </a:r>
+            <a:endParaRPr lang="en-US" sz="1400" dirty="0"/>
+          </a:p>
+        </p:txBody>
+      </p:sp>
+      <p:sp>
+        <p:nvSpPr>
+          <p:cNvPr id="29" name="Text 26"/>
+          <p:cNvSpPr/>
+          <p:nvPr/>
+        </p:nvSpPr>
+        <p:spPr>
+          <a:xfrm>
+            <a:off x="3515868" y="5029200"/>
+            <a:ext cx="2327148" cy="914400"/>
+          </a:xfrm>
+          <a:prstGeom prst="rect">
+            <a:avLst/>
+          </a:prstGeom>
+          <a:noFill/>
+          <a:ln/>
+        </p:spPr>
+        <p:txBody>
+          <a:bodyPr wrap="square" rtlCol="0" anchor="t"/>
+          <a:lstStyle/>
+          <a:p>
+            <a:pPr indent="0" marL="0">
+              <a:buNone/>
+            </a:pPr>
+            <a:r>
+              <a:rPr lang="en-US" sz="1500" dirty="0">
+                <a:solidFill>
+                  <a:srgbClr val="1F2937"/>
+                </a:solidFill>
+                <a:latin typeface="Arial" pitchFamily="34" charset="0"/>
+                <a:ea typeface="Arial" pitchFamily="34" charset="-122"/>
+                <a:cs typeface="Arial" pitchFamily="34" charset="-120"/>
+              </a:rPr>
+              <a:t>dobram</a:t>
+            </a:r>
+            <a:endParaRPr lang="en-US" sz="1500" dirty="0"/>
+          </a:p>
+        </p:txBody>
+      </p:sp>
+      <p:sp>
+        <p:nvSpPr>
+          <p:cNvPr id="30" name="Shape 27"/>
+          <p:cNvSpPr/>
+          <p:nvPr/>
+        </p:nvSpPr>
+        <p:spPr>
+          <a:xfrm>
+            <a:off x="6208776" y="4572000"/>
+            <a:ext cx="2601468" cy="1463040"/>
+          </a:xfrm>
+          <a:prstGeom prst="roundRect">
+            <a:avLst>
+              <a:gd name="adj" fmla="val 5000"/>
+            </a:avLst>
+          </a:prstGeom>
+          <a:solidFill>
+            <a:srgbClr val="FFFFFF"/>
+          </a:solidFill>
+          <a:ln w="9525">
+            <a:solidFill>
+              <a:srgbClr val="D8E0EC"/>
+            </a:solidFill>
+            <a:prstDash val="solid"/>
+          </a:ln>
+        </p:spPr>
+      </p:sp>
+      <p:sp>
+        <p:nvSpPr>
+          <p:cNvPr id="31" name="Text 28"/>
+          <p:cNvSpPr/>
+          <p:nvPr/>
+        </p:nvSpPr>
+        <p:spPr>
+          <a:xfrm>
+            <a:off x="6345936" y="4663440"/>
+            <a:ext cx="365760" cy="365760"/>
+          </a:xfrm>
+          <a:prstGeom prst="rect">
+            <a:avLst/>
+          </a:prstGeom>
+          <a:noFill/>
+          <a:ln/>
+        </p:spPr>
+        <p:txBody>
+          <a:bodyPr wrap="square" rtlCol="0" anchor="ctr"/>
+          <a:lstStyle/>
+          <a:p>
+            <a:pPr indent="0" marL="0">
+              <a:buNone/>
+            </a:pPr>
+            <a:r>
+              <a:rPr lang="en-US" sz="1400" b="1" dirty="0">
+                <a:solidFill>
+                  <a:srgbClr val="F7A23B"/>
+                </a:solidFill>
+                <a:latin typeface="Arial" pitchFamily="34" charset="0"/>
+                <a:ea typeface="Arial" pitchFamily="34" charset="-122"/>
+                <a:cs typeface="Arial" pitchFamily="34" charset="-120"/>
+              </a:rPr>
+              <a:t>D</a:t>
+            </a:r>
+            <a:endParaRPr lang="en-US" sz="1400" dirty="0"/>
+          </a:p>
+        </p:txBody>
+      </p:sp>
+      <p:sp>
+        <p:nvSpPr>
+          <p:cNvPr id="32" name="Text 29"/>
+          <p:cNvSpPr/>
+          <p:nvPr/>
+        </p:nvSpPr>
+        <p:spPr>
+          <a:xfrm>
+            <a:off x="6345936" y="5029200"/>
+            <a:ext cx="2327148" cy="914400"/>
+          </a:xfrm>
+          <a:prstGeom prst="rect">
+            <a:avLst/>
+          </a:prstGeom>
+          <a:noFill/>
+          <a:ln/>
+        </p:spPr>
+        <p:txBody>
+          <a:bodyPr wrap="square" rtlCol="0" anchor="t"/>
+          <a:lstStyle/>
+          <a:p>
+            <a:pPr indent="0" marL="0">
+              <a:buNone/>
+            </a:pPr>
+            <a:r>
+              <a:rPr lang="en-US" sz="1500" dirty="0">
+                <a:solidFill>
+                  <a:srgbClr val="1F2937"/>
+                </a:solidFill>
+                <a:latin typeface="Arial" pitchFamily="34" charset="0"/>
+                <a:ea typeface="Arial" pitchFamily="34" charset="-122"/>
+                <a:cs typeface="Arial" pitchFamily="34" charset="-120"/>
+              </a:rPr>
+              <a:t>não se aplica a nada</a:t>
+            </a:r>
+            <a:endParaRPr lang="en-US" sz="1500" dirty="0"/>
           </a:p>
         </p:txBody>
       </p:sp>
@@ -16158,6 +17832,2692 @@
             <a:fld id="{F7021451-1387-4CA6-816F-3879F97B5CBC}" type="slidenum">
               <a:rPr b="1" lang="en-US"/>
               <a:t>27</a:t>
+            </a:fld>
+            <a:endParaRPr lang="en-US"/>
+          </a:p>
+        </p:txBody>
+      </p:sp>
+    </p:spTree>
+  </p:cSld>
+  <p:clrMapOvr>
+    <a:masterClrMapping/>
+  </p:clrMapOvr>
+</p:sld>
+</file>
+
+<file path=ppt/slides/slide28.xml><?xml version="1.0" encoding="utf-8"?>
+<p:sld xmlns:a="http://schemas.openxmlformats.org/drawingml/2006/main" xmlns:r="http://schemas.openxmlformats.org/officeDocument/2006/relationships" xmlns:p="http://schemas.openxmlformats.org/presentationml/2006/main">
+  <p:cSld name="Slide 28">
+    <p:bg>
+      <p:bgPr>
+        <a:solidFill>
+          <a:srgbClr val="F6F8FB"/>
+        </a:solidFill>
+      </p:bgPr>
+    </p:bg>
+    <p:spTree>
+      <p:nvGrpSpPr>
+        <p:cNvPr id="1" name=""/>
+        <p:cNvGrpSpPr/>
+        <p:nvPr/>
+      </p:nvGrpSpPr>
+      <p:grpSpPr>
+        <a:xfrm>
+          <a:off x="0" y="0"/>
+          <a:ext cx="0" cy="0"/>
+          <a:chOff x="0" y="0"/>
+          <a:chExt cx="0" cy="0"/>
+        </a:xfrm>
+      </p:grpSpPr>
+      <p:sp>
+        <p:nvSpPr>
+          <p:cNvPr id="2" name="Shape 0"/>
+          <p:cNvSpPr/>
+          <p:nvPr/>
+        </p:nvSpPr>
+        <p:spPr>
+          <a:xfrm>
+            <a:off x="0" y="6510528"/>
+            <a:ext cx="12191695" cy="347472"/>
+          </a:xfrm>
+          <a:prstGeom prst="rect">
+            <a:avLst/>
+          </a:prstGeom>
+          <a:solidFill>
+            <a:srgbClr val="FFFFFF"/>
+          </a:solidFill>
+          <a:ln w="6350">
+            <a:solidFill>
+              <a:srgbClr val="D8E0EC"/>
+            </a:solidFill>
+            <a:prstDash val="solid"/>
+          </a:ln>
+        </p:spPr>
+      </p:sp>
+      <p:pic>
+        <p:nvPicPr>
+          <p:cNvPr id="3" name="Image 0" descr="/www/wwwroot/rexar/gdsolar/docs/curso/slides/assets/logo-gdsolar.png">    </p:cNvPr>
+          <p:cNvPicPr>
+            <a:picLocks noChangeAspect="1"/>
+          </p:cNvPicPr>
+          <p:nvPr/>
+        </p:nvPicPr>
+        <p:blipFill>
+          <a:blip r:embed="rId1"/>
+          <a:stretch>
+            <a:fillRect/>
+          </a:stretch>
+        </p:blipFill>
+        <p:spPr>
+          <a:xfrm>
+            <a:off x="548640" y="6547104"/>
+            <a:ext cx="274320" cy="274320"/>
+          </a:xfrm>
+          <a:prstGeom prst="rect">
+            <a:avLst/>
+          </a:prstGeom>
+        </p:spPr>
+      </p:pic>
+      <p:sp>
+        <p:nvSpPr>
+          <p:cNvPr id="4" name="Text 1"/>
+          <p:cNvSpPr/>
+          <p:nvPr/>
+        </p:nvSpPr>
+        <p:spPr>
+          <a:xfrm>
+            <a:off x="886968" y="6528816"/>
+            <a:ext cx="6400800" cy="310896"/>
+          </a:xfrm>
+          <a:prstGeom prst="rect">
+            <a:avLst/>
+          </a:prstGeom>
+          <a:noFill/>
+          <a:ln/>
+        </p:spPr>
+        <p:txBody>
+          <a:bodyPr wrap="square" rtlCol="0" anchor="ctr"/>
+          <a:lstStyle/>
+          <a:p>
+            <a:pPr indent="0" marL="0">
+              <a:buNone/>
+            </a:pPr>
+            <a:r>
+              <a:rPr lang="en-US" sz="900" b="1" dirty="0">
+                <a:solidFill>
+                  <a:srgbClr val="64748B"/>
+                </a:solidFill>
+                <a:latin typeface="Arial" pitchFamily="34" charset="0"/>
+                <a:ea typeface="Arial" pitchFamily="34" charset="-122"/>
+                <a:cs typeface="Arial" pitchFamily="34" charset="-120"/>
+              </a:rPr>
+              <a:t>GD Solar  ·  Formação em Energia por Assinatura</a:t>
+            </a:r>
+            <a:endParaRPr lang="en-US" sz="900" dirty="0"/>
+          </a:p>
+        </p:txBody>
+      </p:sp>
+      <p:sp>
+        <p:nvSpPr>
+          <p:cNvPr id="5" name="Text 2"/>
+          <p:cNvSpPr/>
+          <p:nvPr/>
+        </p:nvSpPr>
+        <p:spPr>
+          <a:xfrm>
+            <a:off x="7132320" y="6528816"/>
+            <a:ext cx="4023360" cy="310896"/>
+          </a:xfrm>
+          <a:prstGeom prst="rect">
+            <a:avLst/>
+          </a:prstGeom>
+          <a:noFill/>
+          <a:ln/>
+        </p:spPr>
+        <p:txBody>
+          <a:bodyPr wrap="square" rtlCol="0" anchor="ctr"/>
+          <a:lstStyle/>
+          <a:p>
+            <a:pPr algn="r" indent="0" marL="0">
+              <a:buNone/>
+            </a:pPr>
+            <a:r>
+              <a:rPr lang="en-US" sz="900" dirty="0">
+                <a:solidFill>
+                  <a:srgbClr val="64748B"/>
+                </a:solidFill>
+                <a:latin typeface="Arial" pitchFamily="34" charset="0"/>
+                <a:ea typeface="Arial" pitchFamily="34" charset="-122"/>
+                <a:cs typeface="Arial" pitchFamily="34" charset="-120"/>
+              </a:rPr>
+              <a:t>M11 · Teste rápido</a:t>
+            </a:r>
+            <a:endParaRPr lang="en-US" sz="900" dirty="0"/>
+          </a:p>
+        </p:txBody>
+      </p:sp>
+      <p:sp>
+        <p:nvSpPr>
+          <p:cNvPr id="6" name="Shape 3"/>
+          <p:cNvSpPr/>
+          <p:nvPr/>
+        </p:nvSpPr>
+        <p:spPr>
+          <a:xfrm>
+            <a:off x="548640" y="384048"/>
+            <a:ext cx="82296" cy="658368"/>
+          </a:xfrm>
+          <a:prstGeom prst="rect">
+            <a:avLst/>
+          </a:prstGeom>
+          <a:solidFill>
+            <a:srgbClr val="F7A23B"/>
+          </a:solidFill>
+          <a:ln/>
+        </p:spPr>
+      </p:sp>
+      <p:sp>
+        <p:nvSpPr>
+          <p:cNvPr id="7" name="Text 4"/>
+          <p:cNvSpPr/>
+          <p:nvPr/>
+        </p:nvSpPr>
+        <p:spPr>
+          <a:xfrm>
+            <a:off x="777240" y="292608"/>
+            <a:ext cx="10972800" cy="274320"/>
+          </a:xfrm>
+          <a:prstGeom prst="rect">
+            <a:avLst/>
+          </a:prstGeom>
+          <a:noFill/>
+          <a:ln/>
+        </p:spPr>
+        <p:txBody>
+          <a:bodyPr wrap="square" rtlCol="0" anchor="ctr"/>
+          <a:lstStyle/>
+          <a:p>
+            <a:pPr indent="0" marL="0">
+              <a:buNone/>
+            </a:pPr>
+            <a:r>
+              <a:rPr lang="en-US" sz="1000" b="1" spc="100" kern="0" dirty="0">
+                <a:solidFill>
+                  <a:srgbClr val="F7A23B"/>
+                </a:solidFill>
+                <a:latin typeface="Arial" pitchFamily="34" charset="0"/>
+                <a:ea typeface="Arial" pitchFamily="34" charset="-122"/>
+                <a:cs typeface="Arial" pitchFamily="34" charset="-120"/>
+              </a:rPr>
+              <a:t>QUESTÕES 3–4 DE 6</a:t>
+            </a:r>
+            <a:endParaRPr lang="en-US" sz="1000" dirty="0"/>
+          </a:p>
+        </p:txBody>
+      </p:sp>
+      <p:sp>
+        <p:nvSpPr>
+          <p:cNvPr id="8" name="Text 5"/>
+          <p:cNvSpPr/>
+          <p:nvPr/>
+        </p:nvSpPr>
+        <p:spPr>
+          <a:xfrm>
+            <a:off x="777240" y="530352"/>
+            <a:ext cx="10881360" cy="566928"/>
+          </a:xfrm>
+          <a:prstGeom prst="rect">
+            <a:avLst/>
+          </a:prstGeom>
+          <a:noFill/>
+          <a:ln/>
+        </p:spPr>
+        <p:txBody>
+          <a:bodyPr wrap="square" rtlCol="0" anchor="ctr">
+            <a:normAutofit/>
+          </a:bodyPr>
+          <a:lstStyle/>
+          <a:p>
+            <a:pPr indent="0" marL="0">
+              <a:buNone/>
+            </a:pPr>
+            <a:r>
+              <a:rPr lang="en-US" sz="2600" b="1" dirty="0">
+                <a:solidFill>
+                  <a:srgbClr val="1B3A6B"/>
+                </a:solidFill>
+                <a:latin typeface="Arial" pitchFamily="34" charset="0"/>
+                <a:ea typeface="Arial" pitchFamily="34" charset="-122"/>
+                <a:cs typeface="Arial" pitchFamily="34" charset="-120"/>
+              </a:rPr>
+              <a:t>Teste rápido</a:t>
+            </a:r>
+            <a:endParaRPr lang="en-US" sz="2600" dirty="0"/>
+          </a:p>
+        </p:txBody>
+      </p:sp>
+      <p:sp>
+        <p:nvSpPr>
+          <p:cNvPr id="9" name="Shape 6"/>
+          <p:cNvSpPr/>
+          <p:nvPr/>
+        </p:nvSpPr>
+        <p:spPr>
+          <a:xfrm>
+            <a:off x="548640" y="1325880"/>
+            <a:ext cx="502920" cy="502920"/>
+          </a:xfrm>
+          <a:prstGeom prst="ellipse">
+            <a:avLst/>
+          </a:prstGeom>
+          <a:solidFill>
+            <a:srgbClr val="1B3A6B"/>
+          </a:solidFill>
+          <a:ln/>
+        </p:spPr>
+      </p:sp>
+      <p:sp>
+        <p:nvSpPr>
+          <p:cNvPr id="10" name="Text 7"/>
+          <p:cNvSpPr/>
+          <p:nvPr/>
+        </p:nvSpPr>
+        <p:spPr>
+          <a:xfrm>
+            <a:off x="548640" y="1325880"/>
+            <a:ext cx="502920" cy="502920"/>
+          </a:xfrm>
+          <a:prstGeom prst="rect">
+            <a:avLst/>
+          </a:prstGeom>
+          <a:noFill/>
+          <a:ln/>
+        </p:spPr>
+        <p:txBody>
+          <a:bodyPr wrap="square" rtlCol="0" anchor="ctr"/>
+          <a:lstStyle/>
+          <a:p>
+            <a:pPr algn="ctr" indent="0" marL="0">
+              <a:buNone/>
+            </a:pPr>
+            <a:r>
+              <a:rPr lang="en-US" sz="1600" b="1" dirty="0">
+                <a:solidFill>
+                  <a:srgbClr val="FFFFFF"/>
+                </a:solidFill>
+                <a:latin typeface="Arial" pitchFamily="34" charset="0"/>
+                <a:ea typeface="Arial" pitchFamily="34" charset="-122"/>
+                <a:cs typeface="Arial" pitchFamily="34" charset="-120"/>
+              </a:rPr>
+              <a:t>3</a:t>
+            </a:r>
+            <a:endParaRPr lang="en-US" sz="1600" dirty="0"/>
+          </a:p>
+        </p:txBody>
+      </p:sp>
+      <p:sp>
+        <p:nvSpPr>
+          <p:cNvPr id="11" name="Text 8"/>
+          <p:cNvSpPr/>
+          <p:nvPr/>
+        </p:nvSpPr>
+        <p:spPr>
+          <a:xfrm>
+            <a:off x="1234440" y="1280160"/>
+            <a:ext cx="10424160" cy="640080"/>
+          </a:xfrm>
+          <a:prstGeom prst="rect">
+            <a:avLst/>
+          </a:prstGeom>
+          <a:noFill/>
+          <a:ln/>
+        </p:spPr>
+        <p:txBody>
+          <a:bodyPr wrap="square" rtlCol="0" anchor="ctr"/>
+          <a:lstStyle/>
+          <a:p>
+            <a:pPr indent="0" marL="0">
+              <a:buNone/>
+            </a:pPr>
+            <a:r>
+              <a:rPr lang="en-US" sz="1800" b="1" dirty="0">
+                <a:solidFill>
+                  <a:srgbClr val="1B3A6B"/>
+                </a:solidFill>
+                <a:latin typeface="Arial" pitchFamily="34" charset="0"/>
+                <a:ea typeface="Arial" pitchFamily="34" charset="-122"/>
+                <a:cs typeface="Arial" pitchFamily="34" charset="-120"/>
+              </a:rPr>
+              <a:t>A isenção de ICMS da energia compensada:</a:t>
+            </a:r>
+            <a:endParaRPr lang="en-US" sz="1800" dirty="0"/>
+          </a:p>
+        </p:txBody>
+      </p:sp>
+      <p:sp>
+        <p:nvSpPr>
+          <p:cNvPr id="12" name="Shape 9"/>
+          <p:cNvSpPr/>
+          <p:nvPr/>
+        </p:nvSpPr>
+        <p:spPr>
+          <a:xfrm>
+            <a:off x="548640" y="2057400"/>
+            <a:ext cx="2601468" cy="1463040"/>
+          </a:xfrm>
+          <a:prstGeom prst="roundRect">
+            <a:avLst>
+              <a:gd name="adj" fmla="val 5000"/>
+            </a:avLst>
+          </a:prstGeom>
+          <a:solidFill>
+            <a:srgbClr val="FFFFFF"/>
+          </a:solidFill>
+          <a:ln w="9525">
+            <a:solidFill>
+              <a:srgbClr val="D8E0EC"/>
+            </a:solidFill>
+            <a:prstDash val="solid"/>
+          </a:ln>
+        </p:spPr>
+      </p:sp>
+      <p:sp>
+        <p:nvSpPr>
+          <p:cNvPr id="13" name="Text 10"/>
+          <p:cNvSpPr/>
+          <p:nvPr/>
+        </p:nvSpPr>
+        <p:spPr>
+          <a:xfrm>
+            <a:off x="685800" y="2148840"/>
+            <a:ext cx="365760" cy="365760"/>
+          </a:xfrm>
+          <a:prstGeom prst="rect">
+            <a:avLst/>
+          </a:prstGeom>
+          <a:noFill/>
+          <a:ln/>
+        </p:spPr>
+        <p:txBody>
+          <a:bodyPr wrap="square" rtlCol="0" anchor="ctr"/>
+          <a:lstStyle/>
+          <a:p>
+            <a:pPr indent="0" marL="0">
+              <a:buNone/>
+            </a:pPr>
+            <a:r>
+              <a:rPr lang="en-US" sz="1400" b="1" dirty="0">
+                <a:solidFill>
+                  <a:srgbClr val="F7A23B"/>
+                </a:solidFill>
+                <a:latin typeface="Arial" pitchFamily="34" charset="0"/>
+                <a:ea typeface="Arial" pitchFamily="34" charset="-122"/>
+                <a:cs typeface="Arial" pitchFamily="34" charset="-120"/>
+              </a:rPr>
+              <a:t>A</a:t>
+            </a:r>
+            <a:endParaRPr lang="en-US" sz="1400" dirty="0"/>
+          </a:p>
+        </p:txBody>
+      </p:sp>
+      <p:sp>
+        <p:nvSpPr>
+          <p:cNvPr id="14" name="Text 11"/>
+          <p:cNvSpPr/>
+          <p:nvPr/>
+        </p:nvSpPr>
+        <p:spPr>
+          <a:xfrm>
+            <a:off x="685800" y="2514600"/>
+            <a:ext cx="2327148" cy="914400"/>
+          </a:xfrm>
+          <a:prstGeom prst="rect">
+            <a:avLst/>
+          </a:prstGeom>
+          <a:noFill/>
+          <a:ln/>
+        </p:spPr>
+        <p:txBody>
+          <a:bodyPr wrap="square" rtlCol="0" anchor="t"/>
+          <a:lstStyle/>
+          <a:p>
+            <a:pPr indent="0" marL="0">
+              <a:buNone/>
+            </a:pPr>
+            <a:r>
+              <a:rPr lang="en-US" sz="1500" dirty="0">
+                <a:solidFill>
+                  <a:srgbClr val="1F2937"/>
+                </a:solidFill>
+                <a:latin typeface="Arial" pitchFamily="34" charset="0"/>
+                <a:ea typeface="Arial" pitchFamily="34" charset="-122"/>
+                <a:cs typeface="Arial" pitchFamily="34" charset="-120"/>
+              </a:rPr>
+              <a:t>é igual em todo o país</a:t>
+            </a:r>
+            <a:endParaRPr lang="en-US" sz="1500" dirty="0"/>
+          </a:p>
+        </p:txBody>
+      </p:sp>
+      <p:sp>
+        <p:nvSpPr>
+          <p:cNvPr id="15" name="Shape 12"/>
+          <p:cNvSpPr/>
+          <p:nvPr/>
+        </p:nvSpPr>
+        <p:spPr>
+          <a:xfrm>
+            <a:off x="3378708" y="2057400"/>
+            <a:ext cx="2601468" cy="1463040"/>
+          </a:xfrm>
+          <a:prstGeom prst="roundRect">
+            <a:avLst>
+              <a:gd name="adj" fmla="val 5000"/>
+            </a:avLst>
+          </a:prstGeom>
+          <a:solidFill>
+            <a:srgbClr val="FFFFFF"/>
+          </a:solidFill>
+          <a:ln w="9525">
+            <a:solidFill>
+              <a:srgbClr val="D8E0EC"/>
+            </a:solidFill>
+            <a:prstDash val="solid"/>
+          </a:ln>
+        </p:spPr>
+      </p:sp>
+      <p:sp>
+        <p:nvSpPr>
+          <p:cNvPr id="16" name="Text 13"/>
+          <p:cNvSpPr/>
+          <p:nvPr/>
+        </p:nvSpPr>
+        <p:spPr>
+          <a:xfrm>
+            <a:off x="3515868" y="2148840"/>
+            <a:ext cx="365760" cy="365760"/>
+          </a:xfrm>
+          <a:prstGeom prst="rect">
+            <a:avLst/>
+          </a:prstGeom>
+          <a:noFill/>
+          <a:ln/>
+        </p:spPr>
+        <p:txBody>
+          <a:bodyPr wrap="square" rtlCol="0" anchor="ctr"/>
+          <a:lstStyle/>
+          <a:p>
+            <a:pPr indent="0" marL="0">
+              <a:buNone/>
+            </a:pPr>
+            <a:r>
+              <a:rPr lang="en-US" sz="1400" b="1" dirty="0">
+                <a:solidFill>
+                  <a:srgbClr val="F7A23B"/>
+                </a:solidFill>
+                <a:latin typeface="Arial" pitchFamily="34" charset="0"/>
+                <a:ea typeface="Arial" pitchFamily="34" charset="-122"/>
+                <a:cs typeface="Arial" pitchFamily="34" charset="-120"/>
+              </a:rPr>
+              <a:t>B</a:t>
+            </a:r>
+            <a:endParaRPr lang="en-US" sz="1400" dirty="0"/>
+          </a:p>
+        </p:txBody>
+      </p:sp>
+      <p:sp>
+        <p:nvSpPr>
+          <p:cNvPr id="17" name="Text 14"/>
+          <p:cNvSpPr/>
+          <p:nvPr/>
+        </p:nvSpPr>
+        <p:spPr>
+          <a:xfrm>
+            <a:off x="3515868" y="2514600"/>
+            <a:ext cx="2327148" cy="914400"/>
+          </a:xfrm>
+          <a:prstGeom prst="rect">
+            <a:avLst/>
+          </a:prstGeom>
+          <a:noFill/>
+          <a:ln/>
+        </p:spPr>
+        <p:txBody>
+          <a:bodyPr wrap="square" rtlCol="0" anchor="t"/>
+          <a:lstStyle/>
+          <a:p>
+            <a:pPr indent="0" marL="0">
+              <a:buNone/>
+            </a:pPr>
+            <a:r>
+              <a:rPr lang="en-US" sz="1500" dirty="0">
+                <a:solidFill>
+                  <a:srgbClr val="1F2937"/>
+                </a:solidFill>
+                <a:latin typeface="Arial" pitchFamily="34" charset="0"/>
+                <a:ea typeface="Arial" pitchFamily="34" charset="-122"/>
+                <a:cs typeface="Arial" pitchFamily="34" charset="-120"/>
+              </a:rPr>
+              <a:t>depende do estado e das condições do Convênio ICMS 16/2015</a:t>
+            </a:r>
+            <a:endParaRPr lang="en-US" sz="1500" dirty="0"/>
+          </a:p>
+        </p:txBody>
+      </p:sp>
+      <p:sp>
+        <p:nvSpPr>
+          <p:cNvPr id="18" name="Shape 15"/>
+          <p:cNvSpPr/>
+          <p:nvPr/>
+        </p:nvSpPr>
+        <p:spPr>
+          <a:xfrm>
+            <a:off x="6208776" y="2057400"/>
+            <a:ext cx="2601468" cy="1463040"/>
+          </a:xfrm>
+          <a:prstGeom prst="roundRect">
+            <a:avLst>
+              <a:gd name="adj" fmla="val 5000"/>
+            </a:avLst>
+          </a:prstGeom>
+          <a:solidFill>
+            <a:srgbClr val="FFFFFF"/>
+          </a:solidFill>
+          <a:ln w="9525">
+            <a:solidFill>
+              <a:srgbClr val="D8E0EC"/>
+            </a:solidFill>
+            <a:prstDash val="solid"/>
+          </a:ln>
+        </p:spPr>
+      </p:sp>
+      <p:sp>
+        <p:nvSpPr>
+          <p:cNvPr id="19" name="Text 16"/>
+          <p:cNvSpPr/>
+          <p:nvPr/>
+        </p:nvSpPr>
+        <p:spPr>
+          <a:xfrm>
+            <a:off x="6345936" y="2148840"/>
+            <a:ext cx="365760" cy="365760"/>
+          </a:xfrm>
+          <a:prstGeom prst="rect">
+            <a:avLst/>
+          </a:prstGeom>
+          <a:noFill/>
+          <a:ln/>
+        </p:spPr>
+        <p:txBody>
+          <a:bodyPr wrap="square" rtlCol="0" anchor="ctr"/>
+          <a:lstStyle/>
+          <a:p>
+            <a:pPr indent="0" marL="0">
+              <a:buNone/>
+            </a:pPr>
+            <a:r>
+              <a:rPr lang="en-US" sz="1400" b="1" dirty="0">
+                <a:solidFill>
+                  <a:srgbClr val="F7A23B"/>
+                </a:solidFill>
+                <a:latin typeface="Arial" pitchFamily="34" charset="0"/>
+                <a:ea typeface="Arial" pitchFamily="34" charset="-122"/>
+                <a:cs typeface="Arial" pitchFamily="34" charset="-120"/>
+              </a:rPr>
+              <a:t>C</a:t>
+            </a:r>
+            <a:endParaRPr lang="en-US" sz="1400" dirty="0"/>
+          </a:p>
+        </p:txBody>
+      </p:sp>
+      <p:sp>
+        <p:nvSpPr>
+          <p:cNvPr id="20" name="Text 17"/>
+          <p:cNvSpPr/>
+          <p:nvPr/>
+        </p:nvSpPr>
+        <p:spPr>
+          <a:xfrm>
+            <a:off x="6345936" y="2514600"/>
+            <a:ext cx="2327148" cy="914400"/>
+          </a:xfrm>
+          <a:prstGeom prst="rect">
+            <a:avLst/>
+          </a:prstGeom>
+          <a:noFill/>
+          <a:ln/>
+        </p:spPr>
+        <p:txBody>
+          <a:bodyPr wrap="square" rtlCol="0" anchor="t"/>
+          <a:lstStyle/>
+          <a:p>
+            <a:pPr indent="0" marL="0">
+              <a:buNone/>
+            </a:pPr>
+            <a:r>
+              <a:rPr lang="en-US" sz="1500" dirty="0">
+                <a:solidFill>
+                  <a:srgbClr val="1F2937"/>
+                </a:solidFill>
+                <a:latin typeface="Arial" pitchFamily="34" charset="0"/>
+                <a:ea typeface="Arial" pitchFamily="34" charset="-122"/>
+                <a:cs typeface="Arial" pitchFamily="34" charset="-120"/>
+              </a:rPr>
+              <a:t>não existe</a:t>
+            </a:r>
+            <a:endParaRPr lang="en-US" sz="1500" dirty="0"/>
+          </a:p>
+        </p:txBody>
+      </p:sp>
+      <p:sp>
+        <p:nvSpPr>
+          <p:cNvPr id="21" name="Shape 18"/>
+          <p:cNvSpPr/>
+          <p:nvPr/>
+        </p:nvSpPr>
+        <p:spPr>
+          <a:xfrm>
+            <a:off x="9038844" y="2057400"/>
+            <a:ext cx="2601468" cy="1463040"/>
+          </a:xfrm>
+          <a:prstGeom prst="roundRect">
+            <a:avLst>
+              <a:gd name="adj" fmla="val 5000"/>
+            </a:avLst>
+          </a:prstGeom>
+          <a:solidFill>
+            <a:srgbClr val="FFFFFF"/>
+          </a:solidFill>
+          <a:ln w="9525">
+            <a:solidFill>
+              <a:srgbClr val="D8E0EC"/>
+            </a:solidFill>
+            <a:prstDash val="solid"/>
+          </a:ln>
+        </p:spPr>
+      </p:sp>
+      <p:sp>
+        <p:nvSpPr>
+          <p:cNvPr id="22" name="Text 19"/>
+          <p:cNvSpPr/>
+          <p:nvPr/>
+        </p:nvSpPr>
+        <p:spPr>
+          <a:xfrm>
+            <a:off x="9176004" y="2148840"/>
+            <a:ext cx="365760" cy="365760"/>
+          </a:xfrm>
+          <a:prstGeom prst="rect">
+            <a:avLst/>
+          </a:prstGeom>
+          <a:noFill/>
+          <a:ln/>
+        </p:spPr>
+        <p:txBody>
+          <a:bodyPr wrap="square" rtlCol="0" anchor="ctr"/>
+          <a:lstStyle/>
+          <a:p>
+            <a:pPr indent="0" marL="0">
+              <a:buNone/>
+            </a:pPr>
+            <a:r>
+              <a:rPr lang="en-US" sz="1400" b="1" dirty="0">
+                <a:solidFill>
+                  <a:srgbClr val="F7A23B"/>
+                </a:solidFill>
+                <a:latin typeface="Arial" pitchFamily="34" charset="0"/>
+                <a:ea typeface="Arial" pitchFamily="34" charset="-122"/>
+                <a:cs typeface="Arial" pitchFamily="34" charset="-120"/>
+              </a:rPr>
+              <a:t>D</a:t>
+            </a:r>
+            <a:endParaRPr lang="en-US" sz="1400" dirty="0"/>
+          </a:p>
+        </p:txBody>
+      </p:sp>
+      <p:sp>
+        <p:nvSpPr>
+          <p:cNvPr id="23" name="Text 20"/>
+          <p:cNvSpPr/>
+          <p:nvPr/>
+        </p:nvSpPr>
+        <p:spPr>
+          <a:xfrm>
+            <a:off x="9176004" y="2514600"/>
+            <a:ext cx="2327148" cy="914400"/>
+          </a:xfrm>
+          <a:prstGeom prst="rect">
+            <a:avLst/>
+          </a:prstGeom>
+          <a:noFill/>
+          <a:ln/>
+        </p:spPr>
+        <p:txBody>
+          <a:bodyPr wrap="square" rtlCol="0" anchor="t"/>
+          <a:lstStyle/>
+          <a:p>
+            <a:pPr indent="0" marL="0">
+              <a:buNone/>
+            </a:pPr>
+            <a:r>
+              <a:rPr lang="en-US" sz="1500" dirty="0">
+                <a:solidFill>
+                  <a:srgbClr val="1F2937"/>
+                </a:solidFill>
+                <a:latin typeface="Arial" pitchFamily="34" charset="0"/>
+                <a:ea typeface="Arial" pitchFamily="34" charset="-122"/>
+                <a:cs typeface="Arial" pitchFamily="34" charset="-120"/>
+              </a:rPr>
+              <a:t>vale só para indústria</a:t>
+            </a:r>
+            <a:endParaRPr lang="en-US" sz="1500" dirty="0"/>
+          </a:p>
+        </p:txBody>
+      </p:sp>
+      <p:sp>
+        <p:nvSpPr>
+          <p:cNvPr id="24" name="Shape 21"/>
+          <p:cNvSpPr/>
+          <p:nvPr/>
+        </p:nvSpPr>
+        <p:spPr>
+          <a:xfrm>
+            <a:off x="548640" y="3840480"/>
+            <a:ext cx="502920" cy="502920"/>
+          </a:xfrm>
+          <a:prstGeom prst="ellipse">
+            <a:avLst/>
+          </a:prstGeom>
+          <a:solidFill>
+            <a:srgbClr val="1B3A6B"/>
+          </a:solidFill>
+          <a:ln/>
+        </p:spPr>
+      </p:sp>
+      <p:sp>
+        <p:nvSpPr>
+          <p:cNvPr id="25" name="Text 22"/>
+          <p:cNvSpPr/>
+          <p:nvPr/>
+        </p:nvSpPr>
+        <p:spPr>
+          <a:xfrm>
+            <a:off x="548640" y="3840480"/>
+            <a:ext cx="502920" cy="502920"/>
+          </a:xfrm>
+          <a:prstGeom prst="rect">
+            <a:avLst/>
+          </a:prstGeom>
+          <a:noFill/>
+          <a:ln/>
+        </p:spPr>
+        <p:txBody>
+          <a:bodyPr wrap="square" rtlCol="0" anchor="ctr"/>
+          <a:lstStyle/>
+          <a:p>
+            <a:pPr algn="ctr" indent="0" marL="0">
+              <a:buNone/>
+            </a:pPr>
+            <a:r>
+              <a:rPr lang="en-US" sz="1600" b="1" dirty="0">
+                <a:solidFill>
+                  <a:srgbClr val="FFFFFF"/>
+                </a:solidFill>
+                <a:latin typeface="Arial" pitchFamily="34" charset="0"/>
+                <a:ea typeface="Arial" pitchFamily="34" charset="-122"/>
+                <a:cs typeface="Arial" pitchFamily="34" charset="-120"/>
+              </a:rPr>
+              <a:t>4</a:t>
+            </a:r>
+            <a:endParaRPr lang="en-US" sz="1600" dirty="0"/>
+          </a:p>
+        </p:txBody>
+      </p:sp>
+      <p:sp>
+        <p:nvSpPr>
+          <p:cNvPr id="26" name="Text 23"/>
+          <p:cNvSpPr/>
+          <p:nvPr/>
+        </p:nvSpPr>
+        <p:spPr>
+          <a:xfrm>
+            <a:off x="1234440" y="3794760"/>
+            <a:ext cx="10424160" cy="640080"/>
+          </a:xfrm>
+          <a:prstGeom prst="rect">
+            <a:avLst/>
+          </a:prstGeom>
+          <a:noFill/>
+          <a:ln/>
+        </p:spPr>
+        <p:txBody>
+          <a:bodyPr wrap="square" rtlCol="0" anchor="ctr"/>
+          <a:lstStyle/>
+          <a:p>
+            <a:pPr indent="0" marL="0">
+              <a:buNone/>
+            </a:pPr>
+            <a:r>
+              <a:rPr lang="en-US" sz="1800" b="1" dirty="0">
+                <a:solidFill>
+                  <a:srgbClr val="1B3A6B"/>
+                </a:solidFill>
+                <a:latin typeface="Arial" pitchFamily="34" charset="0"/>
+                <a:ea typeface="Arial" pitchFamily="34" charset="-122"/>
+                <a:cs typeface="Arial" pitchFamily="34" charset="-120"/>
+              </a:rPr>
+              <a:t>Um risco de alto impacto e média probabilidade deve:</a:t>
+            </a:r>
+            <a:endParaRPr lang="en-US" sz="1800" dirty="0"/>
+          </a:p>
+        </p:txBody>
+      </p:sp>
+      <p:sp>
+        <p:nvSpPr>
+          <p:cNvPr id="27" name="Shape 24"/>
+          <p:cNvSpPr/>
+          <p:nvPr/>
+        </p:nvSpPr>
+        <p:spPr>
+          <a:xfrm>
+            <a:off x="548640" y="4572000"/>
+            <a:ext cx="2601468" cy="1463040"/>
+          </a:xfrm>
+          <a:prstGeom prst="roundRect">
+            <a:avLst>
+              <a:gd name="adj" fmla="val 5000"/>
+            </a:avLst>
+          </a:prstGeom>
+          <a:solidFill>
+            <a:srgbClr val="FFFFFF"/>
+          </a:solidFill>
+          <a:ln w="9525">
+            <a:solidFill>
+              <a:srgbClr val="D8E0EC"/>
+            </a:solidFill>
+            <a:prstDash val="solid"/>
+          </a:ln>
+        </p:spPr>
+      </p:sp>
+      <p:sp>
+        <p:nvSpPr>
+          <p:cNvPr id="28" name="Text 25"/>
+          <p:cNvSpPr/>
+          <p:nvPr/>
+        </p:nvSpPr>
+        <p:spPr>
+          <a:xfrm>
+            <a:off x="685800" y="4663440"/>
+            <a:ext cx="365760" cy="365760"/>
+          </a:xfrm>
+          <a:prstGeom prst="rect">
+            <a:avLst/>
+          </a:prstGeom>
+          <a:noFill/>
+          <a:ln/>
+        </p:spPr>
+        <p:txBody>
+          <a:bodyPr wrap="square" rtlCol="0" anchor="ctr"/>
+          <a:lstStyle/>
+          <a:p>
+            <a:pPr indent="0" marL="0">
+              <a:buNone/>
+            </a:pPr>
+            <a:r>
+              <a:rPr lang="en-US" sz="1400" b="1" dirty="0">
+                <a:solidFill>
+                  <a:srgbClr val="F7A23B"/>
+                </a:solidFill>
+                <a:latin typeface="Arial" pitchFamily="34" charset="0"/>
+                <a:ea typeface="Arial" pitchFamily="34" charset="-122"/>
+                <a:cs typeface="Arial" pitchFamily="34" charset="-120"/>
+              </a:rPr>
+              <a:t>A</a:t>
+            </a:r>
+            <a:endParaRPr lang="en-US" sz="1400" dirty="0"/>
+          </a:p>
+        </p:txBody>
+      </p:sp>
+      <p:sp>
+        <p:nvSpPr>
+          <p:cNvPr id="29" name="Text 26"/>
+          <p:cNvSpPr/>
+          <p:nvPr/>
+        </p:nvSpPr>
+        <p:spPr>
+          <a:xfrm>
+            <a:off x="685800" y="5029200"/>
+            <a:ext cx="2327148" cy="914400"/>
+          </a:xfrm>
+          <a:prstGeom prst="rect">
+            <a:avLst/>
+          </a:prstGeom>
+          <a:noFill/>
+          <a:ln/>
+        </p:spPr>
+        <p:txBody>
+          <a:bodyPr wrap="square" rtlCol="0" anchor="t"/>
+          <a:lstStyle/>
+          <a:p>
+            <a:pPr indent="0" marL="0">
+              <a:buNone/>
+            </a:pPr>
+            <a:r>
+              <a:rPr lang="en-US" sz="1500" dirty="0">
+                <a:solidFill>
+                  <a:srgbClr val="1F2937"/>
+                </a:solidFill>
+                <a:latin typeface="Arial" pitchFamily="34" charset="0"/>
+                <a:ea typeface="Arial" pitchFamily="34" charset="-122"/>
+                <a:cs typeface="Arial" pitchFamily="34" charset="-120"/>
+              </a:rPr>
+              <a:t>ter plano de mitigação e dono definido</a:t>
+            </a:r>
+            <a:endParaRPr lang="en-US" sz="1500" dirty="0"/>
+          </a:p>
+        </p:txBody>
+      </p:sp>
+      <p:sp>
+        <p:nvSpPr>
+          <p:cNvPr id="30" name="Shape 27"/>
+          <p:cNvSpPr/>
+          <p:nvPr/>
+        </p:nvSpPr>
+        <p:spPr>
+          <a:xfrm>
+            <a:off x="3378708" y="4572000"/>
+            <a:ext cx="2601468" cy="1463040"/>
+          </a:xfrm>
+          <a:prstGeom prst="roundRect">
+            <a:avLst>
+              <a:gd name="adj" fmla="val 5000"/>
+            </a:avLst>
+          </a:prstGeom>
+          <a:solidFill>
+            <a:srgbClr val="FFFFFF"/>
+          </a:solidFill>
+          <a:ln w="9525">
+            <a:solidFill>
+              <a:srgbClr val="D8E0EC"/>
+            </a:solidFill>
+            <a:prstDash val="solid"/>
+          </a:ln>
+        </p:spPr>
+      </p:sp>
+      <p:sp>
+        <p:nvSpPr>
+          <p:cNvPr id="31" name="Text 28"/>
+          <p:cNvSpPr/>
+          <p:nvPr/>
+        </p:nvSpPr>
+        <p:spPr>
+          <a:xfrm>
+            <a:off x="3515868" y="4663440"/>
+            <a:ext cx="365760" cy="365760"/>
+          </a:xfrm>
+          <a:prstGeom prst="rect">
+            <a:avLst/>
+          </a:prstGeom>
+          <a:noFill/>
+          <a:ln/>
+        </p:spPr>
+        <p:txBody>
+          <a:bodyPr wrap="square" rtlCol="0" anchor="ctr"/>
+          <a:lstStyle/>
+          <a:p>
+            <a:pPr indent="0" marL="0">
+              <a:buNone/>
+            </a:pPr>
+            <a:r>
+              <a:rPr lang="en-US" sz="1400" b="1" dirty="0">
+                <a:solidFill>
+                  <a:srgbClr val="F7A23B"/>
+                </a:solidFill>
+                <a:latin typeface="Arial" pitchFamily="34" charset="0"/>
+                <a:ea typeface="Arial" pitchFamily="34" charset="-122"/>
+                <a:cs typeface="Arial" pitchFamily="34" charset="-120"/>
+              </a:rPr>
+              <a:t>B</a:t>
+            </a:r>
+            <a:endParaRPr lang="en-US" sz="1400" dirty="0"/>
+          </a:p>
+        </p:txBody>
+      </p:sp>
+      <p:sp>
+        <p:nvSpPr>
+          <p:cNvPr id="32" name="Text 29"/>
+          <p:cNvSpPr/>
+          <p:nvPr/>
+        </p:nvSpPr>
+        <p:spPr>
+          <a:xfrm>
+            <a:off x="3515868" y="5029200"/>
+            <a:ext cx="2327148" cy="914400"/>
+          </a:xfrm>
+          <a:prstGeom prst="rect">
+            <a:avLst/>
+          </a:prstGeom>
+          <a:noFill/>
+          <a:ln/>
+        </p:spPr>
+        <p:txBody>
+          <a:bodyPr wrap="square" rtlCol="0" anchor="t"/>
+          <a:lstStyle/>
+          <a:p>
+            <a:pPr indent="0" marL="0">
+              <a:buNone/>
+            </a:pPr>
+            <a:r>
+              <a:rPr lang="en-US" sz="1500" dirty="0">
+                <a:solidFill>
+                  <a:srgbClr val="1F2937"/>
+                </a:solidFill>
+                <a:latin typeface="Arial" pitchFamily="34" charset="0"/>
+                <a:ea typeface="Arial" pitchFamily="34" charset="-122"/>
+                <a:cs typeface="Arial" pitchFamily="34" charset="-120"/>
+              </a:rPr>
+              <a:t>ser ignorado</a:t>
+            </a:r>
+            <a:endParaRPr lang="en-US" sz="1500" dirty="0"/>
+          </a:p>
+        </p:txBody>
+      </p:sp>
+      <p:sp>
+        <p:nvSpPr>
+          <p:cNvPr id="33" name="Shape 30"/>
+          <p:cNvSpPr/>
+          <p:nvPr/>
+        </p:nvSpPr>
+        <p:spPr>
+          <a:xfrm>
+            <a:off x="6208776" y="4572000"/>
+            <a:ext cx="2601468" cy="1463040"/>
+          </a:xfrm>
+          <a:prstGeom prst="roundRect">
+            <a:avLst>
+              <a:gd name="adj" fmla="val 5000"/>
+            </a:avLst>
+          </a:prstGeom>
+          <a:solidFill>
+            <a:srgbClr val="FFFFFF"/>
+          </a:solidFill>
+          <a:ln w="9525">
+            <a:solidFill>
+              <a:srgbClr val="D8E0EC"/>
+            </a:solidFill>
+            <a:prstDash val="solid"/>
+          </a:ln>
+        </p:spPr>
+      </p:sp>
+      <p:sp>
+        <p:nvSpPr>
+          <p:cNvPr id="34" name="Text 31"/>
+          <p:cNvSpPr/>
+          <p:nvPr/>
+        </p:nvSpPr>
+        <p:spPr>
+          <a:xfrm>
+            <a:off x="6345936" y="4663440"/>
+            <a:ext cx="365760" cy="365760"/>
+          </a:xfrm>
+          <a:prstGeom prst="rect">
+            <a:avLst/>
+          </a:prstGeom>
+          <a:noFill/>
+          <a:ln/>
+        </p:spPr>
+        <p:txBody>
+          <a:bodyPr wrap="square" rtlCol="0" anchor="ctr"/>
+          <a:lstStyle/>
+          <a:p>
+            <a:pPr indent="0" marL="0">
+              <a:buNone/>
+            </a:pPr>
+            <a:r>
+              <a:rPr lang="en-US" sz="1400" b="1" dirty="0">
+                <a:solidFill>
+                  <a:srgbClr val="F7A23B"/>
+                </a:solidFill>
+                <a:latin typeface="Arial" pitchFamily="34" charset="0"/>
+                <a:ea typeface="Arial" pitchFamily="34" charset="-122"/>
+                <a:cs typeface="Arial" pitchFamily="34" charset="-120"/>
+              </a:rPr>
+              <a:t>C</a:t>
+            </a:r>
+            <a:endParaRPr lang="en-US" sz="1400" dirty="0"/>
+          </a:p>
+        </p:txBody>
+      </p:sp>
+      <p:sp>
+        <p:nvSpPr>
+          <p:cNvPr id="35" name="Text 32"/>
+          <p:cNvSpPr/>
+          <p:nvPr/>
+        </p:nvSpPr>
+        <p:spPr>
+          <a:xfrm>
+            <a:off x="6345936" y="5029200"/>
+            <a:ext cx="2327148" cy="914400"/>
+          </a:xfrm>
+          <a:prstGeom prst="rect">
+            <a:avLst/>
+          </a:prstGeom>
+          <a:noFill/>
+          <a:ln/>
+        </p:spPr>
+        <p:txBody>
+          <a:bodyPr wrap="square" rtlCol="0" anchor="t"/>
+          <a:lstStyle/>
+          <a:p>
+            <a:pPr indent="0" marL="0">
+              <a:buNone/>
+            </a:pPr>
+            <a:r>
+              <a:rPr lang="en-US" sz="1500" dirty="0">
+                <a:solidFill>
+                  <a:srgbClr val="1F2937"/>
+                </a:solidFill>
+                <a:latin typeface="Arial" pitchFamily="34" charset="0"/>
+                <a:ea typeface="Arial" pitchFamily="34" charset="-122"/>
+                <a:cs typeface="Arial" pitchFamily="34" charset="-120"/>
+              </a:rPr>
+              <a:t>ser resolvido só se acontecer</a:t>
+            </a:r>
+            <a:endParaRPr lang="en-US" sz="1500" dirty="0"/>
+          </a:p>
+        </p:txBody>
+      </p:sp>
+      <p:sp>
+        <p:nvSpPr>
+          <p:cNvPr id="36" name="Shape 33"/>
+          <p:cNvSpPr/>
+          <p:nvPr/>
+        </p:nvSpPr>
+        <p:spPr>
+          <a:xfrm>
+            <a:off x="9038844" y="4572000"/>
+            <a:ext cx="2601468" cy="1463040"/>
+          </a:xfrm>
+          <a:prstGeom prst="roundRect">
+            <a:avLst>
+              <a:gd name="adj" fmla="val 5000"/>
+            </a:avLst>
+          </a:prstGeom>
+          <a:solidFill>
+            <a:srgbClr val="FFFFFF"/>
+          </a:solidFill>
+          <a:ln w="9525">
+            <a:solidFill>
+              <a:srgbClr val="D8E0EC"/>
+            </a:solidFill>
+            <a:prstDash val="solid"/>
+          </a:ln>
+        </p:spPr>
+      </p:sp>
+      <p:sp>
+        <p:nvSpPr>
+          <p:cNvPr id="37" name="Text 34"/>
+          <p:cNvSpPr/>
+          <p:nvPr/>
+        </p:nvSpPr>
+        <p:spPr>
+          <a:xfrm>
+            <a:off x="9176004" y="4663440"/>
+            <a:ext cx="365760" cy="365760"/>
+          </a:xfrm>
+          <a:prstGeom prst="rect">
+            <a:avLst/>
+          </a:prstGeom>
+          <a:noFill/>
+          <a:ln/>
+        </p:spPr>
+        <p:txBody>
+          <a:bodyPr wrap="square" rtlCol="0" anchor="ctr"/>
+          <a:lstStyle/>
+          <a:p>
+            <a:pPr indent="0" marL="0">
+              <a:buNone/>
+            </a:pPr>
+            <a:r>
+              <a:rPr lang="en-US" sz="1400" b="1" dirty="0">
+                <a:solidFill>
+                  <a:srgbClr val="F7A23B"/>
+                </a:solidFill>
+                <a:latin typeface="Arial" pitchFamily="34" charset="0"/>
+                <a:ea typeface="Arial" pitchFamily="34" charset="-122"/>
+                <a:cs typeface="Arial" pitchFamily="34" charset="-120"/>
+              </a:rPr>
+              <a:t>D</a:t>
+            </a:r>
+            <a:endParaRPr lang="en-US" sz="1400" dirty="0"/>
+          </a:p>
+        </p:txBody>
+      </p:sp>
+      <p:sp>
+        <p:nvSpPr>
+          <p:cNvPr id="38" name="Text 35"/>
+          <p:cNvSpPr/>
+          <p:nvPr/>
+        </p:nvSpPr>
+        <p:spPr>
+          <a:xfrm>
+            <a:off x="9176004" y="5029200"/>
+            <a:ext cx="2327148" cy="914400"/>
+          </a:xfrm>
+          <a:prstGeom prst="rect">
+            <a:avLst/>
+          </a:prstGeom>
+          <a:noFill/>
+          <a:ln/>
+        </p:spPr>
+        <p:txBody>
+          <a:bodyPr wrap="square" rtlCol="0" anchor="t"/>
+          <a:lstStyle/>
+          <a:p>
+            <a:pPr indent="0" marL="0">
+              <a:buNone/>
+            </a:pPr>
+            <a:r>
+              <a:rPr lang="en-US" sz="1500" dirty="0">
+                <a:solidFill>
+                  <a:srgbClr val="1F2937"/>
+                </a:solidFill>
+                <a:latin typeface="Arial" pitchFamily="34" charset="0"/>
+                <a:ea typeface="Arial" pitchFamily="34" charset="-122"/>
+                <a:cs typeface="Arial" pitchFamily="34" charset="-120"/>
+              </a:rPr>
+              <a:t>ir para o cliente</a:t>
+            </a:r>
+            <a:endParaRPr lang="en-US" sz="1500" dirty="0"/>
+          </a:p>
+        </p:txBody>
+      </p:sp>
+      <p:sp>
+        <p:nvSpPr>
+          <p:cNvPr id="25" name="Slide Number Placeholder 0"/>
+          <p:cNvSpPr>
+            <a:spLocks noGrp="1"/>
+          </p:cNvSpPr>
+          <p:nvPr>
+            <p:ph type="sldNum" sz="quarter" idx="4294967295"/>
+          </p:nvPr>
+        </p:nvSpPr>
+        <p:spPr>
+          <a:xfrm>
+            <a:off x="11292840" y="6556248"/>
+            <a:ext cx="548640" cy="256032"/>
+          </a:xfrm>
+          <a:prstGeom prst="rect">
+            <a:avLst/>
+          </a:prstGeom>
+          <a:extLst>
+            <a:ext uri="{C572A759-6A51-4108-AA02-DFA0A04FC94B}">
+              <ma14:wrappingTextBoxFlag xmlns:ma14="http://schemas.microsoft.com/office/mac/drawingml/2011/main" val="0"/>
+            </a:ext>
+          </a:extLst>
+        </p:spPr>
+        <p:txBody>
+          <a:bodyPr/>
+          <a:lstStyle>
+            <a:lvl1pPr>
+              <a:defRPr sz="900">
+                <a:solidFill>
+                  <a:srgbClr val="1B3A6B"/>
+                </a:solidFill>
+                <a:latin typeface="Arial"/>
+                <a:ea typeface="Arial"/>
+                <a:cs typeface="Arial"/>
+              </a:defRPr>
+            </a:lvl1pPr>
+          </a:lstStyle>
+          <a:p>
+            <a:pPr algn="r"/>
+            <a:fld id="{F7021451-1387-4CA6-816F-3879F97B5CBC}" type="slidenum">
+              <a:rPr b="1" lang="en-US"/>
+              <a:t>28</a:t>
+            </a:fld>
+            <a:endParaRPr lang="en-US"/>
+          </a:p>
+        </p:txBody>
+      </p:sp>
+    </p:spTree>
+  </p:cSld>
+  <p:clrMapOvr>
+    <a:masterClrMapping/>
+  </p:clrMapOvr>
+</p:sld>
+</file>
+
+<file path=ppt/slides/slide29.xml><?xml version="1.0" encoding="utf-8"?>
+<p:sld xmlns:a="http://schemas.openxmlformats.org/drawingml/2006/main" xmlns:r="http://schemas.openxmlformats.org/officeDocument/2006/relationships" xmlns:p="http://schemas.openxmlformats.org/presentationml/2006/main">
+  <p:cSld name="Slide 29">
+    <p:bg>
+      <p:bgPr>
+        <a:solidFill>
+          <a:srgbClr val="F6F8FB"/>
+        </a:solidFill>
+      </p:bgPr>
+    </p:bg>
+    <p:spTree>
+      <p:nvGrpSpPr>
+        <p:cNvPr id="1" name=""/>
+        <p:cNvGrpSpPr/>
+        <p:nvPr/>
+      </p:nvGrpSpPr>
+      <p:grpSpPr>
+        <a:xfrm>
+          <a:off x="0" y="0"/>
+          <a:ext cx="0" cy="0"/>
+          <a:chOff x="0" y="0"/>
+          <a:chExt cx="0" cy="0"/>
+        </a:xfrm>
+      </p:grpSpPr>
+      <p:sp>
+        <p:nvSpPr>
+          <p:cNvPr id="2" name="Shape 0"/>
+          <p:cNvSpPr/>
+          <p:nvPr/>
+        </p:nvSpPr>
+        <p:spPr>
+          <a:xfrm>
+            <a:off x="0" y="6510528"/>
+            <a:ext cx="12191695" cy="347472"/>
+          </a:xfrm>
+          <a:prstGeom prst="rect">
+            <a:avLst/>
+          </a:prstGeom>
+          <a:solidFill>
+            <a:srgbClr val="FFFFFF"/>
+          </a:solidFill>
+          <a:ln w="6350">
+            <a:solidFill>
+              <a:srgbClr val="D8E0EC"/>
+            </a:solidFill>
+            <a:prstDash val="solid"/>
+          </a:ln>
+        </p:spPr>
+      </p:sp>
+      <p:pic>
+        <p:nvPicPr>
+          <p:cNvPr id="3" name="Image 0" descr="/www/wwwroot/rexar/gdsolar/docs/curso/slides/assets/logo-gdsolar.png">    </p:cNvPr>
+          <p:cNvPicPr>
+            <a:picLocks noChangeAspect="1"/>
+          </p:cNvPicPr>
+          <p:nvPr/>
+        </p:nvPicPr>
+        <p:blipFill>
+          <a:blip r:embed="rId1"/>
+          <a:stretch>
+            <a:fillRect/>
+          </a:stretch>
+        </p:blipFill>
+        <p:spPr>
+          <a:xfrm>
+            <a:off x="548640" y="6547104"/>
+            <a:ext cx="274320" cy="274320"/>
+          </a:xfrm>
+          <a:prstGeom prst="rect">
+            <a:avLst/>
+          </a:prstGeom>
+        </p:spPr>
+      </p:pic>
+      <p:sp>
+        <p:nvSpPr>
+          <p:cNvPr id="4" name="Text 1"/>
+          <p:cNvSpPr/>
+          <p:nvPr/>
+        </p:nvSpPr>
+        <p:spPr>
+          <a:xfrm>
+            <a:off x="886968" y="6528816"/>
+            <a:ext cx="6400800" cy="310896"/>
+          </a:xfrm>
+          <a:prstGeom prst="rect">
+            <a:avLst/>
+          </a:prstGeom>
+          <a:noFill/>
+          <a:ln/>
+        </p:spPr>
+        <p:txBody>
+          <a:bodyPr wrap="square" rtlCol="0" anchor="ctr"/>
+          <a:lstStyle/>
+          <a:p>
+            <a:pPr indent="0" marL="0">
+              <a:buNone/>
+            </a:pPr>
+            <a:r>
+              <a:rPr lang="en-US" sz="900" b="1" dirty="0">
+                <a:solidFill>
+                  <a:srgbClr val="64748B"/>
+                </a:solidFill>
+                <a:latin typeface="Arial" pitchFamily="34" charset="0"/>
+                <a:ea typeface="Arial" pitchFamily="34" charset="-122"/>
+                <a:cs typeface="Arial" pitchFamily="34" charset="-120"/>
+              </a:rPr>
+              <a:t>GD Solar  ·  Formação em Energia por Assinatura</a:t>
+            </a:r>
+            <a:endParaRPr lang="en-US" sz="900" dirty="0"/>
+          </a:p>
+        </p:txBody>
+      </p:sp>
+      <p:sp>
+        <p:nvSpPr>
+          <p:cNvPr id="5" name="Text 2"/>
+          <p:cNvSpPr/>
+          <p:nvPr/>
+        </p:nvSpPr>
+        <p:spPr>
+          <a:xfrm>
+            <a:off x="7132320" y="6528816"/>
+            <a:ext cx="4023360" cy="310896"/>
+          </a:xfrm>
+          <a:prstGeom prst="rect">
+            <a:avLst/>
+          </a:prstGeom>
+          <a:noFill/>
+          <a:ln/>
+        </p:spPr>
+        <p:txBody>
+          <a:bodyPr wrap="square" rtlCol="0" anchor="ctr"/>
+          <a:lstStyle/>
+          <a:p>
+            <a:pPr algn="r" indent="0" marL="0">
+              <a:buNone/>
+            </a:pPr>
+            <a:r>
+              <a:rPr lang="en-US" sz="900" dirty="0">
+                <a:solidFill>
+                  <a:srgbClr val="64748B"/>
+                </a:solidFill>
+                <a:latin typeface="Arial" pitchFamily="34" charset="0"/>
+                <a:ea typeface="Arial" pitchFamily="34" charset="-122"/>
+                <a:cs typeface="Arial" pitchFamily="34" charset="-120"/>
+              </a:rPr>
+              <a:t>M11 · Teste rápido</a:t>
+            </a:r>
+            <a:endParaRPr lang="en-US" sz="900" dirty="0"/>
+          </a:p>
+        </p:txBody>
+      </p:sp>
+      <p:sp>
+        <p:nvSpPr>
+          <p:cNvPr id="6" name="Shape 3"/>
+          <p:cNvSpPr/>
+          <p:nvPr/>
+        </p:nvSpPr>
+        <p:spPr>
+          <a:xfrm>
+            <a:off x="548640" y="384048"/>
+            <a:ext cx="82296" cy="658368"/>
+          </a:xfrm>
+          <a:prstGeom prst="rect">
+            <a:avLst/>
+          </a:prstGeom>
+          <a:solidFill>
+            <a:srgbClr val="F7A23B"/>
+          </a:solidFill>
+          <a:ln/>
+        </p:spPr>
+      </p:sp>
+      <p:sp>
+        <p:nvSpPr>
+          <p:cNvPr id="7" name="Text 4"/>
+          <p:cNvSpPr/>
+          <p:nvPr/>
+        </p:nvSpPr>
+        <p:spPr>
+          <a:xfrm>
+            <a:off x="777240" y="292608"/>
+            <a:ext cx="10972800" cy="274320"/>
+          </a:xfrm>
+          <a:prstGeom prst="rect">
+            <a:avLst/>
+          </a:prstGeom>
+          <a:noFill/>
+          <a:ln/>
+        </p:spPr>
+        <p:txBody>
+          <a:bodyPr wrap="square" rtlCol="0" anchor="ctr"/>
+          <a:lstStyle/>
+          <a:p>
+            <a:pPr indent="0" marL="0">
+              <a:buNone/>
+            </a:pPr>
+            <a:r>
+              <a:rPr lang="en-US" sz="1000" b="1" spc="100" kern="0" dirty="0">
+                <a:solidFill>
+                  <a:srgbClr val="F7A23B"/>
+                </a:solidFill>
+                <a:latin typeface="Arial" pitchFamily="34" charset="0"/>
+                <a:ea typeface="Arial" pitchFamily="34" charset="-122"/>
+                <a:cs typeface="Arial" pitchFamily="34" charset="-120"/>
+              </a:rPr>
+              <a:t>QUESTÕES 5–6 DE 6</a:t>
+            </a:r>
+            <a:endParaRPr lang="en-US" sz="1000" dirty="0"/>
+          </a:p>
+        </p:txBody>
+      </p:sp>
+      <p:sp>
+        <p:nvSpPr>
+          <p:cNvPr id="8" name="Text 5"/>
+          <p:cNvSpPr/>
+          <p:nvPr/>
+        </p:nvSpPr>
+        <p:spPr>
+          <a:xfrm>
+            <a:off x="777240" y="530352"/>
+            <a:ext cx="10881360" cy="566928"/>
+          </a:xfrm>
+          <a:prstGeom prst="rect">
+            <a:avLst/>
+          </a:prstGeom>
+          <a:noFill/>
+          <a:ln/>
+        </p:spPr>
+        <p:txBody>
+          <a:bodyPr wrap="square" rtlCol="0" anchor="ctr">
+            <a:normAutofit/>
+          </a:bodyPr>
+          <a:lstStyle/>
+          <a:p>
+            <a:pPr indent="0" marL="0">
+              <a:buNone/>
+            </a:pPr>
+            <a:r>
+              <a:rPr lang="en-US" sz="2600" b="1" dirty="0">
+                <a:solidFill>
+                  <a:srgbClr val="1B3A6B"/>
+                </a:solidFill>
+                <a:latin typeface="Arial" pitchFamily="34" charset="0"/>
+                <a:ea typeface="Arial" pitchFamily="34" charset="-122"/>
+                <a:cs typeface="Arial" pitchFamily="34" charset="-120"/>
+              </a:rPr>
+              <a:t>Teste rápido</a:t>
+            </a:r>
+            <a:endParaRPr lang="en-US" sz="2600" dirty="0"/>
+          </a:p>
+        </p:txBody>
+      </p:sp>
+      <p:sp>
+        <p:nvSpPr>
+          <p:cNvPr id="9" name="Shape 6"/>
+          <p:cNvSpPr/>
+          <p:nvPr/>
+        </p:nvSpPr>
+        <p:spPr>
+          <a:xfrm>
+            <a:off x="548640" y="1325880"/>
+            <a:ext cx="502920" cy="502920"/>
+          </a:xfrm>
+          <a:prstGeom prst="ellipse">
+            <a:avLst/>
+          </a:prstGeom>
+          <a:solidFill>
+            <a:srgbClr val="1B3A6B"/>
+          </a:solidFill>
+          <a:ln/>
+        </p:spPr>
+      </p:sp>
+      <p:sp>
+        <p:nvSpPr>
+          <p:cNvPr id="10" name="Text 7"/>
+          <p:cNvSpPr/>
+          <p:nvPr/>
+        </p:nvSpPr>
+        <p:spPr>
+          <a:xfrm>
+            <a:off x="548640" y="1325880"/>
+            <a:ext cx="502920" cy="502920"/>
+          </a:xfrm>
+          <a:prstGeom prst="rect">
+            <a:avLst/>
+          </a:prstGeom>
+          <a:noFill/>
+          <a:ln/>
+        </p:spPr>
+        <p:txBody>
+          <a:bodyPr wrap="square" rtlCol="0" anchor="ctr"/>
+          <a:lstStyle/>
+          <a:p>
+            <a:pPr algn="ctr" indent="0" marL="0">
+              <a:buNone/>
+            </a:pPr>
+            <a:r>
+              <a:rPr lang="en-US" sz="1600" b="1" dirty="0">
+                <a:solidFill>
+                  <a:srgbClr val="FFFFFF"/>
+                </a:solidFill>
+                <a:latin typeface="Arial" pitchFamily="34" charset="0"/>
+                <a:ea typeface="Arial" pitchFamily="34" charset="-122"/>
+                <a:cs typeface="Arial" pitchFamily="34" charset="-120"/>
+              </a:rPr>
+              <a:t>5</a:t>
+            </a:r>
+            <a:endParaRPr lang="en-US" sz="1600" dirty="0"/>
+          </a:p>
+        </p:txBody>
+      </p:sp>
+      <p:sp>
+        <p:nvSpPr>
+          <p:cNvPr id="11" name="Text 8"/>
+          <p:cNvSpPr/>
+          <p:nvPr/>
+        </p:nvSpPr>
+        <p:spPr>
+          <a:xfrm>
+            <a:off x="1234440" y="1280160"/>
+            <a:ext cx="10424160" cy="640080"/>
+          </a:xfrm>
+          <a:prstGeom prst="rect">
+            <a:avLst/>
+          </a:prstGeom>
+          <a:noFill/>
+          <a:ln/>
+        </p:spPr>
+        <p:txBody>
+          <a:bodyPr wrap="square" rtlCol="0" anchor="ctr"/>
+          <a:lstStyle/>
+          <a:p>
+            <a:pPr indent="0" marL="0">
+              <a:buNone/>
+            </a:pPr>
+            <a:r>
+              <a:rPr lang="en-US" sz="1800" b="1" dirty="0">
+                <a:solidFill>
+                  <a:srgbClr val="1B3A6B"/>
+                </a:solidFill>
+                <a:latin typeface="Arial" pitchFamily="34" charset="0"/>
+                <a:ea typeface="Arial" pitchFamily="34" charset="-122"/>
+                <a:cs typeface="Arial" pitchFamily="34" charset="-120"/>
+              </a:rPr>
+              <a:t>Na plataforma, nome, cores e logotipos aparecem em telas, PDFs, boletos e e-mails a partir de:</a:t>
+            </a:r>
+            <a:endParaRPr lang="en-US" sz="1800" dirty="0"/>
+          </a:p>
+        </p:txBody>
+      </p:sp>
+      <p:sp>
+        <p:nvSpPr>
+          <p:cNvPr id="12" name="Shape 9"/>
+          <p:cNvSpPr/>
+          <p:nvPr/>
+        </p:nvSpPr>
+        <p:spPr>
+          <a:xfrm>
+            <a:off x="548640" y="2057400"/>
+            <a:ext cx="2601468" cy="1463040"/>
+          </a:xfrm>
+          <a:prstGeom prst="roundRect">
+            <a:avLst>
+              <a:gd name="adj" fmla="val 5000"/>
+            </a:avLst>
+          </a:prstGeom>
+          <a:solidFill>
+            <a:srgbClr val="FFFFFF"/>
+          </a:solidFill>
+          <a:ln w="9525">
+            <a:solidFill>
+              <a:srgbClr val="D8E0EC"/>
+            </a:solidFill>
+            <a:prstDash val="solid"/>
+          </a:ln>
+        </p:spPr>
+      </p:sp>
+      <p:sp>
+        <p:nvSpPr>
+          <p:cNvPr id="13" name="Text 10"/>
+          <p:cNvSpPr/>
+          <p:nvPr/>
+        </p:nvSpPr>
+        <p:spPr>
+          <a:xfrm>
+            <a:off x="685800" y="2148840"/>
+            <a:ext cx="365760" cy="365760"/>
+          </a:xfrm>
+          <a:prstGeom prst="rect">
+            <a:avLst/>
+          </a:prstGeom>
+          <a:noFill/>
+          <a:ln/>
+        </p:spPr>
+        <p:txBody>
+          <a:bodyPr wrap="square" rtlCol="0" anchor="ctr"/>
+          <a:lstStyle/>
+          <a:p>
+            <a:pPr indent="0" marL="0">
+              <a:buNone/>
+            </a:pPr>
+            <a:r>
+              <a:rPr lang="en-US" sz="1400" b="1" dirty="0">
+                <a:solidFill>
+                  <a:srgbClr val="F7A23B"/>
+                </a:solidFill>
+                <a:latin typeface="Arial" pitchFamily="34" charset="0"/>
+                <a:ea typeface="Arial" pitchFamily="34" charset="-122"/>
+                <a:cs typeface="Arial" pitchFamily="34" charset="-120"/>
+              </a:rPr>
+              <a:t>A</a:t>
+            </a:r>
+            <a:endParaRPr lang="en-US" sz="1400" dirty="0"/>
+          </a:p>
+        </p:txBody>
+      </p:sp>
+      <p:sp>
+        <p:nvSpPr>
+          <p:cNvPr id="14" name="Text 11"/>
+          <p:cNvSpPr/>
+          <p:nvPr/>
+        </p:nvSpPr>
+        <p:spPr>
+          <a:xfrm>
+            <a:off x="685800" y="2514600"/>
+            <a:ext cx="2327148" cy="914400"/>
+          </a:xfrm>
+          <a:prstGeom prst="rect">
+            <a:avLst/>
+          </a:prstGeom>
+          <a:noFill/>
+          <a:ln/>
+        </p:spPr>
+        <p:txBody>
+          <a:bodyPr wrap="square" rtlCol="0" anchor="t"/>
+          <a:lstStyle/>
+          <a:p>
+            <a:pPr indent="0" marL="0">
+              <a:buNone/>
+            </a:pPr>
+            <a:r>
+              <a:rPr lang="en-US" sz="1500" dirty="0">
+                <a:solidFill>
+                  <a:srgbClr val="1F2937"/>
+                </a:solidFill>
+                <a:latin typeface="Arial" pitchFamily="34" charset="0"/>
+                <a:ea typeface="Arial" pitchFamily="34" charset="-122"/>
+                <a:cs typeface="Arial" pitchFamily="34" charset="-120"/>
+              </a:rPr>
+              <a:t>Configurações → Identidade Visual</a:t>
+            </a:r>
+            <a:endParaRPr lang="en-US" sz="1500" dirty="0"/>
+          </a:p>
+        </p:txBody>
+      </p:sp>
+      <p:sp>
+        <p:nvSpPr>
+          <p:cNvPr id="15" name="Shape 12"/>
+          <p:cNvSpPr/>
+          <p:nvPr/>
+        </p:nvSpPr>
+        <p:spPr>
+          <a:xfrm>
+            <a:off x="3378708" y="2057400"/>
+            <a:ext cx="2601468" cy="1463040"/>
+          </a:xfrm>
+          <a:prstGeom prst="roundRect">
+            <a:avLst>
+              <a:gd name="adj" fmla="val 5000"/>
+            </a:avLst>
+          </a:prstGeom>
+          <a:solidFill>
+            <a:srgbClr val="FFFFFF"/>
+          </a:solidFill>
+          <a:ln w="9525">
+            <a:solidFill>
+              <a:srgbClr val="D8E0EC"/>
+            </a:solidFill>
+            <a:prstDash val="solid"/>
+          </a:ln>
+        </p:spPr>
+      </p:sp>
+      <p:sp>
+        <p:nvSpPr>
+          <p:cNvPr id="16" name="Text 13"/>
+          <p:cNvSpPr/>
+          <p:nvPr/>
+        </p:nvSpPr>
+        <p:spPr>
+          <a:xfrm>
+            <a:off x="3515868" y="2148840"/>
+            <a:ext cx="365760" cy="365760"/>
+          </a:xfrm>
+          <a:prstGeom prst="rect">
+            <a:avLst/>
+          </a:prstGeom>
+          <a:noFill/>
+          <a:ln/>
+        </p:spPr>
+        <p:txBody>
+          <a:bodyPr wrap="square" rtlCol="0" anchor="ctr"/>
+          <a:lstStyle/>
+          <a:p>
+            <a:pPr indent="0" marL="0">
+              <a:buNone/>
+            </a:pPr>
+            <a:r>
+              <a:rPr lang="en-US" sz="1400" b="1" dirty="0">
+                <a:solidFill>
+                  <a:srgbClr val="F7A23B"/>
+                </a:solidFill>
+                <a:latin typeface="Arial" pitchFamily="34" charset="0"/>
+                <a:ea typeface="Arial" pitchFamily="34" charset="-122"/>
+                <a:cs typeface="Arial" pitchFamily="34" charset="-120"/>
+              </a:rPr>
+              <a:t>B</a:t>
+            </a:r>
+            <a:endParaRPr lang="en-US" sz="1400" dirty="0"/>
+          </a:p>
+        </p:txBody>
+      </p:sp>
+      <p:sp>
+        <p:nvSpPr>
+          <p:cNvPr id="17" name="Text 14"/>
+          <p:cNvSpPr/>
+          <p:nvPr/>
+        </p:nvSpPr>
+        <p:spPr>
+          <a:xfrm>
+            <a:off x="3515868" y="2514600"/>
+            <a:ext cx="2327148" cy="914400"/>
+          </a:xfrm>
+          <a:prstGeom prst="rect">
+            <a:avLst/>
+          </a:prstGeom>
+          <a:noFill/>
+          <a:ln/>
+        </p:spPr>
+        <p:txBody>
+          <a:bodyPr wrap="square" rtlCol="0" anchor="t"/>
+          <a:lstStyle/>
+          <a:p>
+            <a:pPr indent="0" marL="0">
+              <a:buNone/>
+            </a:pPr>
+            <a:r>
+              <a:rPr lang="en-US" sz="1500" dirty="0">
+                <a:solidFill>
+                  <a:srgbClr val="1F2937"/>
+                </a:solidFill>
+                <a:latin typeface="Arial" pitchFamily="34" charset="0"/>
+                <a:ea typeface="Arial" pitchFamily="34" charset="-122"/>
+                <a:cs typeface="Arial" pitchFamily="34" charset="-120"/>
+              </a:rPr>
+              <a:t>o código-fonte</a:t>
+            </a:r>
+            <a:endParaRPr lang="en-US" sz="1500" dirty="0"/>
+          </a:p>
+        </p:txBody>
+      </p:sp>
+      <p:sp>
+        <p:nvSpPr>
+          <p:cNvPr id="18" name="Shape 15"/>
+          <p:cNvSpPr/>
+          <p:nvPr/>
+        </p:nvSpPr>
+        <p:spPr>
+          <a:xfrm>
+            <a:off x="6208776" y="2057400"/>
+            <a:ext cx="2601468" cy="1463040"/>
+          </a:xfrm>
+          <a:prstGeom prst="roundRect">
+            <a:avLst>
+              <a:gd name="adj" fmla="val 5000"/>
+            </a:avLst>
+          </a:prstGeom>
+          <a:solidFill>
+            <a:srgbClr val="FFFFFF"/>
+          </a:solidFill>
+          <a:ln w="9525">
+            <a:solidFill>
+              <a:srgbClr val="D8E0EC"/>
+            </a:solidFill>
+            <a:prstDash val="solid"/>
+          </a:ln>
+        </p:spPr>
+      </p:sp>
+      <p:sp>
+        <p:nvSpPr>
+          <p:cNvPr id="19" name="Text 16"/>
+          <p:cNvSpPr/>
+          <p:nvPr/>
+        </p:nvSpPr>
+        <p:spPr>
+          <a:xfrm>
+            <a:off x="6345936" y="2148840"/>
+            <a:ext cx="365760" cy="365760"/>
+          </a:xfrm>
+          <a:prstGeom prst="rect">
+            <a:avLst/>
+          </a:prstGeom>
+          <a:noFill/>
+          <a:ln/>
+        </p:spPr>
+        <p:txBody>
+          <a:bodyPr wrap="square" rtlCol="0" anchor="ctr"/>
+          <a:lstStyle/>
+          <a:p>
+            <a:pPr indent="0" marL="0">
+              <a:buNone/>
+            </a:pPr>
+            <a:r>
+              <a:rPr lang="en-US" sz="1400" b="1" dirty="0">
+                <a:solidFill>
+                  <a:srgbClr val="F7A23B"/>
+                </a:solidFill>
+                <a:latin typeface="Arial" pitchFamily="34" charset="0"/>
+                <a:ea typeface="Arial" pitchFamily="34" charset="-122"/>
+                <a:cs typeface="Arial" pitchFamily="34" charset="-120"/>
+              </a:rPr>
+              <a:t>C</a:t>
+            </a:r>
+            <a:endParaRPr lang="en-US" sz="1400" dirty="0"/>
+          </a:p>
+        </p:txBody>
+      </p:sp>
+      <p:sp>
+        <p:nvSpPr>
+          <p:cNvPr id="20" name="Text 17"/>
+          <p:cNvSpPr/>
+          <p:nvPr/>
+        </p:nvSpPr>
+        <p:spPr>
+          <a:xfrm>
+            <a:off x="6345936" y="2514600"/>
+            <a:ext cx="2327148" cy="914400"/>
+          </a:xfrm>
+          <a:prstGeom prst="rect">
+            <a:avLst/>
+          </a:prstGeom>
+          <a:noFill/>
+          <a:ln/>
+        </p:spPr>
+        <p:txBody>
+          <a:bodyPr wrap="square" rtlCol="0" anchor="t"/>
+          <a:lstStyle/>
+          <a:p>
+            <a:pPr indent="0" marL="0">
+              <a:buNone/>
+            </a:pPr>
+            <a:r>
+              <a:rPr lang="en-US" sz="1500" dirty="0">
+                <a:solidFill>
+                  <a:srgbClr val="1F2937"/>
+                </a:solidFill>
+                <a:latin typeface="Arial" pitchFamily="34" charset="0"/>
+                <a:ea typeface="Arial" pitchFamily="34" charset="-122"/>
+                <a:cs typeface="Arial" pitchFamily="34" charset="-120"/>
+              </a:rPr>
+              <a:t>cada usuário</a:t>
+            </a:r>
+            <a:endParaRPr lang="en-US" sz="1500" dirty="0"/>
+          </a:p>
+        </p:txBody>
+      </p:sp>
+      <p:sp>
+        <p:nvSpPr>
+          <p:cNvPr id="21" name="Shape 18"/>
+          <p:cNvSpPr/>
+          <p:nvPr/>
+        </p:nvSpPr>
+        <p:spPr>
+          <a:xfrm>
+            <a:off x="9038844" y="2057400"/>
+            <a:ext cx="2601468" cy="1463040"/>
+          </a:xfrm>
+          <a:prstGeom prst="roundRect">
+            <a:avLst>
+              <a:gd name="adj" fmla="val 5000"/>
+            </a:avLst>
+          </a:prstGeom>
+          <a:solidFill>
+            <a:srgbClr val="FFFFFF"/>
+          </a:solidFill>
+          <a:ln w="9525">
+            <a:solidFill>
+              <a:srgbClr val="D8E0EC"/>
+            </a:solidFill>
+            <a:prstDash val="solid"/>
+          </a:ln>
+        </p:spPr>
+      </p:sp>
+      <p:sp>
+        <p:nvSpPr>
+          <p:cNvPr id="22" name="Text 19"/>
+          <p:cNvSpPr/>
+          <p:nvPr/>
+        </p:nvSpPr>
+        <p:spPr>
+          <a:xfrm>
+            <a:off x="9176004" y="2148840"/>
+            <a:ext cx="365760" cy="365760"/>
+          </a:xfrm>
+          <a:prstGeom prst="rect">
+            <a:avLst/>
+          </a:prstGeom>
+          <a:noFill/>
+          <a:ln/>
+        </p:spPr>
+        <p:txBody>
+          <a:bodyPr wrap="square" rtlCol="0" anchor="ctr"/>
+          <a:lstStyle/>
+          <a:p>
+            <a:pPr indent="0" marL="0">
+              <a:buNone/>
+            </a:pPr>
+            <a:r>
+              <a:rPr lang="en-US" sz="1400" b="1" dirty="0">
+                <a:solidFill>
+                  <a:srgbClr val="F7A23B"/>
+                </a:solidFill>
+                <a:latin typeface="Arial" pitchFamily="34" charset="0"/>
+                <a:ea typeface="Arial" pitchFamily="34" charset="-122"/>
+                <a:cs typeface="Arial" pitchFamily="34" charset="-120"/>
+              </a:rPr>
+              <a:t>D</a:t>
+            </a:r>
+            <a:endParaRPr lang="en-US" sz="1400" dirty="0"/>
+          </a:p>
+        </p:txBody>
+      </p:sp>
+      <p:sp>
+        <p:nvSpPr>
+          <p:cNvPr id="23" name="Text 20"/>
+          <p:cNvSpPr/>
+          <p:nvPr/>
+        </p:nvSpPr>
+        <p:spPr>
+          <a:xfrm>
+            <a:off x="9176004" y="2514600"/>
+            <a:ext cx="2327148" cy="914400"/>
+          </a:xfrm>
+          <a:prstGeom prst="rect">
+            <a:avLst/>
+          </a:prstGeom>
+          <a:noFill/>
+          <a:ln/>
+        </p:spPr>
+        <p:txBody>
+          <a:bodyPr wrap="square" rtlCol="0" anchor="t"/>
+          <a:lstStyle/>
+          <a:p>
+            <a:pPr indent="0" marL="0">
+              <a:buNone/>
+            </a:pPr>
+            <a:r>
+              <a:rPr lang="en-US" sz="1500" dirty="0">
+                <a:solidFill>
+                  <a:srgbClr val="1F2937"/>
+                </a:solidFill>
+                <a:latin typeface="Arial" pitchFamily="34" charset="0"/>
+                <a:ea typeface="Arial" pitchFamily="34" charset="-122"/>
+                <a:cs typeface="Arial" pitchFamily="34" charset="-120"/>
+              </a:rPr>
+              <a:t>a distribuidora</a:t>
+            </a:r>
+            <a:endParaRPr lang="en-US" sz="1500" dirty="0"/>
+          </a:p>
+        </p:txBody>
+      </p:sp>
+      <p:sp>
+        <p:nvSpPr>
+          <p:cNvPr id="24" name="Shape 21"/>
+          <p:cNvSpPr/>
+          <p:nvPr/>
+        </p:nvSpPr>
+        <p:spPr>
+          <a:xfrm>
+            <a:off x="548640" y="3840480"/>
+            <a:ext cx="502920" cy="502920"/>
+          </a:xfrm>
+          <a:prstGeom prst="ellipse">
+            <a:avLst/>
+          </a:prstGeom>
+          <a:solidFill>
+            <a:srgbClr val="1B3A6B"/>
+          </a:solidFill>
+          <a:ln/>
+        </p:spPr>
+      </p:sp>
+      <p:sp>
+        <p:nvSpPr>
+          <p:cNvPr id="25" name="Text 22"/>
+          <p:cNvSpPr/>
+          <p:nvPr/>
+        </p:nvSpPr>
+        <p:spPr>
+          <a:xfrm>
+            <a:off x="548640" y="3840480"/>
+            <a:ext cx="502920" cy="502920"/>
+          </a:xfrm>
+          <a:prstGeom prst="rect">
+            <a:avLst/>
+          </a:prstGeom>
+          <a:noFill/>
+          <a:ln/>
+        </p:spPr>
+        <p:txBody>
+          <a:bodyPr wrap="square" rtlCol="0" anchor="ctr"/>
+          <a:lstStyle/>
+          <a:p>
+            <a:pPr algn="ctr" indent="0" marL="0">
+              <a:buNone/>
+            </a:pPr>
+            <a:r>
+              <a:rPr lang="en-US" sz="1600" b="1" dirty="0">
+                <a:solidFill>
+                  <a:srgbClr val="FFFFFF"/>
+                </a:solidFill>
+                <a:latin typeface="Arial" pitchFamily="34" charset="0"/>
+                <a:ea typeface="Arial" pitchFamily="34" charset="-122"/>
+                <a:cs typeface="Arial" pitchFamily="34" charset="-120"/>
+              </a:rPr>
+              <a:t>6</a:t>
+            </a:r>
+            <a:endParaRPr lang="en-US" sz="1600" dirty="0"/>
+          </a:p>
+        </p:txBody>
+      </p:sp>
+      <p:sp>
+        <p:nvSpPr>
+          <p:cNvPr id="26" name="Text 23"/>
+          <p:cNvSpPr/>
+          <p:nvPr/>
+        </p:nvSpPr>
+        <p:spPr>
+          <a:xfrm>
+            <a:off x="1234440" y="3794760"/>
+            <a:ext cx="10424160" cy="640080"/>
+          </a:xfrm>
+          <a:prstGeom prst="rect">
+            <a:avLst/>
+          </a:prstGeom>
+          <a:noFill/>
+          <a:ln/>
+        </p:spPr>
+        <p:txBody>
+          <a:bodyPr wrap="square" rtlCol="0" anchor="ctr"/>
+          <a:lstStyle/>
+          <a:p>
+            <a:pPr indent="0" marL="0">
+              <a:buNone/>
+            </a:pPr>
+            <a:r>
+              <a:rPr lang="en-US" sz="1800" b="1" dirty="0">
+                <a:solidFill>
+                  <a:srgbClr val="1B3A6B"/>
+                </a:solidFill>
+                <a:latin typeface="Arial" pitchFamily="34" charset="0"/>
+                <a:ea typeface="Arial" pitchFamily="34" charset="-122"/>
+                <a:cs typeface="Arial" pitchFamily="34" charset="-120"/>
+              </a:rPr>
+              <a:t>O plano de negócio em uma página deve ter, no mínimo:</a:t>
+            </a:r>
+            <a:endParaRPr lang="en-US" sz="1800" dirty="0"/>
+          </a:p>
+        </p:txBody>
+      </p:sp>
+      <p:sp>
+        <p:nvSpPr>
+          <p:cNvPr id="27" name="Shape 24"/>
+          <p:cNvSpPr/>
+          <p:nvPr/>
+        </p:nvSpPr>
+        <p:spPr>
+          <a:xfrm>
+            <a:off x="548640" y="4572000"/>
+            <a:ext cx="2601468" cy="1463040"/>
+          </a:xfrm>
+          <a:prstGeom prst="roundRect">
+            <a:avLst>
+              <a:gd name="adj" fmla="val 5000"/>
+            </a:avLst>
+          </a:prstGeom>
+          <a:solidFill>
+            <a:srgbClr val="FFFFFF"/>
+          </a:solidFill>
+          <a:ln w="9525">
+            <a:solidFill>
+              <a:srgbClr val="D8E0EC"/>
+            </a:solidFill>
+            <a:prstDash val="solid"/>
+          </a:ln>
+        </p:spPr>
+      </p:sp>
+      <p:sp>
+        <p:nvSpPr>
+          <p:cNvPr id="28" name="Text 25"/>
+          <p:cNvSpPr/>
+          <p:nvPr/>
+        </p:nvSpPr>
+        <p:spPr>
+          <a:xfrm>
+            <a:off x="685800" y="4663440"/>
+            <a:ext cx="365760" cy="365760"/>
+          </a:xfrm>
+          <a:prstGeom prst="rect">
+            <a:avLst/>
+          </a:prstGeom>
+          <a:noFill/>
+          <a:ln/>
+        </p:spPr>
+        <p:txBody>
+          <a:bodyPr wrap="square" rtlCol="0" anchor="ctr"/>
+          <a:lstStyle/>
+          <a:p>
+            <a:pPr indent="0" marL="0">
+              <a:buNone/>
+            </a:pPr>
+            <a:r>
+              <a:rPr lang="en-US" sz="1400" b="1" dirty="0">
+                <a:solidFill>
+                  <a:srgbClr val="F7A23B"/>
+                </a:solidFill>
+                <a:latin typeface="Arial" pitchFamily="34" charset="0"/>
+                <a:ea typeface="Arial" pitchFamily="34" charset="-122"/>
+                <a:cs typeface="Arial" pitchFamily="34" charset="-120"/>
+              </a:rPr>
+              <a:t>A</a:t>
+            </a:r>
+            <a:endParaRPr lang="en-US" sz="1400" dirty="0"/>
+          </a:p>
+        </p:txBody>
+      </p:sp>
+      <p:sp>
+        <p:nvSpPr>
+          <p:cNvPr id="29" name="Text 26"/>
+          <p:cNvSpPr/>
+          <p:nvPr/>
+        </p:nvSpPr>
+        <p:spPr>
+          <a:xfrm>
+            <a:off x="685800" y="5029200"/>
+            <a:ext cx="2327148" cy="914400"/>
+          </a:xfrm>
+          <a:prstGeom prst="rect">
+            <a:avLst/>
+          </a:prstGeom>
+          <a:noFill/>
+          <a:ln/>
+        </p:spPr>
+        <p:txBody>
+          <a:bodyPr wrap="square" rtlCol="0" anchor="t"/>
+          <a:lstStyle/>
+          <a:p>
+            <a:pPr indent="0" marL="0">
+              <a:buNone/>
+            </a:pPr>
+            <a:r>
+              <a:rPr lang="en-US" sz="1500" dirty="0">
+                <a:solidFill>
+                  <a:srgbClr val="1F2937"/>
+                </a:solidFill>
+                <a:latin typeface="Arial" pitchFamily="34" charset="0"/>
+                <a:ea typeface="Arial" pitchFamily="34" charset="-122"/>
+                <a:cs typeface="Arial" pitchFamily="34" charset="-120"/>
+              </a:rPr>
+              <a:t>modelo, mercado, unit economics, metas, equipe, investimento e riscos</a:t>
+            </a:r>
+            <a:endParaRPr lang="en-US" sz="1500" dirty="0"/>
+          </a:p>
+        </p:txBody>
+      </p:sp>
+      <p:sp>
+        <p:nvSpPr>
+          <p:cNvPr id="30" name="Shape 27"/>
+          <p:cNvSpPr/>
+          <p:nvPr/>
+        </p:nvSpPr>
+        <p:spPr>
+          <a:xfrm>
+            <a:off x="3378708" y="4572000"/>
+            <a:ext cx="2601468" cy="1463040"/>
+          </a:xfrm>
+          <a:prstGeom prst="roundRect">
+            <a:avLst>
+              <a:gd name="adj" fmla="val 5000"/>
+            </a:avLst>
+          </a:prstGeom>
+          <a:solidFill>
+            <a:srgbClr val="FFFFFF"/>
+          </a:solidFill>
+          <a:ln w="9525">
+            <a:solidFill>
+              <a:srgbClr val="D8E0EC"/>
+            </a:solidFill>
+            <a:prstDash val="solid"/>
+          </a:ln>
+        </p:spPr>
+      </p:sp>
+      <p:sp>
+        <p:nvSpPr>
+          <p:cNvPr id="31" name="Text 28"/>
+          <p:cNvSpPr/>
+          <p:nvPr/>
+        </p:nvSpPr>
+        <p:spPr>
+          <a:xfrm>
+            <a:off x="3515868" y="4663440"/>
+            <a:ext cx="365760" cy="365760"/>
+          </a:xfrm>
+          <a:prstGeom prst="rect">
+            <a:avLst/>
+          </a:prstGeom>
+          <a:noFill/>
+          <a:ln/>
+        </p:spPr>
+        <p:txBody>
+          <a:bodyPr wrap="square" rtlCol="0" anchor="ctr"/>
+          <a:lstStyle/>
+          <a:p>
+            <a:pPr indent="0" marL="0">
+              <a:buNone/>
+            </a:pPr>
+            <a:r>
+              <a:rPr lang="en-US" sz="1400" b="1" dirty="0">
+                <a:solidFill>
+                  <a:srgbClr val="F7A23B"/>
+                </a:solidFill>
+                <a:latin typeface="Arial" pitchFamily="34" charset="0"/>
+                <a:ea typeface="Arial" pitchFamily="34" charset="-122"/>
+                <a:cs typeface="Arial" pitchFamily="34" charset="-120"/>
+              </a:rPr>
+              <a:t>B</a:t>
+            </a:r>
+            <a:endParaRPr lang="en-US" sz="1400" dirty="0"/>
+          </a:p>
+        </p:txBody>
+      </p:sp>
+      <p:sp>
+        <p:nvSpPr>
+          <p:cNvPr id="32" name="Text 29"/>
+          <p:cNvSpPr/>
+          <p:nvPr/>
+        </p:nvSpPr>
+        <p:spPr>
+          <a:xfrm>
+            <a:off x="3515868" y="5029200"/>
+            <a:ext cx="2327148" cy="914400"/>
+          </a:xfrm>
+          <a:prstGeom prst="rect">
+            <a:avLst/>
+          </a:prstGeom>
+          <a:noFill/>
+          <a:ln/>
+        </p:spPr>
+        <p:txBody>
+          <a:bodyPr wrap="square" rtlCol="0" anchor="t"/>
+          <a:lstStyle/>
+          <a:p>
+            <a:pPr indent="0" marL="0">
+              <a:buNone/>
+            </a:pPr>
+            <a:r>
+              <a:rPr lang="en-US" sz="1500" dirty="0">
+                <a:solidFill>
+                  <a:srgbClr val="1F2937"/>
+                </a:solidFill>
+                <a:latin typeface="Arial" pitchFamily="34" charset="0"/>
+                <a:ea typeface="Arial" pitchFamily="34" charset="-122"/>
+                <a:cs typeface="Arial" pitchFamily="34" charset="-120"/>
+              </a:rPr>
+              <a:t>só o logotipo</a:t>
+            </a:r>
+            <a:endParaRPr lang="en-US" sz="1500" dirty="0"/>
+          </a:p>
+        </p:txBody>
+      </p:sp>
+      <p:sp>
+        <p:nvSpPr>
+          <p:cNvPr id="33" name="Shape 30"/>
+          <p:cNvSpPr/>
+          <p:nvPr/>
+        </p:nvSpPr>
+        <p:spPr>
+          <a:xfrm>
+            <a:off x="6208776" y="4572000"/>
+            <a:ext cx="2601468" cy="1463040"/>
+          </a:xfrm>
+          <a:prstGeom prst="roundRect">
+            <a:avLst>
+              <a:gd name="adj" fmla="val 5000"/>
+            </a:avLst>
+          </a:prstGeom>
+          <a:solidFill>
+            <a:srgbClr val="FFFFFF"/>
+          </a:solidFill>
+          <a:ln w="9525">
+            <a:solidFill>
+              <a:srgbClr val="D8E0EC"/>
+            </a:solidFill>
+            <a:prstDash val="solid"/>
+          </a:ln>
+        </p:spPr>
+      </p:sp>
+      <p:sp>
+        <p:nvSpPr>
+          <p:cNvPr id="34" name="Text 31"/>
+          <p:cNvSpPr/>
+          <p:nvPr/>
+        </p:nvSpPr>
+        <p:spPr>
+          <a:xfrm>
+            <a:off x="6345936" y="4663440"/>
+            <a:ext cx="365760" cy="365760"/>
+          </a:xfrm>
+          <a:prstGeom prst="rect">
+            <a:avLst/>
+          </a:prstGeom>
+          <a:noFill/>
+          <a:ln/>
+        </p:spPr>
+        <p:txBody>
+          <a:bodyPr wrap="square" rtlCol="0" anchor="ctr"/>
+          <a:lstStyle/>
+          <a:p>
+            <a:pPr indent="0" marL="0">
+              <a:buNone/>
+            </a:pPr>
+            <a:r>
+              <a:rPr lang="en-US" sz="1400" b="1" dirty="0">
+                <a:solidFill>
+                  <a:srgbClr val="F7A23B"/>
+                </a:solidFill>
+                <a:latin typeface="Arial" pitchFamily="34" charset="0"/>
+                <a:ea typeface="Arial" pitchFamily="34" charset="-122"/>
+                <a:cs typeface="Arial" pitchFamily="34" charset="-120"/>
+              </a:rPr>
+              <a:t>C</a:t>
+            </a:r>
+            <a:endParaRPr lang="en-US" sz="1400" dirty="0"/>
+          </a:p>
+        </p:txBody>
+      </p:sp>
+      <p:sp>
+        <p:nvSpPr>
+          <p:cNvPr id="35" name="Text 32"/>
+          <p:cNvSpPr/>
+          <p:nvPr/>
+        </p:nvSpPr>
+        <p:spPr>
+          <a:xfrm>
+            <a:off x="6345936" y="5029200"/>
+            <a:ext cx="2327148" cy="914400"/>
+          </a:xfrm>
+          <a:prstGeom prst="rect">
+            <a:avLst/>
+          </a:prstGeom>
+          <a:noFill/>
+          <a:ln/>
+        </p:spPr>
+        <p:txBody>
+          <a:bodyPr wrap="square" rtlCol="0" anchor="t"/>
+          <a:lstStyle/>
+          <a:p>
+            <a:pPr indent="0" marL="0">
+              <a:buNone/>
+            </a:pPr>
+            <a:r>
+              <a:rPr lang="en-US" sz="1500" dirty="0">
+                <a:solidFill>
+                  <a:srgbClr val="1F2937"/>
+                </a:solidFill>
+                <a:latin typeface="Arial" pitchFamily="34" charset="0"/>
+                <a:ea typeface="Arial" pitchFamily="34" charset="-122"/>
+                <a:cs typeface="Arial" pitchFamily="34" charset="-120"/>
+              </a:rPr>
+              <a:t>só as metas</a:t>
+            </a:r>
+            <a:endParaRPr lang="en-US" sz="1500" dirty="0"/>
+          </a:p>
+        </p:txBody>
+      </p:sp>
+      <p:sp>
+        <p:nvSpPr>
+          <p:cNvPr id="36" name="Shape 33"/>
+          <p:cNvSpPr/>
+          <p:nvPr/>
+        </p:nvSpPr>
+        <p:spPr>
+          <a:xfrm>
+            <a:off x="9038844" y="4572000"/>
+            <a:ext cx="2601468" cy="1463040"/>
+          </a:xfrm>
+          <a:prstGeom prst="roundRect">
+            <a:avLst>
+              <a:gd name="adj" fmla="val 5000"/>
+            </a:avLst>
+          </a:prstGeom>
+          <a:solidFill>
+            <a:srgbClr val="FFFFFF"/>
+          </a:solidFill>
+          <a:ln w="9525">
+            <a:solidFill>
+              <a:srgbClr val="D8E0EC"/>
+            </a:solidFill>
+            <a:prstDash val="solid"/>
+          </a:ln>
+        </p:spPr>
+      </p:sp>
+      <p:sp>
+        <p:nvSpPr>
+          <p:cNvPr id="37" name="Text 34"/>
+          <p:cNvSpPr/>
+          <p:nvPr/>
+        </p:nvSpPr>
+        <p:spPr>
+          <a:xfrm>
+            <a:off x="9176004" y="4663440"/>
+            <a:ext cx="365760" cy="365760"/>
+          </a:xfrm>
+          <a:prstGeom prst="rect">
+            <a:avLst/>
+          </a:prstGeom>
+          <a:noFill/>
+          <a:ln/>
+        </p:spPr>
+        <p:txBody>
+          <a:bodyPr wrap="square" rtlCol="0" anchor="ctr"/>
+          <a:lstStyle/>
+          <a:p>
+            <a:pPr indent="0" marL="0">
+              <a:buNone/>
+            </a:pPr>
+            <a:r>
+              <a:rPr lang="en-US" sz="1400" b="1" dirty="0">
+                <a:solidFill>
+                  <a:srgbClr val="F7A23B"/>
+                </a:solidFill>
+                <a:latin typeface="Arial" pitchFamily="34" charset="0"/>
+                <a:ea typeface="Arial" pitchFamily="34" charset="-122"/>
+                <a:cs typeface="Arial" pitchFamily="34" charset="-120"/>
+              </a:rPr>
+              <a:t>D</a:t>
+            </a:r>
+            <a:endParaRPr lang="en-US" sz="1400" dirty="0"/>
+          </a:p>
+        </p:txBody>
+      </p:sp>
+      <p:sp>
+        <p:nvSpPr>
+          <p:cNvPr id="38" name="Text 35"/>
+          <p:cNvSpPr/>
+          <p:nvPr/>
+        </p:nvSpPr>
+        <p:spPr>
+          <a:xfrm>
+            <a:off x="9176004" y="5029200"/>
+            <a:ext cx="2327148" cy="914400"/>
+          </a:xfrm>
+          <a:prstGeom prst="rect">
+            <a:avLst/>
+          </a:prstGeom>
+          <a:noFill/>
+          <a:ln/>
+        </p:spPr>
+        <p:txBody>
+          <a:bodyPr wrap="square" rtlCol="0" anchor="t"/>
+          <a:lstStyle/>
+          <a:p>
+            <a:pPr indent="0" marL="0">
+              <a:buNone/>
+            </a:pPr>
+            <a:r>
+              <a:rPr lang="en-US" sz="1500" dirty="0">
+                <a:solidFill>
+                  <a:srgbClr val="1F2937"/>
+                </a:solidFill>
+                <a:latin typeface="Arial" pitchFamily="34" charset="0"/>
+                <a:ea typeface="Arial" pitchFamily="34" charset="-122"/>
+                <a:cs typeface="Arial" pitchFamily="34" charset="-120"/>
+              </a:rPr>
+              <a:t>só o preço</a:t>
+            </a:r>
+            <a:endParaRPr lang="en-US" sz="1500" dirty="0"/>
+          </a:p>
+        </p:txBody>
+      </p:sp>
+      <p:sp>
+        <p:nvSpPr>
+          <p:cNvPr id="25" name="Slide Number Placeholder 0"/>
+          <p:cNvSpPr>
+            <a:spLocks noGrp="1"/>
+          </p:cNvSpPr>
+          <p:nvPr>
+            <p:ph type="sldNum" sz="quarter" idx="4294967295"/>
+          </p:nvPr>
+        </p:nvSpPr>
+        <p:spPr>
+          <a:xfrm>
+            <a:off x="11292840" y="6556248"/>
+            <a:ext cx="548640" cy="256032"/>
+          </a:xfrm>
+          <a:prstGeom prst="rect">
+            <a:avLst/>
+          </a:prstGeom>
+          <a:extLst>
+            <a:ext uri="{C572A759-6A51-4108-AA02-DFA0A04FC94B}">
+              <ma14:wrappingTextBoxFlag xmlns:ma14="http://schemas.microsoft.com/office/mac/drawingml/2011/main" val="0"/>
+            </a:ext>
+          </a:extLst>
+        </p:spPr>
+        <p:txBody>
+          <a:bodyPr/>
+          <a:lstStyle>
+            <a:lvl1pPr>
+              <a:defRPr sz="900">
+                <a:solidFill>
+                  <a:srgbClr val="1B3A6B"/>
+                </a:solidFill>
+                <a:latin typeface="Arial"/>
+                <a:ea typeface="Arial"/>
+                <a:cs typeface="Arial"/>
+              </a:defRPr>
+            </a:lvl1pPr>
+          </a:lstStyle>
+          <a:p>
+            <a:pPr algn="r"/>
+            <a:fld id="{F7021451-1387-4CA6-816F-3879F97B5CBC}" type="slidenum">
+              <a:rPr b="1" lang="en-US"/>
+              <a:t>29</a:t>
             </a:fld>
             <a:endParaRPr lang="en-US"/>
           </a:p>
@@ -16526,7 +20886,7 @@
         <p:spPr>
           <a:xfrm>
             <a:off x="822960" y="2286000"/>
-            <a:ext cx="4860036" cy="3749040"/>
+            <a:ext cx="4860036" cy="2286000"/>
           </a:xfrm>
           <a:prstGeom prst="rect">
             <a:avLst/>
@@ -16628,6 +20988,65 @@
       <p:sp>
         <p:nvSpPr>
           <p:cNvPr id="13" name="Shape 10"/>
+          <p:cNvSpPr/>
+          <p:nvPr/>
+        </p:nvSpPr>
+        <p:spPr>
+          <a:xfrm>
+            <a:off x="822960" y="4663440"/>
+            <a:ext cx="4860036" cy="18288"/>
+          </a:xfrm>
+          <a:prstGeom prst="rect">
+            <a:avLst/>
+          </a:prstGeom>
+          <a:solidFill>
+            <a:srgbClr val="D8E0EC"/>
+          </a:solidFill>
+          <a:ln/>
+        </p:spPr>
+      </p:sp>
+      <p:sp>
+        <p:nvSpPr>
+          <p:cNvPr id="14" name="Text 11"/>
+          <p:cNvSpPr/>
+          <p:nvPr/>
+        </p:nvSpPr>
+        <p:spPr>
+          <a:xfrm>
+            <a:off x="822960" y="4754880"/>
+            <a:ext cx="4860036" cy="1371600"/>
+          </a:xfrm>
+          <a:prstGeom prst="rect">
+            <a:avLst/>
+          </a:prstGeom>
+          <a:noFill/>
+          <a:ln/>
+        </p:spPr>
+        <p:txBody>
+          <a:bodyPr wrap="square" rtlCol="0" anchor="t"/>
+          <a:lstStyle/>
+          <a:p>
+            <a:pPr indent="0" marL="0">
+              <a:buNone/>
+            </a:pPr>
+            <a:r>
+              <a:rPr lang="en-US" sz="1300" i="1" dirty="0">
+                <a:solidFill>
+                  <a:srgbClr val="64748B"/>
+                </a:solidFill>
+                <a:latin typeface="Arial" pitchFamily="34" charset="0"/>
+                <a:ea typeface="Arial" pitchFamily="34" charset="-122"/>
+                <a:cs typeface="Arial" pitchFamily="34" charset="-120"/>
+              </a:rPr>
+              <a:t>O desenho típico tem a gestora, as entidades por público e as usinas. No modelo pesado, cada usina pode ficar numa empresa própria.</a:t>
+            </a:r>
+            <a:endParaRPr lang="en-US" sz="1300" dirty="0"/>
+          </a:p>
+        </p:txBody>
+      </p:sp>
+      <p:sp>
+        <p:nvSpPr>
+          <p:cNvPr id="15" name="Shape 12"/>
           <p:cNvSpPr/>
           <p:nvPr/>
         </p:nvSpPr>
@@ -16661,7 +21080,7 @@
       </p:sp>
       <p:sp>
         <p:nvSpPr>
-          <p:cNvPr id="14" name="Shape 11"/>
+          <p:cNvPr id="16" name="Shape 13"/>
           <p:cNvSpPr/>
           <p:nvPr/>
         </p:nvSpPr>
@@ -16681,7 +21100,7 @@
       </p:sp>
       <p:sp>
         <p:nvSpPr>
-          <p:cNvPr id="15" name="Text 12"/>
+          <p:cNvPr id="17" name="Text 14"/>
           <p:cNvSpPr/>
           <p:nvPr/>
         </p:nvSpPr>
@@ -16722,14 +21141,14 @@
       </p:sp>
       <p:sp>
         <p:nvSpPr>
-          <p:cNvPr id="16" name="Text 13"/>
+          <p:cNvPr id="18" name="Text 15"/>
           <p:cNvSpPr/>
           <p:nvPr/>
         </p:nvSpPr>
         <p:spPr>
           <a:xfrm>
             <a:off x="6505956" y="2286000"/>
-            <a:ext cx="4860036" cy="3749040"/>
+            <a:ext cx="4860036" cy="2286000"/>
           </a:xfrm>
           <a:prstGeom prst="rect">
             <a:avLst/>
@@ -16825,6 +21244,65 @@
               <a:t>tributação adequada a cada atividade</a:t>
             </a:r>
             <a:endParaRPr lang="en-US" sz="1700" dirty="0"/>
+          </a:p>
+        </p:txBody>
+      </p:sp>
+      <p:sp>
+        <p:nvSpPr>
+          <p:cNvPr id="19" name="Shape 16"/>
+          <p:cNvSpPr/>
+          <p:nvPr/>
+        </p:nvSpPr>
+        <p:spPr>
+          <a:xfrm>
+            <a:off x="6505956" y="4663440"/>
+            <a:ext cx="4860036" cy="18288"/>
+          </a:xfrm>
+          <a:prstGeom prst="rect">
+            <a:avLst/>
+          </a:prstGeom>
+          <a:solidFill>
+            <a:srgbClr val="D8E0EC"/>
+          </a:solidFill>
+          <a:ln/>
+        </p:spPr>
+      </p:sp>
+      <p:sp>
+        <p:nvSpPr>
+          <p:cNvPr id="20" name="Text 17"/>
+          <p:cNvSpPr/>
+          <p:nvPr/>
+        </p:nvSpPr>
+        <p:spPr>
+          <a:xfrm>
+            <a:off x="6505956" y="4754880"/>
+            <a:ext cx="4860036" cy="1371600"/>
+          </a:xfrm>
+          <a:prstGeom prst="rect">
+            <a:avLst/>
+          </a:prstGeom>
+          <a:noFill/>
+          <a:ln/>
+        </p:spPr>
+        <p:txBody>
+          <a:bodyPr wrap="square" rtlCol="0" anchor="t"/>
+          <a:lstStyle/>
+          <a:p>
+            <a:pPr indent="0" marL="0">
+              <a:buNone/>
+            </a:pPr>
+            <a:r>
+              <a:rPr lang="en-US" sz="1300" i="1" dirty="0">
+                <a:solidFill>
+                  <a:srgbClr val="64748B"/>
+                </a:solidFill>
+                <a:latin typeface="Arial" pitchFamily="34" charset="0"/>
+                <a:ea typeface="Arial" pitchFamily="34" charset="-122"/>
+                <a:cs typeface="Arial" pitchFamily="34" charset="-120"/>
+              </a:rPr>
+              <a:t>Separar isola riscos e facilita financiamento.</a:t>
+            </a:r>
+            <a:endParaRPr lang="en-US" sz="1300" dirty="0"/>
           </a:p>
         </p:txBody>
       </p:sp>
@@ -16871,6 +21349,1625 @@
             <a:fld id="{F7021451-1387-4CA6-816F-3879F97B5CBC}" type="slidenum">
               <a:rPr b="1" lang="en-US"/>
               <a:t>3</a:t>
+            </a:fld>
+            <a:endParaRPr lang="en-US"/>
+          </a:p>
+        </p:txBody>
+      </p:sp>
+    </p:spTree>
+  </p:cSld>
+  <p:clrMapOvr>
+    <a:masterClrMapping/>
+  </p:clrMapOvr>
+</p:sld>
+</file>
+
+<file path=ppt/slides/slide30.xml><?xml version="1.0" encoding="utf-8"?>
+<p:sld xmlns:a="http://schemas.openxmlformats.org/drawingml/2006/main" xmlns:r="http://schemas.openxmlformats.org/officeDocument/2006/relationships" xmlns:p="http://schemas.openxmlformats.org/presentationml/2006/main">
+  <p:cSld name="Slide 30">
+    <p:bg>
+      <p:bgPr>
+        <a:solidFill>
+          <a:srgbClr val="EEF3FA"/>
+        </a:solidFill>
+      </p:bgPr>
+    </p:bg>
+    <p:spTree>
+      <p:nvGrpSpPr>
+        <p:cNvPr id="1" name=""/>
+        <p:cNvGrpSpPr/>
+        <p:nvPr/>
+      </p:nvGrpSpPr>
+      <p:grpSpPr>
+        <a:xfrm>
+          <a:off x="0" y="0"/>
+          <a:ext cx="0" cy="0"/>
+          <a:chOff x="0" y="0"/>
+          <a:chExt cx="0" cy="0"/>
+        </a:xfrm>
+      </p:grpSpPr>
+      <p:sp>
+        <p:nvSpPr>
+          <p:cNvPr id="2" name="Shape 0"/>
+          <p:cNvSpPr/>
+          <p:nvPr/>
+        </p:nvSpPr>
+        <p:spPr>
+          <a:xfrm>
+            <a:off x="0" y="6510528"/>
+            <a:ext cx="12191695" cy="347472"/>
+          </a:xfrm>
+          <a:prstGeom prst="rect">
+            <a:avLst/>
+          </a:prstGeom>
+          <a:solidFill>
+            <a:srgbClr val="FFFFFF"/>
+          </a:solidFill>
+          <a:ln w="6350">
+            <a:solidFill>
+              <a:srgbClr val="D8E0EC"/>
+            </a:solidFill>
+            <a:prstDash val="solid"/>
+          </a:ln>
+        </p:spPr>
+      </p:sp>
+      <p:pic>
+        <p:nvPicPr>
+          <p:cNvPr id="3" name="Image 0" descr="/www/wwwroot/rexar/gdsolar/docs/curso/slides/assets/logo-gdsolar.png">    </p:cNvPr>
+          <p:cNvPicPr>
+            <a:picLocks noChangeAspect="1"/>
+          </p:cNvPicPr>
+          <p:nvPr/>
+        </p:nvPicPr>
+        <p:blipFill>
+          <a:blip r:embed="rId1"/>
+          <a:stretch>
+            <a:fillRect/>
+          </a:stretch>
+        </p:blipFill>
+        <p:spPr>
+          <a:xfrm>
+            <a:off x="548640" y="6547104"/>
+            <a:ext cx="274320" cy="274320"/>
+          </a:xfrm>
+          <a:prstGeom prst="rect">
+            <a:avLst/>
+          </a:prstGeom>
+        </p:spPr>
+      </p:pic>
+      <p:sp>
+        <p:nvSpPr>
+          <p:cNvPr id="4" name="Text 1"/>
+          <p:cNvSpPr/>
+          <p:nvPr/>
+        </p:nvSpPr>
+        <p:spPr>
+          <a:xfrm>
+            <a:off x="886968" y="6528816"/>
+            <a:ext cx="6400800" cy="310896"/>
+          </a:xfrm>
+          <a:prstGeom prst="rect">
+            <a:avLst/>
+          </a:prstGeom>
+          <a:noFill/>
+          <a:ln/>
+        </p:spPr>
+        <p:txBody>
+          <a:bodyPr wrap="square" rtlCol="0" anchor="ctr"/>
+          <a:lstStyle/>
+          <a:p>
+            <a:pPr indent="0" marL="0">
+              <a:buNone/>
+            </a:pPr>
+            <a:r>
+              <a:rPr lang="en-US" sz="900" b="1" dirty="0">
+                <a:solidFill>
+                  <a:srgbClr val="64748B"/>
+                </a:solidFill>
+                <a:latin typeface="Arial" pitchFamily="34" charset="0"/>
+                <a:ea typeface="Arial" pitchFamily="34" charset="-122"/>
+                <a:cs typeface="Arial" pitchFamily="34" charset="-120"/>
+              </a:rPr>
+              <a:t>GD Solar  ·  Formação em Energia por Assinatura</a:t>
+            </a:r>
+            <a:endParaRPr lang="en-US" sz="900" dirty="0"/>
+          </a:p>
+        </p:txBody>
+      </p:sp>
+      <p:sp>
+        <p:nvSpPr>
+          <p:cNvPr id="5" name="Text 2"/>
+          <p:cNvSpPr/>
+          <p:nvPr/>
+        </p:nvSpPr>
+        <p:spPr>
+          <a:xfrm>
+            <a:off x="7132320" y="6528816"/>
+            <a:ext cx="4023360" cy="310896"/>
+          </a:xfrm>
+          <a:prstGeom prst="rect">
+            <a:avLst/>
+          </a:prstGeom>
+          <a:noFill/>
+          <a:ln/>
+        </p:spPr>
+        <p:txBody>
+          <a:bodyPr wrap="square" rtlCol="0" anchor="ctr"/>
+          <a:lstStyle/>
+          <a:p>
+            <a:pPr algn="r" indent="0" marL="0">
+              <a:buNone/>
+            </a:pPr>
+            <a:r>
+              <a:rPr lang="en-US" sz="900" dirty="0">
+                <a:solidFill>
+                  <a:srgbClr val="64748B"/>
+                </a:solidFill>
+                <a:latin typeface="Arial" pitchFamily="34" charset="0"/>
+                <a:ea typeface="Arial" pitchFamily="34" charset="-122"/>
+                <a:cs typeface="Arial" pitchFamily="34" charset="-120"/>
+              </a:rPr>
+              <a:t>M11 · Teste rápido</a:t>
+            </a:r>
+            <a:endParaRPr lang="en-US" sz="900" dirty="0"/>
+          </a:p>
+        </p:txBody>
+      </p:sp>
+      <p:sp>
+        <p:nvSpPr>
+          <p:cNvPr id="6" name="Shape 3"/>
+          <p:cNvSpPr/>
+          <p:nvPr/>
+        </p:nvSpPr>
+        <p:spPr>
+          <a:xfrm>
+            <a:off x="548640" y="384048"/>
+            <a:ext cx="82296" cy="658368"/>
+          </a:xfrm>
+          <a:prstGeom prst="rect">
+            <a:avLst/>
+          </a:prstGeom>
+          <a:solidFill>
+            <a:srgbClr val="F7A23B"/>
+          </a:solidFill>
+          <a:ln/>
+        </p:spPr>
+      </p:sp>
+      <p:sp>
+        <p:nvSpPr>
+          <p:cNvPr id="7" name="Text 4"/>
+          <p:cNvSpPr/>
+          <p:nvPr/>
+        </p:nvSpPr>
+        <p:spPr>
+          <a:xfrm>
+            <a:off x="777240" y="292608"/>
+            <a:ext cx="10972800" cy="274320"/>
+          </a:xfrm>
+          <a:prstGeom prst="rect">
+            <a:avLst/>
+          </a:prstGeom>
+          <a:noFill/>
+          <a:ln/>
+        </p:spPr>
+        <p:txBody>
+          <a:bodyPr wrap="square" rtlCol="0" anchor="ctr"/>
+          <a:lstStyle/>
+          <a:p>
+            <a:pPr indent="0" marL="0">
+              <a:buNone/>
+            </a:pPr>
+            <a:r>
+              <a:rPr lang="en-US" sz="1000" b="1" spc="100" kern="0" dirty="0">
+                <a:solidFill>
+                  <a:srgbClr val="F7A23B"/>
+                </a:solidFill>
+                <a:latin typeface="Arial" pitchFamily="34" charset="0"/>
+                <a:ea typeface="Arial" pitchFamily="34" charset="-122"/>
+                <a:cs typeface="Arial" pitchFamily="34" charset="-120"/>
+              </a:rPr>
+              <a:t>CONFIRA SUAS RESPOSTAS</a:t>
+            </a:r>
+            <a:endParaRPr lang="en-US" sz="1000" dirty="0"/>
+          </a:p>
+        </p:txBody>
+      </p:sp>
+      <p:sp>
+        <p:nvSpPr>
+          <p:cNvPr id="8" name="Text 5"/>
+          <p:cNvSpPr/>
+          <p:nvPr/>
+        </p:nvSpPr>
+        <p:spPr>
+          <a:xfrm>
+            <a:off x="777240" y="530352"/>
+            <a:ext cx="10881360" cy="566928"/>
+          </a:xfrm>
+          <a:prstGeom prst="rect">
+            <a:avLst/>
+          </a:prstGeom>
+          <a:noFill/>
+          <a:ln/>
+        </p:spPr>
+        <p:txBody>
+          <a:bodyPr wrap="square" rtlCol="0" anchor="ctr">
+            <a:normAutofit/>
+          </a:bodyPr>
+          <a:lstStyle/>
+          <a:p>
+            <a:pPr indent="0" marL="0">
+              <a:buNone/>
+            </a:pPr>
+            <a:r>
+              <a:rPr lang="en-US" sz="2600" b="1" dirty="0">
+                <a:solidFill>
+                  <a:srgbClr val="1B3A6B"/>
+                </a:solidFill>
+                <a:latin typeface="Arial" pitchFamily="34" charset="0"/>
+                <a:ea typeface="Arial" pitchFamily="34" charset="-122"/>
+                <a:cs typeface="Arial" pitchFamily="34" charset="-120"/>
+              </a:rPr>
+              <a:t>Gabarito do teste rápido</a:t>
+            </a:r>
+            <a:endParaRPr lang="en-US" sz="2600" dirty="0"/>
+          </a:p>
+        </p:txBody>
+      </p:sp>
+      <p:sp>
+        <p:nvSpPr>
+          <p:cNvPr id="9" name="Shape 6"/>
+          <p:cNvSpPr/>
+          <p:nvPr/>
+        </p:nvSpPr>
+        <p:spPr>
+          <a:xfrm>
+            <a:off x="548640" y="1325880"/>
+            <a:ext cx="3544824" cy="2331720"/>
+          </a:xfrm>
+          <a:prstGeom prst="roundRect">
+            <a:avLst>
+              <a:gd name="adj" fmla="val 3137"/>
+            </a:avLst>
+          </a:prstGeom>
+          <a:solidFill>
+            <a:srgbClr val="FFFFFF"/>
+          </a:solidFill>
+          <a:ln w="9525">
+            <a:solidFill>
+              <a:srgbClr val="D8E0EC"/>
+            </a:solidFill>
+            <a:prstDash val="solid"/>
+          </a:ln>
+          <a:effectLst>
+            <a:outerShdw sx="100000" sy="100000" kx="0" ky="0" algn="bl" rotWithShape="0" blurRad="38100" dist="12700" dir="5400000">
+              <a:srgbClr val="000000">
+                <a:alpha val="8000"/>
+              </a:srgbClr>
+            </a:outerShdw>
+          </a:effectLst>
+        </p:spPr>
+      </p:sp>
+      <p:sp>
+        <p:nvSpPr>
+          <p:cNvPr id="10" name="Shape 7"/>
+          <p:cNvSpPr/>
+          <p:nvPr/>
+        </p:nvSpPr>
+        <p:spPr>
+          <a:xfrm>
+            <a:off x="731520" y="1508760"/>
+            <a:ext cx="457200" cy="457200"/>
+          </a:xfrm>
+          <a:prstGeom prst="ellipse">
+            <a:avLst/>
+          </a:prstGeom>
+          <a:solidFill>
+            <a:srgbClr val="1B3A6B"/>
+          </a:solidFill>
+          <a:ln/>
+        </p:spPr>
+      </p:sp>
+      <p:sp>
+        <p:nvSpPr>
+          <p:cNvPr id="11" name="Text 8"/>
+          <p:cNvSpPr/>
+          <p:nvPr/>
+        </p:nvSpPr>
+        <p:spPr>
+          <a:xfrm>
+            <a:off x="731520" y="1508760"/>
+            <a:ext cx="457200" cy="457200"/>
+          </a:xfrm>
+          <a:prstGeom prst="rect">
+            <a:avLst/>
+          </a:prstGeom>
+          <a:noFill/>
+          <a:ln/>
+        </p:spPr>
+        <p:txBody>
+          <a:bodyPr wrap="square" rtlCol="0" anchor="ctr"/>
+          <a:lstStyle/>
+          <a:p>
+            <a:pPr algn="ctr" indent="0" marL="0">
+              <a:buNone/>
+            </a:pPr>
+            <a:r>
+              <a:rPr lang="en-US" sz="1400" b="1" dirty="0">
+                <a:solidFill>
+                  <a:srgbClr val="FFFFFF"/>
+                </a:solidFill>
+                <a:latin typeface="Arial" pitchFamily="34" charset="0"/>
+                <a:ea typeface="Arial" pitchFamily="34" charset="-122"/>
+                <a:cs typeface="Arial" pitchFamily="34" charset="-120"/>
+              </a:rPr>
+              <a:t>1</a:t>
+            </a:r>
+            <a:endParaRPr lang="en-US" sz="1400" dirty="0"/>
+          </a:p>
+        </p:txBody>
+      </p:sp>
+      <p:sp>
+        <p:nvSpPr>
+          <p:cNvPr id="12" name="Text 9"/>
+          <p:cNvSpPr/>
+          <p:nvPr/>
+        </p:nvSpPr>
+        <p:spPr>
+          <a:xfrm>
+            <a:off x="1325880" y="1435608"/>
+            <a:ext cx="2630424" cy="2112264"/>
+          </a:xfrm>
+          <a:prstGeom prst="rect">
+            <a:avLst/>
+          </a:prstGeom>
+          <a:noFill/>
+          <a:ln/>
+        </p:spPr>
+        <p:txBody>
+          <a:bodyPr wrap="square" rtlCol="0" anchor="ctr">
+            <a:normAutofit/>
+          </a:bodyPr>
+          <a:lstStyle/>
+          <a:p>
+            <a:pPr indent="0" marL="0">
+              <a:buNone/>
+            </a:pPr>
+            <a:r>
+              <a:rPr lang="en-US" sz="1800" dirty="0">
+                <a:solidFill>
+                  <a:srgbClr val="1F2937"/>
+                </a:solidFill>
+                <a:latin typeface="Arial" pitchFamily="34" charset="0"/>
+                <a:ea typeface="Arial" pitchFamily="34" charset="-122"/>
+                <a:cs typeface="Arial" pitchFamily="34" charset="-120"/>
+              </a:rPr>
+              <a:t>-) </a:t>
+            </a:r>
+            <a:endParaRPr lang="en-US" sz="1800" dirty="0"/>
+          </a:p>
+        </p:txBody>
+      </p:sp>
+      <p:sp>
+        <p:nvSpPr>
+          <p:cNvPr id="13" name="Shape 10"/>
+          <p:cNvSpPr/>
+          <p:nvPr/>
+        </p:nvSpPr>
+        <p:spPr>
+          <a:xfrm>
+            <a:off x="4322064" y="1325880"/>
+            <a:ext cx="3544824" cy="2331720"/>
+          </a:xfrm>
+          <a:prstGeom prst="roundRect">
+            <a:avLst>
+              <a:gd name="adj" fmla="val 3137"/>
+            </a:avLst>
+          </a:prstGeom>
+          <a:solidFill>
+            <a:srgbClr val="FFFFFF"/>
+          </a:solidFill>
+          <a:ln w="9525">
+            <a:solidFill>
+              <a:srgbClr val="D8E0EC"/>
+            </a:solidFill>
+            <a:prstDash val="solid"/>
+          </a:ln>
+          <a:effectLst>
+            <a:outerShdw sx="100000" sy="100000" kx="0" ky="0" algn="bl" rotWithShape="0" blurRad="38100" dist="12700" dir="5400000">
+              <a:srgbClr val="000000">
+                <a:alpha val="8000"/>
+              </a:srgbClr>
+            </a:outerShdw>
+          </a:effectLst>
+        </p:spPr>
+      </p:sp>
+      <p:sp>
+        <p:nvSpPr>
+          <p:cNvPr id="14" name="Shape 11"/>
+          <p:cNvSpPr/>
+          <p:nvPr/>
+        </p:nvSpPr>
+        <p:spPr>
+          <a:xfrm>
+            <a:off x="4504944" y="1508760"/>
+            <a:ext cx="457200" cy="457200"/>
+          </a:xfrm>
+          <a:prstGeom prst="ellipse">
+            <a:avLst/>
+          </a:prstGeom>
+          <a:solidFill>
+            <a:srgbClr val="F7A23B"/>
+          </a:solidFill>
+          <a:ln/>
+        </p:spPr>
+      </p:sp>
+      <p:sp>
+        <p:nvSpPr>
+          <p:cNvPr id="15" name="Text 12"/>
+          <p:cNvSpPr/>
+          <p:nvPr/>
+        </p:nvSpPr>
+        <p:spPr>
+          <a:xfrm>
+            <a:off x="4504944" y="1508760"/>
+            <a:ext cx="457200" cy="457200"/>
+          </a:xfrm>
+          <a:prstGeom prst="rect">
+            <a:avLst/>
+          </a:prstGeom>
+          <a:noFill/>
+          <a:ln/>
+        </p:spPr>
+        <p:txBody>
+          <a:bodyPr wrap="square" rtlCol="0" anchor="ctr"/>
+          <a:lstStyle/>
+          <a:p>
+            <a:pPr algn="ctr" indent="0" marL="0">
+              <a:buNone/>
+            </a:pPr>
+            <a:r>
+              <a:rPr lang="en-US" sz="1400" b="1" dirty="0">
+                <a:solidFill>
+                  <a:srgbClr val="FFFFFF"/>
+                </a:solidFill>
+                <a:latin typeface="Arial" pitchFamily="34" charset="0"/>
+                <a:ea typeface="Arial" pitchFamily="34" charset="-122"/>
+                <a:cs typeface="Arial" pitchFamily="34" charset="-120"/>
+              </a:rPr>
+              <a:t>2</a:t>
+            </a:r>
+            <a:endParaRPr lang="en-US" sz="1400" dirty="0"/>
+          </a:p>
+        </p:txBody>
+      </p:sp>
+      <p:sp>
+        <p:nvSpPr>
+          <p:cNvPr id="16" name="Text 13"/>
+          <p:cNvSpPr/>
+          <p:nvPr/>
+        </p:nvSpPr>
+        <p:spPr>
+          <a:xfrm>
+            <a:off x="5099304" y="1435608"/>
+            <a:ext cx="2630424" cy="2112264"/>
+          </a:xfrm>
+          <a:prstGeom prst="rect">
+            <a:avLst/>
+          </a:prstGeom>
+          <a:noFill/>
+          <a:ln/>
+        </p:spPr>
+        <p:txBody>
+          <a:bodyPr wrap="square" rtlCol="0" anchor="ctr">
+            <a:normAutofit/>
+          </a:bodyPr>
+          <a:lstStyle/>
+          <a:p>
+            <a:pPr indent="0" marL="0">
+              <a:buNone/>
+            </a:pPr>
+            <a:r>
+              <a:rPr lang="en-US" sz="1800" dirty="0">
+                <a:solidFill>
+                  <a:srgbClr val="1F2937"/>
+                </a:solidFill>
+                <a:latin typeface="Arial" pitchFamily="34" charset="0"/>
+                <a:ea typeface="Arial" pitchFamily="34" charset="-122"/>
+                <a:cs typeface="Arial" pitchFamily="34" charset="-120"/>
+              </a:rPr>
+              <a:t>-) </a:t>
+            </a:r>
+            <a:endParaRPr lang="en-US" sz="1800" dirty="0"/>
+          </a:p>
+        </p:txBody>
+      </p:sp>
+      <p:sp>
+        <p:nvSpPr>
+          <p:cNvPr id="17" name="Shape 14"/>
+          <p:cNvSpPr/>
+          <p:nvPr/>
+        </p:nvSpPr>
+        <p:spPr>
+          <a:xfrm>
+            <a:off x="8095488" y="1325880"/>
+            <a:ext cx="3544824" cy="2331720"/>
+          </a:xfrm>
+          <a:prstGeom prst="roundRect">
+            <a:avLst>
+              <a:gd name="adj" fmla="val 3137"/>
+            </a:avLst>
+          </a:prstGeom>
+          <a:solidFill>
+            <a:srgbClr val="FFFFFF"/>
+          </a:solidFill>
+          <a:ln w="9525">
+            <a:solidFill>
+              <a:srgbClr val="D8E0EC"/>
+            </a:solidFill>
+            <a:prstDash val="solid"/>
+          </a:ln>
+          <a:effectLst>
+            <a:outerShdw sx="100000" sy="100000" kx="0" ky="0" algn="bl" rotWithShape="0" blurRad="38100" dist="12700" dir="5400000">
+              <a:srgbClr val="000000">
+                <a:alpha val="8000"/>
+              </a:srgbClr>
+            </a:outerShdw>
+          </a:effectLst>
+        </p:spPr>
+      </p:sp>
+      <p:sp>
+        <p:nvSpPr>
+          <p:cNvPr id="18" name="Shape 15"/>
+          <p:cNvSpPr/>
+          <p:nvPr/>
+        </p:nvSpPr>
+        <p:spPr>
+          <a:xfrm>
+            <a:off x="8278368" y="1508760"/>
+            <a:ext cx="457200" cy="457200"/>
+          </a:xfrm>
+          <a:prstGeom prst="ellipse">
+            <a:avLst/>
+          </a:prstGeom>
+          <a:solidFill>
+            <a:srgbClr val="1B3A6B"/>
+          </a:solidFill>
+          <a:ln/>
+        </p:spPr>
+      </p:sp>
+      <p:sp>
+        <p:nvSpPr>
+          <p:cNvPr id="19" name="Text 16"/>
+          <p:cNvSpPr/>
+          <p:nvPr/>
+        </p:nvSpPr>
+        <p:spPr>
+          <a:xfrm>
+            <a:off x="8278368" y="1508760"/>
+            <a:ext cx="457200" cy="457200"/>
+          </a:xfrm>
+          <a:prstGeom prst="rect">
+            <a:avLst/>
+          </a:prstGeom>
+          <a:noFill/>
+          <a:ln/>
+        </p:spPr>
+        <p:txBody>
+          <a:bodyPr wrap="square" rtlCol="0" anchor="ctr"/>
+          <a:lstStyle/>
+          <a:p>
+            <a:pPr algn="ctr" indent="0" marL="0">
+              <a:buNone/>
+            </a:pPr>
+            <a:r>
+              <a:rPr lang="en-US" sz="1400" b="1" dirty="0">
+                <a:solidFill>
+                  <a:srgbClr val="FFFFFF"/>
+                </a:solidFill>
+                <a:latin typeface="Arial" pitchFamily="34" charset="0"/>
+                <a:ea typeface="Arial" pitchFamily="34" charset="-122"/>
+                <a:cs typeface="Arial" pitchFamily="34" charset="-120"/>
+              </a:rPr>
+              <a:t>3</a:t>
+            </a:r>
+            <a:endParaRPr lang="en-US" sz="1400" dirty="0"/>
+          </a:p>
+        </p:txBody>
+      </p:sp>
+      <p:sp>
+        <p:nvSpPr>
+          <p:cNvPr id="20" name="Text 17"/>
+          <p:cNvSpPr/>
+          <p:nvPr/>
+        </p:nvSpPr>
+        <p:spPr>
+          <a:xfrm>
+            <a:off x="8872728" y="1435608"/>
+            <a:ext cx="2630424" cy="2112264"/>
+          </a:xfrm>
+          <a:prstGeom prst="rect">
+            <a:avLst/>
+          </a:prstGeom>
+          <a:noFill/>
+          <a:ln/>
+        </p:spPr>
+        <p:txBody>
+          <a:bodyPr wrap="square" rtlCol="0" anchor="ctr">
+            <a:normAutofit/>
+          </a:bodyPr>
+          <a:lstStyle/>
+          <a:p>
+            <a:pPr indent="0" marL="0">
+              <a:buNone/>
+            </a:pPr>
+            <a:r>
+              <a:rPr lang="en-US" sz="1800" dirty="0">
+                <a:solidFill>
+                  <a:srgbClr val="1F2937"/>
+                </a:solidFill>
+                <a:latin typeface="Arial" pitchFamily="34" charset="0"/>
+                <a:ea typeface="Arial" pitchFamily="34" charset="-122"/>
+                <a:cs typeface="Arial" pitchFamily="34" charset="-120"/>
+              </a:rPr>
+              <a:t>B) depende do estado e das condições do Convênio ICMS 16/2015</a:t>
+            </a:r>
+            <a:endParaRPr lang="en-US" sz="1800" dirty="0"/>
+          </a:p>
+        </p:txBody>
+      </p:sp>
+      <p:sp>
+        <p:nvSpPr>
+          <p:cNvPr id="21" name="Shape 18"/>
+          <p:cNvSpPr/>
+          <p:nvPr/>
+        </p:nvSpPr>
+        <p:spPr>
+          <a:xfrm>
+            <a:off x="548640" y="3886200"/>
+            <a:ext cx="3544824" cy="2331720"/>
+          </a:xfrm>
+          <a:prstGeom prst="roundRect">
+            <a:avLst>
+              <a:gd name="adj" fmla="val 3137"/>
+            </a:avLst>
+          </a:prstGeom>
+          <a:solidFill>
+            <a:srgbClr val="FFFFFF"/>
+          </a:solidFill>
+          <a:ln w="9525">
+            <a:solidFill>
+              <a:srgbClr val="D8E0EC"/>
+            </a:solidFill>
+            <a:prstDash val="solid"/>
+          </a:ln>
+          <a:effectLst>
+            <a:outerShdw sx="100000" sy="100000" kx="0" ky="0" algn="bl" rotWithShape="0" blurRad="38100" dist="12700" dir="5400000">
+              <a:srgbClr val="000000">
+                <a:alpha val="8000"/>
+              </a:srgbClr>
+            </a:outerShdw>
+          </a:effectLst>
+        </p:spPr>
+      </p:sp>
+      <p:sp>
+        <p:nvSpPr>
+          <p:cNvPr id="22" name="Shape 19"/>
+          <p:cNvSpPr/>
+          <p:nvPr/>
+        </p:nvSpPr>
+        <p:spPr>
+          <a:xfrm>
+            <a:off x="731520" y="4069080"/>
+            <a:ext cx="457200" cy="457200"/>
+          </a:xfrm>
+          <a:prstGeom prst="ellipse">
+            <a:avLst/>
+          </a:prstGeom>
+          <a:solidFill>
+            <a:srgbClr val="F7A23B"/>
+          </a:solidFill>
+          <a:ln/>
+        </p:spPr>
+      </p:sp>
+      <p:sp>
+        <p:nvSpPr>
+          <p:cNvPr id="23" name="Text 20"/>
+          <p:cNvSpPr/>
+          <p:nvPr/>
+        </p:nvSpPr>
+        <p:spPr>
+          <a:xfrm>
+            <a:off x="731520" y="4069080"/>
+            <a:ext cx="457200" cy="457200"/>
+          </a:xfrm>
+          <a:prstGeom prst="rect">
+            <a:avLst/>
+          </a:prstGeom>
+          <a:noFill/>
+          <a:ln/>
+        </p:spPr>
+        <p:txBody>
+          <a:bodyPr wrap="square" rtlCol="0" anchor="ctr"/>
+          <a:lstStyle/>
+          <a:p>
+            <a:pPr algn="ctr" indent="0" marL="0">
+              <a:buNone/>
+            </a:pPr>
+            <a:r>
+              <a:rPr lang="en-US" sz="1400" b="1" dirty="0">
+                <a:solidFill>
+                  <a:srgbClr val="FFFFFF"/>
+                </a:solidFill>
+                <a:latin typeface="Arial" pitchFamily="34" charset="0"/>
+                <a:ea typeface="Arial" pitchFamily="34" charset="-122"/>
+                <a:cs typeface="Arial" pitchFamily="34" charset="-120"/>
+              </a:rPr>
+              <a:t>4</a:t>
+            </a:r>
+            <a:endParaRPr lang="en-US" sz="1400" dirty="0"/>
+          </a:p>
+        </p:txBody>
+      </p:sp>
+      <p:sp>
+        <p:nvSpPr>
+          <p:cNvPr id="24" name="Text 21"/>
+          <p:cNvSpPr/>
+          <p:nvPr/>
+        </p:nvSpPr>
+        <p:spPr>
+          <a:xfrm>
+            <a:off x="1325880" y="3995928"/>
+            <a:ext cx="2630424" cy="2112264"/>
+          </a:xfrm>
+          <a:prstGeom prst="rect">
+            <a:avLst/>
+          </a:prstGeom>
+          <a:noFill/>
+          <a:ln/>
+        </p:spPr>
+        <p:txBody>
+          <a:bodyPr wrap="square" rtlCol="0" anchor="ctr">
+            <a:normAutofit/>
+          </a:bodyPr>
+          <a:lstStyle/>
+          <a:p>
+            <a:pPr indent="0" marL="0">
+              <a:buNone/>
+            </a:pPr>
+            <a:r>
+              <a:rPr lang="en-US" sz="1800" dirty="0">
+                <a:solidFill>
+                  <a:srgbClr val="1F2937"/>
+                </a:solidFill>
+                <a:latin typeface="Arial" pitchFamily="34" charset="0"/>
+                <a:ea typeface="Arial" pitchFamily="34" charset="-122"/>
+                <a:cs typeface="Arial" pitchFamily="34" charset="-120"/>
+              </a:rPr>
+              <a:t>A) ter plano de mitigação e dono definido</a:t>
+            </a:r>
+            <a:endParaRPr lang="en-US" sz="1800" dirty="0"/>
+          </a:p>
+        </p:txBody>
+      </p:sp>
+      <p:sp>
+        <p:nvSpPr>
+          <p:cNvPr id="25" name="Shape 22"/>
+          <p:cNvSpPr/>
+          <p:nvPr/>
+        </p:nvSpPr>
+        <p:spPr>
+          <a:xfrm>
+            <a:off x="4322064" y="3886200"/>
+            <a:ext cx="3544824" cy="2331720"/>
+          </a:xfrm>
+          <a:prstGeom prst="roundRect">
+            <a:avLst>
+              <a:gd name="adj" fmla="val 3137"/>
+            </a:avLst>
+          </a:prstGeom>
+          <a:solidFill>
+            <a:srgbClr val="FFFFFF"/>
+          </a:solidFill>
+          <a:ln w="9525">
+            <a:solidFill>
+              <a:srgbClr val="D8E0EC"/>
+            </a:solidFill>
+            <a:prstDash val="solid"/>
+          </a:ln>
+          <a:effectLst>
+            <a:outerShdw sx="100000" sy="100000" kx="0" ky="0" algn="bl" rotWithShape="0" blurRad="38100" dist="12700" dir="5400000">
+              <a:srgbClr val="000000">
+                <a:alpha val="8000"/>
+              </a:srgbClr>
+            </a:outerShdw>
+          </a:effectLst>
+        </p:spPr>
+      </p:sp>
+      <p:sp>
+        <p:nvSpPr>
+          <p:cNvPr id="26" name="Shape 23"/>
+          <p:cNvSpPr/>
+          <p:nvPr/>
+        </p:nvSpPr>
+        <p:spPr>
+          <a:xfrm>
+            <a:off x="4504944" y="4069080"/>
+            <a:ext cx="457200" cy="457200"/>
+          </a:xfrm>
+          <a:prstGeom prst="ellipse">
+            <a:avLst/>
+          </a:prstGeom>
+          <a:solidFill>
+            <a:srgbClr val="1B3A6B"/>
+          </a:solidFill>
+          <a:ln/>
+        </p:spPr>
+      </p:sp>
+      <p:sp>
+        <p:nvSpPr>
+          <p:cNvPr id="27" name="Text 24"/>
+          <p:cNvSpPr/>
+          <p:nvPr/>
+        </p:nvSpPr>
+        <p:spPr>
+          <a:xfrm>
+            <a:off x="4504944" y="4069080"/>
+            <a:ext cx="457200" cy="457200"/>
+          </a:xfrm>
+          <a:prstGeom prst="rect">
+            <a:avLst/>
+          </a:prstGeom>
+          <a:noFill/>
+          <a:ln/>
+        </p:spPr>
+        <p:txBody>
+          <a:bodyPr wrap="square" rtlCol="0" anchor="ctr"/>
+          <a:lstStyle/>
+          <a:p>
+            <a:pPr algn="ctr" indent="0" marL="0">
+              <a:buNone/>
+            </a:pPr>
+            <a:r>
+              <a:rPr lang="en-US" sz="1400" b="1" dirty="0">
+                <a:solidFill>
+                  <a:srgbClr val="FFFFFF"/>
+                </a:solidFill>
+                <a:latin typeface="Arial" pitchFamily="34" charset="0"/>
+                <a:ea typeface="Arial" pitchFamily="34" charset="-122"/>
+                <a:cs typeface="Arial" pitchFamily="34" charset="-120"/>
+              </a:rPr>
+              <a:t>5</a:t>
+            </a:r>
+            <a:endParaRPr lang="en-US" sz="1400" dirty="0"/>
+          </a:p>
+        </p:txBody>
+      </p:sp>
+      <p:sp>
+        <p:nvSpPr>
+          <p:cNvPr id="28" name="Text 25"/>
+          <p:cNvSpPr/>
+          <p:nvPr/>
+        </p:nvSpPr>
+        <p:spPr>
+          <a:xfrm>
+            <a:off x="5099304" y="3995928"/>
+            <a:ext cx="2630424" cy="2112264"/>
+          </a:xfrm>
+          <a:prstGeom prst="rect">
+            <a:avLst/>
+          </a:prstGeom>
+          <a:noFill/>
+          <a:ln/>
+        </p:spPr>
+        <p:txBody>
+          <a:bodyPr wrap="square" rtlCol="0" anchor="ctr">
+            <a:normAutofit/>
+          </a:bodyPr>
+          <a:lstStyle/>
+          <a:p>
+            <a:pPr indent="0" marL="0">
+              <a:buNone/>
+            </a:pPr>
+            <a:r>
+              <a:rPr lang="en-US" sz="1800" dirty="0">
+                <a:solidFill>
+                  <a:srgbClr val="1F2937"/>
+                </a:solidFill>
+                <a:latin typeface="Arial" pitchFamily="34" charset="0"/>
+                <a:ea typeface="Arial" pitchFamily="34" charset="-122"/>
+                <a:cs typeface="Arial" pitchFamily="34" charset="-120"/>
+              </a:rPr>
+              <a:t>A) Configurações → Identidade Visual</a:t>
+            </a:r>
+            <a:endParaRPr lang="en-US" sz="1800" dirty="0"/>
+          </a:p>
+        </p:txBody>
+      </p:sp>
+      <p:sp>
+        <p:nvSpPr>
+          <p:cNvPr id="29" name="Shape 26"/>
+          <p:cNvSpPr/>
+          <p:nvPr/>
+        </p:nvSpPr>
+        <p:spPr>
+          <a:xfrm>
+            <a:off x="8095488" y="3886200"/>
+            <a:ext cx="3544824" cy="2331720"/>
+          </a:xfrm>
+          <a:prstGeom prst="roundRect">
+            <a:avLst>
+              <a:gd name="adj" fmla="val 3137"/>
+            </a:avLst>
+          </a:prstGeom>
+          <a:solidFill>
+            <a:srgbClr val="FFFFFF"/>
+          </a:solidFill>
+          <a:ln w="9525">
+            <a:solidFill>
+              <a:srgbClr val="D8E0EC"/>
+            </a:solidFill>
+            <a:prstDash val="solid"/>
+          </a:ln>
+          <a:effectLst>
+            <a:outerShdw sx="100000" sy="100000" kx="0" ky="0" algn="bl" rotWithShape="0" blurRad="38100" dist="12700" dir="5400000">
+              <a:srgbClr val="000000">
+                <a:alpha val="8000"/>
+              </a:srgbClr>
+            </a:outerShdw>
+          </a:effectLst>
+        </p:spPr>
+      </p:sp>
+      <p:sp>
+        <p:nvSpPr>
+          <p:cNvPr id="30" name="Shape 27"/>
+          <p:cNvSpPr/>
+          <p:nvPr/>
+        </p:nvSpPr>
+        <p:spPr>
+          <a:xfrm>
+            <a:off x="8278368" y="4069080"/>
+            <a:ext cx="457200" cy="457200"/>
+          </a:xfrm>
+          <a:prstGeom prst="ellipse">
+            <a:avLst/>
+          </a:prstGeom>
+          <a:solidFill>
+            <a:srgbClr val="F7A23B"/>
+          </a:solidFill>
+          <a:ln/>
+        </p:spPr>
+      </p:sp>
+      <p:sp>
+        <p:nvSpPr>
+          <p:cNvPr id="31" name="Text 28"/>
+          <p:cNvSpPr/>
+          <p:nvPr/>
+        </p:nvSpPr>
+        <p:spPr>
+          <a:xfrm>
+            <a:off x="8278368" y="4069080"/>
+            <a:ext cx="457200" cy="457200"/>
+          </a:xfrm>
+          <a:prstGeom prst="rect">
+            <a:avLst/>
+          </a:prstGeom>
+          <a:noFill/>
+          <a:ln/>
+        </p:spPr>
+        <p:txBody>
+          <a:bodyPr wrap="square" rtlCol="0" anchor="ctr"/>
+          <a:lstStyle/>
+          <a:p>
+            <a:pPr algn="ctr" indent="0" marL="0">
+              <a:buNone/>
+            </a:pPr>
+            <a:r>
+              <a:rPr lang="en-US" sz="1400" b="1" dirty="0">
+                <a:solidFill>
+                  <a:srgbClr val="FFFFFF"/>
+                </a:solidFill>
+                <a:latin typeface="Arial" pitchFamily="34" charset="0"/>
+                <a:ea typeface="Arial" pitchFamily="34" charset="-122"/>
+                <a:cs typeface="Arial" pitchFamily="34" charset="-120"/>
+              </a:rPr>
+              <a:t>6</a:t>
+            </a:r>
+            <a:endParaRPr lang="en-US" sz="1400" dirty="0"/>
+          </a:p>
+        </p:txBody>
+      </p:sp>
+      <p:sp>
+        <p:nvSpPr>
+          <p:cNvPr id="32" name="Text 29"/>
+          <p:cNvSpPr/>
+          <p:nvPr/>
+        </p:nvSpPr>
+        <p:spPr>
+          <a:xfrm>
+            <a:off x="8872728" y="3995928"/>
+            <a:ext cx="2630424" cy="2112264"/>
+          </a:xfrm>
+          <a:prstGeom prst="rect">
+            <a:avLst/>
+          </a:prstGeom>
+          <a:noFill/>
+          <a:ln/>
+        </p:spPr>
+        <p:txBody>
+          <a:bodyPr wrap="square" rtlCol="0" anchor="ctr">
+            <a:normAutofit/>
+          </a:bodyPr>
+          <a:lstStyle/>
+          <a:p>
+            <a:pPr indent="0" marL="0">
+              <a:buNone/>
+            </a:pPr>
+            <a:r>
+              <a:rPr lang="en-US" sz="1800" dirty="0">
+                <a:solidFill>
+                  <a:srgbClr val="1F2937"/>
+                </a:solidFill>
+                <a:latin typeface="Arial" pitchFamily="34" charset="0"/>
+                <a:ea typeface="Arial" pitchFamily="34" charset="-122"/>
+                <a:cs typeface="Arial" pitchFamily="34" charset="-120"/>
+              </a:rPr>
+              <a:t>A) modelo, mercado, unit economics, metas, equipe, investimento e riscos</a:t>
+            </a:r>
+            <a:endParaRPr lang="en-US" sz="1800" dirty="0"/>
+          </a:p>
+        </p:txBody>
+      </p:sp>
+      <p:sp>
+        <p:nvSpPr>
+          <p:cNvPr id="25" name="Slide Number Placeholder 0"/>
+          <p:cNvSpPr>
+            <a:spLocks noGrp="1"/>
+          </p:cNvSpPr>
+          <p:nvPr>
+            <p:ph type="sldNum" sz="quarter" idx="4294967295"/>
+          </p:nvPr>
+        </p:nvSpPr>
+        <p:spPr>
+          <a:xfrm>
+            <a:off x="11292840" y="6556248"/>
+            <a:ext cx="548640" cy="256032"/>
+          </a:xfrm>
+          <a:prstGeom prst="rect">
+            <a:avLst/>
+          </a:prstGeom>
+          <a:extLst>
+            <a:ext uri="{C572A759-6A51-4108-AA02-DFA0A04FC94B}">
+              <ma14:wrappingTextBoxFlag xmlns:ma14="http://schemas.microsoft.com/office/mac/drawingml/2011/main" val="0"/>
+            </a:ext>
+          </a:extLst>
+        </p:spPr>
+        <p:txBody>
+          <a:bodyPr/>
+          <a:lstStyle>
+            <a:lvl1pPr>
+              <a:defRPr sz="900">
+                <a:solidFill>
+                  <a:srgbClr val="1B3A6B"/>
+                </a:solidFill>
+                <a:latin typeface="Arial"/>
+                <a:ea typeface="Arial"/>
+                <a:cs typeface="Arial"/>
+              </a:defRPr>
+            </a:lvl1pPr>
+          </a:lstStyle>
+          <a:p>
+            <a:pPr algn="r"/>
+            <a:fld id="{F7021451-1387-4CA6-816F-3879F97B5CBC}" type="slidenum">
+              <a:rPr b="1" lang="en-US"/>
+              <a:t>30</a:t>
+            </a:fld>
+            <a:endParaRPr lang="en-US"/>
+          </a:p>
+        </p:txBody>
+      </p:sp>
+    </p:spTree>
+  </p:cSld>
+  <p:clrMapOvr>
+    <a:masterClrMapping/>
+  </p:clrMapOvr>
+</p:sld>
+</file>
+
+<file path=ppt/slides/slide31.xml><?xml version="1.0" encoding="utf-8"?>
+<p:sld xmlns:a="http://schemas.openxmlformats.org/drawingml/2006/main" xmlns:r="http://schemas.openxmlformats.org/officeDocument/2006/relationships" xmlns:p="http://schemas.openxmlformats.org/presentationml/2006/main">
+  <p:cSld name="Slide 31">
+    <p:bg>
+      <p:bgPr>
+        <a:solidFill>
+          <a:srgbClr val="F6F8FB"/>
+        </a:solidFill>
+      </p:bgPr>
+    </p:bg>
+    <p:spTree>
+      <p:nvGrpSpPr>
+        <p:cNvPr id="1" name=""/>
+        <p:cNvGrpSpPr/>
+        <p:nvPr/>
+      </p:nvGrpSpPr>
+      <p:grpSpPr>
+        <a:xfrm>
+          <a:off x="0" y="0"/>
+          <a:ext cx="0" cy="0"/>
+          <a:chOff x="0" y="0"/>
+          <a:chExt cx="0" cy="0"/>
+        </a:xfrm>
+      </p:grpSpPr>
+      <p:sp>
+        <p:nvSpPr>
+          <p:cNvPr id="2" name="Shape 0"/>
+          <p:cNvSpPr/>
+          <p:nvPr/>
+        </p:nvSpPr>
+        <p:spPr>
+          <a:xfrm>
+            <a:off x="0" y="6510528"/>
+            <a:ext cx="12191695" cy="347472"/>
+          </a:xfrm>
+          <a:prstGeom prst="rect">
+            <a:avLst/>
+          </a:prstGeom>
+          <a:solidFill>
+            <a:srgbClr val="FFFFFF"/>
+          </a:solidFill>
+          <a:ln w="6350">
+            <a:solidFill>
+              <a:srgbClr val="D8E0EC"/>
+            </a:solidFill>
+            <a:prstDash val="solid"/>
+          </a:ln>
+        </p:spPr>
+      </p:sp>
+      <p:pic>
+        <p:nvPicPr>
+          <p:cNvPr id="3" name="Image 0" descr="/www/wwwroot/rexar/gdsolar/docs/curso/slides/assets/logo-gdsolar.png">    </p:cNvPr>
+          <p:cNvPicPr>
+            <a:picLocks noChangeAspect="1"/>
+          </p:cNvPicPr>
+          <p:nvPr/>
+        </p:nvPicPr>
+        <p:blipFill>
+          <a:blip r:embed="rId1"/>
+          <a:stretch>
+            <a:fillRect/>
+          </a:stretch>
+        </p:blipFill>
+        <p:spPr>
+          <a:xfrm>
+            <a:off x="548640" y="6547104"/>
+            <a:ext cx="274320" cy="274320"/>
+          </a:xfrm>
+          <a:prstGeom prst="rect">
+            <a:avLst/>
+          </a:prstGeom>
+        </p:spPr>
+      </p:pic>
+      <p:sp>
+        <p:nvSpPr>
+          <p:cNvPr id="4" name="Text 1"/>
+          <p:cNvSpPr/>
+          <p:nvPr/>
+        </p:nvSpPr>
+        <p:spPr>
+          <a:xfrm>
+            <a:off x="886968" y="6528816"/>
+            <a:ext cx="6400800" cy="310896"/>
+          </a:xfrm>
+          <a:prstGeom prst="rect">
+            <a:avLst/>
+          </a:prstGeom>
+          <a:noFill/>
+          <a:ln/>
+        </p:spPr>
+        <p:txBody>
+          <a:bodyPr wrap="square" rtlCol="0" anchor="ctr"/>
+          <a:lstStyle/>
+          <a:p>
+            <a:pPr indent="0" marL="0">
+              <a:buNone/>
+            </a:pPr>
+            <a:r>
+              <a:rPr lang="en-US" sz="900" b="1" dirty="0">
+                <a:solidFill>
+                  <a:srgbClr val="64748B"/>
+                </a:solidFill>
+                <a:latin typeface="Arial" pitchFamily="34" charset="0"/>
+                <a:ea typeface="Arial" pitchFamily="34" charset="-122"/>
+                <a:cs typeface="Arial" pitchFamily="34" charset="-120"/>
+              </a:rPr>
+              <a:t>GD Solar  ·  Formação em Energia por Assinatura</a:t>
+            </a:r>
+            <a:endParaRPr lang="en-US" sz="900" dirty="0"/>
+          </a:p>
+        </p:txBody>
+      </p:sp>
+      <p:sp>
+        <p:nvSpPr>
+          <p:cNvPr id="5" name="Text 2"/>
+          <p:cNvSpPr/>
+          <p:nvPr/>
+        </p:nvSpPr>
+        <p:spPr>
+          <a:xfrm>
+            <a:off x="7132320" y="6528816"/>
+            <a:ext cx="4023360" cy="310896"/>
+          </a:xfrm>
+          <a:prstGeom prst="rect">
+            <a:avLst/>
+          </a:prstGeom>
+          <a:noFill/>
+          <a:ln/>
+        </p:spPr>
+        <p:txBody>
+          <a:bodyPr wrap="square" rtlCol="0" anchor="ctr"/>
+          <a:lstStyle/>
+          <a:p>
+            <a:pPr algn="r" indent="0" marL="0">
+              <a:buNone/>
+            </a:pPr>
+            <a:r>
+              <a:rPr lang="en-US" sz="900" dirty="0">
+                <a:solidFill>
+                  <a:srgbClr val="64748B"/>
+                </a:solidFill>
+                <a:latin typeface="Arial" pitchFamily="34" charset="0"/>
+                <a:ea typeface="Arial" pitchFamily="34" charset="-122"/>
+                <a:cs typeface="Arial" pitchFamily="34" charset="-120"/>
+              </a:rPr>
+              <a:t>M11 · Fechamento</a:t>
+            </a:r>
+            <a:endParaRPr lang="en-US" sz="900" dirty="0"/>
+          </a:p>
+        </p:txBody>
+      </p:sp>
+      <p:sp>
+        <p:nvSpPr>
+          <p:cNvPr id="6" name="Shape 3"/>
+          <p:cNvSpPr/>
+          <p:nvPr/>
+        </p:nvSpPr>
+        <p:spPr>
+          <a:xfrm>
+            <a:off x="548640" y="384048"/>
+            <a:ext cx="82296" cy="658368"/>
+          </a:xfrm>
+          <a:prstGeom prst="rect">
+            <a:avLst/>
+          </a:prstGeom>
+          <a:solidFill>
+            <a:srgbClr val="F7A23B"/>
+          </a:solidFill>
+          <a:ln/>
+        </p:spPr>
+      </p:sp>
+      <p:sp>
+        <p:nvSpPr>
+          <p:cNvPr id="7" name="Text 4"/>
+          <p:cNvSpPr/>
+          <p:nvPr/>
+        </p:nvSpPr>
+        <p:spPr>
+          <a:xfrm>
+            <a:off x="777240" y="292608"/>
+            <a:ext cx="10972800" cy="274320"/>
+          </a:xfrm>
+          <a:prstGeom prst="rect">
+            <a:avLst/>
+          </a:prstGeom>
+          <a:noFill/>
+          <a:ln/>
+        </p:spPr>
+        <p:txBody>
+          <a:bodyPr wrap="square" rtlCol="0" anchor="ctr"/>
+          <a:lstStyle/>
+          <a:p>
+            <a:pPr indent="0" marL="0">
+              <a:buNone/>
+            </a:pPr>
+            <a:r>
+              <a:rPr lang="en-US" sz="1000" b="1" spc="100" kern="0" dirty="0">
+                <a:solidFill>
+                  <a:srgbClr val="F7A23B"/>
+                </a:solidFill>
+                <a:latin typeface="Arial" pitchFamily="34" charset="0"/>
+                <a:ea typeface="Arial" pitchFamily="34" charset="-122"/>
+                <a:cs typeface="Arial" pitchFamily="34" charset="-120"/>
+              </a:rPr>
+              <a:t>FECHAMENTO DO MÓDULO</a:t>
+            </a:r>
+            <a:endParaRPr lang="en-US" sz="1000" dirty="0"/>
+          </a:p>
+        </p:txBody>
+      </p:sp>
+      <p:sp>
+        <p:nvSpPr>
+          <p:cNvPr id="8" name="Text 5"/>
+          <p:cNvSpPr/>
+          <p:nvPr/>
+        </p:nvSpPr>
+        <p:spPr>
+          <a:xfrm>
+            <a:off x="777240" y="530352"/>
+            <a:ext cx="10881360" cy="566928"/>
+          </a:xfrm>
+          <a:prstGeom prst="rect">
+            <a:avLst/>
+          </a:prstGeom>
+          <a:noFill/>
+          <a:ln/>
+        </p:spPr>
+        <p:txBody>
+          <a:bodyPr wrap="square" rtlCol="0" anchor="ctr">
+            <a:normAutofit/>
+          </a:bodyPr>
+          <a:lstStyle/>
+          <a:p>
+            <a:pPr indent="0" marL="0">
+              <a:buNone/>
+            </a:pPr>
+            <a:r>
+              <a:rPr lang="en-US" sz="2600" b="1" dirty="0">
+                <a:solidFill>
+                  <a:srgbClr val="1B3A6B"/>
+                </a:solidFill>
+                <a:latin typeface="Arial" pitchFamily="34" charset="0"/>
+                <a:ea typeface="Arial" pitchFamily="34" charset="-122"/>
+                <a:cs typeface="Arial" pitchFamily="34" charset="-120"/>
+              </a:rPr>
+              <a:t>Pratique e entregue</a:t>
+            </a:r>
+            <a:endParaRPr lang="en-US" sz="2600" dirty="0"/>
+          </a:p>
+        </p:txBody>
+      </p:sp>
+      <p:sp>
+        <p:nvSpPr>
+          <p:cNvPr id="9" name="Text 6"/>
+          <p:cNvSpPr/>
+          <p:nvPr/>
+        </p:nvSpPr>
+        <p:spPr>
+          <a:xfrm>
+            <a:off x="548640" y="1325880"/>
+            <a:ext cx="5394960" cy="411480"/>
+          </a:xfrm>
+          <a:prstGeom prst="rect">
+            <a:avLst/>
+          </a:prstGeom>
+          <a:noFill/>
+          <a:ln/>
+        </p:spPr>
+        <p:txBody>
+          <a:bodyPr wrap="square" rtlCol="0" anchor="ctr"/>
+          <a:lstStyle/>
+          <a:p>
+            <a:pPr indent="0" marL="0">
+              <a:buNone/>
+            </a:pPr>
+            <a:r>
+              <a:rPr lang="en-US" sz="1600" b="1" dirty="0">
+                <a:solidFill>
+                  <a:srgbClr val="1B3A6B"/>
+                </a:solidFill>
+                <a:latin typeface="Arial" pitchFamily="34" charset="0"/>
+                <a:ea typeface="Arial" pitchFamily="34" charset="-122"/>
+                <a:cs typeface="Arial" pitchFamily="34" charset="-120"/>
+              </a:rPr>
+              <a:t>Exercícios</a:t>
+            </a:r>
+            <a:endParaRPr lang="en-US" sz="1600" dirty="0"/>
+          </a:p>
+        </p:txBody>
+      </p:sp>
+      <p:sp>
+        <p:nvSpPr>
+          <p:cNvPr id="10" name="Text 7"/>
+          <p:cNvSpPr/>
+          <p:nvPr/>
+        </p:nvSpPr>
+        <p:spPr>
+          <a:xfrm>
+            <a:off x="548640" y="1783080"/>
+            <a:ext cx="5394960" cy="4480560"/>
+          </a:xfrm>
+          <a:prstGeom prst="rect">
+            <a:avLst/>
+          </a:prstGeom>
+          <a:noFill/>
+          <a:ln/>
+        </p:spPr>
+        <p:txBody>
+          <a:bodyPr wrap="square" rtlCol="0" anchor="t">
+            <a:normAutofit/>
+          </a:bodyPr>
+          <a:lstStyle/>
+          <a:p>
+            <a:pPr indent="0" marL="0">
+              <a:spcAft>
+                <a:spcPts val="800"/>
+              </a:spcAft>
+              <a:buNone/>
+            </a:pPr>
+            <a:r>
+              <a:rPr lang="en-US" sz="1600" dirty="0">
+                <a:solidFill>
+                  <a:srgbClr val="1F2937"/>
+                </a:solidFill>
+                <a:latin typeface="Arial" pitchFamily="34" charset="0"/>
+                <a:ea typeface="Arial" pitchFamily="34" charset="-122"/>
+                <a:cs typeface="Arial" pitchFamily="34" charset="-120"/>
+              </a:rPr>
+              <a:t>1. Liste 8 perguntas para levar ao contador (regime da gestora, ISS, tributação da entidade, ICMS na sua UF, reforma tributária…).</a:t>
+            </a:r>
+            <a:endParaRPr lang="en-US" sz="1600" dirty="0"/>
+          </a:p>
+          <a:p>
+            <a:pPr indent="0" marL="0">
+              <a:spcAft>
+                <a:spcPts val="800"/>
+              </a:spcAft>
+              <a:buNone/>
+            </a:pPr>
+            <a:r>
+              <a:rPr lang="en-US" sz="1600" dirty="0">
+                <a:solidFill>
+                  <a:srgbClr val="1F2937"/>
+                </a:solidFill>
+                <a:latin typeface="Arial" pitchFamily="34" charset="0"/>
+                <a:ea typeface="Arial" pitchFamily="34" charset="-122"/>
+                <a:cs typeface="Arial" pitchFamily="34" charset="-120"/>
+              </a:rPr>
+              <a:t>2. Classifique 10 riscos na matriz e escolha os 3 que você mitiga primeiro.</a:t>
+            </a:r>
+            <a:endParaRPr lang="en-US" sz="1600" dirty="0"/>
+          </a:p>
+          <a:p>
+            <a:pPr indent="0" marL="0">
+              <a:spcAft>
+                <a:spcPts val="800"/>
+              </a:spcAft>
+              <a:buNone/>
+            </a:pPr>
+            <a:r>
+              <a:rPr lang="en-US" sz="1600" dirty="0">
+                <a:solidFill>
+                  <a:srgbClr val="1F2937"/>
+                </a:solidFill>
+                <a:latin typeface="Arial" pitchFamily="34" charset="0"/>
+                <a:ea typeface="Arial" pitchFamily="34" charset="-122"/>
+                <a:cs typeface="Arial" pitchFamily="34" charset="-120"/>
+              </a:rPr>
+              <a:t>3. Desenhe o organograma da empresa com 300 e com 1.500 clientes.</a:t>
+            </a:r>
+            <a:endParaRPr lang="en-US" sz="1600" dirty="0"/>
+          </a:p>
+        </p:txBody>
+      </p:sp>
+      <p:sp>
+        <p:nvSpPr>
+          <p:cNvPr id="11" name="Shape 8"/>
+          <p:cNvSpPr/>
+          <p:nvPr/>
+        </p:nvSpPr>
+        <p:spPr>
+          <a:xfrm>
+            <a:off x="6172200" y="1325880"/>
+            <a:ext cx="5468112" cy="4937760"/>
+          </a:xfrm>
+          <a:prstGeom prst="roundRect">
+            <a:avLst>
+              <a:gd name="adj" fmla="val 1852"/>
+            </a:avLst>
+          </a:prstGeom>
+          <a:solidFill>
+            <a:srgbClr val="1B3A6B"/>
+          </a:solidFill>
+          <a:ln/>
+        </p:spPr>
+      </p:sp>
+      <p:sp>
+        <p:nvSpPr>
+          <p:cNvPr id="12" name="Text 9"/>
+          <p:cNvSpPr/>
+          <p:nvPr/>
+        </p:nvSpPr>
+        <p:spPr>
+          <a:xfrm>
+            <a:off x="6492240" y="1554480"/>
+            <a:ext cx="4828032" cy="4480560"/>
+          </a:xfrm>
+          <a:prstGeom prst="rect">
+            <a:avLst/>
+          </a:prstGeom>
+          <a:noFill/>
+          <a:ln/>
+        </p:spPr>
+        <p:txBody>
+          <a:bodyPr wrap="square" rtlCol="0" anchor="t">
+            <a:normAutofit/>
+          </a:bodyPr>
+          <a:lstStyle/>
+          <a:p>
+            <a:pPr indent="0" marL="0">
+              <a:buNone/>
+            </a:pPr>
+            <a:r>
+              <a:rPr lang="en-US" sz="1300" b="1" spc="100" kern="0" dirty="0">
+                <a:solidFill>
+                  <a:srgbClr val="F7A23B"/>
+                </a:solidFill>
+                <a:latin typeface="Arial" pitchFamily="34" charset="0"/>
+                <a:ea typeface="Arial" pitchFamily="34" charset="-122"/>
+                <a:cs typeface="Arial" pitchFamily="34" charset="-120"/>
+              </a:rPr>
+              <a:t>ENTREGÁVEL DO MÓDULO
+</a:t>
+            </a:r>
+            <a:pPr indent="0" marL="0">
+              <a:buNone/>
+            </a:pPr>
+            <a:r>
+              <a:rPr lang="en-US" sz="1600" dirty="0">
+                <a:solidFill>
+                  <a:srgbClr val="FFFFFF"/>
+                </a:solidFill>
+                <a:latin typeface="Arial" pitchFamily="34" charset="0"/>
+                <a:ea typeface="Arial" pitchFamily="34" charset="-122"/>
+                <a:cs typeface="Arial" pitchFamily="34" charset="-120"/>
+              </a:rPr>
+              <a:t>Plano de negócio em uma página + matriz de riscos (10 riscos com probabilidade, impacto e mitigação) + identidade visual da sua empresa aplicada no laboratório.</a:t>
+            </a:r>
+            <a:endParaRPr lang="en-US" sz="1300" dirty="0"/>
+          </a:p>
+        </p:txBody>
+      </p:sp>
+      <p:sp>
+        <p:nvSpPr>
+          <p:cNvPr id="25" name="Slide Number Placeholder 0"/>
+          <p:cNvSpPr>
+            <a:spLocks noGrp="1"/>
+          </p:cNvSpPr>
+          <p:nvPr>
+            <p:ph type="sldNum" sz="quarter" idx="4294967295"/>
+          </p:nvPr>
+        </p:nvSpPr>
+        <p:spPr>
+          <a:xfrm>
+            <a:off x="11292840" y="6556248"/>
+            <a:ext cx="548640" cy="256032"/>
+          </a:xfrm>
+          <a:prstGeom prst="rect">
+            <a:avLst/>
+          </a:prstGeom>
+          <a:extLst>
+            <a:ext uri="{C572A759-6A51-4108-AA02-DFA0A04FC94B}">
+              <ma14:wrappingTextBoxFlag xmlns:ma14="http://schemas.microsoft.com/office/mac/drawingml/2011/main" val="0"/>
+            </a:ext>
+          </a:extLst>
+        </p:spPr>
+        <p:txBody>
+          <a:bodyPr/>
+          <a:lstStyle>
+            <a:lvl1pPr>
+              <a:defRPr sz="900">
+                <a:solidFill>
+                  <a:srgbClr val="1B3A6B"/>
+                </a:solidFill>
+                <a:latin typeface="Arial"/>
+                <a:ea typeface="Arial"/>
+                <a:cs typeface="Arial"/>
+              </a:defRPr>
+            </a:lvl1pPr>
+          </a:lstStyle>
+          <a:p>
+            <a:pPr algn="r"/>
+            <a:fld id="{F7021451-1387-4CA6-816F-3879F97B5CBC}" type="slidenum">
+              <a:rPr b="1" lang="en-US"/>
+              <a:t>31</a:t>
             </a:fld>
             <a:endParaRPr lang="en-US"/>
           </a:p>
@@ -17144,7 +23241,7 @@
         <p:spPr>
           <a:xfrm>
             <a:off x="548640" y="1325880"/>
-            <a:ext cx="5486400" cy="4937760"/>
+            <a:ext cx="5486400" cy="3977640"/>
           </a:xfrm>
           <a:prstGeom prst="rect">
             <a:avLst/>
@@ -17248,7 +23345,7 @@
         <p:spPr>
           <a:xfrm>
             <a:off x="6263640" y="1325880"/>
-            <a:ext cx="5486400" cy="4937760"/>
+            <a:ext cx="5486400" cy="3977640"/>
           </a:xfrm>
           <a:prstGeom prst="rect">
             <a:avLst/>
@@ -17320,6 +23417,92 @@
               <a:t>☐ Política de privacidade e termos de uso do portal</a:t>
             </a:r>
             <a:endParaRPr lang="en-US" sz="1800" dirty="0"/>
+          </a:p>
+        </p:txBody>
+      </p:sp>
+      <p:sp>
+        <p:nvSpPr>
+          <p:cNvPr id="11" name="Shape 8"/>
+          <p:cNvSpPr/>
+          <p:nvPr/>
+        </p:nvSpPr>
+        <p:spPr>
+          <a:xfrm>
+            <a:off x="548640" y="5413248"/>
+            <a:ext cx="11091672" cy="868680"/>
+          </a:xfrm>
+          <a:prstGeom prst="roundRect">
+            <a:avLst>
+              <a:gd name="adj" fmla="val 8421"/>
+            </a:avLst>
+          </a:prstGeom>
+          <a:solidFill>
+            <a:srgbClr val="EEF3FA"/>
+          </a:solidFill>
+          <a:ln w="6350">
+            <a:solidFill>
+              <a:srgbClr val="D8E0EC"/>
+            </a:solidFill>
+            <a:prstDash val="solid"/>
+          </a:ln>
+        </p:spPr>
+      </p:sp>
+      <p:sp>
+        <p:nvSpPr>
+          <p:cNvPr id="12" name="Shape 9"/>
+          <p:cNvSpPr/>
+          <p:nvPr/>
+        </p:nvSpPr>
+        <p:spPr>
+          <a:xfrm>
+            <a:off x="548640" y="5413248"/>
+            <a:ext cx="91440" cy="868680"/>
+          </a:xfrm>
+          <a:prstGeom prst="rect">
+            <a:avLst/>
+          </a:prstGeom>
+          <a:solidFill>
+            <a:srgbClr val="F7A23B"/>
+          </a:solidFill>
+          <a:ln/>
+        </p:spPr>
+      </p:sp>
+      <p:sp>
+        <p:nvSpPr>
+          <p:cNvPr id="13" name="Text 10"/>
+          <p:cNvSpPr/>
+          <p:nvPr/>
+        </p:nvSpPr>
+        <p:spPr>
+          <a:xfrm>
+            <a:off x="777240" y="5458968"/>
+            <a:ext cx="10744200" cy="777240"/>
+          </a:xfrm>
+          <a:prstGeom prst="rect">
+            <a:avLst/>
+          </a:prstGeom>
+          <a:noFill/>
+          <a:ln/>
+        </p:spPr>
+        <p:txBody>
+          <a:bodyPr wrap="square" rtlCol="0" anchor="ctr"/>
+          <a:lstStyle/>
+          <a:p>
+            <a:pPr indent="0" marL="0">
+              <a:buNone/>
+            </a:pPr>
+            <a:r>
+              <a:rPr lang="en-US" sz="1500" dirty="0">
+                <a:solidFill>
+                  <a:srgbClr val="1F2937"/>
+                </a:solidFill>
+                <a:latin typeface="Arial" pitchFamily="34" charset="0"/>
+                <a:ea typeface="Arial" pitchFamily="34" charset="-122"/>
+                <a:cs typeface="Arial" pitchFamily="34" charset="-120"/>
+              </a:rPr>
+              <a:t>Faça o inventário dos contratos da tela, com cláusulas de reequilíbrio coerentes entre si.</a:t>
+            </a:r>
+            <a:endParaRPr lang="en-US" sz="1500" dirty="0"/>
           </a:p>
         </p:txBody>
       </p:sp>
@@ -17639,7 +23822,7 @@
         <p:spPr>
           <a:xfrm>
             <a:off x="548640" y="1325880"/>
-            <a:ext cx="3544824" cy="4892040"/>
+            <a:ext cx="3544824" cy="3977640"/>
           </a:xfrm>
           <a:prstGeom prst="roundRect">
             <a:avLst>
@@ -17732,7 +23915,7 @@
         <p:spPr>
           <a:xfrm>
             <a:off x="1325880" y="1435608"/>
-            <a:ext cx="2630424" cy="4672584"/>
+            <a:ext cx="2630424" cy="3758184"/>
           </a:xfrm>
           <a:prstGeom prst="rect">
             <a:avLst/>
@@ -17773,7 +23956,7 @@
         <p:spPr>
           <a:xfrm>
             <a:off x="4322064" y="1325880"/>
-            <a:ext cx="3544824" cy="4892040"/>
+            <a:ext cx="3544824" cy="3977640"/>
           </a:xfrm>
           <a:prstGeom prst="roundRect">
             <a:avLst>
@@ -17866,7 +24049,7 @@
         <p:spPr>
           <a:xfrm>
             <a:off x="5099304" y="1435608"/>
-            <a:ext cx="2630424" cy="4672584"/>
+            <a:ext cx="2630424" cy="3758184"/>
           </a:xfrm>
           <a:prstGeom prst="rect">
             <a:avLst/>
@@ -17907,7 +24090,7 @@
         <p:spPr>
           <a:xfrm>
             <a:off x="8095488" y="1325880"/>
-            <a:ext cx="3544824" cy="4892040"/>
+            <a:ext cx="3544824" cy="3977640"/>
           </a:xfrm>
           <a:prstGeom prst="roundRect">
             <a:avLst>
@@ -18000,7 +24183,7 @@
         <p:spPr>
           <a:xfrm>
             <a:off x="8872728" y="1435608"/>
-            <a:ext cx="2630424" cy="4672584"/>
+            <a:ext cx="2630424" cy="3758184"/>
           </a:xfrm>
           <a:prstGeom prst="rect">
             <a:avLst/>
@@ -18029,6 +24212,92 @@
               <a:t>atenção a conflito de interesse com o investidor</a:t>
             </a:r>
             <a:endParaRPr lang="en-US" sz="1800" dirty="0"/>
+          </a:p>
+        </p:txBody>
+      </p:sp>
+      <p:sp>
+        <p:nvSpPr>
+          <p:cNvPr id="21" name="Shape 18"/>
+          <p:cNvSpPr/>
+          <p:nvPr/>
+        </p:nvSpPr>
+        <p:spPr>
+          <a:xfrm>
+            <a:off x="548640" y="5413248"/>
+            <a:ext cx="11091672" cy="868680"/>
+          </a:xfrm>
+          <a:prstGeom prst="roundRect">
+            <a:avLst>
+              <a:gd name="adj" fmla="val 8421"/>
+            </a:avLst>
+          </a:prstGeom>
+          <a:solidFill>
+            <a:srgbClr val="EEF3FA"/>
+          </a:solidFill>
+          <a:ln w="6350">
+            <a:solidFill>
+              <a:srgbClr val="D8E0EC"/>
+            </a:solidFill>
+            <a:prstDash val="solid"/>
+          </a:ln>
+        </p:spPr>
+      </p:sp>
+      <p:sp>
+        <p:nvSpPr>
+          <p:cNvPr id="22" name="Shape 19"/>
+          <p:cNvSpPr/>
+          <p:nvPr/>
+        </p:nvSpPr>
+        <p:spPr>
+          <a:xfrm>
+            <a:off x="548640" y="5413248"/>
+            <a:ext cx="91440" cy="868680"/>
+          </a:xfrm>
+          <a:prstGeom prst="rect">
+            <a:avLst/>
+          </a:prstGeom>
+          <a:solidFill>
+            <a:srgbClr val="F7A23B"/>
+          </a:solidFill>
+          <a:ln/>
+        </p:spPr>
+      </p:sp>
+      <p:sp>
+        <p:nvSpPr>
+          <p:cNvPr id="23" name="Text 20"/>
+          <p:cNvSpPr/>
+          <p:nvPr/>
+        </p:nvSpPr>
+        <p:spPr>
+          <a:xfrm>
+            <a:off x="777240" y="5458968"/>
+            <a:ext cx="10744200" cy="777240"/>
+          </a:xfrm>
+          <a:prstGeom prst="rect">
+            <a:avLst/>
+          </a:prstGeom>
+          <a:noFill/>
+          <a:ln/>
+        </p:spPr>
+        <p:txBody>
+          <a:bodyPr wrap="square" rtlCol="0" anchor="ctr"/>
+          <a:lstStyle/>
+          <a:p>
+            <a:pPr indent="0" marL="0">
+              <a:buNone/>
+            </a:pPr>
+            <a:r>
+              <a:rPr lang="en-US" sz="1500" dirty="0">
+                <a:solidFill>
+                  <a:srgbClr val="1F2937"/>
+                </a:solidFill>
+                <a:latin typeface="Arial" pitchFamily="34" charset="0"/>
+                <a:ea typeface="Arial" pitchFamily="34" charset="-122"/>
+                <a:cs typeface="Arial" pitchFamily="34" charset="-120"/>
+              </a:rPr>
+              <a:t>Se você já tem integradora, contrate obra e manutenção a preço de mercado. O investidor vai perguntar.</a:t>
+            </a:r>
+            <a:endParaRPr lang="en-US" sz="1500" dirty="0"/>
           </a:p>
         </p:txBody>
       </p:sp>
@@ -19842,7 +26111,7 @@
         <p:spPr>
           <a:xfrm>
             <a:off x="822960" y="2286000"/>
-            <a:ext cx="2965704" cy="3749040"/>
+            <a:ext cx="2965704" cy="2286000"/>
           </a:xfrm>
           <a:prstGeom prst="rect">
             <a:avLst/>
@@ -19864,7 +26133,7 @@
               <a:buChar char="●"/>
             </a:pPr>
             <a:r>
-              <a:rPr lang="en-US" sz="1700" dirty="0">
+              <a:rPr lang="en-US" sz="1200" dirty="0">
                 <a:solidFill>
                   <a:srgbClr val="1F2937"/>
                 </a:solidFill>
@@ -19874,7 +26143,7 @@
               </a:rPr>
               <a:t>PIS/COFINS: alíquota zero sobre a energia compensada (Lei 13.169/2015)</a:t>
             </a:r>
-            <a:endParaRPr lang="en-US" sz="1700" dirty="0"/>
+            <a:endParaRPr lang="en-US" sz="1200" dirty="0"/>
           </a:p>
           <a:p>
             <a:pPr marL="342900" indent="-342900">
@@ -19885,7 +26154,7 @@
               <a:buChar char="●"/>
             </a:pPr>
             <a:r>
-              <a:rPr lang="en-US" sz="1700" dirty="0">
+              <a:rPr lang="en-US" sz="1200" dirty="0">
                 <a:solidFill>
                   <a:srgbClr val="1F2937"/>
                 </a:solidFill>
@@ -19895,7 +26164,7 @@
               </a:rPr>
               <a:t>ICMS: isenção sobre a energia compensada pelo Convênio ICMS 16/2015, conforme adesão e condições de cada estado</a:t>
             </a:r>
-            <a:endParaRPr lang="en-US" sz="1700" dirty="0"/>
+            <a:endParaRPr lang="en-US" sz="1200" dirty="0"/>
           </a:p>
           <a:p>
             <a:pPr marL="342900" indent="-342900">
@@ -19906,7 +26175,7 @@
               <a:buChar char="●"/>
             </a:pPr>
             <a:r>
-              <a:rPr lang="en-US" sz="1700" dirty="0">
+              <a:rPr lang="en-US" sz="1200" dirty="0">
                 <a:solidFill>
                   <a:srgbClr val="1F2937"/>
                 </a:solidFill>
@@ -19916,13 +26185,72 @@
               </a:rPr>
               <a:t>Parcela não compensada (ex.: Fio B, mínimo): tributada normalmente</a:t>
             </a:r>
-            <a:endParaRPr lang="en-US" sz="1700" dirty="0"/>
+            <a:endParaRPr lang="en-US" sz="1200" dirty="0"/>
           </a:p>
         </p:txBody>
       </p:sp>
       <p:sp>
         <p:nvSpPr>
           <p:cNvPr id="13" name="Shape 10"/>
+          <p:cNvSpPr/>
+          <p:nvPr/>
+        </p:nvSpPr>
+        <p:spPr>
+          <a:xfrm>
+            <a:off x="822960" y="4663440"/>
+            <a:ext cx="2965704" cy="18288"/>
+          </a:xfrm>
+          <a:prstGeom prst="rect">
+            <a:avLst/>
+          </a:prstGeom>
+          <a:solidFill>
+            <a:srgbClr val="D8E0EC"/>
+          </a:solidFill>
+          <a:ln/>
+        </p:spPr>
+      </p:sp>
+      <p:sp>
+        <p:nvSpPr>
+          <p:cNvPr id="14" name="Text 11"/>
+          <p:cNvSpPr/>
+          <p:nvPr/>
+        </p:nvSpPr>
+        <p:spPr>
+          <a:xfrm>
+            <a:off x="822960" y="4754880"/>
+            <a:ext cx="2965704" cy="1371600"/>
+          </a:xfrm>
+          <a:prstGeom prst="rect">
+            <a:avLst/>
+          </a:prstGeom>
+          <a:noFill/>
+          <a:ln/>
+        </p:spPr>
+        <p:txBody>
+          <a:bodyPr wrap="square" rtlCol="0" anchor="t"/>
+          <a:lstStyle/>
+          <a:p>
+            <a:pPr indent="0" marL="0">
+              <a:buNone/>
+            </a:pPr>
+            <a:r>
+              <a:rPr lang="en-US" sz="1300" i="1" dirty="0">
+                <a:solidFill>
+                  <a:srgbClr val="64748B"/>
+                </a:solidFill>
+                <a:latin typeface="Arial" pitchFamily="34" charset="0"/>
+                <a:ea typeface="Arial" pitchFamily="34" charset="-122"/>
+                <a:cs typeface="Arial" pitchFamily="34" charset="-120"/>
+              </a:rPr>
+              <a:t>Sobre a energia compensada há regras federais e estaduais específicas, que mudam o valor do crédito e a economia do cliente. Confira a regra do seu estado numa fatura real.</a:t>
+            </a:r>
+            <a:endParaRPr lang="en-US" sz="1300" dirty="0"/>
+          </a:p>
+        </p:txBody>
+      </p:sp>
+      <p:sp>
+        <p:nvSpPr>
+          <p:cNvPr id="15" name="Shape 12"/>
           <p:cNvSpPr/>
           <p:nvPr/>
         </p:nvSpPr>
@@ -19956,7 +26284,7 @@
       </p:sp>
       <p:sp>
         <p:nvSpPr>
-          <p:cNvPr id="14" name="Shape 11"/>
+          <p:cNvPr id="16" name="Shape 13"/>
           <p:cNvSpPr/>
           <p:nvPr/>
         </p:nvSpPr>
@@ -19976,7 +26304,7 @@
       </p:sp>
       <p:sp>
         <p:nvSpPr>
-          <p:cNvPr id="15" name="Text 12"/>
+          <p:cNvPr id="17" name="Text 14"/>
           <p:cNvSpPr/>
           <p:nvPr/>
         </p:nvSpPr>
@@ -20017,14 +26345,14 @@
       </p:sp>
       <p:sp>
         <p:nvSpPr>
-          <p:cNvPr id="16" name="Text 13"/>
+          <p:cNvPr id="18" name="Text 15"/>
           <p:cNvSpPr/>
           <p:nvPr/>
         </p:nvSpPr>
         <p:spPr>
           <a:xfrm>
             <a:off x="4611624" y="2286000"/>
-            <a:ext cx="2965704" cy="3749040"/>
+            <a:ext cx="2965704" cy="2286000"/>
           </a:xfrm>
           <a:prstGeom prst="rect">
             <a:avLst/>
@@ -20046,7 +26374,7 @@
               <a:buChar char="●"/>
             </a:pPr>
             <a:r>
-              <a:rPr lang="en-US" sz="1600" dirty="0">
+              <a:rPr lang="en-US" sz="1100" dirty="0">
                 <a:solidFill>
                   <a:srgbClr val="1F2937"/>
                 </a:solidFill>
@@ -20056,7 +26384,7 @@
               </a:rPr>
               <a:t>Simples Nacional: guia única; atenção ao anexo e ao fator R para serviços</a:t>
             </a:r>
-            <a:endParaRPr lang="en-US" sz="1600" dirty="0"/>
+            <a:endParaRPr lang="en-US" sz="1100" dirty="0"/>
           </a:p>
           <a:p>
             <a:pPr marL="342900" indent="-342900">
@@ -20067,7 +26395,7 @@
               <a:buChar char="●"/>
             </a:pPr>
             <a:r>
-              <a:rPr lang="en-US" sz="1600" dirty="0">
+              <a:rPr lang="en-US" sz="1100" dirty="0">
                 <a:solidFill>
                   <a:srgbClr val="1F2937"/>
                 </a:solidFill>
@@ -20077,7 +26405,7 @@
               </a:rPr>
               <a:t>Lucro Presumido: IRPJ/CSLL sobre base presumida de serviços + PIS/COFINS cumulativos + ISS</a:t>
             </a:r>
-            <a:endParaRPr lang="en-US" sz="1600" dirty="0"/>
+            <a:endParaRPr lang="en-US" sz="1100" dirty="0"/>
           </a:p>
           <a:p>
             <a:pPr marL="342900" indent="-342900">
@@ -20088,7 +26416,7 @@
               <a:buChar char="●"/>
             </a:pPr>
             <a:r>
-              <a:rPr lang="en-US" sz="1600" dirty="0">
+              <a:rPr lang="en-US" sz="1100" dirty="0">
                 <a:solidFill>
                   <a:srgbClr val="1F2937"/>
                 </a:solidFill>
@@ -20098,7 +26426,7 @@
               </a:rPr>
               <a:t>Lucro Real: para margens baixas/estruturas maiores</a:t>
             </a:r>
-            <a:endParaRPr lang="en-US" sz="1600" dirty="0"/>
+            <a:endParaRPr lang="en-US" sz="1100" dirty="0"/>
           </a:p>
           <a:p>
             <a:pPr marL="342900" indent="-342900">
@@ -20109,7 +26437,7 @@
               <a:buChar char="●"/>
             </a:pPr>
             <a:r>
-              <a:rPr lang="en-US" sz="1600" dirty="0">
+              <a:rPr lang="en-US" sz="1100" dirty="0">
                 <a:solidFill>
                   <a:srgbClr val="1F2937"/>
                 </a:solidFill>
@@ -20119,13 +26447,72 @@
               </a:rPr>
               <a:t>ISS municipal sobre a taxa de gestão (alíquota do município)</a:t>
             </a:r>
-            <a:endParaRPr lang="en-US" sz="1600" dirty="0"/>
-          </a:p>
-        </p:txBody>
-      </p:sp>
-      <p:sp>
-        <p:nvSpPr>
-          <p:cNvPr id="17" name="Shape 14"/>
+            <a:endParaRPr lang="en-US" sz="1100" dirty="0"/>
+          </a:p>
+        </p:txBody>
+      </p:sp>
+      <p:sp>
+        <p:nvSpPr>
+          <p:cNvPr id="19" name="Shape 16"/>
+          <p:cNvSpPr/>
+          <p:nvPr/>
+        </p:nvSpPr>
+        <p:spPr>
+          <a:xfrm>
+            <a:off x="4611624" y="4663440"/>
+            <a:ext cx="2965704" cy="18288"/>
+          </a:xfrm>
+          <a:prstGeom prst="rect">
+            <a:avLst/>
+          </a:prstGeom>
+          <a:solidFill>
+            <a:srgbClr val="D8E0EC"/>
+          </a:solidFill>
+          <a:ln/>
+        </p:spPr>
+      </p:sp>
+      <p:sp>
+        <p:nvSpPr>
+          <p:cNvPr id="20" name="Text 17"/>
+          <p:cNvSpPr/>
+          <p:nvPr/>
+        </p:nvSpPr>
+        <p:spPr>
+          <a:xfrm>
+            <a:off x="4611624" y="4754880"/>
+            <a:ext cx="2965704" cy="1371600"/>
+          </a:xfrm>
+          <a:prstGeom prst="rect">
+            <a:avLst/>
+          </a:prstGeom>
+          <a:noFill/>
+          <a:ln/>
+        </p:spPr>
+        <p:txBody>
+          <a:bodyPr wrap="square" rtlCol="0" anchor="t"/>
+          <a:lstStyle/>
+          <a:p>
+            <a:pPr indent="0" marL="0">
+              <a:buNone/>
+            </a:pPr>
+            <a:r>
+              <a:rPr lang="en-US" sz="1300" i="1" dirty="0">
+                <a:solidFill>
+                  <a:srgbClr val="64748B"/>
+                </a:solidFill>
+                <a:latin typeface="Arial" pitchFamily="34" charset="0"/>
+                <a:ea typeface="Arial" pitchFamily="34" charset="-122"/>
+                <a:cs typeface="Arial" pitchFamily="34" charset="-120"/>
+              </a:rPr>
+              <a:t>A gestora recebe por serviço. O regime tributário muda a margem, e o imposto real entra na calculadora.</a:t>
+            </a:r>
+            <a:endParaRPr lang="en-US" sz="1300" dirty="0"/>
+          </a:p>
+        </p:txBody>
+      </p:sp>
+      <p:sp>
+        <p:nvSpPr>
+          <p:cNvPr id="21" name="Shape 18"/>
           <p:cNvSpPr/>
           <p:nvPr/>
         </p:nvSpPr>
@@ -20159,7 +26546,7 @@
       </p:sp>
       <p:sp>
         <p:nvSpPr>
-          <p:cNvPr id="18" name="Shape 15"/>
+          <p:cNvPr id="22" name="Shape 19"/>
           <p:cNvSpPr/>
           <p:nvPr/>
         </p:nvSpPr>
@@ -20179,7 +26566,7 @@
       </p:sp>
       <p:sp>
         <p:nvSpPr>
-          <p:cNvPr id="19" name="Text 16"/>
+          <p:cNvPr id="23" name="Text 20"/>
           <p:cNvSpPr/>
           <p:nvPr/>
         </p:nvSpPr>
@@ -20220,14 +26607,14 @@
       </p:sp>
       <p:sp>
         <p:nvSpPr>
-          <p:cNvPr id="20" name="Text 17"/>
+          <p:cNvPr id="24" name="Text 21"/>
           <p:cNvSpPr/>
           <p:nvPr/>
         </p:nvSpPr>
         <p:spPr>
           <a:xfrm>
             <a:off x="8400288" y="2286000"/>
-            <a:ext cx="2965704" cy="3749040"/>
+            <a:ext cx="2965704" cy="2286000"/>
           </a:xfrm>
           <a:prstGeom prst="rect">
             <a:avLst/>
@@ -20249,7 +26636,7 @@
               <a:buChar char="●"/>
             </a:pPr>
             <a:r>
-              <a:rPr lang="en-US" sz="1700" dirty="0">
+              <a:rPr lang="en-US" sz="1400" dirty="0">
                 <a:solidFill>
                   <a:srgbClr val="1F2937"/>
                 </a:solidFill>
@@ -20259,7 +26646,7 @@
               </a:rPr>
               <a:t>Consórcio: tributação nas consorciadas, conforme contrato</a:t>
             </a:r>
-            <a:endParaRPr lang="en-US" sz="1700" dirty="0"/>
+            <a:endParaRPr lang="en-US" sz="1400" dirty="0"/>
           </a:p>
           <a:p>
             <a:pPr marL="342900" indent="-342900">
@@ -20270,7 +26657,7 @@
               <a:buChar char="●"/>
             </a:pPr>
             <a:r>
-              <a:rPr lang="en-US" sz="1700" dirty="0">
+              <a:rPr lang="en-US" sz="1400" dirty="0">
                 <a:solidFill>
                   <a:srgbClr val="1F2937"/>
                 </a:solidFill>
@@ -20280,7 +26667,7 @@
               </a:rPr>
               <a:t>Cooperativa: ato cooperativo</a:t>
             </a:r>
-            <a:endParaRPr lang="en-US" sz="1700" dirty="0"/>
+            <a:endParaRPr lang="en-US" sz="1400" dirty="0"/>
           </a:p>
           <a:p>
             <a:pPr marL="342900" indent="-342900">
@@ -20291,7 +26678,7 @@
               <a:buChar char="●"/>
             </a:pPr>
             <a:r>
-              <a:rPr lang="en-US" sz="1700" dirty="0">
+              <a:rPr lang="en-US" sz="1400" dirty="0">
                 <a:solidFill>
                   <a:srgbClr val="1F2937"/>
                 </a:solidFill>
@@ -20301,7 +26688,7 @@
               </a:rPr>
               <a:t>Associação: regras de entidade sem fins lucrativos</a:t>
             </a:r>
-            <a:endParaRPr lang="en-US" sz="1700" dirty="0"/>
+            <a:endParaRPr lang="en-US" sz="1400" dirty="0"/>
           </a:p>
           <a:p>
             <a:pPr marL="342900" indent="-342900">
@@ -20312,7 +26699,7 @@
               <a:buChar char="●"/>
             </a:pPr>
             <a:r>
-              <a:rPr lang="en-US" sz="1700" dirty="0">
+              <a:rPr lang="en-US" sz="1400" dirty="0">
                 <a:solidFill>
                   <a:srgbClr val="1F2937"/>
                 </a:solidFill>
@@ -20322,7 +26709,66 @@
               </a:rPr>
               <a:t>Locação ao produtor: rendimento tributado do produtor</a:t>
             </a:r>
-            <a:endParaRPr lang="en-US" sz="1700" dirty="0"/>
+            <a:endParaRPr lang="en-US" sz="1400" dirty="0"/>
+          </a:p>
+        </p:txBody>
+      </p:sp>
+      <p:sp>
+        <p:nvSpPr>
+          <p:cNvPr id="25" name="Shape 22"/>
+          <p:cNvSpPr/>
+          <p:nvPr/>
+        </p:nvSpPr>
+        <p:spPr>
+          <a:xfrm>
+            <a:off x="8400288" y="4663440"/>
+            <a:ext cx="2965704" cy="18288"/>
+          </a:xfrm>
+          <a:prstGeom prst="rect">
+            <a:avLst/>
+          </a:prstGeom>
+          <a:solidFill>
+            <a:srgbClr val="D8E0EC"/>
+          </a:solidFill>
+          <a:ln/>
+        </p:spPr>
+      </p:sp>
+      <p:sp>
+        <p:nvSpPr>
+          <p:cNvPr id="26" name="Text 23"/>
+          <p:cNvSpPr/>
+          <p:nvPr/>
+        </p:nvSpPr>
+        <p:spPr>
+          <a:xfrm>
+            <a:off x="8400288" y="4754880"/>
+            <a:ext cx="2965704" cy="1371600"/>
+          </a:xfrm>
+          <a:prstGeom prst="rect">
+            <a:avLst/>
+          </a:prstGeom>
+          <a:noFill/>
+          <a:ln/>
+        </p:spPr>
+        <p:txBody>
+          <a:bodyPr wrap="square" rtlCol="0" anchor="t"/>
+          <a:lstStyle/>
+          <a:p>
+            <a:pPr indent="0" marL="0">
+              <a:buNone/>
+            </a:pPr>
+            <a:r>
+              <a:rPr lang="en-US" sz="1300" i="1" dirty="0">
+                <a:solidFill>
+                  <a:srgbClr val="64748B"/>
+                </a:solidFill>
+                <a:latin typeface="Arial" pitchFamily="34" charset="0"/>
+                <a:ea typeface="Arial" pitchFamily="34" charset="-122"/>
+                <a:cs typeface="Arial" pitchFamily="34" charset="-120"/>
+              </a:rPr>
+              <a:t>A forma da entidade e o aluguel do produtor têm tratamentos próprios.</a:t>
+            </a:r>
+            <a:endParaRPr lang="en-US" sz="1300" dirty="0"/>
           </a:p>
         </p:txBody>
       </p:sp>
@@ -20642,11 +27088,11 @@
         <p:spPr>
           <a:xfrm>
             <a:off x="548640" y="1325880"/>
-            <a:ext cx="5431536" cy="2331720"/>
+            <a:ext cx="5431536" cy="1874520"/>
           </a:xfrm>
           <a:prstGeom prst="roundRect">
             <a:avLst>
-              <a:gd name="adj" fmla="val 3137"/>
+              <a:gd name="adj" fmla="val 3902"/>
             </a:avLst>
           </a:prstGeom>
           <a:solidFill>
@@ -20735,7 +27181,7 @@
         <p:spPr>
           <a:xfrm>
             <a:off x="1325880" y="1435608"/>
-            <a:ext cx="4517136" cy="2112264"/>
+            <a:ext cx="4517136" cy="1655064"/>
           </a:xfrm>
           <a:prstGeom prst="rect">
             <a:avLst/>
@@ -20776,11 +27222,11 @@
         <p:spPr>
           <a:xfrm>
             <a:off x="6208776" y="1325880"/>
-            <a:ext cx="5431536" cy="2331720"/>
+            <a:ext cx="5431536" cy="1874520"/>
           </a:xfrm>
           <a:prstGeom prst="roundRect">
             <a:avLst>
-              <a:gd name="adj" fmla="val 3137"/>
+              <a:gd name="adj" fmla="val 3902"/>
             </a:avLst>
           </a:prstGeom>
           <a:solidFill>
@@ -20869,7 +27315,7 @@
         <p:spPr>
           <a:xfrm>
             <a:off x="6986016" y="1435608"/>
-            <a:ext cx="4517136" cy="2112264"/>
+            <a:ext cx="4517136" cy="1655064"/>
           </a:xfrm>
           <a:prstGeom prst="rect">
             <a:avLst/>
@@ -20909,12 +27355,12 @@
         </p:nvSpPr>
         <p:spPr>
           <a:xfrm>
-            <a:off x="548640" y="3886200"/>
-            <a:ext cx="5431536" cy="2331720"/>
+            <a:off x="548640" y="3429000"/>
+            <a:ext cx="5431536" cy="1874520"/>
           </a:xfrm>
           <a:prstGeom prst="roundRect">
             <a:avLst>
-              <a:gd name="adj" fmla="val 3137"/>
+              <a:gd name="adj" fmla="val 3902"/>
             </a:avLst>
           </a:prstGeom>
           <a:solidFill>
@@ -20943,7 +27389,7 @@
         </p:nvSpPr>
         <p:spPr>
           <a:xfrm>
-            <a:off x="731520" y="4069080"/>
+            <a:off x="731520" y="3611880"/>
             <a:ext cx="457200" cy="457200"/>
           </a:xfrm>
           <a:prstGeom prst="ellipse">
@@ -20963,7 +27409,7 @@
         </p:nvSpPr>
         <p:spPr>
           <a:xfrm>
-            <a:off x="731520" y="4069080"/>
+            <a:off x="731520" y="3611880"/>
             <a:ext cx="457200" cy="457200"/>
           </a:xfrm>
           <a:prstGeom prst="rect">
@@ -21002,8 +27448,8 @@
         </p:nvSpPr>
         <p:spPr>
           <a:xfrm>
-            <a:off x="1325880" y="3995928"/>
-            <a:ext cx="4517136" cy="2112264"/>
+            <a:off x="1325880" y="3538728"/>
+            <a:ext cx="4517136" cy="1655064"/>
           </a:xfrm>
           <a:prstGeom prst="rect">
             <a:avLst/>
@@ -21043,12 +27489,12 @@
         </p:nvSpPr>
         <p:spPr>
           <a:xfrm>
-            <a:off x="6208776" y="3886200"/>
-            <a:ext cx="5431536" cy="2331720"/>
+            <a:off x="6208776" y="3429000"/>
+            <a:ext cx="5431536" cy="1874520"/>
           </a:xfrm>
           <a:prstGeom prst="roundRect">
             <a:avLst>
-              <a:gd name="adj" fmla="val 3137"/>
+              <a:gd name="adj" fmla="val 3902"/>
             </a:avLst>
           </a:prstGeom>
           <a:solidFill>
@@ -21077,7 +27523,7 @@
         </p:nvSpPr>
         <p:spPr>
           <a:xfrm>
-            <a:off x="6391656" y="4069080"/>
+            <a:off x="6391656" y="3611880"/>
             <a:ext cx="457200" cy="457200"/>
           </a:xfrm>
           <a:prstGeom prst="ellipse">
@@ -21097,7 +27543,7 @@
         </p:nvSpPr>
         <p:spPr>
           <a:xfrm>
-            <a:off x="6391656" y="4069080"/>
+            <a:off x="6391656" y="3611880"/>
             <a:ext cx="457200" cy="457200"/>
           </a:xfrm>
           <a:prstGeom prst="rect">
@@ -21136,8 +27582,8 @@
         </p:nvSpPr>
         <p:spPr>
           <a:xfrm>
-            <a:off x="6986016" y="3995928"/>
-            <a:ext cx="4517136" cy="2112264"/>
+            <a:off x="6986016" y="3538728"/>
+            <a:ext cx="4517136" cy="1655064"/>
           </a:xfrm>
           <a:prstGeom prst="rect">
             <a:avLst/>
@@ -21166,6 +27612,92 @@
               <a:t>2033: sistema novo</a:t>
             </a:r>
             <a:endParaRPr lang="en-US" sz="1800" dirty="0"/>
+          </a:p>
+        </p:txBody>
+      </p:sp>
+      <p:sp>
+        <p:nvSpPr>
+          <p:cNvPr id="25" name="Shape 22"/>
+          <p:cNvSpPr/>
+          <p:nvPr/>
+        </p:nvSpPr>
+        <p:spPr>
+          <a:xfrm>
+            <a:off x="548640" y="5413248"/>
+            <a:ext cx="11091672" cy="868680"/>
+          </a:xfrm>
+          <a:prstGeom prst="roundRect">
+            <a:avLst>
+              <a:gd name="adj" fmla="val 8421"/>
+            </a:avLst>
+          </a:prstGeom>
+          <a:solidFill>
+            <a:srgbClr val="EEF3FA"/>
+          </a:solidFill>
+          <a:ln w="6350">
+            <a:solidFill>
+              <a:srgbClr val="D8E0EC"/>
+            </a:solidFill>
+            <a:prstDash val="solid"/>
+          </a:ln>
+        </p:spPr>
+      </p:sp>
+      <p:sp>
+        <p:nvSpPr>
+          <p:cNvPr id="26" name="Shape 23"/>
+          <p:cNvSpPr/>
+          <p:nvPr/>
+        </p:nvSpPr>
+        <p:spPr>
+          <a:xfrm>
+            <a:off x="548640" y="5413248"/>
+            <a:ext cx="91440" cy="868680"/>
+          </a:xfrm>
+          <a:prstGeom prst="rect">
+            <a:avLst/>
+          </a:prstGeom>
+          <a:solidFill>
+            <a:srgbClr val="F7A23B"/>
+          </a:solidFill>
+          <a:ln/>
+        </p:spPr>
+      </p:sp>
+      <p:sp>
+        <p:nvSpPr>
+          <p:cNvPr id="27" name="Text 24"/>
+          <p:cNvSpPr/>
+          <p:nvPr/>
+        </p:nvSpPr>
+        <p:spPr>
+          <a:xfrm>
+            <a:off x="777240" y="5458968"/>
+            <a:ext cx="10744200" cy="777240"/>
+          </a:xfrm>
+          <a:prstGeom prst="rect">
+            <a:avLst/>
+          </a:prstGeom>
+          <a:noFill/>
+          <a:ln/>
+        </p:spPr>
+        <p:txBody>
+          <a:bodyPr wrap="square" rtlCol="0" anchor="ctr"/>
+          <a:lstStyle/>
+          <a:p>
+            <a:pPr indent="0" marL="0">
+              <a:buNone/>
+            </a:pPr>
+            <a:r>
+              <a:rPr lang="en-US" sz="1500" dirty="0">
+                <a:solidFill>
+                  <a:srgbClr val="1F2937"/>
+                </a:solidFill>
+                <a:latin typeface="Arial" pitchFamily="34" charset="0"/>
+                <a:ea typeface="Arial" pitchFamily="34" charset="-122"/>
+                <a:cs typeface="Arial" pitchFamily="34" charset="-120"/>
+              </a:rPr>
+              <a:t>A reforma tributária muda o cenário até 2033. Inclua-a nos cenários e nas cláusulas dos contratos.</a:t>
+            </a:r>
+            <a:endParaRPr lang="en-US" sz="1500" dirty="0"/>
           </a:p>
         </p:txBody>
       </p:sp>

--- a/docs/curso/slides/m11-gestao.pptx
+++ b/docs/curso/slides/m11-gestao.pptx
@@ -3945,7 +3945,7 @@
                 <a:ea typeface="Arial" pitchFamily="34" charset="-122"/>
                 <a:cs typeface="Arial" pitchFamily="34" charset="-120"/>
               </a:rPr>
-              <a:t>5. tecnologia e marca — identidade visual e integrações</a:t>
+              <a:t>5. Tecnologia e marca — identidade visual e integrações</a:t>
             </a:r>
             <a:endParaRPr lang="en-US" sz="1400" dirty="0"/>
           </a:p>
@@ -5181,7 +5181,7 @@
             <a:r>
               <a:rPr lang="en-US" sz="11000" b="1" dirty="0">
                 <a:solidFill>
-                  <a:srgbClr val="11396F"/>
+                  <a:srgbClr val="F7A23B"/>
                 </a:solidFill>
                 <a:latin typeface="Arial" pitchFamily="34" charset="0"/>
                 <a:ea typeface="Arial" pitchFamily="34" charset="-122"/>
@@ -5304,7 +5304,7 @@
                 <a:ea typeface="Arial" pitchFamily="34" charset="-122"/>
                 <a:cs typeface="Arial" pitchFamily="34" charset="-120"/>
               </a:rPr>
-              <a:t>Aula</a:t>
+              <a:t>Aula teórica</a:t>
             </a:r>
             <a:endParaRPr lang="en-US" sz="1400" dirty="0"/>
           </a:p>
@@ -8656,7 +8656,7 @@
             <a:r>
               <a:rPr lang="en-US" sz="11000" b="1" dirty="0">
                 <a:solidFill>
-                  <a:srgbClr val="11396F"/>
+                  <a:srgbClr val="F7A23B"/>
                 </a:solidFill>
                 <a:latin typeface="Arial" pitchFamily="34" charset="0"/>
                 <a:ea typeface="Arial" pitchFamily="34" charset="-122"/>
@@ -8779,7 +8779,7 @@
                 <a:ea typeface="Arial" pitchFamily="34" charset="-122"/>
                 <a:cs typeface="Arial" pitchFamily="34" charset="-120"/>
               </a:rPr>
-              <a:t>Aula</a:t>
+              <a:t>Aula teórica</a:t>
             </a:r>
             <a:endParaRPr lang="en-US" sz="1400" dirty="0"/>
           </a:p>
@@ -9506,7 +9506,7 @@
               <a:buNone/>
             </a:pPr>
             <a:r>
-              <a:rPr lang="en-US" sz="1300" i="1" dirty="0">
+              <a:rPr lang="en-US" sz="1400" i="1" dirty="0">
                 <a:solidFill>
                   <a:srgbClr val="64748B"/>
                 </a:solidFill>
@@ -9516,7 +9516,7 @@
               </a:rPr>
               <a:t>Na primeira fase, a estrutura é mínima e o dono conhece cada processo por dentro.</a:t>
             </a:r>
-            <a:endParaRPr lang="en-US" sz="1300" dirty="0"/>
+            <a:endParaRPr lang="en-US" sz="1400" dirty="0"/>
           </a:p>
         </p:txBody>
       </p:sp>
@@ -9789,7 +9789,7 @@
               <a:buNone/>
             </a:pPr>
             <a:r>
-              <a:rPr lang="en-US" sz="1300" i="1" dirty="0">
+              <a:rPr lang="en-US" sz="1400" i="1" dirty="0">
                 <a:solidFill>
                   <a:srgbClr val="64748B"/>
                 </a:solidFill>
@@ -9799,7 +9799,7 @@
               </a:rPr>
               <a:t>Na segunda, a empresa se divide em áreas, com alguém dedicado a captar usinas.</a:t>
             </a:r>
-            <a:endParaRPr lang="en-US" sz="1300" dirty="0"/>
+            <a:endParaRPr lang="en-US" sz="1400" dirty="0"/>
           </a:p>
         </p:txBody>
       </p:sp>
@@ -10051,7 +10051,7 @@
               <a:buNone/>
             </a:pPr>
             <a:r>
-              <a:rPr lang="en-US" sz="1300" i="1" dirty="0">
+              <a:rPr lang="en-US" sz="1400" i="1" dirty="0">
                 <a:solidFill>
                   <a:srgbClr val="64748B"/>
                 </a:solidFill>
@@ -10061,7 +10061,7 @@
               </a:rPr>
               <a:t>Na terceira, a operação se organiza por distribuidora.</a:t>
             </a:r>
-            <a:endParaRPr lang="en-US" sz="1300" dirty="0"/>
+            <a:endParaRPr lang="en-US" sz="1400" dirty="0"/>
           </a:p>
         </p:txBody>
       </p:sp>
@@ -12098,7 +12098,7 @@
             <a:r>
               <a:rPr lang="en-US" sz="11000" b="1" dirty="0">
                 <a:solidFill>
-                  <a:srgbClr val="11396F"/>
+                  <a:srgbClr val="F7A23B"/>
                 </a:solidFill>
                 <a:latin typeface="Arial" pitchFamily="34" charset="0"/>
                 <a:ea typeface="Arial" pitchFamily="34" charset="-122"/>
@@ -12221,7 +12221,7 @@
                 <a:ea typeface="Arial" pitchFamily="34" charset="-122"/>
                 <a:cs typeface="Arial" pitchFamily="34" charset="-120"/>
               </a:rPr>
-              <a:t>Aula</a:t>
+              <a:t>Aula teórica</a:t>
             </a:r>
             <a:endParaRPr lang="en-US" sz="1400" dirty="0"/>
           </a:p>
@@ -12520,7 +12520,7 @@
             <a:r>
               <a:rPr lang="en-US" sz="11000" b="1" dirty="0">
                 <a:solidFill>
-                  <a:srgbClr val="11396F"/>
+                  <a:srgbClr val="F7A23B"/>
                 </a:solidFill>
                 <a:latin typeface="Arial" pitchFamily="34" charset="0"/>
                 <a:ea typeface="Arial" pitchFamily="34" charset="-122"/>
@@ -12708,7 +12708,7 @@
                 <a:ea typeface="Arial" pitchFamily="34" charset="-122"/>
                 <a:cs typeface="Arial" pitchFamily="34" charset="-120"/>
               </a:rPr>
-              <a:t>tecnologia e marca — identidade visual e integrações</a:t>
+              <a:t>Tecnologia e marca — identidade visual e integrações</a:t>
             </a:r>
             <a:endParaRPr lang="en-US" sz="3200" dirty="0"/>
           </a:p>
@@ -13876,7 +13876,7 @@
             <a:r>
               <a:rPr lang="en-US" sz="11000" b="1" dirty="0">
                 <a:solidFill>
-                  <a:srgbClr val="11396F"/>
+                  <a:srgbClr val="F7A23B"/>
                 </a:solidFill>
                 <a:latin typeface="Arial" pitchFamily="34" charset="0"/>
                 <a:ea typeface="Arial" pitchFamily="34" charset="-122"/>
@@ -13999,7 +13999,7 @@
                 <a:ea typeface="Arial" pitchFamily="34" charset="-122"/>
                 <a:cs typeface="Arial" pitchFamily="34" charset="-120"/>
               </a:rPr>
-              <a:t>Aula</a:t>
+              <a:t>Aula teórica</a:t>
             </a:r>
             <a:endParaRPr lang="en-US" sz="1400" dirty="0"/>
           </a:p>
@@ -21030,7 +21030,7 @@
               <a:buNone/>
             </a:pPr>
             <a:r>
-              <a:rPr lang="en-US" sz="1300" i="1" dirty="0">
+              <a:rPr lang="en-US" sz="1400" i="1" dirty="0">
                 <a:solidFill>
                   <a:srgbClr val="64748B"/>
                 </a:solidFill>
@@ -21040,7 +21040,7 @@
               </a:rPr>
               <a:t>O desenho típico tem a gestora, as entidades por público e as usinas. No modelo pesado, cada usina pode ficar numa empresa própria.</a:t>
             </a:r>
-            <a:endParaRPr lang="en-US" sz="1300" dirty="0"/>
+            <a:endParaRPr lang="en-US" sz="1400" dirty="0"/>
           </a:p>
         </p:txBody>
       </p:sp>
@@ -21292,7 +21292,7 @@
               <a:buNone/>
             </a:pPr>
             <a:r>
-              <a:rPr lang="en-US" sz="1300" i="1" dirty="0">
+              <a:rPr lang="en-US" sz="1400" i="1" dirty="0">
                 <a:solidFill>
                   <a:srgbClr val="64748B"/>
                 </a:solidFill>
@@ -21302,7 +21302,7 @@
               </a:rPr>
               <a:t>Separar isola riscos e facilita financiamento.</a:t>
             </a:r>
-            <a:endParaRPr lang="en-US" sz="1300" dirty="0"/>
+            <a:endParaRPr lang="en-US" sz="1400" dirty="0"/>
           </a:p>
         </p:txBody>
       </p:sp>
@@ -25405,7 +25405,7 @@
             <a:r>
               <a:rPr lang="en-US" sz="11000" b="1" dirty="0">
                 <a:solidFill>
-                  <a:srgbClr val="11396F"/>
+                  <a:srgbClr val="F7A23B"/>
                 </a:solidFill>
                 <a:latin typeface="Arial" pitchFamily="34" charset="0"/>
                 <a:ea typeface="Arial" pitchFamily="34" charset="-122"/>
@@ -25528,7 +25528,7 @@
                 <a:ea typeface="Arial" pitchFamily="34" charset="-122"/>
                 <a:cs typeface="Arial" pitchFamily="34" charset="-120"/>
               </a:rPr>
-              <a:t>Aula</a:t>
+              <a:t>Aula teórica</a:t>
             </a:r>
             <a:endParaRPr lang="en-US" sz="1400" dirty="0"/>
           </a:p>
@@ -26496,7 +26496,7 @@
               <a:buNone/>
             </a:pPr>
             <a:r>
-              <a:rPr lang="en-US" sz="1300" i="1" dirty="0">
+              <a:rPr lang="en-US" sz="1400" i="1" dirty="0">
                 <a:solidFill>
                   <a:srgbClr val="64748B"/>
                 </a:solidFill>
@@ -26506,7 +26506,7 @@
               </a:rPr>
               <a:t>A gestora recebe por serviço. O regime tributário muda a margem, e o imposto real entra na calculadora.</a:t>
             </a:r>
-            <a:endParaRPr lang="en-US" sz="1300" dirty="0"/>
+            <a:endParaRPr lang="en-US" sz="1400" dirty="0"/>
           </a:p>
         </p:txBody>
       </p:sp>
@@ -26758,7 +26758,7 @@
               <a:buNone/>
             </a:pPr>
             <a:r>
-              <a:rPr lang="en-US" sz="1300" i="1" dirty="0">
+              <a:rPr lang="en-US" sz="1400" i="1" dirty="0">
                 <a:solidFill>
                   <a:srgbClr val="64748B"/>
                 </a:solidFill>
@@ -26768,7 +26768,7 @@
               </a:rPr>
               <a:t>A forma da entidade e o aluguel do produtor têm tratamentos próprios.</a:t>
             </a:r>
-            <a:endParaRPr lang="en-US" sz="1300" dirty="0"/>
+            <a:endParaRPr lang="en-US" sz="1400" dirty="0"/>
           </a:p>
         </p:txBody>
       </p:sp>
